--- a/slides/data-aware-scheduling.pptx
+++ b/slides/data-aware-scheduling.pptx
@@ -6,18 +6,26 @@
   </p:sldMasterIdLst>
   <p:sldIdLst>
     <p:sldId id="256" r:id="rId7"/>
-    <p:sldId id="257" r:id="rId8"/>
-    <p:sldId id="258" r:id="rId9"/>
-    <p:sldId id="259" r:id="rId10"/>
-    <p:sldId id="260" r:id="rId11"/>
-    <p:sldId id="261" r:id="rId12"/>
-    <p:sldId id="262" r:id="rId13"/>
-    <p:sldId id="263" r:id="rId14"/>
-    <p:sldId id="264" r:id="rId15"/>
-    <p:sldId id="265" r:id="rId16"/>
-    <p:sldId id="266" r:id="rId17"/>
-    <p:sldId id="267" r:id="rId18"/>
-    <p:sldId id="268" r:id="rId19"/>
+    <p:sldId id="257" r:id="rId9"/>
+    <p:sldId id="258" r:id="rId10"/>
+    <p:sldId id="259" r:id="rId11"/>
+    <p:sldId id="260" r:id="rId12"/>
+    <p:sldId id="261" r:id="rId13"/>
+    <p:sldId id="262" r:id="rId14"/>
+    <p:sldId id="263" r:id="rId15"/>
+    <p:sldId id="264" r:id="rId16"/>
+    <p:sldId id="265" r:id="rId17"/>
+    <p:sldId id="266" r:id="rId18"/>
+    <p:sldId id="267" r:id="rId19"/>
+    <p:sldId id="268" r:id="rId20"/>
+    <p:sldId id="269" r:id="rId21"/>
+    <p:sldId id="270" r:id="rId22"/>
+    <p:sldId id="271" r:id="rId23"/>
+    <p:sldId id="272" r:id="rId24"/>
+    <p:sldId id="273" r:id="rId25"/>
+    <p:sldId id="274" r:id="rId26"/>
+    <p:sldId id="275" r:id="rId27"/>
+    <p:sldId id="276" r:id="rId28"/>
   </p:sldIdLst>
   <p:sldSz cx="12191695" cy="6858000" type="screen4x3"/>
   <p:notesSz cx="6858000" cy="9144000"/>
@@ -117,6 +125,1826 @@
     </a:lvl9pPr>
   </p:defaultTextStyle>
 </p:presentation>
+</file>
+
+<file path=ppt/notesMasters/notesMaster1.xml><?xml version="1.0" encoding="utf-8"?>
+<p:notesMaster xmlns:a="http://schemas.openxmlformats.org/drawingml/2006/main" xmlns:p="http://schemas.openxmlformats.org/presentationml/2006/main" xmlns:r="http://schemas.openxmlformats.org/officeDocument/2006/relationships">
+  <p:cSld>
+    <p:bg>
+      <p:bgRef idx="1001">
+        <a:schemeClr val="bg1"/>
+      </p:bgRef>
+    </p:bg>
+    <p:spTree>
+      <p:nvGrpSpPr>
+        <p:cNvPr id="1" name=""/>
+        <p:cNvGrpSpPr/>
+        <p:nvPr/>
+      </p:nvGrpSpPr>
+      <p:grpSpPr>
+        <a:xfrm>
+          <a:off x="0" y="0"/>
+          <a:ext cx="0" cy="0"/>
+          <a:chOff x="0" y="0"/>
+          <a:chExt cx="0" cy="0"/>
+        </a:xfrm>
+      </p:grpSpPr>
+      <p:sp>
+        <p:nvSpPr>
+          <p:cNvPr id="2" name="Header Placeholder 1"/>
+          <p:cNvSpPr>
+            <a:spLocks noGrp="1"/>
+          </p:cNvSpPr>
+          <p:nvPr>
+            <p:ph type="hdr" sz="quarter"/>
+          </p:nvPr>
+        </p:nvSpPr>
+        <p:spPr>
+          <a:xfrm>
+            <a:off x="0" y="0"/>
+            <a:ext cx="2971800" cy="457200"/>
+          </a:xfrm>
+          <a:prstGeom prst="rect">
+            <a:avLst/>
+          </a:prstGeom>
+        </p:spPr>
+        <p:txBody>
+          <a:bodyPr vert="horz" lIns="91440" tIns="45720" rIns="91440" bIns="45720" rtlCol="0"/>
+          <a:lstStyle>
+            <a:lvl1pPr algn="l">
+              <a:defRPr sz="1200"/>
+            </a:lvl1pPr>
+          </a:lstStyle>
+          <a:p>
+            <a:endParaRPr lang="en-US"/>
+          </a:p>
+        </p:txBody>
+      </p:sp>
+      <p:sp>
+        <p:nvSpPr>
+          <p:cNvPr id="3" name="Date Placeholder 2"/>
+          <p:cNvSpPr>
+            <a:spLocks noGrp="1"/>
+          </p:cNvSpPr>
+          <p:nvPr>
+            <p:ph type="dt" idx="1"/>
+          </p:nvPr>
+        </p:nvSpPr>
+        <p:spPr>
+          <a:xfrm>
+            <a:off x="3884613" y="0"/>
+            <a:ext cx="2971800" cy="457200"/>
+          </a:xfrm>
+          <a:prstGeom prst="rect">
+            <a:avLst/>
+          </a:prstGeom>
+        </p:spPr>
+        <p:txBody>
+          <a:bodyPr vert="horz" lIns="91440" tIns="45720" rIns="91440" bIns="45720" rtlCol="0"/>
+          <a:lstStyle>
+            <a:lvl1pPr algn="r">
+              <a:defRPr sz="1200"/>
+            </a:lvl1pPr>
+          </a:lstStyle>
+          <a:p>
+            <a:fld id="{0F89C1C7-3DCD-1040-A9CF-14679D8B5DDD}" type="datetimeFigureOut">
+              <a:rPr lang="en-US" smtClean="0"/>
+              <a:t>10/17/16</a:t>
+            </a:fld>
+            <a:endParaRPr lang="en-US"/>
+          </a:p>
+        </p:txBody>
+      </p:sp>
+      <p:sp>
+        <p:nvSpPr>
+          <p:cNvPr id="4" name="Slide Image Placeholder 3"/>
+          <p:cNvSpPr>
+            <a:spLocks noGrp="1" noRot="1" noChangeAspect="1"/>
+          </p:cNvSpPr>
+          <p:nvPr>
+            <p:ph type="sldImg" idx="2"/>
+          </p:nvPr>
+        </p:nvSpPr>
+        <p:spPr>
+          <a:xfrm>
+            <a:off x="1143000" y="685800"/>
+            <a:ext cx="4572000" cy="3429000"/>
+          </a:xfrm>
+          <a:prstGeom prst="rect">
+            <a:avLst/>
+          </a:prstGeom>
+          <a:noFill/>
+          <a:ln w="12700">
+            <a:solidFill>
+              <a:prstClr val="black"/>
+            </a:solidFill>
+          </a:ln>
+        </p:spPr>
+        <p:txBody>
+          <a:bodyPr vert="horz" lIns="91440" tIns="45720" rIns="91440" bIns="45720" rtlCol="0" anchor="ctr"/>
+          <a:lstStyle/>
+          <a:p>
+            <a:endParaRPr lang="en-US"/>
+          </a:p>
+        </p:txBody>
+      </p:sp>
+      <p:sp>
+        <p:nvSpPr>
+          <p:cNvPr id="5" name="Notes Placeholder 4"/>
+          <p:cNvSpPr>
+            <a:spLocks noGrp="1"/>
+          </p:cNvSpPr>
+          <p:nvPr>
+            <p:ph type="body" sz="quarter" idx="3"/>
+          </p:nvPr>
+        </p:nvSpPr>
+        <p:spPr>
+          <a:xfrm>
+            <a:off x="685800" y="4343400"/>
+            <a:ext cx="5486400" cy="4114800"/>
+          </a:xfrm>
+          <a:prstGeom prst="rect">
+            <a:avLst/>
+          </a:prstGeom>
+        </p:spPr>
+        <p:txBody>
+          <a:bodyPr vert="horz" lIns="91440" tIns="45720" rIns="91440" bIns="45720" rtlCol="0"/>
+          <a:lstStyle/>
+          <a:p>
+            <a:pPr lvl="0"/>
+            <a:r>
+              <a:rPr lang="en-US" smtClean="0"/>
+              <a:t>Click to edit Master text styles</a:t>
+            </a:r>
+          </a:p>
+          <a:p>
+            <a:pPr lvl="1"/>
+            <a:r>
+              <a:rPr lang="en-US" smtClean="0"/>
+              <a:t>Second level</a:t>
+            </a:r>
+          </a:p>
+          <a:p>
+            <a:pPr lvl="2"/>
+            <a:r>
+              <a:rPr lang="en-US" smtClean="0"/>
+              <a:t>Third level</a:t>
+            </a:r>
+          </a:p>
+          <a:p>
+            <a:pPr lvl="3"/>
+            <a:r>
+              <a:rPr lang="en-US" smtClean="0"/>
+              <a:t>Fourth level</a:t>
+            </a:r>
+          </a:p>
+          <a:p>
+            <a:pPr lvl="4"/>
+            <a:r>
+              <a:rPr lang="en-US" smtClean="0"/>
+              <a:t>Fifth level</a:t>
+            </a:r>
+            <a:endParaRPr lang="en-US"/>
+          </a:p>
+        </p:txBody>
+      </p:sp>
+      <p:sp>
+        <p:nvSpPr>
+          <p:cNvPr id="6" name="Footer Placeholder 5"/>
+          <p:cNvSpPr>
+            <a:spLocks noGrp="1"/>
+          </p:cNvSpPr>
+          <p:nvPr>
+            <p:ph type="ftr" sz="quarter" idx="4"/>
+          </p:nvPr>
+        </p:nvSpPr>
+        <p:spPr>
+          <a:xfrm>
+            <a:off x="0" y="8685213"/>
+            <a:ext cx="2971800" cy="457200"/>
+          </a:xfrm>
+          <a:prstGeom prst="rect">
+            <a:avLst/>
+          </a:prstGeom>
+        </p:spPr>
+        <p:txBody>
+          <a:bodyPr vert="horz" lIns="91440" tIns="45720" rIns="91440" bIns="45720" rtlCol="0" anchor="b"/>
+          <a:lstStyle>
+            <a:lvl1pPr algn="l">
+              <a:defRPr sz="1200"/>
+            </a:lvl1pPr>
+          </a:lstStyle>
+          <a:p>
+            <a:endParaRPr lang="en-US"/>
+          </a:p>
+        </p:txBody>
+      </p:sp>
+      <p:sp>
+        <p:nvSpPr>
+          <p:cNvPr id="7" name="Slide Number Placeholder 6"/>
+          <p:cNvSpPr>
+            <a:spLocks noGrp="1"/>
+          </p:cNvSpPr>
+          <p:nvPr>
+            <p:ph type="sldNum" sz="quarter" idx="5"/>
+          </p:nvPr>
+        </p:nvSpPr>
+        <p:spPr>
+          <a:xfrm>
+            <a:off x="3884613" y="8685213"/>
+            <a:ext cx="2971800" cy="457200"/>
+          </a:xfrm>
+          <a:prstGeom prst="rect">
+            <a:avLst/>
+          </a:prstGeom>
+        </p:spPr>
+        <p:txBody>
+          <a:bodyPr vert="horz" lIns="91440" tIns="45720" rIns="91440" bIns="45720" rtlCol="0" anchor="b"/>
+          <a:lstStyle>
+            <a:lvl1pPr algn="r">
+              <a:defRPr sz="1200"/>
+            </a:lvl1pPr>
+          </a:lstStyle>
+          <a:p>
+            <a:fld id="{BB5E49A5-4136-284D-997B-48E1D791AD67}" type="slidenum">
+              <a:rPr lang="en-US" smtClean="0"/>
+              <a:t>‹#›</a:t>
+            </a:fld>
+            <a:endParaRPr lang="en-US"/>
+          </a:p>
+        </p:txBody>
+      </p:sp>
+    </p:spTree>
+    <p:extLst>
+      <p:ext uri="{BB962C8B-B14F-4D97-AF65-F5344CB8AC3E}">
+        <p14:creationId xmlns:p14="http://schemas.microsoft.com/office/powerpoint/2010/main" val="2623252185"/>
+      </p:ext>
+    </p:extLst>
+  </p:cSld>
+  <p:clrMap bg1="lt1" tx1="dk1" bg2="lt2" tx2="dk2" accent1="accent1" accent2="accent2" accent3="accent3" accent4="accent4" accent5="accent5" accent6="accent6" hlink="hlink" folHlink="folHlink"/>
+  <p:notesStyle>
+    <a:lvl1pPr marL="0" algn="l" defTabSz="457200" rtl="0" eaLnBrk="1" latinLnBrk="0" hangingPunct="1">
+      <a:defRPr sz="1200" kern="1200">
+        <a:solidFill>
+          <a:schemeClr val="tx1"/>
+        </a:solidFill>
+        <a:latin typeface="+mn-lt"/>
+        <a:ea typeface="+mn-ea"/>
+        <a:cs typeface="+mn-cs"/>
+      </a:defRPr>
+    </a:lvl1pPr>
+    <a:lvl2pPr marL="457200" algn="l" defTabSz="457200" rtl="0" eaLnBrk="1" latinLnBrk="0" hangingPunct="1">
+      <a:defRPr sz="1200" kern="1200">
+        <a:solidFill>
+          <a:schemeClr val="tx1"/>
+        </a:solidFill>
+        <a:latin typeface="+mn-lt"/>
+        <a:ea typeface="+mn-ea"/>
+        <a:cs typeface="+mn-cs"/>
+      </a:defRPr>
+    </a:lvl2pPr>
+    <a:lvl3pPr marL="914400" algn="l" defTabSz="457200" rtl="0" eaLnBrk="1" latinLnBrk="0" hangingPunct="1">
+      <a:defRPr sz="1200" kern="1200">
+        <a:solidFill>
+          <a:schemeClr val="tx1"/>
+        </a:solidFill>
+        <a:latin typeface="+mn-lt"/>
+        <a:ea typeface="+mn-ea"/>
+        <a:cs typeface="+mn-cs"/>
+      </a:defRPr>
+    </a:lvl3pPr>
+    <a:lvl4pPr marL="1371600" algn="l" defTabSz="457200" rtl="0" eaLnBrk="1" latinLnBrk="0" hangingPunct="1">
+      <a:defRPr sz="1200" kern="1200">
+        <a:solidFill>
+          <a:schemeClr val="tx1"/>
+        </a:solidFill>
+        <a:latin typeface="+mn-lt"/>
+        <a:ea typeface="+mn-ea"/>
+        <a:cs typeface="+mn-cs"/>
+      </a:defRPr>
+    </a:lvl4pPr>
+    <a:lvl5pPr marL="1828800" algn="l" defTabSz="457200" rtl="0" eaLnBrk="1" latinLnBrk="0" hangingPunct="1">
+      <a:defRPr sz="1200" kern="1200">
+        <a:solidFill>
+          <a:schemeClr val="tx1"/>
+        </a:solidFill>
+        <a:latin typeface="+mn-lt"/>
+        <a:ea typeface="+mn-ea"/>
+        <a:cs typeface="+mn-cs"/>
+      </a:defRPr>
+    </a:lvl5pPr>
+    <a:lvl6pPr marL="2286000" algn="l" defTabSz="457200" rtl="0" eaLnBrk="1" latinLnBrk="0" hangingPunct="1">
+      <a:defRPr sz="1200" kern="1200">
+        <a:solidFill>
+          <a:schemeClr val="tx1"/>
+        </a:solidFill>
+        <a:latin typeface="+mn-lt"/>
+        <a:ea typeface="+mn-ea"/>
+        <a:cs typeface="+mn-cs"/>
+      </a:defRPr>
+    </a:lvl6pPr>
+    <a:lvl7pPr marL="2743200" algn="l" defTabSz="457200" rtl="0" eaLnBrk="1" latinLnBrk="0" hangingPunct="1">
+      <a:defRPr sz="1200" kern="1200">
+        <a:solidFill>
+          <a:schemeClr val="tx1"/>
+        </a:solidFill>
+        <a:latin typeface="+mn-lt"/>
+        <a:ea typeface="+mn-ea"/>
+        <a:cs typeface="+mn-cs"/>
+      </a:defRPr>
+    </a:lvl7pPr>
+    <a:lvl8pPr marL="3200400" algn="l" defTabSz="457200" rtl="0" eaLnBrk="1" latinLnBrk="0" hangingPunct="1">
+      <a:defRPr sz="1200" kern="1200">
+        <a:solidFill>
+          <a:schemeClr val="tx1"/>
+        </a:solidFill>
+        <a:latin typeface="+mn-lt"/>
+        <a:ea typeface="+mn-ea"/>
+        <a:cs typeface="+mn-cs"/>
+      </a:defRPr>
+    </a:lvl8pPr>
+    <a:lvl9pPr marL="3657600" algn="l" defTabSz="457200" rtl="0" eaLnBrk="1" latinLnBrk="0" hangingPunct="1">
+      <a:defRPr sz="1200" kern="1200">
+        <a:solidFill>
+          <a:schemeClr val="tx1"/>
+        </a:solidFill>
+        <a:latin typeface="+mn-lt"/>
+        <a:ea typeface="+mn-ea"/>
+        <a:cs typeface="+mn-cs"/>
+      </a:defRPr>
+    </a:lvl9pPr>
+  </p:notesStyle>
+</p:notesMaster>
+</file>
+
+<file path=ppt/notesSlides/notesSlide1.xml><?xml version="1.0" encoding="utf-8"?>
+<p:notes xmlns:a="http://schemas.openxmlformats.org/drawingml/2006/main" xmlns:p="http://schemas.openxmlformats.org/presentationml/2006/main" xmlns:r="http://schemas.openxmlformats.org/officeDocument/2006/relationships">
+  <p:cSld>
+    <p:spTree>
+      <p:nvGrpSpPr>
+        <p:cNvPr id="1" name=""/>
+        <p:cNvGrpSpPr/>
+        <p:nvPr/>
+      </p:nvGrpSpPr>
+      <p:grpSpPr>
+        <a:xfrm>
+          <a:off x="0" y="0"/>
+          <a:ext cx="0" cy="0"/>
+          <a:chOff x="0" y="0"/>
+          <a:chExt cx="0" cy="0"/>
+        </a:xfrm>
+      </p:grpSpPr>
+      <p:sp>
+        <p:nvSpPr>
+          <p:cNvPr id="2" name="Slide Image Placeholder 1"/>
+          <p:cNvSpPr>
+            <a:spLocks noGrp="1"/>
+          </p:cNvSpPr>
+          <p:nvPr>
+            <p:ph type="sldImg" idx="2"/>
+          </p:nvPr>
+        </p:nvSpPr>
+        <p:spPr/>
+      </p:sp>
+      <p:sp>
+        <p:nvSpPr>
+          <p:cNvPr id="3" name="Notes Placeholder 2"/>
+          <p:cNvSpPr>
+            <a:spLocks noGrp="1"/>
+          </p:cNvSpPr>
+          <p:nvPr>
+            <p:ph type="body" idx="3" sz="quarter"/>
+          </p:nvPr>
+        </p:nvSpPr>
+        <p:spPr/>
+        <p:txBody>
+          <a:bodyPr/>
+          <a:lstStyle/>
+          <a:p>
+            <a:r>
+              <a:t>Welcome everyone. This talk is about scheduling workflows on federated fog systems when the cloud is out of reach — think disaster response. The story: the problem, the model, four schedulers, five experiments, and what we learned.</a:t>
+            </a:r>
+          </a:p>
+        </p:txBody>
+      </p:sp>
+      <p:sp>
+        <p:nvSpPr>
+          <p:cNvPr id="4" name="Slide Number Placeholder 3"/>
+          <p:cNvSpPr>
+            <a:spLocks noGrp="1"/>
+          </p:cNvSpPr>
+          <p:nvPr>
+            <p:ph type="sldNum" idx="5" sz="quarter"/>
+          </p:nvPr>
+        </p:nvSpPr>
+        <p:spPr/>
+      </p:sp>
+    </p:spTree>
+  </p:cSld>
+  <p:clrMapOvr>
+    <a:masterClrMapping/>
+  </p:clrMapOvr>
+</p:notes>
+</file>
+
+<file path=ppt/notesSlides/notesSlide10.xml><?xml version="1.0" encoding="utf-8"?>
+<p:notes xmlns:a="http://schemas.openxmlformats.org/drawingml/2006/main" xmlns:p="http://schemas.openxmlformats.org/presentationml/2006/main" xmlns:r="http://schemas.openxmlformats.org/officeDocument/2006/relationships">
+  <p:cSld>
+    <p:spTree>
+      <p:nvGrpSpPr>
+        <p:cNvPr id="1" name=""/>
+        <p:cNvGrpSpPr/>
+        <p:nvPr/>
+      </p:nvGrpSpPr>
+      <p:grpSpPr>
+        <a:xfrm>
+          <a:off x="0" y="0"/>
+          <a:ext cx="0" cy="0"/>
+          <a:chOff x="0" y="0"/>
+          <a:chExt cx="0" cy="0"/>
+        </a:xfrm>
+      </p:grpSpPr>
+      <p:sp>
+        <p:nvSpPr>
+          <p:cNvPr id="2" name="Slide Image Placeholder 1"/>
+          <p:cNvSpPr>
+            <a:spLocks noGrp="1"/>
+          </p:cNvSpPr>
+          <p:nvPr>
+            <p:ph type="sldImg" idx="2"/>
+          </p:nvPr>
+        </p:nvSpPr>
+        <p:spPr/>
+      </p:sp>
+      <p:sp>
+        <p:nvSpPr>
+          <p:cNvPr id="3" name="Notes Placeholder 2"/>
+          <p:cNvSpPr>
+            <a:spLocks noGrp="1"/>
+          </p:cNvSpPr>
+          <p:nvPr>
+            <p:ph type="body" idx="3" sz="quarter"/>
+          </p:nvPr>
+        </p:nvSpPr>
+        <p:spPr/>
+        <p:txBody>
+          <a:bodyPr/>
+          <a:lstStyle/>
+          <a:p>
+            <a:r>
+              <a:t>Each sweep varies one thing and holds the rest fixed. Slack: how tight is the deadline? Federation: how many nodes? Workflow: how many tasks? Failures: what if tasks crash and retry once? Bandwidth: what if the local links degrade? Five reps each, fresh random instances.</a:t>
+            </a:r>
+          </a:p>
+        </p:txBody>
+      </p:sp>
+      <p:sp>
+        <p:nvSpPr>
+          <p:cNvPr id="4" name="Slide Number Placeholder 3"/>
+          <p:cNvSpPr>
+            <a:spLocks noGrp="1"/>
+          </p:cNvSpPr>
+          <p:nvPr>
+            <p:ph type="sldNum" idx="5" sz="quarter"/>
+          </p:nvPr>
+        </p:nvSpPr>
+        <p:spPr/>
+      </p:sp>
+    </p:spTree>
+  </p:cSld>
+  <p:clrMapOvr>
+    <a:masterClrMapping/>
+  </p:clrMapOvr>
+</p:notes>
+</file>
+
+<file path=ppt/notesSlides/notesSlide11.xml><?xml version="1.0" encoding="utf-8"?>
+<p:notes xmlns:a="http://schemas.openxmlformats.org/drawingml/2006/main" xmlns:p="http://schemas.openxmlformats.org/presentationml/2006/main" xmlns:r="http://schemas.openxmlformats.org/officeDocument/2006/relationships">
+  <p:cSld>
+    <p:spTree>
+      <p:nvGrpSpPr>
+        <p:cNvPr id="1" name=""/>
+        <p:cNvGrpSpPr/>
+        <p:nvPr/>
+      </p:nvGrpSpPr>
+      <p:grpSpPr>
+        <a:xfrm>
+          <a:off x="0" y="0"/>
+          <a:ext cx="0" cy="0"/>
+          <a:chOff x="0" y="0"/>
+          <a:chExt cx="0" cy="0"/>
+        </a:xfrm>
+      </p:grpSpPr>
+      <p:sp>
+        <p:nvSpPr>
+          <p:cNvPr id="2" name="Slide Image Placeholder 1"/>
+          <p:cNvSpPr>
+            <a:spLocks noGrp="1"/>
+          </p:cNvSpPr>
+          <p:nvPr>
+            <p:ph type="sldImg" idx="2"/>
+          </p:nvPr>
+        </p:nvSpPr>
+        <p:spPr/>
+      </p:sp>
+      <p:sp>
+        <p:nvSpPr>
+          <p:cNvPr id="3" name="Notes Placeholder 2"/>
+          <p:cNvSpPr>
+            <a:spLocks noGrp="1"/>
+          </p:cNvSpPr>
+          <p:nvPr>
+            <p:ph type="body" idx="3" sz="quarter"/>
+          </p:nvPr>
+        </p:nvSpPr>
+        <p:spPr/>
+        <p:txBody>
+          <a:bodyPr/>
+          <a:lstStyle/>
+          <a:p>
+            <a:r>
+              <a:t>At alpha = 1.0 the deadline barely fits. MILP leads at 1.38 against a bound of 1.43; rounding 1.25, greedy 1.23, GA 1.20. The ranking you see here is the paper's ranking under pressure. Loosen the deadline and the picture flips: greedy reaches the bound from alpha = 1.2, MILP by 1.5. But rounding and the GA never fully close the gap even at alpha = 2.0 — a fixed sampling budget does not recover the bound.</a:t>
+            </a:r>
+          </a:p>
+        </p:txBody>
+      </p:sp>
+      <p:sp>
+        <p:nvSpPr>
+          <p:cNvPr id="4" name="Slide Number Placeholder 3"/>
+          <p:cNvSpPr>
+            <a:spLocks noGrp="1"/>
+          </p:cNvSpPr>
+          <p:nvPr>
+            <p:ph type="sldNum" idx="5" sz="quarter"/>
+          </p:nvPr>
+        </p:nvSpPr>
+        <p:spPr/>
+      </p:sp>
+    </p:spTree>
+  </p:cSld>
+  <p:clrMapOvr>
+    <a:masterClrMapping/>
+  </p:clrMapOvr>
+</p:notes>
+</file>
+
+<file path=ppt/notesSlides/notesSlide12.xml><?xml version="1.0" encoding="utf-8"?>
+<p:notes xmlns:a="http://schemas.openxmlformats.org/drawingml/2006/main" xmlns:p="http://schemas.openxmlformats.org/presentationml/2006/main" xmlns:r="http://schemas.openxmlformats.org/officeDocument/2006/relationships">
+  <p:cSld>
+    <p:spTree>
+      <p:nvGrpSpPr>
+        <p:cNvPr id="1" name=""/>
+        <p:cNvGrpSpPr/>
+        <p:nvPr/>
+      </p:nvGrpSpPr>
+      <p:grpSpPr>
+        <a:xfrm>
+          <a:off x="0" y="0"/>
+          <a:ext cx="0" cy="0"/>
+          <a:chOff x="0" y="0"/>
+          <a:chExt cx="0" cy="0"/>
+        </a:xfrm>
+      </p:grpSpPr>
+      <p:sp>
+        <p:nvSpPr>
+          <p:cNvPr id="2" name="Slide Image Placeholder 1"/>
+          <p:cNvSpPr>
+            <a:spLocks noGrp="1"/>
+          </p:cNvSpPr>
+          <p:nvPr>
+            <p:ph type="sldImg" idx="2"/>
+          </p:nvPr>
+        </p:nvSpPr>
+        <p:spPr/>
+      </p:sp>
+      <p:sp>
+        <p:nvSpPr>
+          <p:cNvPr id="3" name="Notes Placeholder 2"/>
+          <p:cNvSpPr>
+            <a:spLocks noGrp="1"/>
+          </p:cNvSpPr>
+          <p:nvPr>
+            <p:ph type="body" idx="3" sz="quarter"/>
+          </p:nvPr>
+        </p:nvSpPr>
+        <p:spPr/>
+        <p:txBody>
+          <a:bodyPr/>
+          <a:lstStyle/>
+          <a:p>
+            <a:r>
+              <a:t>Grow the federation from 2 to 10 nodes. MILP and greedy sit exactly on the bound at every size. The GA drifts from about 1.5% below the bound at N=2 to about 8% below at N=10; rounding matches only at N=2 and ends ~8% short. Why? Each node's chromosome/placement space grows, but the search budget is fixed. And notice — extra nodes never push anyone above the bound. They buy feasible placements, not accuracy.</a:t>
+            </a:r>
+          </a:p>
+        </p:txBody>
+      </p:sp>
+      <p:sp>
+        <p:nvSpPr>
+          <p:cNvPr id="4" name="Slide Number Placeholder 3"/>
+          <p:cNvSpPr>
+            <a:spLocks noGrp="1"/>
+          </p:cNvSpPr>
+          <p:nvPr>
+            <p:ph type="sldNum" idx="5" sz="quarter"/>
+          </p:nvPr>
+        </p:nvSpPr>
+        <p:spPr/>
+      </p:sp>
+    </p:spTree>
+  </p:cSld>
+  <p:clrMapOvr>
+    <a:masterClrMapping/>
+  </p:clrMapOvr>
+</p:notes>
+</file>
+
+<file path=ppt/notesSlides/notesSlide13.xml><?xml version="1.0" encoding="utf-8"?>
+<p:notes xmlns:a="http://schemas.openxmlformats.org/drawingml/2006/main" xmlns:p="http://schemas.openxmlformats.org/presentationml/2006/main" xmlns:r="http://schemas.openxmlformats.org/officeDocument/2006/relationships">
+  <p:cSld>
+    <p:spTree>
+      <p:nvGrpSpPr>
+        <p:cNvPr id="1" name=""/>
+        <p:cNvGrpSpPr/>
+        <p:nvPr/>
+      </p:nvGrpSpPr>
+      <p:grpSpPr>
+        <a:xfrm>
+          <a:off x="0" y="0"/>
+          <a:ext cx="0" cy="0"/>
+          <a:chOff x="0" y="0"/>
+          <a:chExt cx="0" cy="0"/>
+        </a:xfrm>
+      </p:grpSpPr>
+      <p:sp>
+        <p:nvSpPr>
+          <p:cNvPr id="2" name="Slide Image Placeholder 1"/>
+          <p:cNvSpPr>
+            <a:spLocks noGrp="1"/>
+          </p:cNvSpPr>
+          <p:nvPr>
+            <p:ph type="sldImg" idx="2"/>
+          </p:nvPr>
+        </p:nvSpPr>
+        <p:spPr/>
+      </p:sp>
+      <p:sp>
+        <p:nvSpPr>
+          <p:cNvPr id="3" name="Notes Placeholder 2"/>
+          <p:cNvSpPr>
+            <a:spLocks noGrp="1"/>
+          </p:cNvSpPr>
+          <p:nvPr>
+            <p:ph type="body" idx="3" sz="quarter"/>
+          </p:nvPr>
+        </p:nvSpPr>
+        <p:spPr/>
+        <p:txBody>
+          <a:bodyPr/>
+          <a:lstStyle/>
+          <a:p>
+            <a:r>
+              <a:t>Now scale the workflow itself. At n=10 every method is on the bound — too small to separate them. At n=100 the GA is first to drift (1.26 vs bound ~1.40). At n=1000 the MILP exceeds our 800-variable cap and drops out; rounding survives (1.37) but at roughly 93 seconds per LP re-solve, ~5-6 minutes per run; the GA falls to 1.10 in ~159 seconds. The greedy — milliseconds — stays on the bound. At 1000 tasks it is the only method that is both fast and optimal-accuracy.</a:t>
+            </a:r>
+          </a:p>
+        </p:txBody>
+      </p:sp>
+      <p:sp>
+        <p:nvSpPr>
+          <p:cNvPr id="4" name="Slide Number Placeholder 3"/>
+          <p:cNvSpPr>
+            <a:spLocks noGrp="1"/>
+          </p:cNvSpPr>
+          <p:nvPr>
+            <p:ph type="sldNum" idx="5" sz="quarter"/>
+          </p:nvPr>
+        </p:nvSpPr>
+        <p:spPr/>
+      </p:sp>
+    </p:spTree>
+  </p:cSld>
+  <p:clrMapOvr>
+    <a:masterClrMapping/>
+  </p:clrMapOvr>
+</p:notes>
+</file>
+
+<file path=ppt/notesSlides/notesSlide14.xml><?xml version="1.0" encoding="utf-8"?>
+<p:notes xmlns:a="http://schemas.openxmlformats.org/drawingml/2006/main" xmlns:p="http://schemas.openxmlformats.org/presentationml/2006/main" xmlns:r="http://schemas.openxmlformats.org/officeDocument/2006/relationships">
+  <p:cSld>
+    <p:spTree>
+      <p:nvGrpSpPr>
+        <p:cNvPr id="1" name=""/>
+        <p:cNvGrpSpPr/>
+        <p:nvPr/>
+      </p:nvGrpSpPr>
+      <p:grpSpPr>
+        <a:xfrm>
+          <a:off x="0" y="0"/>
+          <a:ext cx="0" cy="0"/>
+          <a:chOff x="0" y="0"/>
+          <a:chExt cx="0" cy="0"/>
+        </a:xfrm>
+      </p:grpSpPr>
+      <p:sp>
+        <p:nvSpPr>
+          <p:cNvPr id="2" name="Slide Image Placeholder 1"/>
+          <p:cNvSpPr>
+            <a:spLocks noGrp="1"/>
+          </p:cNvSpPr>
+          <p:nvPr>
+            <p:ph type="sldImg" idx="2"/>
+          </p:nvPr>
+        </p:nvSpPr>
+        <p:spPr/>
+      </p:sp>
+      <p:sp>
+        <p:nvSpPr>
+          <p:cNvPr id="3" name="Notes Placeholder 2"/>
+          <p:cNvSpPr>
+            <a:spLocks noGrp="1"/>
+          </p:cNvSpPr>
+          <p:nvPr>
+            <p:ph type="body" idx="3" sz="quarter"/>
+          </p:nvPr>
+        </p:nvSpPr>
+        <p:spPr/>
+        <p:txBody>
+          <a:bodyPr/>
+          <a:lstStyle/>
+          <a:p>
+            <a:r>
+              <a:t>The per-dataset table agrees with the sweep. Small and medium: MILP, greedy — and at small scale also rounding and GA — hit the same score; greedy just does it in microseconds with the shortest makespan. Large and xlarge: only greedy and GA run; greedy keeps ~1.41 while the GA falls to 1.17 then 1.13 — and its makespan actually exceeds the greedy's by ~40%, spending 73 seconds to lose.</a:t>
+            </a:r>
+          </a:p>
+        </p:txBody>
+      </p:sp>
+      <p:sp>
+        <p:nvSpPr>
+          <p:cNvPr id="4" name="Slide Number Placeholder 3"/>
+          <p:cNvSpPr>
+            <a:spLocks noGrp="1"/>
+          </p:cNvSpPr>
+          <p:nvPr>
+            <p:ph type="sldNum" idx="5" sz="quarter"/>
+          </p:nvPr>
+        </p:nvSpPr>
+        <p:spPr/>
+      </p:sp>
+    </p:spTree>
+  </p:cSld>
+  <p:clrMapOvr>
+    <a:masterClrMapping/>
+  </p:clrMapOvr>
+</p:notes>
+</file>
+
+<file path=ppt/notesSlides/notesSlide15.xml><?xml version="1.0" encoding="utf-8"?>
+<p:notes xmlns:a="http://schemas.openxmlformats.org/drawingml/2006/main" xmlns:p="http://schemas.openxmlformats.org/presentationml/2006/main" xmlns:r="http://schemas.openxmlformats.org/officeDocument/2006/relationships">
+  <p:cSld>
+    <p:spTree>
+      <p:nvGrpSpPr>
+        <p:cNvPr id="1" name=""/>
+        <p:cNvGrpSpPr/>
+        <p:nvPr/>
+      </p:nvGrpSpPr>
+      <p:grpSpPr>
+        <a:xfrm>
+          <a:off x="0" y="0"/>
+          <a:ext cx="0" cy="0"/>
+          <a:chOff x="0" y="0"/>
+          <a:chExt cx="0" cy="0"/>
+        </a:xfrm>
+      </p:grpSpPr>
+      <p:sp>
+        <p:nvSpPr>
+          <p:cNvPr id="2" name="Slide Image Placeholder 1"/>
+          <p:cNvSpPr>
+            <a:spLocks noGrp="1"/>
+          </p:cNvSpPr>
+          <p:nvPr>
+            <p:ph type="sldImg" idx="2"/>
+          </p:nvPr>
+        </p:nvSpPr>
+        <p:spPr/>
+      </p:sp>
+      <p:sp>
+        <p:nvSpPr>
+          <p:cNvPr id="3" name="Notes Placeholder 2"/>
+          <p:cNvSpPr>
+            <a:spLocks noGrp="1"/>
+          </p:cNvSpPr>
+          <p:nvPr>
+            <p:ph type="body" idx="3" sz="quarter"/>
+          </p:nvPr>
+        </p:nvSpPr>
+        <p:spPr/>
+        <p:txBody>
+          <a:bodyPr/>
+          <a:lstStyle/>
+          <a:p>
+            <a:r>
+              <a:t>Here tasks fail independently and retry once in place — a retry doubles that task's runtime but keeps its accuracy if it still finishes. So scores barely move with the failure rate — look at feasibility instead. The greedy stays feasible at every rate; MILP and GA drop to ~60% by 0.5; rounding only ~20%. Why is greedy so robust? It already finishes early — makespan 27-35 vs the MILP's 38-79 — leaving slack for a retry to absorb.</a:t>
+            </a:r>
+          </a:p>
+        </p:txBody>
+      </p:sp>
+      <p:sp>
+        <p:nvSpPr>
+          <p:cNvPr id="4" name="Slide Number Placeholder 3"/>
+          <p:cNvSpPr>
+            <a:spLocks noGrp="1"/>
+          </p:cNvSpPr>
+          <p:nvPr>
+            <p:ph type="sldNum" idx="5" sz="quarter"/>
+          </p:nvPr>
+        </p:nvSpPr>
+        <p:spPr/>
+      </p:sp>
+    </p:spTree>
+  </p:cSld>
+  <p:clrMapOvr>
+    <a:masterClrMapping/>
+  </p:clrMapOvr>
+</p:notes>
+</file>
+
+<file path=ppt/notesSlides/notesSlide16.xml><?xml version="1.0" encoding="utf-8"?>
+<p:notes xmlns:a="http://schemas.openxmlformats.org/drawingml/2006/main" xmlns:p="http://schemas.openxmlformats.org/presentationml/2006/main" xmlns:r="http://schemas.openxmlformats.org/officeDocument/2006/relationships">
+  <p:cSld>
+    <p:spTree>
+      <p:nvGrpSpPr>
+        <p:cNvPr id="1" name=""/>
+        <p:cNvGrpSpPr/>
+        <p:nvPr/>
+      </p:nvGrpSpPr>
+      <p:grpSpPr>
+        <a:xfrm>
+          <a:off x="0" y="0"/>
+          <a:ext cx="0" cy="0"/>
+          <a:chOff x="0" y="0"/>
+          <a:chExt cx="0" cy="0"/>
+        </a:xfrm>
+      </p:grpSpPr>
+      <p:sp>
+        <p:nvSpPr>
+          <p:cNvPr id="2" name="Slide Image Placeholder 1"/>
+          <p:cNvSpPr>
+            <a:spLocks noGrp="1"/>
+          </p:cNvSpPr>
+          <p:nvPr>
+            <p:ph type="sldImg" idx="2"/>
+          </p:nvPr>
+        </p:nvSpPr>
+        <p:spPr/>
+      </p:sp>
+      <p:sp>
+        <p:nvSpPr>
+          <p:cNvPr id="3" name="Notes Placeholder 2"/>
+          <p:cNvSpPr>
+            <a:spLocks noGrp="1"/>
+          </p:cNvSpPr>
+          <p:nvPr>
+            <p:ph type="body" idx="3" sz="quarter"/>
+          </p:nvPr>
+        </p:nvSpPr>
+        <p:spPr/>
+        <p:txBody>
+          <a:bodyPr/>
+          <a:lstStyle/>
+          <a:p>
+            <a:r>
+              <a:t>Finally, degrade every link — down to 5% of nominal bandwidth. The bandwidth-blind baseline is the cautionary tale: its scores look perfect, bound-level, at every degradation — because the score doesn't know the schedule is late. Feasibility tells the truth: 80% at 0.5x, 20% at 0.2x, zero below. Among data-aware methods: MILP stays feasible everywhere, losing ~10% score at 0.05x; greedy holds feasibility to 0.1x but pays heavily in accuracy; the GA fails at 0.05x; rounding only survives above 0.5x.</a:t>
+            </a:r>
+          </a:p>
+        </p:txBody>
+      </p:sp>
+      <p:sp>
+        <p:nvSpPr>
+          <p:cNvPr id="4" name="Slide Number Placeholder 3"/>
+          <p:cNvSpPr>
+            <a:spLocks noGrp="1"/>
+          </p:cNvSpPr>
+          <p:nvPr>
+            <p:ph type="sldNum" idx="5" sz="quarter"/>
+          </p:nvPr>
+        </p:nvSpPr>
+        <p:spPr/>
+      </p:sp>
+    </p:spTree>
+  </p:cSld>
+  <p:clrMapOvr>
+    <a:masterClrMapping/>
+  </p:clrMapOvr>
+</p:notes>
+</file>
+
+<file path=ppt/notesSlides/notesSlide17.xml><?xml version="1.0" encoding="utf-8"?>
+<p:notes xmlns:a="http://schemas.openxmlformats.org/drawingml/2006/main" xmlns:p="http://schemas.openxmlformats.org/presentationml/2006/main" xmlns:r="http://schemas.openxmlformats.org/officeDocument/2006/relationships">
+  <p:cSld>
+    <p:spTree>
+      <p:nvGrpSpPr>
+        <p:cNvPr id="1" name=""/>
+        <p:cNvGrpSpPr/>
+        <p:nvPr/>
+      </p:nvGrpSpPr>
+      <p:grpSpPr>
+        <a:xfrm>
+          <a:off x="0" y="0"/>
+          <a:ext cx="0" cy="0"/>
+          <a:chOff x="0" y="0"/>
+          <a:chExt cx="0" cy="0"/>
+        </a:xfrm>
+      </p:grpSpPr>
+      <p:sp>
+        <p:nvSpPr>
+          <p:cNvPr id="2" name="Slide Image Placeholder 1"/>
+          <p:cNvSpPr>
+            <a:spLocks noGrp="1"/>
+          </p:cNvSpPr>
+          <p:nvPr>
+            <p:ph type="sldImg" idx="2"/>
+          </p:nvPr>
+        </p:nvSpPr>
+        <p:spPr/>
+      </p:sp>
+      <p:sp>
+        <p:nvSpPr>
+          <p:cNvPr id="3" name="Notes Placeholder 2"/>
+          <p:cNvSpPr>
+            <a:spLocks noGrp="1"/>
+          </p:cNvSpPr>
+          <p:nvPr>
+            <p:ph type="body" idx="3" sz="quarter"/>
+          </p:nvPr>
+        </p:nvSpPr>
+        <p:spPr/>
+        <p:txBody>
+          <a:bodyPr/>
+          <a:lstStyle/>
+          <a:p>
+            <a:r>
+              <a:t>Separately from scheduling, we stress-tested the generators themselves: DAGs up to a million tasks generate in ~3 seconds with stable shape — depth grows like log n, ~3 edges per node. Resource graphs up to a million fog nodes generate in ~7 seconds, degree ~5, bandwidth range stable. These are structural instances: scheduling a million-task dense instance is out of reach for the LP-based methods — the honest boundary is where constraints and memory hit the wall.</a:t>
+            </a:r>
+          </a:p>
+        </p:txBody>
+      </p:sp>
+      <p:sp>
+        <p:nvSpPr>
+          <p:cNvPr id="4" name="Slide Number Placeholder 3"/>
+          <p:cNvSpPr>
+            <a:spLocks noGrp="1"/>
+          </p:cNvSpPr>
+          <p:nvPr>
+            <p:ph type="sldNum" idx="5" sz="quarter"/>
+          </p:nvPr>
+        </p:nvSpPr>
+        <p:spPr/>
+      </p:sp>
+    </p:spTree>
+  </p:cSld>
+  <p:clrMapOvr>
+    <a:masterClrMapping/>
+  </p:clrMapOvr>
+</p:notes>
+</file>
+
+<file path=ppt/notesSlides/notesSlide18.xml><?xml version="1.0" encoding="utf-8"?>
+<p:notes xmlns:a="http://schemas.openxmlformats.org/drawingml/2006/main" xmlns:p="http://schemas.openxmlformats.org/presentationml/2006/main" xmlns:r="http://schemas.openxmlformats.org/officeDocument/2006/relationships">
+  <p:cSld>
+    <p:spTree>
+      <p:nvGrpSpPr>
+        <p:cNvPr id="1" name=""/>
+        <p:cNvGrpSpPr/>
+        <p:nvPr/>
+      </p:nvGrpSpPr>
+      <p:grpSpPr>
+        <a:xfrm>
+          <a:off x="0" y="0"/>
+          <a:ext cx="0" cy="0"/>
+          <a:chOff x="0" y="0"/>
+          <a:chExt cx="0" cy="0"/>
+        </a:xfrm>
+      </p:grpSpPr>
+      <p:sp>
+        <p:nvSpPr>
+          <p:cNvPr id="2" name="Slide Image Placeholder 1"/>
+          <p:cNvSpPr>
+            <a:spLocks noGrp="1"/>
+          </p:cNvSpPr>
+          <p:nvPr>
+            <p:ph type="sldImg" idx="2"/>
+          </p:nvPr>
+        </p:nvSpPr>
+        <p:spPr/>
+      </p:sp>
+      <p:sp>
+        <p:nvSpPr>
+          <p:cNvPr id="3" name="Notes Placeholder 2"/>
+          <p:cNvSpPr>
+            <a:spLocks noGrp="1"/>
+          </p:cNvSpPr>
+          <p:nvPr>
+            <p:ph type="body" idx="3" sz="quarter"/>
+          </p:nvPr>
+        </p:nvSpPr>
+        <p:spPr/>
+        <p:txBody>
+          <a:bodyPr/>
+          <a:lstStyle/>
+          <a:p>
+            <a:r>
+              <a:t>Four takeaways. One: the scheduler matters most exactly where the deadline binds — at loose slack almost anything works. Two: accuracy under a binding deadline is not free — it costs solver time; the greedy's 0.15 seconds buys bound-level accuracy at 1000 tasks where the LP methods cost minutes. Three: data-awareness is what keeps schedules feasible as links degrade — the blind baseline's perfect scores are just late schedules. Four: fixed search budgets don't scale — the GA's quality decays with both n and N.</a:t>
+            </a:r>
+          </a:p>
+        </p:txBody>
+      </p:sp>
+      <p:sp>
+        <p:nvSpPr>
+          <p:cNvPr id="4" name="Slide Number Placeholder 3"/>
+          <p:cNvSpPr>
+            <a:spLocks noGrp="1"/>
+          </p:cNvSpPr>
+          <p:nvPr>
+            <p:ph type="sldNum" idx="5" sz="quarter"/>
+          </p:nvPr>
+        </p:nvSpPr>
+        <p:spPr/>
+      </p:sp>
+    </p:spTree>
+  </p:cSld>
+  <p:clrMapOvr>
+    <a:masterClrMapping/>
+  </p:clrMapOvr>
+</p:notes>
+</file>
+
+<file path=ppt/notesSlides/notesSlide19.xml><?xml version="1.0" encoding="utf-8"?>
+<p:notes xmlns:a="http://schemas.openxmlformats.org/drawingml/2006/main" xmlns:p="http://schemas.openxmlformats.org/presentationml/2006/main" xmlns:r="http://schemas.openxmlformats.org/officeDocument/2006/relationships">
+  <p:cSld>
+    <p:spTree>
+      <p:nvGrpSpPr>
+        <p:cNvPr id="1" name=""/>
+        <p:cNvGrpSpPr/>
+        <p:nvPr/>
+      </p:nvGrpSpPr>
+      <p:grpSpPr>
+        <a:xfrm>
+          <a:off x="0" y="0"/>
+          <a:ext cx="0" cy="0"/>
+          <a:chOff x="0" y="0"/>
+          <a:chExt cx="0" cy="0"/>
+        </a:xfrm>
+      </p:grpSpPr>
+      <p:sp>
+        <p:nvSpPr>
+          <p:cNvPr id="2" name="Slide Image Placeholder 1"/>
+          <p:cNvSpPr>
+            <a:spLocks noGrp="1"/>
+          </p:cNvSpPr>
+          <p:nvPr>
+            <p:ph type="sldImg" idx="2"/>
+          </p:nvPr>
+        </p:nvSpPr>
+        <p:spPr/>
+      </p:sp>
+      <p:sp>
+        <p:nvSpPr>
+          <p:cNvPr id="3" name="Notes Placeholder 2"/>
+          <p:cNvSpPr>
+            <a:spLocks noGrp="1"/>
+          </p:cNvSpPr>
+          <p:nvPr>
+            <p:ph type="body" idx="3" sz="quarter"/>
+          </p:nvPr>
+        </p:nvSpPr>
+        <p:spPr/>
+        <p:txBody>
+          <a:bodyPr/>
+          <a:lstStyle/>
+          <a:p>
+            <a:r>
+              <a:t>What we do not claim. The MILP is capped at 800 assignment variables — beyond that it is the benchmark's boundary, not the result's. The LP grows ~10^5 rows at n=1000; our randomized rounding reduces trials as size grows, which is part of why its scores dip. The GA uses one fixed budget across all sizes. And the retry model is retry-once-in-place — no replication, no checkpointing, no migration to another node.</a:t>
+            </a:r>
+          </a:p>
+        </p:txBody>
+      </p:sp>
+      <p:sp>
+        <p:nvSpPr>
+          <p:cNvPr id="4" name="Slide Number Placeholder 3"/>
+          <p:cNvSpPr>
+            <a:spLocks noGrp="1"/>
+          </p:cNvSpPr>
+          <p:nvPr>
+            <p:ph type="sldNum" idx="5" sz="quarter"/>
+          </p:nvPr>
+        </p:nvSpPr>
+        <p:spPr/>
+      </p:sp>
+    </p:spTree>
+  </p:cSld>
+  <p:clrMapOvr>
+    <a:masterClrMapping/>
+  </p:clrMapOvr>
+</p:notes>
+</file>
+
+<file path=ppt/notesSlides/notesSlide2.xml><?xml version="1.0" encoding="utf-8"?>
+<p:notes xmlns:a="http://schemas.openxmlformats.org/drawingml/2006/main" xmlns:p="http://schemas.openxmlformats.org/presentationml/2006/main" xmlns:r="http://schemas.openxmlformats.org/officeDocument/2006/relationships">
+  <p:cSld>
+    <p:spTree>
+      <p:nvGrpSpPr>
+        <p:cNvPr id="1" name=""/>
+        <p:cNvGrpSpPr/>
+        <p:nvPr/>
+      </p:nvGrpSpPr>
+      <p:grpSpPr>
+        <a:xfrm>
+          <a:off x="0" y="0"/>
+          <a:ext cx="0" cy="0"/>
+          <a:chOff x="0" y="0"/>
+          <a:chExt cx="0" cy="0"/>
+        </a:xfrm>
+      </p:grpSpPr>
+      <p:sp>
+        <p:nvSpPr>
+          <p:cNvPr id="2" name="Slide Image Placeholder 1"/>
+          <p:cNvSpPr>
+            <a:spLocks noGrp="1"/>
+          </p:cNvSpPr>
+          <p:nvPr>
+            <p:ph type="sldImg" idx="2"/>
+          </p:nvPr>
+        </p:nvSpPr>
+        <p:spPr/>
+      </p:sp>
+      <p:sp>
+        <p:nvSpPr>
+          <p:cNvPr id="3" name="Notes Placeholder 2"/>
+          <p:cNvSpPr>
+            <a:spLocks noGrp="1"/>
+          </p:cNvSpPr>
+          <p:nvPr>
+            <p:ph type="body" idx="3" sz="quarter"/>
+          </p:nvPr>
+        </p:nvSpPr>
+        <p:spPr/>
+        <p:txBody>
+          <a:bodyPr/>
+          <a:lstStyle/>
+          <a:p>
+            <a:r>
+              <a:t>Picture a river basin flooding. A workflow runs: rainfall sensors feed a runoff model, that feeds a flood-forecast model, that feeds evacuation planning and public alerts. Every stage hands data to the next. The deadline is not soft — a forecast that arrives after the water is useless. Now: during the storm, the uplink to the cloud is degraded or dead. The compute must happen on machines close to the disaster area.</a:t>
+            </a:r>
+          </a:p>
+        </p:txBody>
+      </p:sp>
+      <p:sp>
+        <p:nvSpPr>
+          <p:cNvPr id="4" name="Slide Number Placeholder 3"/>
+          <p:cNvSpPr>
+            <a:spLocks noGrp="1"/>
+          </p:cNvSpPr>
+          <p:nvPr>
+            <p:ph type="sldNum" idx="5" sz="quarter"/>
+          </p:nvPr>
+        </p:nvSpPr>
+        <p:spPr/>
+      </p:sp>
+    </p:spTree>
+  </p:cSld>
+  <p:clrMapOvr>
+    <a:masterClrMapping/>
+  </p:clrMapOvr>
+</p:notes>
+</file>
+
+<file path=ppt/notesSlides/notesSlide20.xml><?xml version="1.0" encoding="utf-8"?>
+<p:notes xmlns:a="http://schemas.openxmlformats.org/drawingml/2006/main" xmlns:p="http://schemas.openxmlformats.org/presentationml/2006/main" xmlns:r="http://schemas.openxmlformats.org/officeDocument/2006/relationships">
+  <p:cSld>
+    <p:spTree>
+      <p:nvGrpSpPr>
+        <p:cNvPr id="1" name=""/>
+        <p:cNvGrpSpPr/>
+        <p:nvPr/>
+      </p:nvGrpSpPr>
+      <p:grpSpPr>
+        <a:xfrm>
+          <a:off x="0" y="0"/>
+          <a:ext cx="0" cy="0"/>
+          <a:chOff x="0" y="0"/>
+          <a:chExt cx="0" cy="0"/>
+        </a:xfrm>
+      </p:grpSpPr>
+      <p:sp>
+        <p:nvSpPr>
+          <p:cNvPr id="2" name="Slide Image Placeholder 1"/>
+          <p:cNvSpPr>
+            <a:spLocks noGrp="1"/>
+          </p:cNvSpPr>
+          <p:nvPr>
+            <p:ph type="sldImg" idx="2"/>
+          </p:nvPr>
+        </p:nvSpPr>
+        <p:spPr/>
+      </p:sp>
+      <p:sp>
+        <p:nvSpPr>
+          <p:cNvPr id="3" name="Notes Placeholder 2"/>
+          <p:cNvSpPr>
+            <a:spLocks noGrp="1"/>
+          </p:cNvSpPr>
+          <p:nvPr>
+            <p:ph type="body" idx="3" sz="quarter"/>
+          </p:nvPr>
+        </p:nvSpPr>
+        <p:spPr/>
+        <p:txBody>
+          <a:bodyPr/>
+          <a:lstStyle/>
+          <a:p>
+            <a:r>
+              <a:t>One joint formulation — placement, execution fraction, data movement — proved, linearized, and solver-ready. Four schedulers on one cost model, five sweeps, honest scalability limits. Next: decomposed formulations to reach the million-task regime for real, adaptive GA budgets, richer failure semantics, and an online re-scheduler on a real fog testbed. Everything reproduces — code, data, executed notebook — at the repo.</a:t>
+            </a:r>
+          </a:p>
+        </p:txBody>
+      </p:sp>
+      <p:sp>
+        <p:nvSpPr>
+          <p:cNvPr id="4" name="Slide Number Placeholder 3"/>
+          <p:cNvSpPr>
+            <a:spLocks noGrp="1"/>
+          </p:cNvSpPr>
+          <p:nvPr>
+            <p:ph type="sldNum" idx="5" sz="quarter"/>
+          </p:nvPr>
+        </p:nvSpPr>
+        <p:spPr/>
+      </p:sp>
+    </p:spTree>
+  </p:cSld>
+  <p:clrMapOvr>
+    <a:masterClrMapping/>
+  </p:clrMapOvr>
+</p:notes>
+</file>
+
+<file path=ppt/notesSlides/notesSlide21.xml><?xml version="1.0" encoding="utf-8"?>
+<p:notes xmlns:a="http://schemas.openxmlformats.org/drawingml/2006/main" xmlns:p="http://schemas.openxmlformats.org/presentationml/2006/main" xmlns:r="http://schemas.openxmlformats.org/officeDocument/2006/relationships">
+  <p:cSld>
+    <p:spTree>
+      <p:nvGrpSpPr>
+        <p:cNvPr id="1" name=""/>
+        <p:cNvGrpSpPr/>
+        <p:nvPr/>
+      </p:nvGrpSpPr>
+      <p:grpSpPr>
+        <a:xfrm>
+          <a:off x="0" y="0"/>
+          <a:ext cx="0" cy="0"/>
+          <a:chOff x="0" y="0"/>
+          <a:chExt cx="0" cy="0"/>
+        </a:xfrm>
+      </p:grpSpPr>
+      <p:sp>
+        <p:nvSpPr>
+          <p:cNvPr id="2" name="Slide Image Placeholder 1"/>
+          <p:cNvSpPr>
+            <a:spLocks noGrp="1"/>
+          </p:cNvSpPr>
+          <p:nvPr>
+            <p:ph type="sldImg" idx="2"/>
+          </p:nvPr>
+        </p:nvSpPr>
+        <p:spPr/>
+      </p:sp>
+      <p:sp>
+        <p:nvSpPr>
+          <p:cNvPr id="3" name="Notes Placeholder 2"/>
+          <p:cNvSpPr>
+            <a:spLocks noGrp="1"/>
+          </p:cNvSpPr>
+          <p:nvPr>
+            <p:ph type="body" idx="3" sz="quarter"/>
+          </p:nvPr>
+        </p:nvSpPr>
+        <p:spPr/>
+        <p:txBody>
+          <a:bodyPr/>
+          <a:lstStyle/>
+          <a:p>
+            <a:r>
+              <a:t>Questions welcome.</a:t>
+            </a:r>
+          </a:p>
+        </p:txBody>
+      </p:sp>
+      <p:sp>
+        <p:nvSpPr>
+          <p:cNvPr id="4" name="Slide Number Placeholder 3"/>
+          <p:cNvSpPr>
+            <a:spLocks noGrp="1"/>
+          </p:cNvSpPr>
+          <p:nvPr>
+            <p:ph type="sldNum" idx="5" sz="quarter"/>
+          </p:nvPr>
+        </p:nvSpPr>
+        <p:spPr/>
+      </p:sp>
+    </p:spTree>
+  </p:cSld>
+  <p:clrMapOvr>
+    <a:masterClrMapping/>
+  </p:clrMapOvr>
+</p:notes>
+</file>
+
+<file path=ppt/notesSlides/notesSlide3.xml><?xml version="1.0" encoding="utf-8"?>
+<p:notes xmlns:a="http://schemas.openxmlformats.org/drawingml/2006/main" xmlns:p="http://schemas.openxmlformats.org/presentationml/2006/main" xmlns:r="http://schemas.openxmlformats.org/officeDocument/2006/relationships">
+  <p:cSld>
+    <p:spTree>
+      <p:nvGrpSpPr>
+        <p:cNvPr id="1" name=""/>
+        <p:cNvGrpSpPr/>
+        <p:nvPr/>
+      </p:nvGrpSpPr>
+      <p:grpSpPr>
+        <a:xfrm>
+          <a:off x="0" y="0"/>
+          <a:ext cx="0" cy="0"/>
+          <a:chOff x="0" y="0"/>
+          <a:chExt cx="0" cy="0"/>
+        </a:xfrm>
+      </p:grpSpPr>
+      <p:sp>
+        <p:nvSpPr>
+          <p:cNvPr id="2" name="Slide Image Placeholder 1"/>
+          <p:cNvSpPr>
+            <a:spLocks noGrp="1"/>
+          </p:cNvSpPr>
+          <p:nvPr>
+            <p:ph type="sldImg" idx="2"/>
+          </p:nvPr>
+        </p:nvSpPr>
+        <p:spPr/>
+      </p:sp>
+      <p:sp>
+        <p:nvSpPr>
+          <p:cNvPr id="3" name="Notes Placeholder 2"/>
+          <p:cNvSpPr>
+            <a:spLocks noGrp="1"/>
+          </p:cNvSpPr>
+          <p:nvPr>
+            <p:ph type="body" idx="3" sz="quarter"/>
+          </p:nvPr>
+        </p:nvSpPr>
+        <p:spPr/>
+        <p:txBody>
+          <a:bodyPr/>
+          <a:lstStyle/>
+          <a:p>
+            <a:r>
+              <a:t>A single fog site — a cell-tower rack, a roadside cabinet, a ship's server — rarely has the capacity to run the whole workflow in time. But several nearby sites share fast local links. Federating them gives a small local cloud. The catch: now every task has a choice of where to run, and that choice has a price — the data has to move.</a:t>
+            </a:r>
+          </a:p>
+        </p:txBody>
+      </p:sp>
+      <p:sp>
+        <p:nvSpPr>
+          <p:cNvPr id="4" name="Slide Number Placeholder 3"/>
+          <p:cNvSpPr>
+            <a:spLocks noGrp="1"/>
+          </p:cNvSpPr>
+          <p:nvPr>
+            <p:ph type="sldNum" idx="5" sz="quarter"/>
+          </p:nvPr>
+        </p:nvSpPr>
+        <p:spPr/>
+      </p:sp>
+    </p:spTree>
+  </p:cSld>
+  <p:clrMapOvr>
+    <a:masterClrMapping/>
+  </p:clrMapOvr>
+</p:notes>
+</file>
+
+<file path=ppt/notesSlides/notesSlide4.xml><?xml version="1.0" encoding="utf-8"?>
+<p:notes xmlns:a="http://schemas.openxmlformats.org/drawingml/2006/main" xmlns:p="http://schemas.openxmlformats.org/presentationml/2006/main" xmlns:r="http://schemas.openxmlformats.org/officeDocument/2006/relationships">
+  <p:cSld>
+    <p:spTree>
+      <p:nvGrpSpPr>
+        <p:cNvPr id="1" name=""/>
+        <p:cNvGrpSpPr/>
+        <p:nvPr/>
+      </p:nvGrpSpPr>
+      <p:grpSpPr>
+        <a:xfrm>
+          <a:off x="0" y="0"/>
+          <a:ext cx="0" cy="0"/>
+          <a:chOff x="0" y="0"/>
+          <a:chExt cx="0" cy="0"/>
+        </a:xfrm>
+      </p:grpSpPr>
+      <p:sp>
+        <p:nvSpPr>
+          <p:cNvPr id="2" name="Slide Image Placeholder 1"/>
+          <p:cNvSpPr>
+            <a:spLocks noGrp="1"/>
+          </p:cNvSpPr>
+          <p:nvPr>
+            <p:ph type="sldImg" idx="2"/>
+          </p:nvPr>
+        </p:nvSpPr>
+        <p:spPr/>
+      </p:sp>
+      <p:sp>
+        <p:nvSpPr>
+          <p:cNvPr id="3" name="Notes Placeholder 2"/>
+          <p:cNvSpPr>
+            <a:spLocks noGrp="1"/>
+          </p:cNvSpPr>
+          <p:nvPr>
+            <p:ph type="body" idx="3" sz="quarter"/>
+          </p:nvPr>
+        </p:nvSpPr>
+        <p:spPr/>
+        <p:txBody>
+          <a:bodyPr/>
+          <a:lstStyle/>
+          <a:p>
+            <a:r>
+              <a:t>The workflow is a directed acyclic graph: tasks are nodes, dependencies are edges. On each edge rides a chunk of data — tens of units in our model, which at realistic link speeds can take as long to move as the task itself takes to run. That is the first lever. The second: many of these tasks are iterative models — a hydrology model, a tracker — that can run partially and still return something useful.</a:t>
+            </a:r>
+          </a:p>
+        </p:txBody>
+      </p:sp>
+      <p:sp>
+        <p:nvSpPr>
+          <p:cNvPr id="4" name="Slide Number Placeholder 3"/>
+          <p:cNvSpPr>
+            <a:spLocks noGrp="1"/>
+          </p:cNvSpPr>
+          <p:nvPr>
+            <p:ph type="sldNum" idx="5" sz="quarter"/>
+          </p:nvPr>
+        </p:nvSpPr>
+        <p:spPr/>
+      </p:sp>
+    </p:spTree>
+  </p:cSld>
+  <p:clrMapOvr>
+    <a:masterClrMapping/>
+  </p:clrMapOvr>
+</p:notes>
+</file>
+
+<file path=ppt/notesSlides/notesSlide5.xml><?xml version="1.0" encoding="utf-8"?>
+<p:notes xmlns:a="http://schemas.openxmlformats.org/drawingml/2006/main" xmlns:p="http://schemas.openxmlformats.org/presentationml/2006/main" xmlns:r="http://schemas.openxmlformats.org/officeDocument/2006/relationships">
+  <p:cSld>
+    <p:spTree>
+      <p:nvGrpSpPr>
+        <p:cNvPr id="1" name=""/>
+        <p:cNvGrpSpPr/>
+        <p:nvPr/>
+      </p:nvGrpSpPr>
+      <p:grpSpPr>
+        <a:xfrm>
+          <a:off x="0" y="0"/>
+          <a:ext cx="0" cy="0"/>
+          <a:chOff x="0" y="0"/>
+          <a:chExt cx="0" cy="0"/>
+        </a:xfrm>
+      </p:grpSpPr>
+      <p:sp>
+        <p:nvSpPr>
+          <p:cNvPr id="2" name="Slide Image Placeholder 1"/>
+          <p:cNvSpPr>
+            <a:spLocks noGrp="1"/>
+          </p:cNvSpPr>
+          <p:nvPr>
+            <p:ph type="sldImg" idx="2"/>
+          </p:nvPr>
+        </p:nvSpPr>
+        <p:spPr/>
+      </p:sp>
+      <p:sp>
+        <p:nvSpPr>
+          <p:cNvPr id="3" name="Notes Placeholder 2"/>
+          <p:cNvSpPr>
+            <a:spLocks noGrp="1"/>
+          </p:cNvSpPr>
+          <p:nvPr>
+            <p:ph type="body" idx="3" sz="quarter"/>
+          </p:nvPr>
+        </p:nvSpPr>
+        <p:spPr/>
+        <p:txBody>
+          <a:bodyPr/>
+          <a:lstStyle/>
+          <a:p>
+            <a:r>
+              <a:t>So the problem is: place every task on a node, choose how much of each task to run, so that the whole DAG finishes before the deadline and the average accuracy is as high as possible. Two things make it interesting. First, data movement is a first-class cost — the fastest node for a task can be the worst choice once you pay for shipping its input. Second, accuracy is a knob, not a constant — when the deadline is tight you can buy time by giving back some accuracy.</a:t>
+            </a:r>
+          </a:p>
+        </p:txBody>
+      </p:sp>
+      <p:sp>
+        <p:nvSpPr>
+          <p:cNvPr id="4" name="Slide Number Placeholder 3"/>
+          <p:cNvSpPr>
+            <a:spLocks noGrp="1"/>
+          </p:cNvSpPr>
+          <p:nvPr>
+            <p:ph type="sldNum" idx="5" sz="quarter"/>
+          </p:nvPr>
+        </p:nvSpPr>
+        <p:spPr/>
+      </p:sp>
+    </p:spTree>
+  </p:cSld>
+  <p:clrMapOvr>
+    <a:masterClrMapping/>
+  </p:clrMapOvr>
+</p:notes>
+</file>
+
+<file path=ppt/notesSlides/notesSlide6.xml><?xml version="1.0" encoding="utf-8"?>
+<p:notes xmlns:a="http://schemas.openxmlformats.org/drawingml/2006/main" xmlns:p="http://schemas.openxmlformats.org/presentationml/2006/main" xmlns:r="http://schemas.openxmlformats.org/officeDocument/2006/relationships">
+  <p:cSld>
+    <p:spTree>
+      <p:nvGrpSpPr>
+        <p:cNvPr id="1" name=""/>
+        <p:cNvGrpSpPr/>
+        <p:nvPr/>
+      </p:nvGrpSpPr>
+      <p:grpSpPr>
+        <a:xfrm>
+          <a:off x="0" y="0"/>
+          <a:ext cx="0" cy="0"/>
+          <a:chOff x="0" y="0"/>
+          <a:chExt cx="0" cy="0"/>
+        </a:xfrm>
+      </p:grpSpPr>
+      <p:sp>
+        <p:nvSpPr>
+          <p:cNvPr id="2" name="Slide Image Placeholder 1"/>
+          <p:cNvSpPr>
+            <a:spLocks noGrp="1"/>
+          </p:cNvSpPr>
+          <p:nvPr>
+            <p:ph type="sldImg" idx="2"/>
+          </p:nvPr>
+        </p:nvSpPr>
+        <p:spPr/>
+      </p:sp>
+      <p:sp>
+        <p:nvSpPr>
+          <p:cNvPr id="3" name="Notes Placeholder 2"/>
+          <p:cNvSpPr>
+            <a:spLocks noGrp="1"/>
+          </p:cNvSpPr>
+          <p:nvPr>
+            <p:ph type="body" idx="3" sz="quarter"/>
+          </p:nvPr>
+        </p:nvSpPr>
+        <p:spPr/>
+        <p:txBody>
+          <a:bodyPr/>
+          <a:lstStyle/>
+          <a:p>
+            <a:r>
+              <a:t>Classic DAG schedulers — HEFT is the standard reference — rank tasks and place each where it finishes earliest. They assume every task runs to completion and treat transfer time as a fixed edge weight. Fog schedulers mostly do capacity and placement, ignoring approximate execution. Nobody combines: per-edge data volume, per-link bandwidth, and a per-task execution fraction, under one deadline, on a federation.</a:t>
+            </a:r>
+          </a:p>
+        </p:txBody>
+      </p:sp>
+      <p:sp>
+        <p:nvSpPr>
+          <p:cNvPr id="4" name="Slide Number Placeholder 3"/>
+          <p:cNvSpPr>
+            <a:spLocks noGrp="1"/>
+          </p:cNvSpPr>
+          <p:nvPr>
+            <p:ph type="sldNum" idx="5" sz="quarter"/>
+          </p:nvPr>
+        </p:nvSpPr>
+        <p:spPr/>
+      </p:sp>
+    </p:spTree>
+  </p:cSld>
+  <p:clrMapOvr>
+    <a:masterClrMapping/>
+  </p:clrMapOvr>
+</p:notes>
+</file>
+
+<file path=ppt/notesSlides/notesSlide7.xml><?xml version="1.0" encoding="utf-8"?>
+<p:notes xmlns:a="http://schemas.openxmlformats.org/drawingml/2006/main" xmlns:p="http://schemas.openxmlformats.org/presentationml/2006/main" xmlns:r="http://schemas.openxmlformats.org/officeDocument/2006/relationships">
+  <p:cSld>
+    <p:spTree>
+      <p:nvGrpSpPr>
+        <p:cNvPr id="1" name=""/>
+        <p:cNvGrpSpPr/>
+        <p:nvPr/>
+      </p:nvGrpSpPr>
+      <p:grpSpPr>
+        <a:xfrm>
+          <a:off x="0" y="0"/>
+          <a:ext cx="0" cy="0"/>
+          <a:chOff x="0" y="0"/>
+          <a:chExt cx="0" cy="0"/>
+        </a:xfrm>
+      </p:grpSpPr>
+      <p:sp>
+        <p:nvSpPr>
+          <p:cNvPr id="2" name="Slide Image Placeholder 1"/>
+          <p:cNvSpPr>
+            <a:spLocks noGrp="1"/>
+          </p:cNvSpPr>
+          <p:nvPr>
+            <p:ph type="sldImg" idx="2"/>
+          </p:nvPr>
+        </p:nvSpPr>
+        <p:spPr/>
+      </p:sp>
+      <p:sp>
+        <p:nvSpPr>
+          <p:cNvPr id="3" name="Notes Placeholder 2"/>
+          <p:cNvSpPr>
+            <a:spLocks noGrp="1"/>
+          </p:cNvSpPr>
+          <p:nvPr>
+            <p:ph type="body" idx="3" sz="quarter"/>
+          </p:nvPr>
+        </p:nvSpPr>
+        <p:spPr/>
+        <p:txBody>
+          <a:bodyPr/>
+          <a:lstStyle/>
+          <a:p>
+            <a:r>
+              <a:t>Three decisions per task: which node (e_ia), what fraction (l_ia), when it starts (M_ia). The objective maximizes average accuracy. Constraints force each task onto exactly one eligible node, make a task wait for every predecessor to finish AND its data to arrive — that is where the D over B term enters — and keep every task's completion time inside the deadline. Deadline feasibility is the same bound used in the paper's proofs; the linearization is solver-ready.</a:t>
+            </a:r>
+          </a:p>
+        </p:txBody>
+      </p:sp>
+      <p:sp>
+        <p:nvSpPr>
+          <p:cNvPr id="4" name="Slide Number Placeholder 3"/>
+          <p:cNvSpPr>
+            <a:spLocks noGrp="1"/>
+          </p:cNvSpPr>
+          <p:nvPr>
+            <p:ph type="sldNum" idx="5" sz="quarter"/>
+          </p:nvPr>
+        </p:nvSpPr>
+        <p:spPr/>
+      </p:sp>
+    </p:spTree>
+  </p:cSld>
+  <p:clrMapOvr>
+    <a:masterClrMapping/>
+  </p:clrMapOvr>
+</p:notes>
+</file>
+
+<file path=ppt/notesSlides/notesSlide8.xml><?xml version="1.0" encoding="utf-8"?>
+<p:notes xmlns:a="http://schemas.openxmlformats.org/drawingml/2006/main" xmlns:p="http://schemas.openxmlformats.org/presentationml/2006/main" xmlns:r="http://schemas.openxmlformats.org/officeDocument/2006/relationships">
+  <p:cSld>
+    <p:spTree>
+      <p:nvGrpSpPr>
+        <p:cNvPr id="1" name=""/>
+        <p:cNvGrpSpPr/>
+        <p:nvPr/>
+      </p:nvGrpSpPr>
+      <p:grpSpPr>
+        <a:xfrm>
+          <a:off x="0" y="0"/>
+          <a:ext cx="0" cy="0"/>
+          <a:chOff x="0" y="0"/>
+          <a:chExt cx="0" cy="0"/>
+        </a:xfrm>
+      </p:grpSpPr>
+      <p:sp>
+        <p:nvSpPr>
+          <p:cNvPr id="2" name="Slide Image Placeholder 1"/>
+          <p:cNvSpPr>
+            <a:spLocks noGrp="1"/>
+          </p:cNvSpPr>
+          <p:nvPr>
+            <p:ph type="sldImg" idx="2"/>
+          </p:nvPr>
+        </p:nvSpPr>
+        <p:spPr/>
+      </p:sp>
+      <p:sp>
+        <p:nvSpPr>
+          <p:cNvPr id="3" name="Notes Placeholder 2"/>
+          <p:cNvSpPr>
+            <a:spLocks noGrp="1"/>
+          </p:cNvSpPr>
+          <p:nvPr>
+            <p:ph type="body" idx="3" sz="quarter"/>
+          </p:nvPr>
+        </p:nvSpPr>
+        <p:spPr/>
+        <p:txBody>
+          <a:bodyPr/>
+          <a:lstStyle/>
+          <a:p>
+            <a:r>
+              <a:t>Because the problem is NP-hard, we also built three scalable schedulers that all share the same communication-cost model — so any difference in the results is about the algorithm, not the accounting. Randomized rounding: solve the LP relaxation, sample each task's node from the fractional solution, re-solve the LP for the fractions. Greedy: priority order, earliest-finish placement, retry with smaller fractions if late. GA: chromosome encodes assignment plus fractions.</a:t>
+            </a:r>
+          </a:p>
+        </p:txBody>
+      </p:sp>
+      <p:sp>
+        <p:nvSpPr>
+          <p:cNvPr id="4" name="Slide Number Placeholder 3"/>
+          <p:cNvSpPr>
+            <a:spLocks noGrp="1"/>
+          </p:cNvSpPr>
+          <p:nvPr>
+            <p:ph type="sldNum" idx="5" sz="quarter"/>
+          </p:nvPr>
+        </p:nvSpPr>
+        <p:spPr/>
+      </p:sp>
+    </p:spTree>
+  </p:cSld>
+  <p:clrMapOvr>
+    <a:masterClrMapping/>
+  </p:clrMapOvr>
+</p:notes>
+</file>
+
+<file path=ppt/notesSlides/notesSlide9.xml><?xml version="1.0" encoding="utf-8"?>
+<p:notes xmlns:a="http://schemas.openxmlformats.org/drawingml/2006/main" xmlns:p="http://schemas.openxmlformats.org/presentationml/2006/main" xmlns:r="http://schemas.openxmlformats.org/officeDocument/2006/relationships">
+  <p:cSld>
+    <p:spTree>
+      <p:nvGrpSpPr>
+        <p:cNvPr id="1" name=""/>
+        <p:cNvGrpSpPr/>
+        <p:nvPr/>
+      </p:nvGrpSpPr>
+      <p:grpSpPr>
+        <a:xfrm>
+          <a:off x="0" y="0"/>
+          <a:ext cx="0" cy="0"/>
+          <a:chOff x="0" y="0"/>
+          <a:chExt cx="0" cy="0"/>
+        </a:xfrm>
+      </p:grpSpPr>
+      <p:sp>
+        <p:nvSpPr>
+          <p:cNvPr id="2" name="Slide Image Placeholder 1"/>
+          <p:cNvSpPr>
+            <a:spLocks noGrp="1"/>
+          </p:cNvSpPr>
+          <p:nvPr>
+            <p:ph type="sldImg" idx="2"/>
+          </p:nvPr>
+        </p:nvSpPr>
+        <p:spPr/>
+      </p:sp>
+      <p:sp>
+        <p:nvSpPr>
+          <p:cNvPr id="3" name="Notes Placeholder 2"/>
+          <p:cNvSpPr>
+            <a:spLocks noGrp="1"/>
+          </p:cNvSpPr>
+          <p:nvPr>
+            <p:ph type="body" idx="3" sz="quarter"/>
+          </p:nvPr>
+        </p:nvSpPr>
+        <p:spPr/>
+        <p:txBody>
+          <a:bodyPr/>
+          <a:lstStyle/>
+          <a:p>
+            <a:r>
+              <a:t>A discrete-event simulator in Python — NumPy and SciPy's HiGHS solver. Parameters are chosen so the problem is contested: runtimes 1–5, edge payloads 5–50, link bandwidth 10–100 — so a transfer can genuinely rival a task. Four datasets from 10 tasks/3 nodes up to 1000 tasks/10 nodes. Five parameter sweeps. The yardstick in every plot: the max-accuracy bound — run everything fully — drawn as the dashed line. Plus a bandwidth-blind greedy in the link sweep to show what ignoring data costs.</a:t>
+            </a:r>
+          </a:p>
+        </p:txBody>
+      </p:sp>
+      <p:sp>
+        <p:nvSpPr>
+          <p:cNvPr id="4" name="Slide Number Placeholder 3"/>
+          <p:cNvSpPr>
+            <a:spLocks noGrp="1"/>
+          </p:cNvSpPr>
+          <p:nvPr>
+            <p:ph type="sldNum" idx="5" sz="quarter"/>
+          </p:nvPr>
+        </p:nvSpPr>
+        <p:spPr/>
+      </p:sp>
+    </p:spTree>
+  </p:cSld>
+  <p:clrMapOvr>
+    <a:masterClrMapping/>
+  </p:clrMapOvr>
+</p:notes>
 </file>
 
 <file path=ppt/slideLayouts/slideLayout1.xml><?xml version="1.0" encoding="utf-8"?>
@@ -3108,7 +4936,7 @@
         </p:nvSpPr>
         <p:spPr>
           <a:xfrm>
-            <a:off x="914400" y="1463040"/>
+            <a:off x="914400" y="1371600"/>
             <a:ext cx="10332720" cy="2011680"/>
           </a:xfrm>
           <a:prstGeom prst="rect">
@@ -3147,8 +4975,8 @@
         </p:nvSpPr>
         <p:spPr>
           <a:xfrm>
-            <a:off x="914400" y="3840480"/>
-            <a:ext cx="10332720" cy="1645920"/>
+            <a:off x="914400" y="3657600"/>
+            <a:ext cx="10332720" cy="2011680"/>
           </a:xfrm>
           <a:prstGeom prst="rect">
             <a:avLst/>
@@ -3246,45 +5074,21 @@
               </a:defRPr>
             </a:pPr>
             <a:r>
-              <a:t>Task failures: methods separate on feasibility</a:t>
-            </a:r>
-          </a:p>
-        </p:txBody>
-      </p:sp>
-      <p:pic>
-        <p:nvPicPr>
-          <p:cNvPr id="3" name="Picture 2" descr="perf_failure_accuracy.png"/>
-          <p:cNvPicPr>
-            <a:picLocks noChangeAspect="1"/>
-          </p:cNvPicPr>
+              <a:t>Five questions</a:t>
+            </a:r>
+          </a:p>
+        </p:txBody>
+      </p:sp>
+      <p:sp>
+        <p:nvSpPr>
+          <p:cNvPr id="3" name="TextBox 2"/>
+          <p:cNvSpPr txBox="1"/>
           <p:nvPr/>
-        </p:nvPicPr>
-        <p:blipFill>
-          <a:blip r:embed="rId2"/>
-          <a:stretch>
-            <a:fillRect/>
-          </a:stretch>
-        </p:blipFill>
+        </p:nvSpPr>
         <p:spPr>
           <a:xfrm>
-            <a:off x="731520" y="1005840"/>
-            <a:ext cx="6035040" cy="2322360"/>
-          </a:xfrm>
-          <a:prstGeom prst="rect">
-            <a:avLst/>
-          </a:prstGeom>
-        </p:spPr>
-      </p:pic>
-      <p:sp>
-        <p:nvSpPr>
-          <p:cNvPr id="4" name="TextBox 3"/>
-          <p:cNvSpPr txBox="1"/>
-          <p:nvPr/>
-        </p:nvSpPr>
-        <p:spPr>
-          <a:xfrm>
-            <a:off x="7040880" y="1097280"/>
-            <a:ext cx="4572000" cy="5303520"/>
+            <a:off x="548640" y="1097280"/>
+            <a:ext cx="10972800" cy="5303520"/>
           </a:xfrm>
           <a:prstGeom prst="rect">
             <a:avLst/>
@@ -3308,7 +5112,7 @@
               </a:defRPr>
             </a:pPr>
             <a:r>
-              <a:t>Retry-once model: a failed task reruns in place; accuracy is kept if the retry meets the deadline</a:t>
+              <a:t>Q1  Deadline slack alpha in {1.0 ... 2.0} — how tight is the deadline?</a:t>
             </a:r>
           </a:p>
           <a:p>
@@ -3323,7 +5127,7 @@
               </a:defRPr>
             </a:pPr>
             <a:r>
-              <a:t>Scores are flat - retries preserve accuracy</a:t>
+              <a:t>Q2  Federation size N in {2 ... 10} nodes — does capacity help?</a:t>
             </a:r>
           </a:p>
           <a:p>
@@ -3338,7 +5142,7 @@
               </a:defRPr>
             </a:pPr>
             <a:r>
-              <a:t>Feasibility separates them: greedy 100% at every rate; MILP and GA ~60%; rounding ~20%</a:t>
+              <a:t>Q3  Workflow size n in {10, 100, 1000} — who scales?</a:t>
             </a:r>
           </a:p>
           <a:p>
@@ -3353,7 +5157,49 @@
               </a:defRPr>
             </a:pPr>
             <a:r>
-              <a:t>Flat-vs-rate: at n = 100 tasks even a 10% rate makes at least one failure almost certain</a:t>
+              <a:t>Q4  Failure rate in {0 ... 0.5}, retry-once — who stays feasible?</a:t>
+            </a:r>
+          </a:p>
+          <a:p>
+            <a:pPr>
+              <a:spcAft>
+                <a:spcPts val="800"/>
+              </a:spcAft>
+              <a:defRPr sz="1800">
+                <a:solidFill>
+                  <a:srgbClr val="212121"/>
+                </a:solidFill>
+              </a:defRPr>
+            </a:pPr>
+            <a:r>
+              <a:t>Q5  Bandwidth x {1.0 ... 0.05} — what is data-awareness worth?</a:t>
+            </a:r>
+          </a:p>
+          <a:p>
+            <a:pPr>
+              <a:spcAft>
+                <a:spcPts val="800"/>
+              </a:spcAft>
+              <a:defRPr sz="1800">
+                <a:solidFill>
+                  <a:srgbClr val="212121"/>
+                </a:solidFill>
+              </a:defRPr>
+            </a:pPr>
+          </a:p>
+          <a:p>
+            <a:pPr>
+              <a:spcAft>
+                <a:spcPts val="800"/>
+              </a:spcAft>
+              <a:defRPr sz="1800">
+                <a:solidFill>
+                  <a:srgbClr val="212121"/>
+                </a:solidFill>
+              </a:defRPr>
+            </a:pPr>
+            <a:r>
+              <a:t>5 fresh instances per point; means reported</a:t>
             </a:r>
           </a:p>
         </p:txBody>
@@ -3406,29 +5252,29 @@
               </a:defRPr>
             </a:pPr>
             <a:r>
-              <a:t>Link degradation: what data-aware placement is worth</a:t>
+              <a:t>Q1 — Slack: the scheduler matters exactly when it hurts</a:t>
             </a:r>
           </a:p>
         </p:txBody>
       </p:sp>
       <p:pic>
         <p:nvPicPr>
-          <p:cNvPr id="3" name="Picture 2" descr="perf_bandwidth_accuracy.png"/>
+          <p:cNvPr id="3" name="Picture 2" descr="perf_slack_accuracy.png"/>
           <p:cNvPicPr>
             <a:picLocks noChangeAspect="1"/>
           </p:cNvPicPr>
           <p:nvPr/>
         </p:nvPicPr>
         <p:blipFill>
-          <a:blip r:embed="rId2"/>
+          <a:blip r:embed="rId3"/>
           <a:stretch>
             <a:fillRect/>
           </a:stretch>
         </p:blipFill>
         <p:spPr>
           <a:xfrm>
-            <a:off x="731520" y="1005840"/>
-            <a:ext cx="6035040" cy="2318074"/>
+            <a:off x="640080" y="1051560"/>
+            <a:ext cx="6126480" cy="4509185"/>
           </a:xfrm>
           <a:prstGeom prst="rect">
             <a:avLst/>
@@ -3443,8 +5289,8 @@
         </p:nvSpPr>
         <p:spPr>
           <a:xfrm>
-            <a:off x="7040880" y="1097280"/>
-            <a:ext cx="4572000" cy="5303520"/>
+            <a:off x="7040880" y="1188720"/>
+            <a:ext cx="4663440" cy="5303520"/>
           </a:xfrm>
           <a:prstGeom prst="rect">
             <a:avLst/>
@@ -3468,7 +5314,7 @@
               </a:defRPr>
             </a:pPr>
             <a:r>
-              <a:t>Bandwidth-blind greedy reports bound-level scores but misses the deadline: 80% feasible at 0.5x, 20% at 0.2x, 0% below</a:t>
+              <a:t>alpha = 1.0 (deadline barely fits): MILP 1.38 vs bound 1.43; rounding 1.25, greedy 1.23, GA 1.20</a:t>
             </a:r>
           </a:p>
           <a:p>
@@ -3483,7 +5329,7 @@
               </a:defRPr>
             </a:pPr>
             <a:r>
-              <a:t>MILP stays feasible at every level, losing ~10% of score at 0.05x</a:t>
+              <a:t>alpha &gt;= 1.2: greedy reaches the bound; MILP joins by 1.5</a:t>
             </a:r>
           </a:p>
           <a:p>
@@ -3498,7 +5344,7 @@
               </a:defRPr>
             </a:pPr>
             <a:r>
-              <a:t>Greedy stays feasible to 0.1x but pays in accuracy (0.80); GA holds to 0.1x, fails at 0.05x</a:t>
+              <a:t>Rounding and GA trail 2.5-8% even at alpha = 2.0 — a fixed search budget cannot fully recover</a:t>
             </a:r>
           </a:p>
           <a:p>
@@ -3513,7 +5359,7 @@
               </a:defRPr>
             </a:pPr>
             <a:r>
-              <a:t>Rounding survives only above 0.5x in our implementation</a:t>
+              <a:t>Lesson: method choice matters most exactly where the deadline binds</a:t>
             </a:r>
           </a:p>
         </p:txBody>
@@ -3566,21 +5412,45 @@
               </a:defRPr>
             </a:pPr>
             <a:r>
-              <a:t>Takeaways</a:t>
-            </a:r>
-          </a:p>
-        </p:txBody>
-      </p:sp>
-      <p:sp>
-        <p:nvSpPr>
-          <p:cNvPr id="3" name="TextBox 2"/>
+              <a:t>Q2 — Federation size: capacity buys feasibility, not accuracy</a:t>
+            </a:r>
+          </a:p>
+        </p:txBody>
+      </p:sp>
+      <p:pic>
+        <p:nvPicPr>
+          <p:cNvPr id="3" name="Picture 2" descr="perf_nodes_accuracy.png"/>
+          <p:cNvPicPr>
+            <a:picLocks noChangeAspect="1"/>
+          </p:cNvPicPr>
+          <p:nvPr/>
+        </p:nvPicPr>
+        <p:blipFill>
+          <a:blip r:embed="rId3"/>
+          <a:stretch>
+            <a:fillRect/>
+          </a:stretch>
+        </p:blipFill>
+        <p:spPr>
+          <a:xfrm>
+            <a:off x="640080" y="1051560"/>
+            <a:ext cx="6126480" cy="4504765"/>
+          </a:xfrm>
+          <a:prstGeom prst="rect">
+            <a:avLst/>
+          </a:prstGeom>
+        </p:spPr>
+      </p:pic>
+      <p:sp>
+        <p:nvSpPr>
+          <p:cNvPr id="4" name="TextBox 3"/>
           <p:cNvSpPr txBox="1"/>
           <p:nvPr/>
         </p:nvSpPr>
         <p:spPr>
           <a:xfrm>
-            <a:off x="548640" y="1097280"/>
-            <a:ext cx="10972800" cy="5303520"/>
+            <a:off x="7040880" y="1188720"/>
+            <a:ext cx="4663440" cy="5303520"/>
           </a:xfrm>
           <a:prstGeom prst="rect">
             <a:avLst/>
@@ -3604,7 +5474,7 @@
               </a:defRPr>
             </a:pPr>
             <a:r>
-              <a:t>The scheduler matters most exactly where the deadline binds</a:t>
+              <a:t>MILP and greedy match the bound at every N</a:t>
             </a:r>
           </a:p>
           <a:p>
@@ -3619,7 +5489,7 @@
               </a:defRPr>
             </a:pPr>
             <a:r>
-              <a:t>Accuracy under a binding deadline is not free in wall time: greedy 0.15 s vs rounding ~372 s vs GA ~159 s at n = 1000</a:t>
+              <a:t>GA: ~1.5% below bound at N=2 -&gt; ~8% below at N=10; rounding similar (~8% at N=10)</a:t>
             </a:r>
           </a:p>
           <a:p>
@@ -3634,7 +5504,7 @@
               </a:defRPr>
             </a:pPr>
             <a:r>
-              <a:t>Data-aware placement is what keeps schedules feasible as links degrade - the blind baseline's 'perfect' scores are late schedules</a:t>
+              <a:t>Reason: placement space grows with N but the search budget is fixed</a:t>
             </a:r>
           </a:p>
           <a:p>
@@ -3649,7 +5519,7 @@
               </a:defRPr>
             </a:pPr>
             <a:r>
-              <a:t>Honest limits: MILP capped at 800 assignment vars; LP rows grow ~10^5 at n=1000; fixed GA budget degrades; dense n x n instances stop at ~10^4 tasks (10^6 structural only)</a:t>
+              <a:t>Extra nodes never exceed the bound — they buy feasibility, not accuracy</a:t>
             </a:r>
           </a:p>
         </p:txBody>
@@ -3702,7 +5572,167 @@
               </a:defRPr>
             </a:pPr>
             <a:r>
-              <a:t>Conclusion and future work</a:t>
+              <a:t>Q3 — Workflow size: the simple greedy holds up best</a:t>
+            </a:r>
+          </a:p>
+        </p:txBody>
+      </p:sp>
+      <p:pic>
+        <p:nvPicPr>
+          <p:cNvPr id="3" name="Picture 2" descr="perf_task_size_accuracy.png"/>
+          <p:cNvPicPr>
+            <a:picLocks noChangeAspect="1"/>
+          </p:cNvPicPr>
+          <p:nvPr/>
+        </p:nvPicPr>
+        <p:blipFill>
+          <a:blip r:embed="rId3"/>
+          <a:stretch>
+            <a:fillRect/>
+          </a:stretch>
+        </p:blipFill>
+        <p:spPr>
+          <a:xfrm>
+            <a:off x="640080" y="1051560"/>
+            <a:ext cx="6126480" cy="4504765"/>
+          </a:xfrm>
+          <a:prstGeom prst="rect">
+            <a:avLst/>
+          </a:prstGeom>
+        </p:spPr>
+      </p:pic>
+      <p:sp>
+        <p:nvSpPr>
+          <p:cNvPr id="4" name="TextBox 3"/>
+          <p:cNvSpPr txBox="1"/>
+          <p:nvPr/>
+        </p:nvSpPr>
+        <p:spPr>
+          <a:xfrm>
+            <a:off x="7040880" y="1188720"/>
+            <a:ext cx="4663440" cy="5303520"/>
+          </a:xfrm>
+          <a:prstGeom prst="rect">
+            <a:avLst/>
+          </a:prstGeom>
+          <a:noFill/>
+        </p:spPr>
+        <p:txBody>
+          <a:bodyPr wrap="square">
+            <a:spAutoFit/>
+          </a:bodyPr>
+          <a:lstStyle/>
+          <a:p>
+            <a:pPr>
+              <a:spcAft>
+                <a:spcPts val="800"/>
+              </a:spcAft>
+              <a:defRPr sz="1800">
+                <a:solidFill>
+                  <a:srgbClr val="212121"/>
+                </a:solidFill>
+              </a:defRPr>
+            </a:pPr>
+            <a:r>
+              <a:t>n = 10: all methods on the bound (1.41)</a:t>
+            </a:r>
+          </a:p>
+          <a:p>
+            <a:pPr>
+              <a:spcAft>
+                <a:spcPts val="800"/>
+              </a:spcAft>
+              <a:defRPr sz="1800">
+                <a:solidFill>
+                  <a:srgbClr val="212121"/>
+                </a:solidFill>
+              </a:defRPr>
+            </a:pPr>
+            <a:r>
+              <a:t>n = 100: MILP + greedy on bound; GA first to drift (1.26)</a:t>
+            </a:r>
+          </a:p>
+          <a:p>
+            <a:pPr>
+              <a:spcAft>
+                <a:spcPts val="800"/>
+              </a:spcAft>
+              <a:defRPr sz="1800">
+                <a:solidFill>
+                  <a:srgbClr val="212121"/>
+                </a:solidFill>
+              </a:defRPr>
+            </a:pPr>
+            <a:r>
+              <a:t>n = 1000: MILP past the 800-var cap; greedy on bound in 0.15 s; rounding 1.37 (~93 s per LP re-solve, ~372 s/run); GA 1.10 in ~159 s</a:t>
+            </a:r>
+          </a:p>
+          <a:p>
+            <a:pPr>
+              <a:spcAft>
+                <a:spcPts val="800"/>
+              </a:spcAft>
+              <a:defRPr sz="1800">
+                <a:solidFill>
+                  <a:srgbClr val="212121"/>
+                </a:solidFill>
+              </a:defRPr>
+            </a:pPr>
+            <a:r>
+              <a:t>GA budget is spread over a combinatorially growing space</a:t>
+            </a:r>
+          </a:p>
+        </p:txBody>
+      </p:sp>
+    </p:spTree>
+  </p:cSld>
+  <p:clrMapOvr>
+    <a:masterClrMapping/>
+  </p:clrMapOvr>
+</p:sld>
+</file>
+
+<file path=ppt/slides/slide14.xml><?xml version="1.0" encoding="utf-8"?>
+<p:sld xmlns:a="http://schemas.openxmlformats.org/drawingml/2006/main" xmlns:p="http://schemas.openxmlformats.org/presentationml/2006/main" xmlns:r="http://schemas.openxmlformats.org/officeDocument/2006/relationships">
+  <p:cSld>
+    <p:spTree>
+      <p:nvGrpSpPr>
+        <p:cNvPr id="1" name=""/>
+        <p:cNvGrpSpPr/>
+        <p:nvPr/>
+      </p:nvGrpSpPr>
+      <p:grpSpPr/>
+      <p:sp>
+        <p:nvSpPr>
+          <p:cNvPr id="2" name="TextBox 1"/>
+          <p:cNvSpPr txBox="1"/>
+          <p:nvPr/>
+        </p:nvSpPr>
+        <p:spPr>
+          <a:xfrm>
+            <a:off x="457200" y="228600"/>
+            <a:ext cx="11247120" cy="731520"/>
+          </a:xfrm>
+          <a:prstGeom prst="rect">
+            <a:avLst/>
+          </a:prstGeom>
+          <a:noFill/>
+        </p:spPr>
+        <p:txBody>
+          <a:bodyPr wrap="none">
+            <a:spAutoFit/>
+          </a:bodyPr>
+          <a:lstStyle/>
+          <a:p>
+            <a:pPr>
+              <a:defRPr sz="3000" b="1">
+                <a:solidFill>
+                  <a:srgbClr val="0D2C54"/>
+                </a:solidFill>
+              </a:defRPr>
+            </a:pPr>
+            <a:r>
+              <a:t>Same story on the four test datasets</a:t>
             </a:r>
           </a:p>
         </p:txBody>
@@ -3740,7 +5770,7 @@
               </a:defRPr>
             </a:pPr>
             <a:r>
-              <a:t>One joint formulation: placement + execution fraction + data movement, verified with proofs and a solver-ready linearization</a:t>
+              <a:t>small (10/3): all four methods identical score 1.64; greedy fastest and shortest makespan (16.8 vs ~18)</a:t>
             </a:r>
           </a:p>
           <a:p>
@@ -3755,7 +5785,7 @@
               </a:defRPr>
             </a:pPr>
             <a:r>
-              <a:t>Four schedulers, one cost model; sweeps over slack, size, federation, failures, and bandwidth</a:t>
+              <a:t>medium (100/5): MILP + greedy 1.44; rounding 1.32; GA 1.27 — but greedy makespan 43.1 vs ~61</a:t>
             </a:r>
           </a:p>
           <a:p>
@@ -3770,7 +5800,7 @@
               </a:defRPr>
             </a:pPr>
             <a:r>
-              <a:t>Next: sparse/decomposed formulations toward 10^6-task instances; adaptive GA budgets; replication/checkpointing beyond retry-once; online re-scheduling on a real testbed</a:t>
+              <a:t>large (500/8): only greedy + GA fit: 1.42 vs 1.17, makespan 50 vs 71</a:t>
             </a:r>
           </a:p>
           <a:p>
@@ -3785,7 +5815,878 @@
               </a:defRPr>
             </a:pPr>
             <a:r>
-              <a:t>Reproduce: github.com/gayanigupta/data-aware-scheduling - code, data, executed notebook</a:t>
+              <a:t>xlarge (1000/10): greedy 1.41 in 0.14 s; GA 1.13 in 73 s with makespan 120</a:t>
+            </a:r>
+          </a:p>
+          <a:p>
+            <a:pPr>
+              <a:spcAft>
+                <a:spcPts val="800"/>
+              </a:spcAft>
+              <a:defRPr sz="1800">
+                <a:solidFill>
+                  <a:srgbClr val="212121"/>
+                </a:solidFill>
+              </a:defRPr>
+            </a:pPr>
+          </a:p>
+          <a:p>
+            <a:pPr>
+              <a:spcAft>
+                <a:spcPts val="800"/>
+              </a:spcAft>
+              <a:defRPr sz="1800">
+                <a:solidFill>
+                  <a:srgbClr val="212121"/>
+                </a:solidFill>
+              </a:defRPr>
+            </a:pPr>
+            <a:r>
+              <a:t>Accuracy is not free in wall time — and neither is the makespan</a:t>
+            </a:r>
+          </a:p>
+        </p:txBody>
+      </p:sp>
+    </p:spTree>
+  </p:cSld>
+  <p:clrMapOvr>
+    <a:masterClrMapping/>
+  </p:clrMapOvr>
+</p:sld>
+</file>
+
+<file path=ppt/slides/slide15.xml><?xml version="1.0" encoding="utf-8"?>
+<p:sld xmlns:a="http://schemas.openxmlformats.org/drawingml/2006/main" xmlns:p="http://schemas.openxmlformats.org/presentationml/2006/main" xmlns:r="http://schemas.openxmlformats.org/officeDocument/2006/relationships">
+  <p:cSld>
+    <p:spTree>
+      <p:nvGrpSpPr>
+        <p:cNvPr id="1" name=""/>
+        <p:cNvGrpSpPr/>
+        <p:nvPr/>
+      </p:nvGrpSpPr>
+      <p:grpSpPr/>
+      <p:sp>
+        <p:nvSpPr>
+          <p:cNvPr id="2" name="TextBox 1"/>
+          <p:cNvSpPr txBox="1"/>
+          <p:nvPr/>
+        </p:nvSpPr>
+        <p:spPr>
+          <a:xfrm>
+            <a:off x="457200" y="228600"/>
+            <a:ext cx="11247120" cy="731520"/>
+          </a:xfrm>
+          <a:prstGeom prst="rect">
+            <a:avLst/>
+          </a:prstGeom>
+          <a:noFill/>
+        </p:spPr>
+        <p:txBody>
+          <a:bodyPr wrap="none">
+            <a:spAutoFit/>
+          </a:bodyPr>
+          <a:lstStyle/>
+          <a:p>
+            <a:pPr>
+              <a:defRPr sz="3000" b="1">
+                <a:solidFill>
+                  <a:srgbClr val="0D2C54"/>
+                </a:solidFill>
+              </a:defRPr>
+            </a:pPr>
+            <a:r>
+              <a:t>Q4 — Failures: scores stay flat; feasibility is the story</a:t>
+            </a:r>
+          </a:p>
+        </p:txBody>
+      </p:sp>
+      <p:pic>
+        <p:nvPicPr>
+          <p:cNvPr id="3" name="Picture 2" descr="perf_failure_accuracy.png"/>
+          <p:cNvPicPr>
+            <a:picLocks noChangeAspect="1"/>
+          </p:cNvPicPr>
+          <p:nvPr/>
+        </p:nvPicPr>
+        <p:blipFill>
+          <a:blip r:embed="rId3"/>
+          <a:stretch>
+            <a:fillRect/>
+          </a:stretch>
+        </p:blipFill>
+        <p:spPr>
+          <a:xfrm>
+            <a:off x="640080" y="1051560"/>
+            <a:ext cx="6126480" cy="2357547"/>
+          </a:xfrm>
+          <a:prstGeom prst="rect">
+            <a:avLst/>
+          </a:prstGeom>
+        </p:spPr>
+      </p:pic>
+      <p:sp>
+        <p:nvSpPr>
+          <p:cNvPr id="4" name="TextBox 3"/>
+          <p:cNvSpPr txBox="1"/>
+          <p:nvPr/>
+        </p:nvSpPr>
+        <p:spPr>
+          <a:xfrm>
+            <a:off x="7040880" y="1188720"/>
+            <a:ext cx="4663440" cy="5303520"/>
+          </a:xfrm>
+          <a:prstGeom prst="rect">
+            <a:avLst/>
+          </a:prstGeom>
+          <a:noFill/>
+        </p:spPr>
+        <p:txBody>
+          <a:bodyPr wrap="square">
+            <a:spAutoFit/>
+          </a:bodyPr>
+          <a:lstStyle/>
+          <a:p>
+            <a:pPr>
+              <a:spcAft>
+                <a:spcPts val="800"/>
+              </a:spcAft>
+              <a:defRPr sz="1800">
+                <a:solidFill>
+                  <a:srgbClr val="212121"/>
+                </a:solidFill>
+              </a:defRPr>
+            </a:pPr>
+            <a:r>
+              <a:t>Retry-once model: failed task reruns in place; accuracy kept if the retry meets the deadline</a:t>
+            </a:r>
+          </a:p>
+          <a:p>
+            <a:pPr>
+              <a:spcAft>
+                <a:spcPts val="800"/>
+              </a:spcAft>
+              <a:defRPr sz="1800">
+                <a:solidFill>
+                  <a:srgbClr val="212121"/>
+                </a:solidFill>
+              </a:defRPr>
+            </a:pPr>
+            <a:r>
+              <a:t>Scores flat in failure rate — retries preserve accuracy</a:t>
+            </a:r>
+          </a:p>
+          <a:p>
+            <a:pPr>
+              <a:spcAft>
+                <a:spcPts val="800"/>
+              </a:spcAft>
+              <a:defRPr sz="1800">
+                <a:solidFill>
+                  <a:srgbClr val="212121"/>
+                </a:solidFill>
+              </a:defRPr>
+            </a:pPr>
+            <a:r>
+              <a:t>Feasibility at rate 0.5: greedy 100%; MILP/GA ~60%; rounding ~20%</a:t>
+            </a:r>
+          </a:p>
+          <a:p>
+            <a:pPr>
+              <a:spcAft>
+                <a:spcPts val="800"/>
+              </a:spcAft>
+              <a:defRPr sz="1800">
+                <a:solidFill>
+                  <a:srgbClr val="212121"/>
+                </a:solidFill>
+              </a:defRPr>
+            </a:pPr>
+            <a:r>
+              <a:t>Greedy's edge: it finishes early (makespan ~30 vs 40-80), leaving room for retries</a:t>
+            </a:r>
+          </a:p>
+        </p:txBody>
+      </p:sp>
+    </p:spTree>
+  </p:cSld>
+  <p:clrMapOvr>
+    <a:masterClrMapping/>
+  </p:clrMapOvr>
+</p:sld>
+</file>
+
+<file path=ppt/slides/slide16.xml><?xml version="1.0" encoding="utf-8"?>
+<p:sld xmlns:a="http://schemas.openxmlformats.org/drawingml/2006/main" xmlns:p="http://schemas.openxmlformats.org/presentationml/2006/main" xmlns:r="http://schemas.openxmlformats.org/officeDocument/2006/relationships">
+  <p:cSld>
+    <p:spTree>
+      <p:nvGrpSpPr>
+        <p:cNvPr id="1" name=""/>
+        <p:cNvGrpSpPr/>
+        <p:nvPr/>
+      </p:nvGrpSpPr>
+      <p:grpSpPr/>
+      <p:sp>
+        <p:nvSpPr>
+          <p:cNvPr id="2" name="TextBox 1"/>
+          <p:cNvSpPr txBox="1"/>
+          <p:nvPr/>
+        </p:nvSpPr>
+        <p:spPr>
+          <a:xfrm>
+            <a:off x="457200" y="228600"/>
+            <a:ext cx="11247120" cy="731520"/>
+          </a:xfrm>
+          <a:prstGeom prst="rect">
+            <a:avLst/>
+          </a:prstGeom>
+          <a:noFill/>
+        </p:spPr>
+        <p:txBody>
+          <a:bodyPr wrap="none">
+            <a:spAutoFit/>
+          </a:bodyPr>
+          <a:lstStyle/>
+          <a:p>
+            <a:pPr>
+              <a:defRPr sz="3000" b="1">
+                <a:solidFill>
+                  <a:srgbClr val="0D2C54"/>
+                </a:solidFill>
+              </a:defRPr>
+            </a:pPr>
+            <a:r>
+              <a:t>Q5 — Link degradation: what data-awareness is worth</a:t>
+            </a:r>
+          </a:p>
+        </p:txBody>
+      </p:sp>
+      <p:pic>
+        <p:nvPicPr>
+          <p:cNvPr id="3" name="Picture 2" descr="perf_bandwidth_accuracy.png"/>
+          <p:cNvPicPr>
+            <a:picLocks noChangeAspect="1"/>
+          </p:cNvPicPr>
+          <p:nvPr/>
+        </p:nvPicPr>
+        <p:blipFill>
+          <a:blip r:embed="rId3"/>
+          <a:stretch>
+            <a:fillRect/>
+          </a:stretch>
+        </p:blipFill>
+        <p:spPr>
+          <a:xfrm>
+            <a:off x="640080" y="1051560"/>
+            <a:ext cx="6126480" cy="2353197"/>
+          </a:xfrm>
+          <a:prstGeom prst="rect">
+            <a:avLst/>
+          </a:prstGeom>
+        </p:spPr>
+      </p:pic>
+      <p:sp>
+        <p:nvSpPr>
+          <p:cNvPr id="4" name="TextBox 3"/>
+          <p:cNvSpPr txBox="1"/>
+          <p:nvPr/>
+        </p:nvSpPr>
+        <p:spPr>
+          <a:xfrm>
+            <a:off x="7040880" y="1188720"/>
+            <a:ext cx="4663440" cy="5303520"/>
+          </a:xfrm>
+          <a:prstGeom prst="rect">
+            <a:avLst/>
+          </a:prstGeom>
+          <a:noFill/>
+        </p:spPr>
+        <p:txBody>
+          <a:bodyPr wrap="square">
+            <a:spAutoFit/>
+          </a:bodyPr>
+          <a:lstStyle/>
+          <a:p>
+            <a:pPr>
+              <a:spcAft>
+                <a:spcPts val="800"/>
+              </a:spcAft>
+              <a:defRPr sz="1800">
+                <a:solidFill>
+                  <a:srgbClr val="212121"/>
+                </a:solidFill>
+              </a:defRPr>
+            </a:pPr>
+            <a:r>
+              <a:t>Bandwidth-blind greedy: bound-level scores at every level — but infeasible (80% at 0.5x, 20% at 0.2x, 0% below)</a:t>
+            </a:r>
+          </a:p>
+          <a:p>
+            <a:pPr>
+              <a:spcAft>
+                <a:spcPts val="800"/>
+              </a:spcAft>
+              <a:defRPr sz="1800">
+                <a:solidFill>
+                  <a:srgbClr val="212121"/>
+                </a:solidFill>
+              </a:defRPr>
+            </a:pPr>
+            <a:r>
+              <a:t>MILP: feasible at all levels; ~10% score loss at 0.05x</a:t>
+            </a:r>
+          </a:p>
+          <a:p>
+            <a:pPr>
+              <a:spcAft>
+                <a:spcPts val="800"/>
+              </a:spcAft>
+              <a:defRPr sz="1800">
+                <a:solidFill>
+                  <a:srgbClr val="212121"/>
+                </a:solidFill>
+              </a:defRPr>
+            </a:pPr>
+            <a:r>
+              <a:t>Greedy: feasible to 0.1x, pays in accuracy (0.3-1.4 avg); collapses at 0.05x</a:t>
+            </a:r>
+          </a:p>
+          <a:p>
+            <a:pPr>
+              <a:spcAft>
+                <a:spcPts val="800"/>
+              </a:spcAft>
+              <a:defRPr sz="1800">
+                <a:solidFill>
+                  <a:srgbClr val="212121"/>
+                </a:solidFill>
+              </a:defRPr>
+            </a:pPr>
+            <a:r>
+              <a:t>GA: holds to 0.1x, infeasible at 0.05x; rounding survives only above 0.5x</a:t>
+            </a:r>
+          </a:p>
+          <a:p>
+            <a:pPr>
+              <a:spcAft>
+                <a:spcPts val="800"/>
+              </a:spcAft>
+              <a:defRPr sz="1800">
+                <a:solidFill>
+                  <a:srgbClr val="212121"/>
+                </a:solidFill>
+              </a:defRPr>
+            </a:pPr>
+            <a:r>
+              <a:t>High score + late = a missed alert, not a result</a:t>
+            </a:r>
+          </a:p>
+        </p:txBody>
+      </p:sp>
+    </p:spTree>
+  </p:cSld>
+  <p:clrMapOvr>
+    <a:masterClrMapping/>
+  </p:clrMapOvr>
+</p:sld>
+</file>
+
+<file path=ppt/slides/slide17.xml><?xml version="1.0" encoding="utf-8"?>
+<p:sld xmlns:a="http://schemas.openxmlformats.org/drawingml/2006/main" xmlns:p="http://schemas.openxmlformats.org/presentationml/2006/main" xmlns:r="http://schemas.openxmlformats.org/officeDocument/2006/relationships">
+  <p:cSld>
+    <p:spTree>
+      <p:nvGrpSpPr>
+        <p:cNvPr id="1" name=""/>
+        <p:cNvGrpSpPr/>
+        <p:nvPr/>
+      </p:nvGrpSpPr>
+      <p:grpSpPr/>
+      <p:sp>
+        <p:nvSpPr>
+          <p:cNvPr id="2" name="TextBox 1"/>
+          <p:cNvSpPr txBox="1"/>
+          <p:nvPr/>
+        </p:nvSpPr>
+        <p:spPr>
+          <a:xfrm>
+            <a:off x="457200" y="228600"/>
+            <a:ext cx="11247120" cy="731520"/>
+          </a:xfrm>
+          <a:prstGeom prst="rect">
+            <a:avLst/>
+          </a:prstGeom>
+          <a:noFill/>
+        </p:spPr>
+        <p:txBody>
+          <a:bodyPr wrap="none">
+            <a:spAutoFit/>
+          </a:bodyPr>
+          <a:lstStyle/>
+          <a:p>
+            <a:pPr>
+              <a:defRPr sz="3000" b="1">
+                <a:solidFill>
+                  <a:srgbClr val="0D2C54"/>
+                </a:solidFill>
+              </a:defRPr>
+            </a:pPr>
+            <a:r>
+              <a:t>Beyond the sweeps: 10^6-task structures</a:t>
+            </a:r>
+          </a:p>
+        </p:txBody>
+      </p:sp>
+      <p:sp>
+        <p:nvSpPr>
+          <p:cNvPr id="3" name="TextBox 2"/>
+          <p:cNvSpPr txBox="1"/>
+          <p:nvPr/>
+        </p:nvSpPr>
+        <p:spPr>
+          <a:xfrm>
+            <a:off x="548640" y="1097280"/>
+            <a:ext cx="6309360" cy="5303520"/>
+          </a:xfrm>
+          <a:prstGeom prst="rect">
+            <a:avLst/>
+          </a:prstGeom>
+          <a:noFill/>
+        </p:spPr>
+        <p:txBody>
+          <a:bodyPr wrap="square">
+            <a:spAutoFit/>
+          </a:bodyPr>
+          <a:lstStyle/>
+          <a:p>
+            <a:pPr>
+              <a:spcAft>
+                <a:spcPts val="800"/>
+              </a:spcAft>
+              <a:defRPr sz="1800">
+                <a:solidFill>
+                  <a:srgbClr val="212121"/>
+                </a:solidFill>
+              </a:defRPr>
+            </a:pPr>
+            <a:r>
+              <a:t>DAG generator: 10^6 tasks / ~3M edges in ~3 s; depth grows like log n (24 -&gt; 91 for 100 -&gt; 10^6)</a:t>
+            </a:r>
+          </a:p>
+          <a:p>
+            <a:pPr>
+              <a:spcAft>
+                <a:spcPts val="800"/>
+              </a:spcAft>
+              <a:defRPr sz="1800">
+                <a:solidFill>
+                  <a:srgbClr val="212121"/>
+                </a:solidFill>
+              </a:defRPr>
+            </a:pPr>
+            <a:r>
+              <a:t>Resource graphs: 10^6 fog nodes in ~7 s; avg degree ~5, bandwidth 10-100</a:t>
+            </a:r>
+          </a:p>
+          <a:p>
+            <a:pPr>
+              <a:spcAft>
+                <a:spcPts val="800"/>
+              </a:spcAft>
+              <a:defRPr sz="1800">
+                <a:solidFill>
+                  <a:srgbClr val="212121"/>
+                </a:solidFill>
+              </a:defRPr>
+            </a:pPr>
+            <a:r>
+              <a:t>Structural generation is cheap; schedulable dense instances stop where constraints do</a:t>
+            </a:r>
+          </a:p>
+          <a:p>
+            <a:pPr lvl="1">
+              <a:spcAft>
+                <a:spcPts val="800"/>
+              </a:spcAft>
+              <a:defRPr sz="1600">
+                <a:solidFill>
+                  <a:srgbClr val="555555"/>
+                </a:solidFill>
+              </a:defRPr>
+            </a:pPr>
+            <a:r>
+              <a:t>  MILP: ~800 assignment vars; LP: ~10^5 rows at n=1000; dense n x n instancing ~10^4 tasks</a:t>
+            </a:r>
+          </a:p>
+        </p:txBody>
+      </p:sp>
+      <p:pic>
+        <p:nvPicPr>
+          <p:cNvPr id="4" name="Picture 3" descr="resource_graphs.png"/>
+          <p:cNvPicPr>
+            <a:picLocks noChangeAspect="1"/>
+          </p:cNvPicPr>
+          <p:nvPr/>
+        </p:nvPicPr>
+        <p:blipFill>
+          <a:blip r:embed="rId3"/>
+          <a:stretch>
+            <a:fillRect/>
+          </a:stretch>
+        </p:blipFill>
+        <p:spPr>
+          <a:xfrm>
+            <a:off x="6949440" y="1188720"/>
+            <a:ext cx="4937760" cy="2698608"/>
+          </a:xfrm>
+          <a:prstGeom prst="rect">
+            <a:avLst/>
+          </a:prstGeom>
+        </p:spPr>
+      </p:pic>
+      <p:sp>
+        <p:nvSpPr>
+          <p:cNvPr id="5" name="TextBox 4"/>
+          <p:cNvSpPr txBox="1"/>
+          <p:nvPr/>
+        </p:nvSpPr>
+        <p:spPr>
+          <a:xfrm>
+            <a:off x="6949440" y="5943600"/>
+            <a:ext cx="4937760" cy="548640"/>
+          </a:xfrm>
+          <a:prstGeom prst="rect">
+            <a:avLst/>
+          </a:prstGeom>
+          <a:noFill/>
+        </p:spPr>
+        <p:txBody>
+          <a:bodyPr wrap="none">
+            <a:spAutoFit/>
+          </a:bodyPr>
+          <a:lstStyle/>
+          <a:p>
+            <a:pPr algn="ctr">
+              <a:defRPr sz="1200" i="1">
+                <a:solidFill>
+                  <a:srgbClr val="555555"/>
+                </a:solidFill>
+              </a:defRPr>
+            </a:pPr>
+            <a:r>
+              <a:t>Generated federated resource graphs (up to 10^6 nodes)</a:t>
+            </a:r>
+          </a:p>
+        </p:txBody>
+      </p:sp>
+    </p:spTree>
+  </p:cSld>
+  <p:clrMapOvr>
+    <a:masterClrMapping/>
+  </p:clrMapOvr>
+</p:sld>
+</file>
+
+<file path=ppt/slides/slide18.xml><?xml version="1.0" encoding="utf-8"?>
+<p:sld xmlns:a="http://schemas.openxmlformats.org/drawingml/2006/main" xmlns:p="http://schemas.openxmlformats.org/presentationml/2006/main" xmlns:r="http://schemas.openxmlformats.org/officeDocument/2006/relationships">
+  <p:cSld>
+    <p:spTree>
+      <p:nvGrpSpPr>
+        <p:cNvPr id="1" name=""/>
+        <p:cNvGrpSpPr/>
+        <p:nvPr/>
+      </p:nvGrpSpPr>
+      <p:grpSpPr/>
+      <p:sp>
+        <p:nvSpPr>
+          <p:cNvPr id="2" name="TextBox 1"/>
+          <p:cNvSpPr txBox="1"/>
+          <p:nvPr/>
+        </p:nvSpPr>
+        <p:spPr>
+          <a:xfrm>
+            <a:off x="457200" y="228600"/>
+            <a:ext cx="11247120" cy="731520"/>
+          </a:xfrm>
+          <a:prstGeom prst="rect">
+            <a:avLst/>
+          </a:prstGeom>
+          <a:noFill/>
+        </p:spPr>
+        <p:txBody>
+          <a:bodyPr wrap="none">
+            <a:spAutoFit/>
+          </a:bodyPr>
+          <a:lstStyle/>
+          <a:p>
+            <a:pPr>
+              <a:defRPr sz="3000" b="1">
+                <a:solidFill>
+                  <a:srgbClr val="0D2C54"/>
+                </a:solidFill>
+              </a:defRPr>
+            </a:pPr>
+            <a:r>
+              <a:t>What we learned</a:t>
+            </a:r>
+          </a:p>
+        </p:txBody>
+      </p:sp>
+      <p:sp>
+        <p:nvSpPr>
+          <p:cNvPr id="3" name="TextBox 2"/>
+          <p:cNvSpPr txBox="1"/>
+          <p:nvPr/>
+        </p:nvSpPr>
+        <p:spPr>
+          <a:xfrm>
+            <a:off x="548640" y="1097280"/>
+            <a:ext cx="10972800" cy="5303520"/>
+          </a:xfrm>
+          <a:prstGeom prst="rect">
+            <a:avLst/>
+          </a:prstGeom>
+          <a:noFill/>
+        </p:spPr>
+        <p:txBody>
+          <a:bodyPr wrap="square">
+            <a:spAutoFit/>
+          </a:bodyPr>
+          <a:lstStyle/>
+          <a:p>
+            <a:pPr>
+              <a:spcAft>
+                <a:spcPts val="800"/>
+              </a:spcAft>
+              <a:defRPr sz="1800">
+                <a:solidFill>
+                  <a:srgbClr val="212121"/>
+                </a:solidFill>
+              </a:defRPr>
+            </a:pPr>
+            <a:r>
+              <a:t>1. The scheduler matters most exactly where the deadline binds — at loose slack almost anything works</a:t>
+            </a:r>
+          </a:p>
+          <a:p>
+            <a:pPr>
+              <a:spcAft>
+                <a:spcPts val="800"/>
+              </a:spcAft>
+              <a:defRPr sz="1800">
+                <a:solidFill>
+                  <a:srgbClr val="212121"/>
+                </a:solidFill>
+              </a:defRPr>
+            </a:pPr>
+            <a:r>
+              <a:t>2. Accuracy under a binding deadline costs wall time: greedy 0.15 s vs rounding ~372 s vs GA ~159 s at n=1000</a:t>
+            </a:r>
+          </a:p>
+          <a:p>
+            <a:pPr>
+              <a:spcAft>
+                <a:spcPts val="800"/>
+              </a:spcAft>
+              <a:defRPr sz="1800">
+                <a:solidFill>
+                  <a:srgbClr val="212121"/>
+                </a:solidFill>
+              </a:defRPr>
+            </a:pPr>
+            <a:r>
+              <a:t>3. Data-awareness buys feasibility, not score: the blind baseline's 'perfect' scores are late schedules</a:t>
+            </a:r>
+          </a:p>
+          <a:p>
+            <a:pPr>
+              <a:spcAft>
+                <a:spcPts val="800"/>
+              </a:spcAft>
+              <a:defRPr sz="1800">
+                <a:solidFill>
+                  <a:srgbClr val="212121"/>
+                </a:solidFill>
+              </a:defRPr>
+            </a:pPr>
+            <a:r>
+              <a:t>4. Fixed search budgets decay — GA quality erodes with both n and N; size-adaptive budgets would close the gap</a:t>
+            </a:r>
+          </a:p>
+          <a:p>
+            <a:pPr>
+              <a:spcAft>
+                <a:spcPts val="800"/>
+              </a:spcAft>
+              <a:defRPr sz="1800">
+                <a:solidFill>
+                  <a:srgbClr val="212121"/>
+                </a:solidFill>
+              </a:defRPr>
+            </a:pPr>
+          </a:p>
+          <a:p>
+            <a:pPr>
+              <a:spcAft>
+                <a:spcPts val="800"/>
+              </a:spcAft>
+              <a:defRPr sz="1800">
+                <a:solidFill>
+                  <a:srgbClr val="212121"/>
+                </a:solidFill>
+              </a:defRPr>
+            </a:pPr>
+            <a:r>
+              <a:t>Rule of thumb: MILP at moderate scale, greedy at large scale, rounding/GA only where their cost is affordable</a:t>
+            </a:r>
+          </a:p>
+        </p:txBody>
+      </p:sp>
+    </p:spTree>
+  </p:cSld>
+  <p:clrMapOvr>
+    <a:masterClrMapping/>
+  </p:clrMapOvr>
+</p:sld>
+</file>
+
+<file path=ppt/slides/slide19.xml><?xml version="1.0" encoding="utf-8"?>
+<p:sld xmlns:a="http://schemas.openxmlformats.org/drawingml/2006/main" xmlns:p="http://schemas.openxmlformats.org/presentationml/2006/main" xmlns:r="http://schemas.openxmlformats.org/officeDocument/2006/relationships">
+  <p:cSld>
+    <p:spTree>
+      <p:nvGrpSpPr>
+        <p:cNvPr id="1" name=""/>
+        <p:cNvGrpSpPr/>
+        <p:nvPr/>
+      </p:nvGrpSpPr>
+      <p:grpSpPr/>
+      <p:sp>
+        <p:nvSpPr>
+          <p:cNvPr id="2" name="TextBox 1"/>
+          <p:cNvSpPr txBox="1"/>
+          <p:nvPr/>
+        </p:nvSpPr>
+        <p:spPr>
+          <a:xfrm>
+            <a:off x="457200" y="228600"/>
+            <a:ext cx="11247120" cy="731520"/>
+          </a:xfrm>
+          <a:prstGeom prst="rect">
+            <a:avLst/>
+          </a:prstGeom>
+          <a:noFill/>
+        </p:spPr>
+        <p:txBody>
+          <a:bodyPr wrap="none">
+            <a:spAutoFit/>
+          </a:bodyPr>
+          <a:lstStyle/>
+          <a:p>
+            <a:pPr>
+              <a:defRPr sz="3000" b="1">
+                <a:solidFill>
+                  <a:srgbClr val="0D2C54"/>
+                </a:solidFill>
+              </a:defRPr>
+            </a:pPr>
+            <a:r>
+              <a:t>Honest limits</a:t>
+            </a:r>
+          </a:p>
+        </p:txBody>
+      </p:sp>
+      <p:sp>
+        <p:nvSpPr>
+          <p:cNvPr id="3" name="TextBox 2"/>
+          <p:cNvSpPr txBox="1"/>
+          <p:nvPr/>
+        </p:nvSpPr>
+        <p:spPr>
+          <a:xfrm>
+            <a:off x="548640" y="1097280"/>
+            <a:ext cx="10972800" cy="5303520"/>
+          </a:xfrm>
+          <a:prstGeom prst="rect">
+            <a:avLst/>
+          </a:prstGeom>
+          <a:noFill/>
+        </p:spPr>
+        <p:txBody>
+          <a:bodyPr wrap="square">
+            <a:spAutoFit/>
+          </a:bodyPr>
+          <a:lstStyle/>
+          <a:p>
+            <a:pPr>
+              <a:spcAft>
+                <a:spcPts val="800"/>
+              </a:spcAft>
+              <a:defRPr sz="1800">
+                <a:solidFill>
+                  <a:srgbClr val="212121"/>
+                </a:solidFill>
+              </a:defRPr>
+            </a:pPr>
+            <a:r>
+              <a:t>MILP capped at ~800 assignment variables — a deliberate boundary, not an oversight</a:t>
+            </a:r>
+          </a:p>
+          <a:p>
+            <a:pPr>
+              <a:spcAft>
+                <a:spcPts val="800"/>
+              </a:spcAft>
+              <a:defRPr sz="1800">
+                <a:solidFill>
+                  <a:srgbClr val="212121"/>
+                </a:solidFill>
+              </a:defRPr>
+            </a:pPr>
+            <a:r>
+              <a:t>LP relaxation: ~10^5 constraint rows at n=1000; rounding trials reduced as size grows (part of its score dip)</a:t>
+            </a:r>
+          </a:p>
+          <a:p>
+            <a:pPr>
+              <a:spcAft>
+                <a:spcPts val="800"/>
+              </a:spcAft>
+              <a:defRPr sz="1800">
+                <a:solidFill>
+                  <a:srgbClr val="212121"/>
+                </a:solidFill>
+              </a:defRPr>
+            </a:pPr>
+            <a:r>
+              <a:t>GA uses one fixed budget across all sizes — its gap is partly budget, partly search</a:t>
+            </a:r>
+          </a:p>
+          <a:p>
+            <a:pPr>
+              <a:spcAft>
+                <a:spcPts val="800"/>
+              </a:spcAft>
+              <a:defRPr sz="1800">
+                <a:solidFill>
+                  <a:srgbClr val="212121"/>
+                </a:solidFill>
+              </a:defRPr>
+            </a:pPr>
+            <a:r>
+              <a:t>Failure model is retry-once-in-place — no replication, checkpointing, or cross-node migration yet</a:t>
+            </a:r>
+          </a:p>
+          <a:p>
+            <a:pPr>
+              <a:spcAft>
+                <a:spcPts val="800"/>
+              </a:spcAft>
+              <a:defRPr sz="1800">
+                <a:solidFill>
+                  <a:srgbClr val="212121"/>
+                </a:solidFill>
+              </a:defRPr>
+            </a:pPr>
+            <a:r>
+              <a:t>Dense schedulable instances stop near 10^4 tasks; the 10^6 experiments are structural</a:t>
             </a:r>
           </a:p>
         </p:txBody>
@@ -3838,7 +6739,7 @@
               </a:defRPr>
             </a:pPr>
             <a:r>
-              <a:t>Motivation: disaster response without the cloud</a:t>
+              <a:t>The scenario</a:t>
             </a:r>
           </a:p>
         </p:txBody>
@@ -3852,7 +6753,7 @@
         <p:spPr>
           <a:xfrm>
             <a:off x="548640" y="1097280"/>
-            <a:ext cx="6400800" cy="5303520"/>
+            <a:ext cx="10972800" cy="5303520"/>
           </a:xfrm>
           <a:prstGeom prst="rect">
             <a:avLst/>
@@ -3876,7 +6777,7 @@
               </a:defRPr>
             </a:pPr>
             <a:r>
-              <a:t>Flood forecasting, wildfire tracking, evacuation planning run as workflows of dependent tasks</a:t>
+              <a:t>A disaster unfolds: flood, wildfire, offshore incident</a:t>
             </a:r>
           </a:p>
           <a:p>
@@ -3891,7 +6792,37 @@
               </a:defRPr>
             </a:pPr>
             <a:r>
-              <a:t>During an extreme event the cloud link often fails - the work must happen on fog computers near the disaster area</a:t>
+              <a:t>Response systems run workflows of dependent tasks</a:t>
+            </a:r>
+          </a:p>
+          <a:p>
+            <a:pPr lvl="1">
+              <a:spcAft>
+                <a:spcPts val="800"/>
+              </a:spcAft>
+              <a:defRPr sz="1600">
+                <a:solidFill>
+                  <a:srgbClr val="555555"/>
+                </a:solidFill>
+              </a:defRPr>
+            </a:pPr>
+            <a:r>
+              <a:t>  sense -&gt; model -&gt; predict -&gt; plan -&gt; alert</a:t>
+            </a:r>
+          </a:p>
+          <a:p>
+            <a:pPr lvl="1">
+              <a:spcAft>
+                <a:spcPts val="800"/>
+              </a:spcAft>
+              <a:defRPr sz="1600">
+                <a:solidFill>
+                  <a:srgbClr val="555555"/>
+                </a:solidFill>
+              </a:defRPr>
+            </a:pPr>
+            <a:r>
+              <a:t>  each stage hands data to the next</a:t>
             </a:r>
           </a:p>
           <a:p>
@@ -3906,7 +6837,7 @@
               </a:defRPr>
             </a:pPr>
             <a:r>
-              <a:t>One fog site rarely has enough capacity to finish in time</a:t>
+              <a:t>The deadline is hard: a forecast that arrives late is a forecast nobody uses</a:t>
             </a:r>
           </a:p>
           <a:p>
@@ -3921,7 +6852,7 @@
               </a:defRPr>
             </a:pPr>
             <a:r>
-              <a:t>Nearby sites keep fast, stable links to each other - a federation of fog sites acts as a small local cloud</a:t>
+              <a:t>Meanwhile the uplink to the cloud is degraded or gone</a:t>
             </a:r>
           </a:p>
           <a:p>
@@ -3936,45 +6867,39 @@
               </a:defRPr>
             </a:pPr>
             <a:r>
-              <a:t>The question: where should each task run, and how much of it should run, so the workflow finishes on time with the best possible accuracy?</a:t>
-            </a:r>
-          </a:p>
-        </p:txBody>
-      </p:sp>
-      <p:pic>
-        <p:nvPicPr>
-          <p:cNvPr id="4" name="Picture 3" descr="federated-fog-architecture.png"/>
-          <p:cNvPicPr>
-            <a:picLocks noChangeAspect="1"/>
-          </p:cNvPicPr>
+              <a:t>So the computation must run on fog computers near the disaster area</a:t>
+            </a:r>
+          </a:p>
+        </p:txBody>
+      </p:sp>
+    </p:spTree>
+  </p:cSld>
+  <p:clrMapOvr>
+    <a:masterClrMapping/>
+  </p:clrMapOvr>
+</p:sld>
+</file>
+
+<file path=ppt/slides/slide20.xml><?xml version="1.0" encoding="utf-8"?>
+<p:sld xmlns:a="http://schemas.openxmlformats.org/drawingml/2006/main" xmlns:p="http://schemas.openxmlformats.org/presentationml/2006/main" xmlns:r="http://schemas.openxmlformats.org/officeDocument/2006/relationships">
+  <p:cSld>
+    <p:spTree>
+      <p:nvGrpSpPr>
+        <p:cNvPr id="1" name=""/>
+        <p:cNvGrpSpPr/>
+        <p:nvPr/>
+      </p:nvGrpSpPr>
+      <p:grpSpPr/>
+      <p:sp>
+        <p:nvSpPr>
+          <p:cNvPr id="2" name="TextBox 1"/>
+          <p:cNvSpPr txBox="1"/>
           <p:nvPr/>
-        </p:nvPicPr>
-        <p:blipFill>
-          <a:blip r:embed="rId2"/>
-          <a:stretch>
-            <a:fillRect/>
-          </a:stretch>
-        </p:blipFill>
+        </p:nvSpPr>
         <p:spPr>
           <a:xfrm>
-            <a:off x="7040880" y="1188720"/>
-            <a:ext cx="4754880" cy="3270552"/>
-          </a:xfrm>
-          <a:prstGeom prst="rect">
-            <a:avLst/>
-          </a:prstGeom>
-        </p:spPr>
-      </p:pic>
-      <p:sp>
-        <p:nvSpPr>
-          <p:cNvPr id="5" name="TextBox 4"/>
-          <p:cNvSpPr txBox="1"/>
-          <p:nvPr/>
-        </p:nvSpPr>
-        <p:spPr>
-          <a:xfrm>
-            <a:off x="7040880" y="5760720"/>
-            <a:ext cx="4754880" cy="548640"/>
+            <a:off x="457200" y="228600"/>
+            <a:ext cx="11247120" cy="731520"/>
           </a:xfrm>
           <a:prstGeom prst="rect">
             <a:avLst/>
@@ -3987,15 +6912,213 @@
           </a:bodyPr>
           <a:lstStyle/>
           <a:p>
+            <a:pPr>
+              <a:defRPr sz="3000" b="1">
+                <a:solidFill>
+                  <a:srgbClr val="0D2C54"/>
+                </a:solidFill>
+              </a:defRPr>
+            </a:pPr>
+            <a:r>
+              <a:t>Conclusion</a:t>
+            </a:r>
+          </a:p>
+        </p:txBody>
+      </p:sp>
+      <p:sp>
+        <p:nvSpPr>
+          <p:cNvPr id="3" name="TextBox 2"/>
+          <p:cNvSpPr txBox="1"/>
+          <p:nvPr/>
+        </p:nvSpPr>
+        <p:spPr>
+          <a:xfrm>
+            <a:off x="548640" y="1097280"/>
+            <a:ext cx="10972800" cy="5303520"/>
+          </a:xfrm>
+          <a:prstGeom prst="rect">
+            <a:avLst/>
+          </a:prstGeom>
+          <a:noFill/>
+        </p:spPr>
+        <p:txBody>
+          <a:bodyPr wrap="square">
+            <a:spAutoFit/>
+          </a:bodyPr>
+          <a:lstStyle/>
+          <a:p>
+            <a:pPr>
+              <a:spcAft>
+                <a:spcPts val="800"/>
+              </a:spcAft>
+              <a:defRPr sz="1800">
+                <a:solidFill>
+                  <a:srgbClr val="212121"/>
+                </a:solidFill>
+              </a:defRPr>
+            </a:pPr>
+            <a:r>
+              <a:t>One joint formulation: task placement + execution fraction + inter-node data movement, under a hard deadline</a:t>
+            </a:r>
+          </a:p>
+          <a:p>
+            <a:pPr>
+              <a:spcAft>
+                <a:spcPts val="800"/>
+              </a:spcAft>
+              <a:defRPr sz="1800">
+                <a:solidFill>
+                  <a:srgbClr val="212121"/>
+                </a:solidFill>
+              </a:defRPr>
+            </a:pPr>
+            <a:r>
+              <a:t>Four schedulers sharing one cost model; five parameter sweeps; a verifiable benchmark at every scale</a:t>
+            </a:r>
+          </a:p>
+          <a:p>
+            <a:pPr>
+              <a:spcAft>
+                <a:spcPts val="800"/>
+              </a:spcAft>
+              <a:defRPr sz="1800">
+                <a:solidFill>
+                  <a:srgbClr val="212121"/>
+                </a:solidFill>
+              </a:defRPr>
+            </a:pPr>
+            <a:r>
+              <a:t>MILP leads under pressure at moderate scale; the data-aware greedy is fast and bound-level at large scale</a:t>
+            </a:r>
+          </a:p>
+          <a:p>
+            <a:pPr>
+              <a:spcAft>
+                <a:spcPts val="800"/>
+              </a:spcAft>
+              <a:defRPr sz="1800">
+                <a:solidFill>
+                  <a:srgbClr val="212121"/>
+                </a:solidFill>
+              </a:defRPr>
+            </a:pPr>
+            <a:r>
+              <a:t>Next: sparse/decomposed models toward 10^6 tasks, adaptive GA budgets, replication/checkpointing, online re-scheduling on a real testbed</a:t>
+            </a:r>
+          </a:p>
+          <a:p>
+            <a:pPr>
+              <a:spcAft>
+                <a:spcPts val="800"/>
+              </a:spcAft>
+              <a:defRPr sz="1800">
+                <a:solidFill>
+                  <a:srgbClr val="212121"/>
+                </a:solidFill>
+              </a:defRPr>
+            </a:pPr>
+          </a:p>
+          <a:p>
+            <a:pPr>
+              <a:spcAft>
+                <a:spcPts val="800"/>
+              </a:spcAft>
+              <a:defRPr sz="1800">
+                <a:solidFill>
+                  <a:srgbClr val="212121"/>
+                </a:solidFill>
+              </a:defRPr>
+            </a:pPr>
+            <a:r>
+              <a:t>Reproduce it: github.com/gayanigupta/data-aware-scheduling — code, CSVs, executed notebook, this deck</a:t>
+            </a:r>
+          </a:p>
+        </p:txBody>
+      </p:sp>
+    </p:spTree>
+  </p:cSld>
+  <p:clrMapOvr>
+    <a:masterClrMapping/>
+  </p:clrMapOvr>
+</p:sld>
+</file>
+
+<file path=ppt/slides/slide21.xml><?xml version="1.0" encoding="utf-8"?>
+<p:sld xmlns:a="http://schemas.openxmlformats.org/drawingml/2006/main" xmlns:p="http://schemas.openxmlformats.org/presentationml/2006/main" xmlns:r="http://schemas.openxmlformats.org/officeDocument/2006/relationships">
+  <p:cSld>
+    <p:spTree>
+      <p:nvGrpSpPr>
+        <p:cNvPr id="1" name=""/>
+        <p:cNvGrpSpPr/>
+        <p:nvPr/>
+      </p:nvGrpSpPr>
+      <p:grpSpPr/>
+      <p:sp>
+        <p:nvSpPr>
+          <p:cNvPr id="2" name="TextBox 1"/>
+          <p:cNvSpPr txBox="1"/>
+          <p:nvPr/>
+        </p:nvSpPr>
+        <p:spPr>
+          <a:xfrm>
+            <a:off x="914400" y="2377440"/>
+            <a:ext cx="10332720" cy="1371600"/>
+          </a:xfrm>
+          <a:prstGeom prst="rect">
+            <a:avLst/>
+          </a:prstGeom>
+          <a:noFill/>
+        </p:spPr>
+        <p:txBody>
+          <a:bodyPr wrap="none">
+            <a:spAutoFit/>
+          </a:bodyPr>
+          <a:lstStyle/>
+          <a:p>
             <a:pPr algn="ctr">
-              <a:defRPr sz="1200" i="1">
+              <a:defRPr sz="4400" b="1">
+                <a:solidFill>
+                  <a:srgbClr val="0D2C54"/>
+                </a:solidFill>
+              </a:defRPr>
+            </a:pPr>
+            <a:r>
+              <a:t>Thank you</a:t>
+            </a:r>
+          </a:p>
+        </p:txBody>
+      </p:sp>
+      <p:sp>
+        <p:nvSpPr>
+          <p:cNvPr id="3" name="TextBox 2"/>
+          <p:cNvSpPr txBox="1"/>
+          <p:nvPr/>
+        </p:nvSpPr>
+        <p:spPr>
+          <a:xfrm>
+            <a:off x="914400" y="3931920"/>
+            <a:ext cx="10332720" cy="731520"/>
+          </a:xfrm>
+          <a:prstGeom prst="rect">
+            <a:avLst/>
+          </a:prstGeom>
+          <a:noFill/>
+        </p:spPr>
+        <p:txBody>
+          <a:bodyPr wrap="none">
+            <a:spAutoFit/>
+          </a:bodyPr>
+          <a:lstStyle/>
+          <a:p>
+            <a:pPr algn="ctr">
+              <a:defRPr sz="1800">
                 <a:solidFill>
                   <a:srgbClr val="555555"/>
                 </a:solidFill>
               </a:defRPr>
             </a:pPr>
             <a:r>
-              <a:t>Federated fog deployment for disaster response</a:t>
+              <a:t>github.com/gayanigupta/data-aware-scheduling</a:t>
             </a:r>
           </a:p>
         </p:txBody>
@@ -4048,7 +7171,7 @@
               </a:defRPr>
             </a:pPr>
             <a:r>
-              <a:t>What makes the scheduling hard</a:t>
+              <a:t>One fog site is not enough — so sites federate</a:t>
             </a:r>
           </a:p>
         </p:txBody>
@@ -4062,7 +7185,7 @@
         <p:spPr>
           <a:xfrm>
             <a:off x="548640" y="1097280"/>
-            <a:ext cx="6400800" cy="5303520"/>
+            <a:ext cx="6309360" cy="5303520"/>
           </a:xfrm>
           <a:prstGeom prst="rect">
             <a:avLst/>
@@ -4086,7 +7209,52 @@
               </a:defRPr>
             </a:pPr>
             <a:r>
-              <a:t>Lever 1 - data movement: a task's input can take as long to arrive as the task takes to run</a:t>
+              <a:t>Fog sites near the event: cell-tower racks, roadside cabinets, platform servers</a:t>
+            </a:r>
+          </a:p>
+          <a:p>
+            <a:pPr>
+              <a:spcAft>
+                <a:spcPts val="800"/>
+              </a:spcAft>
+              <a:defRPr sz="1800">
+                <a:solidFill>
+                  <a:srgbClr val="212121"/>
+                </a:solidFill>
+              </a:defRPr>
+            </a:pPr>
+            <a:r>
+              <a:t>Individually too weak; but they keep fast, stable links to each other even when the cloud link fails</a:t>
+            </a:r>
+          </a:p>
+          <a:p>
+            <a:pPr>
+              <a:spcAft>
+                <a:spcPts val="800"/>
+              </a:spcAft>
+              <a:defRPr sz="1800">
+                <a:solidFill>
+                  <a:srgbClr val="212121"/>
+                </a:solidFill>
+              </a:defRPr>
+            </a:pPr>
+            <a:r>
+              <a:t>Federation = a small local cloud built from nearby sites</a:t>
+            </a:r>
+          </a:p>
+          <a:p>
+            <a:pPr>
+              <a:spcAft>
+                <a:spcPts val="800"/>
+              </a:spcAft>
+              <a:defRPr sz="1800">
+                <a:solidFill>
+                  <a:srgbClr val="212121"/>
+                </a:solidFill>
+              </a:defRPr>
+            </a:pPr>
+            <a:r>
+              <a:t>The catch: every task can now run in many places —</a:t>
             </a:r>
           </a:p>
           <a:p>
@@ -4101,104 +7269,29 @@
               </a:defRPr>
             </a:pPr>
             <a:r>
-              <a:t>  edge (Tj, Ti) carries D_ji bytes over link bandwidth B_ba</a:t>
-            </a:r>
-          </a:p>
-          <a:p>
-            <a:pPr lvl="1">
-              <a:spcAft>
-                <a:spcPts val="800"/>
-              </a:spcAft>
-              <a:defRPr sz="1600">
-                <a:solidFill>
-                  <a:srgbClr val="555555"/>
-                </a:solidFill>
-              </a:defRPr>
-            </a:pPr>
-            <a:r>
-              <a:t>  a 'fast' remote node can lose more time to transfer than it saves in execution</a:t>
-            </a:r>
-          </a:p>
-          <a:p>
-            <a:pPr>
-              <a:spcAft>
-                <a:spcPts val="800"/>
-              </a:spcAft>
-              <a:defRPr sz="1800">
-                <a:solidFill>
-                  <a:srgbClr val="212121"/>
-                </a:solidFill>
-              </a:defRPr>
-            </a:pPr>
-            <a:r>
-              <a:t>Lever 2 - approximate execution: tasks can run partially</a:t>
-            </a:r>
-          </a:p>
-          <a:p>
-            <a:pPr lvl="1">
-              <a:spcAft>
-                <a:spcPts val="800"/>
-              </a:spcAft>
-              <a:defRPr sz="1600">
-                <a:solidFill>
-                  <a:srgbClr val="555555"/>
-                </a:solidFill>
-              </a:defRPr>
-            </a:pPr>
-            <a:r>
-              <a:t>  fraction l of a task costs l of its time and returns l of its accuracy</a:t>
-            </a:r>
-          </a:p>
-          <a:p>
-            <a:pPr lvl="1">
-              <a:spcAft>
-                <a:spcPts val="800"/>
-              </a:spcAft>
-              <a:defRPr sz="1600">
-                <a:solidFill>
-                  <a:srgbClr val="555555"/>
-                </a:solidFill>
-              </a:defRPr>
-            </a:pPr>
-            <a:r>
-              <a:t>  at a tight deadline, 80% accuracy beats a missed alert</a:t>
-            </a:r>
-          </a:p>
-          <a:p>
-            <a:pPr>
-              <a:spcAft>
-                <a:spcPts val="800"/>
-              </a:spcAft>
-              <a:defRPr sz="1800">
-                <a:solidFill>
-                  <a:srgbClr val="212121"/>
-                </a:solidFill>
-              </a:defRPr>
-            </a:pPr>
-            <a:r>
-              <a:t>Existing schedulers are compute-centric: they ignore one or both levers</a:t>
+              <a:t>  and wherever it runs, its input data has to get there first</a:t>
             </a:r>
           </a:p>
         </p:txBody>
       </p:sp>
       <p:pic>
         <p:nvPicPr>
-          <p:cNvPr id="4" name="Picture 3" descr="disaster-response-dag.png"/>
+          <p:cNvPr id="4" name="Picture 3" descr="federated-fog-architecture.png"/>
           <p:cNvPicPr>
             <a:picLocks noChangeAspect="1"/>
           </p:cNvPicPr>
           <p:nvPr/>
         </p:nvPicPr>
         <p:blipFill>
-          <a:blip r:embed="rId2"/>
+          <a:blip r:embed="rId3"/>
           <a:stretch>
             <a:fillRect/>
           </a:stretch>
         </p:blipFill>
         <p:spPr>
           <a:xfrm>
-            <a:off x="7315200" y="1280160"/>
-            <a:ext cx="4480560" cy="3218180"/>
+            <a:off x="7040880" y="1188720"/>
+            <a:ext cx="4754880" cy="3270552"/>
           </a:xfrm>
           <a:prstGeom prst="rect">
             <a:avLst/>
@@ -4213,8 +7306,8 @@
         </p:nvSpPr>
         <p:spPr>
           <a:xfrm>
-            <a:off x="7315200" y="5669280"/>
-            <a:ext cx="4480560" cy="548640"/>
+            <a:off x="7040880" y="5760720"/>
+            <a:ext cx="4754880" cy="548640"/>
           </a:xfrm>
           <a:prstGeom prst="rect">
             <a:avLst/>
@@ -4235,7 +7328,7 @@
               </a:defRPr>
             </a:pPr>
             <a:r>
-              <a:t>Example disaster-response workflow (DAG)</a:t>
+              <a:t>Federated fog deployment around a disaster area</a:t>
             </a:r>
           </a:p>
         </p:txBody>
@@ -4288,7 +7381,7 @@
               </a:defRPr>
             </a:pPr>
             <a:r>
-              <a:t>The model as an MILP</a:t>
+              <a:t>The workflow is a DAG — and data is the glue</a:t>
             </a:r>
           </a:p>
         </p:txBody>
@@ -4302,7 +7395,7 @@
         <p:spPr>
           <a:xfrm>
             <a:off x="548640" y="1097280"/>
-            <a:ext cx="10972800" cy="5303520"/>
+            <a:ext cx="6035040" cy="5303520"/>
           </a:xfrm>
           <a:prstGeom prst="rect">
             <a:avLst/>
@@ -4326,7 +7419,7 @@
               </a:defRPr>
             </a:pPr>
             <a:r>
-              <a:t>Decisions: assignment e_ia (binary), execution fraction l_ia, implied start times M_ia</a:t>
+              <a:t>Tasks = nodes, dependencies = edges (a DAG)</a:t>
             </a:r>
           </a:p>
           <a:p>
@@ -4341,7 +7434,22 @@
               </a:defRPr>
             </a:pPr>
             <a:r>
-              <a:t>Objective: maximize average accuracy (1/n) sum_i A_i sum_a l_ia</a:t>
+              <a:t>Every edge carries data, D_ji, across a link of bandwidth B</a:t>
+            </a:r>
+          </a:p>
+          <a:p>
+            <a:pPr lvl="1">
+              <a:spcAft>
+                <a:spcPts val="800"/>
+              </a:spcAft>
+              <a:defRPr sz="1600">
+                <a:solidFill>
+                  <a:srgbClr val="555555"/>
+                </a:solidFill>
+              </a:defRPr>
+            </a:pPr>
+            <a:r>
+              <a:t>  transfer time = D_ji / B  —  comparable to task runtime</a:t>
             </a:r>
           </a:p>
           <a:p>
@@ -4356,52 +7464,81 @@
               </a:defRPr>
             </a:pPr>
             <a:r>
-              <a:t>Constraints: each task on exactly one eligible node; a task starts only after every predecessor finishes AND its data arrives over the link</a:t>
-            </a:r>
-          </a:p>
-          <a:p>
-            <a:pPr>
-              <a:spcAft>
-                <a:spcPts val="800"/>
-              </a:spcAft>
-              <a:defRPr sz="1800">
-                <a:solidFill>
-                  <a:srgbClr val="212121"/>
-                </a:solidFill>
-              </a:defRPr>
-            </a:pPr>
-            <a:r>
-              <a:t>Completion y_i = sum_a e_ia (M_ia + t_ia l_ia) &lt;= deadline t_max for every task</a:t>
-            </a:r>
-          </a:p>
-          <a:p>
-            <a:pPr>
-              <a:spcAft>
-                <a:spcPts val="800"/>
-              </a:spcAft>
-              <a:defRPr sz="1800">
-                <a:solidFill>
-                  <a:srgbClr val="212121"/>
-                </a:solidFill>
-              </a:defRPr>
-            </a:pPr>
-            <a:r>
-              <a:t>Jointly treats per-edge data size, per-link bandwidth, and per-task execution fraction - not previously combined in this setting</a:t>
-            </a:r>
-          </a:p>
-          <a:p>
-            <a:pPr>
-              <a:spcAft>
-                <a:spcPts val="800"/>
-              </a:spcAft>
-              <a:defRPr sz="1800">
-                <a:solidFill>
-                  <a:srgbClr val="212121"/>
-                </a:solidFill>
-              </a:defRPr>
-            </a:pPr>
-            <a:r>
-              <a:t>NP-hard already on unrelated parallel machines - so the MILP is the benchmark, and we add three scalable schedulers</a:t>
+              <a:t>Tasks are approximate: running a fraction l costs l of the time and returns l of the accuracy</a:t>
+            </a:r>
+          </a:p>
+          <a:p>
+            <a:pPr lvl="1">
+              <a:spcAft>
+                <a:spcPts val="800"/>
+              </a:spcAft>
+              <a:defRPr sz="1600">
+                <a:solidFill>
+                  <a:srgbClr val="555555"/>
+                </a:solidFill>
+              </a:defRPr>
+            </a:pPr>
+            <a:r>
+              <a:t>  a flood model at 80% fidelity still warns in time</a:t>
+            </a:r>
+          </a:p>
+        </p:txBody>
+      </p:sp>
+      <p:pic>
+        <p:nvPicPr>
+          <p:cNvPr id="4" name="Picture 3" descr="disaster-response-dag.png"/>
+          <p:cNvPicPr>
+            <a:picLocks noChangeAspect="1"/>
+          </p:cNvPicPr>
+          <p:nvPr/>
+        </p:nvPicPr>
+        <p:blipFill>
+          <a:blip r:embed="rId3"/>
+          <a:stretch>
+            <a:fillRect/>
+          </a:stretch>
+        </p:blipFill>
+        <p:spPr>
+          <a:xfrm>
+            <a:off x="6766560" y="1097280"/>
+            <a:ext cx="5029200" cy="3612243"/>
+          </a:xfrm>
+          <a:prstGeom prst="rect">
+            <a:avLst/>
+          </a:prstGeom>
+        </p:spPr>
+      </p:pic>
+      <p:sp>
+        <p:nvSpPr>
+          <p:cNvPr id="5" name="TextBox 4"/>
+          <p:cNvSpPr txBox="1"/>
+          <p:nvPr/>
+        </p:nvSpPr>
+        <p:spPr>
+          <a:xfrm>
+            <a:off x="6766560" y="5852160"/>
+            <a:ext cx="5029200" cy="548640"/>
+          </a:xfrm>
+          <a:prstGeom prst="rect">
+            <a:avLst/>
+          </a:prstGeom>
+          <a:noFill/>
+        </p:spPr>
+        <p:txBody>
+          <a:bodyPr wrap="none">
+            <a:spAutoFit/>
+          </a:bodyPr>
+          <a:lstStyle/>
+          <a:p>
+            <a:pPr algn="ctr">
+              <a:defRPr sz="1200" i="1">
+                <a:solidFill>
+                  <a:srgbClr val="555555"/>
+                </a:solidFill>
+              </a:defRPr>
+            </a:pPr>
+            <a:r>
+              <a:t>Example disaster-response DAG used in the study</a:t>
             </a:r>
           </a:p>
         </p:txBody>
@@ -4454,7 +7591,7 @@
               </a:defRPr>
             </a:pPr>
             <a:r>
-              <a:t>Three scalable schedulers on the same cost model</a:t>
+              <a:t>The problem, in one sentence</a:t>
             </a:r>
           </a:p>
         </p:txBody>
@@ -4492,7 +7629,64 @@
               </a:defRPr>
             </a:pPr>
             <a:r>
-              <a:t>LP relaxation + randomized rounding</a:t>
+              <a:t>Assign every task to a fog node AND choose how much of it to run,</a:t>
+            </a:r>
+          </a:p>
+          <a:p>
+            <a:pPr>
+              <a:spcAft>
+                <a:spcPts val="800"/>
+              </a:spcAft>
+              <a:defRPr sz="1800">
+                <a:solidFill>
+                  <a:srgbClr val="212121"/>
+                </a:solidFill>
+              </a:defRPr>
+            </a:pPr>
+            <a:r>
+              <a:t>so that the DAG finishes before the deadline</a:t>
+            </a:r>
+          </a:p>
+          <a:p>
+            <a:pPr>
+              <a:spcAft>
+                <a:spcPts val="800"/>
+              </a:spcAft>
+              <a:defRPr sz="1800">
+                <a:solidFill>
+                  <a:srgbClr val="212121"/>
+                </a:solidFill>
+              </a:defRPr>
+            </a:pPr>
+            <a:r>
+              <a:t>with the highest possible average accuracy.</a:t>
+            </a:r>
+          </a:p>
+          <a:p>
+            <a:pPr>
+              <a:spcAft>
+                <a:spcPts val="800"/>
+              </a:spcAft>
+              <a:defRPr sz="1800">
+                <a:solidFill>
+                  <a:srgbClr val="212121"/>
+                </a:solidFill>
+              </a:defRPr>
+            </a:pPr>
+          </a:p>
+          <a:p>
+            <a:pPr>
+              <a:spcAft>
+                <a:spcPts val="800"/>
+              </a:spcAft>
+              <a:defRPr sz="1800">
+                <a:solidFill>
+                  <a:srgbClr val="212121"/>
+                </a:solidFill>
+              </a:defRPr>
+            </a:pPr>
+            <a:r>
+              <a:t>Why it is hard:</a:t>
             </a:r>
           </a:p>
           <a:p>
@@ -4507,22 +7701,7 @@
               </a:defRPr>
             </a:pPr>
             <a:r>
-              <a:t>  relax e_ia to [0,1], sample each task's node from the LP solution, re-solve the LP for fractions</a:t>
-            </a:r>
-          </a:p>
-          <a:p>
-            <a:pPr>
-              <a:spcAft>
-                <a:spcPts val="800"/>
-              </a:spcAft>
-              <a:defRPr sz="1800">
-                <a:solidFill>
-                  <a:srgbClr val="212121"/>
-                </a:solidFill>
-              </a:defRPr>
-            </a:pPr>
-            <a:r>
-              <a:t>Bandwidth/data-aware greedy</a:t>
+              <a:t>  data transfer time rivals execution time — the 'fastest' node can be the worst once you pay to move the input</a:t>
             </a:r>
           </a:p>
           <a:p>
@@ -4537,22 +7716,7 @@
               </a:defRPr>
             </a:pPr>
             <a:r>
-              <a:t>  priority = beta*A_i + (1-beta)*critical-path; earliest-finish node among ready tasks; retry with lower global fraction if the deadline is missed</a:t>
-            </a:r>
-          </a:p>
-          <a:p>
-            <a:pPr>
-              <a:spcAft>
-                <a:spcPts val="800"/>
-              </a:spcAft>
-              <a:defRPr sz="1800">
-                <a:solidFill>
-                  <a:srgbClr val="212121"/>
-                </a:solidFill>
-              </a:defRPr>
-            </a:pPr>
-            <a:r>
-              <a:t>Genetic algorithm</a:t>
+              <a:t>  accuracy is a tradeable resource — tight deadline? run partially, arrive on time</a:t>
             </a:r>
           </a:p>
           <a:p>
@@ -4567,22 +7731,7 @@
               </a:defRPr>
             </a:pPr>
             <a:r>
-              <a:t>  chromosome = assignment vector + per-task fractions; fitness rewards accuracy and penalizes deadline violations; co-location repair for heavy edges</a:t>
-            </a:r>
-          </a:p>
-          <a:p>
-            <a:pPr>
-              <a:spcAft>
-                <a:spcPts val="800"/>
-              </a:spcAft>
-              <a:defRPr sz="1800">
-                <a:solidFill>
-                  <a:srgbClr val="212121"/>
-                </a:solidFill>
-              </a:defRPr>
-            </a:pPr>
-            <a:r>
-              <a:t>All three evaluate the same communication cost, so all are bandwidth-aware</a:t>
+              <a:t>  the two choices interact: placement decides transfers, fractions decide runtimes</a:t>
             </a:r>
           </a:p>
         </p:txBody>
@@ -4635,7 +7784,7 @@
               </a:defRPr>
             </a:pPr>
             <a:r>
-              <a:t>Experimental setup</a:t>
+              <a:t>Why existing schedulers do not fit</a:t>
             </a:r>
           </a:p>
         </p:txBody>
@@ -4649,7 +7798,7 @@
         <p:spPr>
           <a:xfrm>
             <a:off x="548640" y="1097280"/>
-            <a:ext cx="6217920" cy="5303520"/>
+            <a:ext cx="10972800" cy="5303520"/>
           </a:xfrm>
           <a:prstGeom prst="rect">
             <a:avLst/>
@@ -4673,7 +7822,37 @@
               </a:defRPr>
             </a:pPr>
             <a:r>
-              <a:t>Discrete-event simulator (NumPy/SciPy HiGHS); synthetic disaster-response DAGs</a:t>
+              <a:t>HEFT (Heterogeneous Earliest Finish Time): the classic DAG scheduler</a:t>
+            </a:r>
+          </a:p>
+          <a:p>
+            <a:pPr lvl="1">
+              <a:spcAft>
+                <a:spcPts val="800"/>
+              </a:spcAft>
+              <a:defRPr sz="1600">
+                <a:solidFill>
+                  <a:srgbClr val="555555"/>
+                </a:solidFill>
+              </a:defRPr>
+            </a:pPr>
+            <a:r>
+              <a:t>  ranks tasks, places each where it finishes earliest</a:t>
+            </a:r>
+          </a:p>
+          <a:p>
+            <a:pPr lvl="1">
+              <a:spcAft>
+                <a:spcPts val="800"/>
+              </a:spcAft>
+              <a:defRPr sz="1600">
+                <a:solidFill>
+                  <a:srgbClr val="555555"/>
+                </a:solidFill>
+              </a:defRPr>
+            </a:pPr>
+            <a:r>
+              <a:t>  but: full execution only; transfers are static edge weights</a:t>
             </a:r>
           </a:p>
           <a:p>
@@ -4688,7 +7867,7 @@
               </a:defRPr>
             </a:pPr>
             <a:r>
-              <a:t>Parameters chosen so transfers are contested: t in [1,5], D in [5,50], B in [10,100]</a:t>
+              <a:t>Fog schedulers handle capacity and placement — but assume tasks always run completely</a:t>
             </a:r>
           </a:p>
           <a:p>
@@ -4703,7 +7882,7 @@
               </a:defRPr>
             </a:pPr>
             <a:r>
-              <a:t>Four datasets: 10/3, 100/5, 500/8, 1000/10 tasks-nodes; structural DAGs up to 10^6 tasks in the notebook</a:t>
+              <a:t>Approximate-computing work trades quality for time — but ignores inter-node data movement</a:t>
             </a:r>
           </a:p>
           <a:p>
@@ -4718,96 +7897,7 @@
               </a:defRPr>
             </a:pPr>
             <a:r>
-              <a:t>Five sweeps: deadline slack, federation size, workflow size, failure rate (retry-once), link-bandwidth degradation</a:t>
-            </a:r>
-          </a:p>
-          <a:p>
-            <a:pPr>
-              <a:spcAft>
-                <a:spcPts val="800"/>
-              </a:spcAft>
-              <a:defRPr sz="1800">
-                <a:solidFill>
-                  <a:srgbClr val="212121"/>
-                </a:solidFill>
-              </a:defRPr>
-            </a:pPr>
-            <a:r>
-              <a:t>Baselines: fixed scheduling and the max-accuracy bound (dashed line in every plot); a bandwidth-blind greedy for the link sweep</a:t>
-            </a:r>
-          </a:p>
-          <a:p>
-            <a:pPr>
-              <a:spcAft>
-                <a:spcPts val="800"/>
-              </a:spcAft>
-              <a:defRPr sz="1800">
-                <a:solidFill>
-                  <a:srgbClr val="212121"/>
-                </a:solidFill>
-              </a:defRPr>
-            </a:pPr>
-            <a:r>
-              <a:t>Metric: average achieved accuracy vs the bound; plus makespan, feasibility, wall time</a:t>
-            </a:r>
-          </a:p>
-        </p:txBody>
-      </p:sp>
-      <p:pic>
-        <p:nvPicPr>
-          <p:cNvPr id="4" name="Picture 3" descr="dataset_medium_graphs.png"/>
-          <p:cNvPicPr>
-            <a:picLocks noChangeAspect="1"/>
-          </p:cNvPicPr>
-          <p:nvPr/>
-        </p:nvPicPr>
-        <p:blipFill>
-          <a:blip r:embed="rId2"/>
-          <a:stretch>
-            <a:fillRect/>
-          </a:stretch>
-        </p:blipFill>
-        <p:spPr>
-          <a:xfrm>
-            <a:off x="6949440" y="1188720"/>
-            <a:ext cx="4937760" cy="2114396"/>
-          </a:xfrm>
-          <a:prstGeom prst="rect">
-            <a:avLst/>
-          </a:prstGeom>
-        </p:spPr>
-      </p:pic>
-      <p:sp>
-        <p:nvSpPr>
-          <p:cNvPr id="5" name="TextBox 4"/>
-          <p:cNvSpPr txBox="1"/>
-          <p:nvPr/>
-        </p:nvSpPr>
-        <p:spPr>
-          <a:xfrm>
-            <a:off x="6949440" y="5943600"/>
-            <a:ext cx="4937760" cy="548640"/>
-          </a:xfrm>
-          <a:prstGeom prst="rect">
-            <a:avLst/>
-          </a:prstGeom>
-          <a:noFill/>
-        </p:spPr>
-        <p:txBody>
-          <a:bodyPr wrap="none">
-            <a:spAutoFit/>
-          </a:bodyPr>
-          <a:lstStyle/>
-          <a:p>
-            <a:pPr algn="ctr">
-              <a:defRPr sz="1200" i="1">
-                <a:solidFill>
-                  <a:srgbClr val="555555"/>
-                </a:solidFill>
-              </a:defRPr>
-            </a:pPr>
-            <a:r>
-              <a:t>A generated test dataset (medium, 100 tasks / 5 nodes)</a:t>
+              <a:t>Our gap: jointly optimize placement + data movement + execution fraction under one deadline</a:t>
             </a:r>
           </a:p>
         </p:txBody>
@@ -4860,45 +7950,21 @@
               </a:defRPr>
             </a:pPr>
             <a:r>
-              <a:t>Deadline slack: the choice matters when it barely fits</a:t>
-            </a:r>
-          </a:p>
-        </p:txBody>
-      </p:sp>
-      <p:pic>
-        <p:nvPicPr>
-          <p:cNvPr id="3" name="Picture 2" descr="perf_slack_accuracy.png"/>
-          <p:cNvPicPr>
-            <a:picLocks noChangeAspect="1"/>
-          </p:cNvPicPr>
+              <a:t>The formulation: one MILP</a:t>
+            </a:r>
+          </a:p>
+        </p:txBody>
+      </p:sp>
+      <p:sp>
+        <p:nvSpPr>
+          <p:cNvPr id="3" name="TextBox 2"/>
+          <p:cNvSpPr txBox="1"/>
           <p:nvPr/>
-        </p:nvPicPr>
-        <p:blipFill>
-          <a:blip r:embed="rId2"/>
-          <a:stretch>
-            <a:fillRect/>
-          </a:stretch>
-        </p:blipFill>
+        </p:nvSpPr>
         <p:spPr>
           <a:xfrm>
-            <a:off x="731520" y="1005840"/>
-            <a:ext cx="6035040" cy="4441884"/>
-          </a:xfrm>
-          <a:prstGeom prst="rect">
-            <a:avLst/>
-          </a:prstGeom>
-        </p:spPr>
-      </p:pic>
-      <p:sp>
-        <p:nvSpPr>
-          <p:cNvPr id="4" name="TextBox 3"/>
-          <p:cNvSpPr txBox="1"/>
-          <p:nvPr/>
-        </p:nvSpPr>
-        <p:spPr>
-          <a:xfrm>
-            <a:off x="7040880" y="1097280"/>
-            <a:ext cx="4572000" cy="5303520"/>
+            <a:off x="548640" y="1097280"/>
+            <a:ext cx="10972800" cy="5303520"/>
           </a:xfrm>
           <a:prstGeom prst="rect">
             <a:avLst/>
@@ -4922,7 +7988,7 @@
               </a:defRPr>
             </a:pPr>
             <a:r>
-              <a:t>At alpha = 1.0: MILP 1.38 vs bound 1.43; rounding 1.25, greedy 1.23, GA 1.20</a:t>
+              <a:t>Decisions: e_ia in {0,1} (task i on node a), l_ia in [0,1] (fraction), M_ia (start time)</a:t>
             </a:r>
           </a:p>
           <a:p>
@@ -4937,7 +8003,7 @@
               </a:defRPr>
             </a:pPr>
             <a:r>
-              <a:t>From alpha = 1.2 the greedy reaches the bound; the MILP follows at 1.5</a:t>
+              <a:t>Objective: max (1/n) sum_i A_i sum_a l_ia — average accuracy</a:t>
             </a:r>
           </a:p>
           <a:p>
@@ -4952,7 +8018,52 @@
               </a:defRPr>
             </a:pPr>
             <a:r>
-              <a:t>Rounding and the GA never fully close the gap even at loose slack - a fixed sampling budget does not recover the bound</a:t>
+              <a:t>One eligible node per task:  sum_a e_ia = 1</a:t>
+            </a:r>
+          </a:p>
+          <a:p>
+            <a:pPr>
+              <a:spcAft>
+                <a:spcPts val="800"/>
+              </a:spcAft>
+              <a:defRPr sz="1800">
+                <a:solidFill>
+                  <a:srgbClr val="212121"/>
+                </a:solidFill>
+              </a:defRPr>
+            </a:pPr>
+            <a:r>
+              <a:t>Precedence + data: task i waits until every predecessor j finished AND D_ji/B_ba arrived</a:t>
+            </a:r>
+          </a:p>
+          <a:p>
+            <a:pPr>
+              <a:spcAft>
+                <a:spcPts val="800"/>
+              </a:spcAft>
+              <a:defRPr sz="1800">
+                <a:solidFill>
+                  <a:srgbClr val="212121"/>
+                </a:solidFill>
+              </a:defRPr>
+            </a:pPr>
+            <a:r>
+              <a:t>Deadline: sum_a e_ia (M_ia + t_ia l_ia) &lt;= t_max  for all i</a:t>
+            </a:r>
+          </a:p>
+          <a:p>
+            <a:pPr>
+              <a:spcAft>
+                <a:spcPts val="800"/>
+              </a:spcAft>
+              <a:defRPr sz="1800">
+                <a:solidFill>
+                  <a:srgbClr val="212121"/>
+                </a:solidFill>
+              </a:defRPr>
+            </a:pPr>
+            <a:r>
+              <a:t>NP-hard even on unrelated parallel machines — the MILP is the benchmark, not the product</a:t>
             </a:r>
           </a:p>
         </p:txBody>
@@ -5005,45 +8116,21 @@
               </a:defRPr>
             </a:pPr>
             <a:r>
-              <a:t>Federation size: capacity buys feasibility, not accuracy</a:t>
-            </a:r>
-          </a:p>
-        </p:txBody>
-      </p:sp>
-      <p:pic>
-        <p:nvPicPr>
-          <p:cNvPr id="3" name="Picture 2" descr="perf_nodes_accuracy.png"/>
-          <p:cNvPicPr>
-            <a:picLocks noChangeAspect="1"/>
-          </p:cNvPicPr>
+              <a:t>Four schedulers, one cost model</a:t>
+            </a:r>
+          </a:p>
+        </p:txBody>
+      </p:sp>
+      <p:sp>
+        <p:nvSpPr>
+          <p:cNvPr id="3" name="TextBox 2"/>
+          <p:cNvSpPr txBox="1"/>
           <p:nvPr/>
-        </p:nvPicPr>
-        <p:blipFill>
-          <a:blip r:embed="rId2"/>
-          <a:stretch>
-            <a:fillRect/>
-          </a:stretch>
-        </p:blipFill>
+        </p:nvSpPr>
         <p:spPr>
           <a:xfrm>
-            <a:off x="731520" y="1005840"/>
-            <a:ext cx="6035040" cy="4437529"/>
-          </a:xfrm>
-          <a:prstGeom prst="rect">
-            <a:avLst/>
-          </a:prstGeom>
-        </p:spPr>
-      </p:pic>
-      <p:sp>
-        <p:nvSpPr>
-          <p:cNvPr id="4" name="TextBox 3"/>
-          <p:cNvSpPr txBox="1"/>
-          <p:nvPr/>
-        </p:nvSpPr>
-        <p:spPr>
-          <a:xfrm>
-            <a:off x="7040880" y="1097280"/>
-            <a:ext cx="4572000" cy="5303520"/>
+            <a:off x="548640" y="1097280"/>
+            <a:ext cx="10972800" cy="5303520"/>
           </a:xfrm>
           <a:prstGeom prst="rect">
             <a:avLst/>
@@ -5067,7 +8154,7 @@
               </a:defRPr>
             </a:pPr>
             <a:r>
-              <a:t>MILP and greedy match the bound at every N</a:t>
+              <a:t>MILP (HiGHS) — optimal at small/medium scale; the benchmark</a:t>
             </a:r>
           </a:p>
           <a:p>
@@ -5082,7 +8169,22 @@
               </a:defRPr>
             </a:pPr>
             <a:r>
-              <a:t>GA drifts from ~1.5% below the bound (N=2) to ~8% (N=10); rounding matches only at N=2, ~8% short at N=10</a:t>
+              <a:t>LP relaxation + randomized rounding</a:t>
+            </a:r>
+          </a:p>
+          <a:p>
+            <a:pPr lvl="1">
+              <a:spcAft>
+                <a:spcPts val="800"/>
+              </a:spcAft>
+              <a:defRPr sz="1600">
+                <a:solidFill>
+                  <a:srgbClr val="555555"/>
+                </a:solidFill>
+              </a:defRPr>
+            </a:pPr>
+            <a:r>
+              <a:t>  relax e_ia to [0,1]; sample each task's node from the LP; re-solve the LP for fractions</a:t>
             </a:r>
           </a:p>
           <a:p>
@@ -5097,7 +8199,22 @@
               </a:defRPr>
             </a:pPr>
             <a:r>
-              <a:t>Fixed search budgets cover a shrinking fraction of the placement space as N grows</a:t>
+              <a:t>Data-aware greedy</a:t>
+            </a:r>
+          </a:p>
+          <a:p>
+            <a:pPr lvl="1">
+              <a:spcAft>
+                <a:spcPts val="800"/>
+              </a:spcAft>
+              <a:defRPr sz="1600">
+                <a:solidFill>
+                  <a:srgbClr val="555555"/>
+                </a:solidFill>
+              </a:defRPr>
+            </a:pPr>
+            <a:r>
+              <a:t>  priority = beta*A_i + (1-beta)*critical-path; earliest-finish node among ready tasks; on deadline miss, retry with a lower global fraction</a:t>
             </a:r>
           </a:p>
           <a:p>
@@ -5112,7 +8229,22 @@
               </a:defRPr>
             </a:pPr>
             <a:r>
-              <a:t>Extra nodes do not raise accuracy once the deadline is met - their value is the feasible placements they open</a:t>
+              <a:t>Genetic algorithm</a:t>
+            </a:r>
+          </a:p>
+          <a:p>
+            <a:pPr lvl="1">
+              <a:spcAft>
+                <a:spcPts val="800"/>
+              </a:spcAft>
+              <a:defRPr sz="1600">
+                <a:solidFill>
+                  <a:srgbClr val="555555"/>
+                </a:solidFill>
+              </a:defRPr>
+            </a:pPr>
+            <a:r>
+              <a:t>  chromosome = assignment + per-task fractions; fitness rewards accuracy, penalizes lateness; co-location repair for heavy edges</a:t>
             </a:r>
           </a:p>
         </p:txBody>
@@ -5165,29 +8297,142 @@
               </a:defRPr>
             </a:pPr>
             <a:r>
-              <a:t>Workflow size: the simple greedy holds up best</a:t>
+              <a:t>How we test it</a:t>
+            </a:r>
+          </a:p>
+        </p:txBody>
+      </p:sp>
+      <p:sp>
+        <p:nvSpPr>
+          <p:cNvPr id="3" name="TextBox 2"/>
+          <p:cNvSpPr txBox="1"/>
+          <p:nvPr/>
+        </p:nvSpPr>
+        <p:spPr>
+          <a:xfrm>
+            <a:off x="548640" y="1097280"/>
+            <a:ext cx="6309360" cy="5303520"/>
+          </a:xfrm>
+          <a:prstGeom prst="rect">
+            <a:avLst/>
+          </a:prstGeom>
+          <a:noFill/>
+        </p:spPr>
+        <p:txBody>
+          <a:bodyPr wrap="square">
+            <a:spAutoFit/>
+          </a:bodyPr>
+          <a:lstStyle/>
+          <a:p>
+            <a:pPr>
+              <a:spcAft>
+                <a:spcPts val="800"/>
+              </a:spcAft>
+              <a:defRPr sz="1800">
+                <a:solidFill>
+                  <a:srgbClr val="212121"/>
+                </a:solidFill>
+              </a:defRPr>
+            </a:pPr>
+            <a:r>
+              <a:t>Discrete-event simulator (NumPy + SciPy HiGHS)</a:t>
+            </a:r>
+          </a:p>
+          <a:p>
+            <a:pPr>
+              <a:spcAft>
+                <a:spcPts val="800"/>
+              </a:spcAft>
+              <a:defRPr sz="1800">
+                <a:solidFill>
+                  <a:srgbClr val="212121"/>
+                </a:solidFill>
+              </a:defRPr>
+            </a:pPr>
+            <a:r>
+              <a:t>Contested regime: t in [1,5], D in [5,50], B in [10,100] — a transfer can rival a task</a:t>
+            </a:r>
+          </a:p>
+          <a:p>
+            <a:pPr>
+              <a:spcAft>
+                <a:spcPts val="800"/>
+              </a:spcAft>
+              <a:defRPr sz="1800">
+                <a:solidFill>
+                  <a:srgbClr val="212121"/>
+                </a:solidFill>
+              </a:defRPr>
+            </a:pPr>
+            <a:r>
+              <a:t>Datasets: 10/3, 100/5, 500/8, 1000/10 tasks-nodes; ~15% of node-task pairs ineligible; ~2x node speed range</a:t>
+            </a:r>
+          </a:p>
+          <a:p>
+            <a:pPr>
+              <a:spcAft>
+                <a:spcPts val="800"/>
+              </a:spcAft>
+              <a:defRPr sz="1800">
+                <a:solidFill>
+                  <a:srgbClr val="212121"/>
+                </a:solidFill>
+              </a:defRPr>
+            </a:pPr>
+            <a:r>
+              <a:t>Five sweeps: slack | federation size | workflow size | failure rate | link bandwidth</a:t>
+            </a:r>
+          </a:p>
+          <a:p>
+            <a:pPr>
+              <a:spcAft>
+                <a:spcPts val="800"/>
+              </a:spcAft>
+              <a:defRPr sz="1800">
+                <a:solidFill>
+                  <a:srgbClr val="212121"/>
+                </a:solidFill>
+              </a:defRPr>
+            </a:pPr>
+            <a:r>
+              <a:t>Metric: average accuracy vs the max-accuracy bound (dashed line); plus feasibility and wall time</a:t>
+            </a:r>
+          </a:p>
+          <a:p>
+            <a:pPr>
+              <a:spcAft>
+                <a:spcPts val="800"/>
+              </a:spcAft>
+              <a:defRPr sz="1800">
+                <a:solidFill>
+                  <a:srgbClr val="212121"/>
+                </a:solidFill>
+              </a:defRPr>
+            </a:pPr>
+            <a:r>
+              <a:t>Baselines: fixed scheduling; a bandwidth-blind greedy in the link sweep</a:t>
             </a:r>
           </a:p>
         </p:txBody>
       </p:sp>
       <p:pic>
         <p:nvPicPr>
-          <p:cNvPr id="3" name="Picture 2" descr="perf_task_size_accuracy.png"/>
+          <p:cNvPr id="4" name="Picture 3" descr="dataset_medium_graphs.png"/>
           <p:cNvPicPr>
             <a:picLocks noChangeAspect="1"/>
           </p:cNvPicPr>
           <p:nvPr/>
         </p:nvPicPr>
         <p:blipFill>
-          <a:blip r:embed="rId2"/>
+          <a:blip r:embed="rId3"/>
           <a:stretch>
             <a:fillRect/>
           </a:stretch>
         </p:blipFill>
         <p:spPr>
           <a:xfrm>
-            <a:off x="731520" y="1005840"/>
-            <a:ext cx="6035040" cy="4437529"/>
+            <a:off x="6949440" y="1188720"/>
+            <a:ext cx="4937760" cy="2114396"/>
           </a:xfrm>
           <a:prstGeom prst="rect">
             <a:avLst/>
@@ -5196,14 +8441,14 @@
       </p:pic>
       <p:sp>
         <p:nvSpPr>
-          <p:cNvPr id="4" name="TextBox 3"/>
+          <p:cNvPr id="5" name="TextBox 4"/>
           <p:cNvSpPr txBox="1"/>
           <p:nvPr/>
         </p:nvSpPr>
         <p:spPr>
           <a:xfrm>
-            <a:off x="7040880" y="1097280"/>
-            <a:ext cx="4572000" cy="5303520"/>
+            <a:off x="6949440" y="5943600"/>
+            <a:ext cx="4937760" cy="548640"/>
           </a:xfrm>
           <a:prstGeom prst="rect">
             <a:avLst/>
@@ -5211,68 +8456,20 @@
           <a:noFill/>
         </p:spPr>
         <p:txBody>
-          <a:bodyPr wrap="square">
+          <a:bodyPr wrap="none">
             <a:spAutoFit/>
           </a:bodyPr>
           <a:lstStyle/>
           <a:p>
-            <a:pPr>
-              <a:spcAft>
-                <a:spcPts val="800"/>
-              </a:spcAft>
-              <a:defRPr sz="1800">
-                <a:solidFill>
-                  <a:srgbClr val="212121"/>
-                </a:solidFill>
-              </a:defRPr>
-            </a:pPr>
-            <a:r>
-              <a:t>n = 10 / 100: MILP and greedy on the bound; GA first to drift (1.26 at 100)</a:t>
-            </a:r>
-          </a:p>
-          <a:p>
-            <a:pPr>
-              <a:spcAft>
-                <a:spcPts val="800"/>
-              </a:spcAft>
-              <a:defRPr sz="1800">
-                <a:solidFill>
-                  <a:srgbClr val="212121"/>
-                </a:solidFill>
-              </a:defRPr>
-            </a:pPr>
-            <a:r>
-              <a:t>n = 1000: MILP beyond the 800-variable cap; greedy stays on the bound in 0.15 s</a:t>
-            </a:r>
-          </a:p>
-          <a:p>
-            <a:pPr>
-              <a:spcAft>
-                <a:spcPts val="800"/>
-              </a:spcAft>
-              <a:defRPr sz="1800">
-                <a:solidFill>
-                  <a:srgbClr val="212121"/>
-                </a:solidFill>
-              </a:defRPr>
-            </a:pPr>
-            <a:r>
-              <a:t>Rounding 1.37 but ~93 s per LP re-solve; GA falls to 1.10 in 159 s</a:t>
-            </a:r>
-          </a:p>
-          <a:p>
-            <a:pPr>
-              <a:spcAft>
-                <a:spcPts val="800"/>
-              </a:spcAft>
-              <a:defRPr sz="1800">
-                <a:solidFill>
-                  <a:srgbClr val="212121"/>
-                </a:solidFill>
-              </a:defRPr>
-            </a:pPr>
-            <a:r>
-              <a:t>The GA's fixed budget is spread over a combinatorially growing space - size-adaptive budgets would close the gap</a:t>
+            <a:pPr algn="ctr">
+              <a:defRPr sz="1200" i="1">
+                <a:solidFill>
+                  <a:srgbClr val="555555"/>
+                </a:solidFill>
+              </a:defRPr>
+            </a:pPr>
+            <a:r>
+              <a:t>A generated dataset (100 tasks / 5 nodes)</a:t>
             </a:r>
           </a:p>
         </p:txBody>
@@ -5603,4 +8800,324 @@
   </a:objectDefaults>
   <a:extraClrSchemeLst/>
 </a:theme>
+</file>
+
+<file path=ppt/theme/theme2.xml><?xml version="1.0" encoding="utf-8"?>
+<a:theme xmlns:a="http://schemas.openxmlformats.org/drawingml/2006/main" name="Office Theme">
+  <a:themeElements>
+    <a:clrScheme name="Office">
+      <a:dk1>
+        <a:sysClr val="windowText" lastClr="000000"/>
+      </a:dk1>
+      <a:lt1>
+        <a:sysClr val="window" lastClr="FFFFFF"/>
+      </a:lt1>
+      <a:dk2>
+        <a:srgbClr val="1F497D"/>
+      </a:dk2>
+      <a:lt2>
+        <a:srgbClr val="EEECE1"/>
+      </a:lt2>
+      <a:accent1>
+        <a:srgbClr val="4F81BD"/>
+      </a:accent1>
+      <a:accent2>
+        <a:srgbClr val="C0504D"/>
+      </a:accent2>
+      <a:accent3>
+        <a:srgbClr val="9BBB59"/>
+      </a:accent3>
+      <a:accent4>
+        <a:srgbClr val="8064A2"/>
+      </a:accent4>
+      <a:accent5>
+        <a:srgbClr val="4BACC6"/>
+      </a:accent5>
+      <a:accent6>
+        <a:srgbClr val="F79646"/>
+      </a:accent6>
+      <a:hlink>
+        <a:srgbClr val="0000FF"/>
+      </a:hlink>
+      <a:folHlink>
+        <a:srgbClr val="800080"/>
+      </a:folHlink>
+    </a:clrScheme>
+    <a:fontScheme name="Office">
+      <a:majorFont>
+        <a:latin typeface="Calibri"/>
+        <a:ea typeface=""/>
+        <a:cs typeface=""/>
+        <a:font script="Jpan" typeface="ＭＳ Ｐゴシック"/>
+        <a:font script="Hang" typeface="맑은 고딕"/>
+        <a:font script="Hans" typeface="宋体"/>
+        <a:font script="Hant" typeface="新細明體"/>
+        <a:font script="Arab" typeface="Times New Roman"/>
+        <a:font script="Hebr" typeface="Times New Roman"/>
+        <a:font script="Thai" typeface="Angsana New"/>
+        <a:font script="Ethi" typeface="Nyala"/>
+        <a:font script="Beng" typeface="Vrinda"/>
+        <a:font script="Gujr" typeface="Shruti"/>
+        <a:font script="Khmr" typeface="MoolBoran"/>
+        <a:font script="Knda" typeface="Tunga"/>
+        <a:font script="Guru" typeface="Raavi"/>
+        <a:font script="Cans" typeface="Euphemia"/>
+        <a:font script="Cher" typeface="Plantagenet Cherokee"/>
+        <a:font script="Yiii" typeface="Microsoft Yi Baiti"/>
+        <a:font script="Tibt" typeface="Microsoft Himalaya"/>
+        <a:font script="Thaa" typeface="MV Boli"/>
+        <a:font script="Deva" typeface="Mangal"/>
+        <a:font script="Telu" typeface="Gautami"/>
+        <a:font script="Taml" typeface="Latha"/>
+        <a:font script="Syrc" typeface="Estrangelo Edessa"/>
+        <a:font script="Orya" typeface="Kalinga"/>
+        <a:font script="Mlym" typeface="Kartika"/>
+        <a:font script="Laoo" typeface="DokChampa"/>
+        <a:font script="Sinh" typeface="Iskoola Pota"/>
+        <a:font script="Mong" typeface="Mongolian Baiti"/>
+        <a:font script="Viet" typeface="Times New Roman"/>
+        <a:font script="Uigh" typeface="Microsoft Uighur"/>
+        <a:font script="Geor" typeface="Sylfaen"/>
+      </a:majorFont>
+      <a:minorFont>
+        <a:latin typeface="Calibri"/>
+        <a:ea typeface=""/>
+        <a:cs typeface=""/>
+        <a:font script="Jpan" typeface="ＭＳ Ｐゴシック"/>
+        <a:font script="Hang" typeface="맑은 고딕"/>
+        <a:font script="Hans" typeface="宋体"/>
+        <a:font script="Hant" typeface="新細明體"/>
+        <a:font script="Arab" typeface="Arial"/>
+        <a:font script="Hebr" typeface="Arial"/>
+        <a:font script="Thai" typeface="Cordia New"/>
+        <a:font script="Ethi" typeface="Nyala"/>
+        <a:font script="Beng" typeface="Vrinda"/>
+        <a:font script="Gujr" typeface="Shruti"/>
+        <a:font script="Khmr" typeface="DaunPenh"/>
+        <a:font script="Knda" typeface="Tunga"/>
+        <a:font script="Guru" typeface="Raavi"/>
+        <a:font script="Cans" typeface="Euphemia"/>
+        <a:font script="Cher" typeface="Plantagenet Cherokee"/>
+        <a:font script="Yiii" typeface="Microsoft Yi Baiti"/>
+        <a:font script="Tibt" typeface="Microsoft Himalaya"/>
+        <a:font script="Thaa" typeface="MV Boli"/>
+        <a:font script="Deva" typeface="Mangal"/>
+        <a:font script="Telu" typeface="Gautami"/>
+        <a:font script="Taml" typeface="Latha"/>
+        <a:font script="Syrc" typeface="Estrangelo Edessa"/>
+        <a:font script="Orya" typeface="Kalinga"/>
+        <a:font script="Mlym" typeface="Kartika"/>
+        <a:font script="Laoo" typeface="DokChampa"/>
+        <a:font script="Sinh" typeface="Iskoola Pota"/>
+        <a:font script="Mong" typeface="Mongolian Baiti"/>
+        <a:font script="Viet" typeface="Arial"/>
+        <a:font script="Uigh" typeface="Microsoft Uighur"/>
+        <a:font script="Geor" typeface="Sylfaen"/>
+      </a:minorFont>
+    </a:fontScheme>
+    <a:fmtScheme name="Office">
+      <a:fillStyleLst>
+        <a:solidFill>
+          <a:schemeClr val="phClr"/>
+        </a:solidFill>
+        <a:gradFill rotWithShape="1">
+          <a:gsLst>
+            <a:gs pos="0">
+              <a:schemeClr val="phClr">
+                <a:tint val="50000"/>
+                <a:satMod val="300000"/>
+              </a:schemeClr>
+            </a:gs>
+            <a:gs pos="35000">
+              <a:schemeClr val="phClr">
+                <a:tint val="37000"/>
+                <a:satMod val="300000"/>
+              </a:schemeClr>
+            </a:gs>
+            <a:gs pos="100000">
+              <a:schemeClr val="phClr">
+                <a:tint val="15000"/>
+                <a:satMod val="350000"/>
+              </a:schemeClr>
+            </a:gs>
+          </a:gsLst>
+          <a:lin ang="16200000" scaled="1"/>
+        </a:gradFill>
+        <a:gradFill rotWithShape="1">
+          <a:gsLst>
+            <a:gs pos="0">
+              <a:schemeClr val="phClr">
+                <a:tint val="100000"/>
+                <a:shade val="100000"/>
+                <a:satMod val="130000"/>
+              </a:schemeClr>
+            </a:gs>
+            <a:gs pos="100000">
+              <a:schemeClr val="phClr">
+                <a:tint val="50000"/>
+                <a:shade val="100000"/>
+                <a:satMod val="350000"/>
+              </a:schemeClr>
+            </a:gs>
+          </a:gsLst>
+          <a:lin ang="16200000" scaled="0"/>
+        </a:gradFill>
+      </a:fillStyleLst>
+      <a:lnStyleLst>
+        <a:ln w="9525" cap="flat" cmpd="sng" algn="ctr">
+          <a:solidFill>
+            <a:schemeClr val="phClr">
+              <a:shade val="95000"/>
+              <a:satMod val="105000"/>
+            </a:schemeClr>
+          </a:solidFill>
+          <a:prstDash val="solid"/>
+        </a:ln>
+        <a:ln w="25400" cap="flat" cmpd="sng" algn="ctr">
+          <a:solidFill>
+            <a:schemeClr val="phClr"/>
+          </a:solidFill>
+          <a:prstDash val="solid"/>
+        </a:ln>
+        <a:ln w="38100" cap="flat" cmpd="sng" algn="ctr">
+          <a:solidFill>
+            <a:schemeClr val="phClr"/>
+          </a:solidFill>
+          <a:prstDash val="solid"/>
+        </a:ln>
+      </a:lnStyleLst>
+      <a:effectStyleLst>
+        <a:effectStyle>
+          <a:effectLst>
+            <a:outerShdw blurRad="40000" dist="20000" dir="5400000" rotWithShape="0">
+              <a:srgbClr val="000000">
+                <a:alpha val="38000"/>
+              </a:srgbClr>
+            </a:outerShdw>
+          </a:effectLst>
+        </a:effectStyle>
+        <a:effectStyle>
+          <a:effectLst>
+            <a:outerShdw blurRad="40000" dist="23000" dir="5400000" rotWithShape="0">
+              <a:srgbClr val="000000">
+                <a:alpha val="35000"/>
+              </a:srgbClr>
+            </a:outerShdw>
+          </a:effectLst>
+        </a:effectStyle>
+        <a:effectStyle>
+          <a:effectLst>
+            <a:outerShdw blurRad="40000" dist="23000" dir="5400000" rotWithShape="0">
+              <a:srgbClr val="000000">
+                <a:alpha val="35000"/>
+              </a:srgbClr>
+            </a:outerShdw>
+          </a:effectLst>
+          <a:scene3d>
+            <a:camera prst="orthographicFront">
+              <a:rot lat="0" lon="0" rev="0"/>
+            </a:camera>
+            <a:lightRig rig="threePt" dir="t">
+              <a:rot lat="0" lon="0" rev="1200000"/>
+            </a:lightRig>
+          </a:scene3d>
+          <a:sp3d>
+            <a:bevelT w="63500" h="25400"/>
+          </a:sp3d>
+        </a:effectStyle>
+      </a:effectStyleLst>
+      <a:bgFillStyleLst>
+        <a:solidFill>
+          <a:schemeClr val="phClr"/>
+        </a:solidFill>
+        <a:gradFill rotWithShape="1">
+          <a:gsLst>
+            <a:gs pos="0">
+              <a:schemeClr val="phClr">
+                <a:tint val="40000"/>
+                <a:satMod val="350000"/>
+              </a:schemeClr>
+            </a:gs>
+            <a:gs pos="40000">
+              <a:schemeClr val="phClr">
+                <a:tint val="45000"/>
+                <a:shade val="99000"/>
+                <a:satMod val="350000"/>
+              </a:schemeClr>
+            </a:gs>
+            <a:gs pos="100000">
+              <a:schemeClr val="phClr">
+                <a:shade val="20000"/>
+                <a:satMod val="255000"/>
+              </a:schemeClr>
+            </a:gs>
+          </a:gsLst>
+          <a:path path="circle">
+            <a:fillToRect l="50000" t="-80000" r="50000" b="180000"/>
+          </a:path>
+        </a:gradFill>
+        <a:gradFill rotWithShape="1">
+          <a:gsLst>
+            <a:gs pos="0">
+              <a:schemeClr val="phClr">
+                <a:tint val="80000"/>
+                <a:satMod val="300000"/>
+              </a:schemeClr>
+            </a:gs>
+            <a:gs pos="100000">
+              <a:schemeClr val="phClr">
+                <a:shade val="30000"/>
+                <a:satMod val="200000"/>
+              </a:schemeClr>
+            </a:gs>
+          </a:gsLst>
+          <a:path path="circle">
+            <a:fillToRect l="50000" t="50000" r="50000" b="50000"/>
+          </a:path>
+        </a:gradFill>
+      </a:bgFillStyleLst>
+    </a:fmtScheme>
+  </a:themeElements>
+  <a:objectDefaults>
+    <a:spDef>
+      <a:spPr/>
+      <a:bodyPr/>
+      <a:lstStyle/>
+      <a:style>
+        <a:lnRef idx="1">
+          <a:schemeClr val="accent1"/>
+        </a:lnRef>
+        <a:fillRef idx="3">
+          <a:schemeClr val="accent1"/>
+        </a:fillRef>
+        <a:effectRef idx="2">
+          <a:schemeClr val="accent1"/>
+        </a:effectRef>
+        <a:fontRef idx="minor">
+          <a:schemeClr val="lt1"/>
+        </a:fontRef>
+      </a:style>
+    </a:spDef>
+    <a:lnDef>
+      <a:spPr/>
+      <a:bodyPr/>
+      <a:lstStyle/>
+      <a:style>
+        <a:lnRef idx="2">
+          <a:schemeClr val="accent1"/>
+        </a:lnRef>
+        <a:fillRef idx="0">
+          <a:schemeClr val="accent1"/>
+        </a:fillRef>
+        <a:effectRef idx="1">
+          <a:schemeClr val="accent1"/>
+        </a:effectRef>
+        <a:fontRef idx="minor">
+          <a:schemeClr val="tx1"/>
+        </a:fontRef>
+      </a:style>
+    </a:lnDef>
+  </a:objectDefaults>
+  <a:extraClrSchemeLst/>
+</a:theme>
 </file>
--- a/slides/data-aware-scheduling.pptx
+++ b/slides/data-aware-scheduling.pptx
@@ -3557,7 +3557,7 @@
           <a:lstStyle/>
           <a:p>
             <a:r>
-              <a:t>The completed work establishes the platform; the proposal builds on it. Paper 1: model and four schedulers. Paper 2: data-aware, bounded, stress-tested. Proposal: repair the smallest affected part when a whole resource fails.</a:t>
+              <a:t>The whole PhD is three papers on one arc. Paper 1 — published at Cloud Summit 2025 — built the model and four schedulers. Paper 2 — the current submission — hardened it: data-aware, bounded, stress-tested. Paper 3 — this proposal — repairs the smallest affected region when a whole resource fails. Each paper answers the question the previous one left open.</a:t>
             </a:r>
           </a:p>
         </p:txBody>
@@ -26712,6 +26712,33 @@
               <a:t>Expected outcome:  faster recovery with less disturbance than full repartition, at near-reference quality</a:t>
             </a:r>
           </a:p>
+          <a:p>
+            <a:pPr>
+              <a:spcAft>
+                <a:spcPts val="700"/>
+              </a:spcAft>
+              <a:defRPr sz="1700">
+                <a:solidFill>
+                  <a:srgbClr val="232B33"/>
+                </a:solidFill>
+              </a:defRPr>
+            </a:pPr>
+          </a:p>
+          <a:p>
+            <a:pPr>
+              <a:spcAft>
+                <a:spcPts val="700"/>
+              </a:spcAft>
+              <a:defRPr sz="1700">
+                <a:solidFill>
+                  <a:srgbClr val="232B33"/>
+                </a:solidFill>
+              </a:defRPr>
+            </a:pPr>
+            <a:r>
+              <a:t>Paper 1 placed the workflow; Paper 2 priced its data and approximation; Paper 3 keeps it alive when the infrastructure fails.</a:t>
+            </a:r>
+          </a:p>
         </p:txBody>
       </p:sp>
     </p:spTree>
@@ -27730,7 +27757,7 @@
               </a:defRPr>
             </a:pPr>
             <a:r>
-              <a:t>One research arc, three stages</a:t>
+              <a:t>The dissertation as three papers</a:t>
             </a:r>
           </a:p>
         </p:txBody>
@@ -27879,7 +27906,7 @@
               </a:defRPr>
             </a:pPr>
             <a:r>
-              <a:t>DONE</a:t>
+              <a:t>PAPER 1</a:t>
             </a:r>
           </a:p>
         </p:txBody>
@@ -27914,7 +27941,7 @@
               </a:defRPr>
             </a:pPr>
             <a:r>
-              <a:t>Paper 1 — DAG task allocation across federated fog; model + 4 schedulers  (IEEE Cloud Summit 2025)</a:t>
+              <a:t>Efficient DAG task allocation across federated fog — the model + 4 schedulers.  Published: IEEE Cloud Summit 2025</a:t>
             </a:r>
           </a:p>
         </p:txBody>
@@ -27993,7 +28020,7 @@
               </a:defRPr>
             </a:pPr>
             <a:r>
-              <a:t>DONE</a:t>
+              <a:t>PAPER 2</a:t>
             </a:r>
           </a:p>
         </p:txBody>
@@ -28028,7 +28055,7 @@
               </a:defRPr>
             </a:pPr>
             <a:r>
-              <a:t>Paper 2 — data-aware approximate scheduling: bound, retry semantics, bandwidth degradation, scale limits</a:t>
+              <a:t>Data-aware scheduling of approximate DAG workflows — bound, retry semantics, bandwidth degradation, scale limits.  Submitted: CCGrid 2027</a:t>
             </a:r>
           </a:p>
         </p:txBody>
@@ -28107,7 +28134,7 @@
               </a:defRPr>
             </a:pPr>
             <a:r>
-              <a:t>PROPOSED</a:t>
+              <a:t>PAPER 3</a:t>
             </a:r>
           </a:p>
         </p:txBody>
@@ -28142,7 +28169,7 @@
               </a:defRPr>
             </a:pPr>
             <a:r>
-              <a:t>Dynamic partial repartitioning after a resource fails mid-workflow — repair only what broke</a:t>
+              <a:t>Dynamic partial repartitioning after resource failure — minimal-region repair, incremental paths.  This proposal — target: IPDPS / CCGrid 2028</a:t>
             </a:r>
           </a:p>
         </p:txBody>

--- a/slides/data-aware-scheduling.pptx
+++ b/slides/data-aware-scheduling.pptx
@@ -547,7 +547,7 @@
           <a:lstStyle/>
           <a:p>
             <a:r>
-              <a:t>Welcome. This is my PhD research proposal. The talk follows the standard structure: motivation, related work and the gap, a formal problem definition, the work already completed and its evidence, the proposed research, the evaluation plan and timeline, and a conclusion.</a:t>
+              <a:t>Good morning everyone. I am going to walk you through my PhD proposal. The talk runs in seven parts: the motivation, the related work and the gap, a precise problem statement, the work we have already finished and what it showed, the research I am proposing, how I plan to evaluate it and when, and finally what the work contributes.</a:t>
             </a:r>
           </a:p>
         </p:txBody>
@@ -617,7 +617,7 @@
           <a:lstStyle/>
           <a:p>
             <a:r>
-              <a:t>Fog schedulers handle capacity, eligibility and heterogeneity across edge, fog and cloud tiers. But they treat tasks as atomic — no execution fractions — and data movement is usually a fixed cost or ignored.</a:t>
+              <a:t>The fog scheduling literature handles capacity, eligibility and heterogeneity across the continuum. What it does not do, for the most part, is treat data movement as a first-class cost, and it treats tasks as atomic: run completely or not at all.</a:t>
             </a:r>
           </a:p>
         </p:txBody>
@@ -687,7 +687,7 @@
           <a:lstStyle/>
           <a:p>
             <a:r>
-              <a:t>Approximate computing trades result quality for time or energy — loop truncation, reduced precision, early termination. Powerful for deadline workloads, but the literature assumes data is already where it needs to be.</a:t>
+              <a:t>Approximate computing trades quality for time, which is exactly what a tight deadline needs. But that literature assumes the data is already sitting where it needs to be; the cost of moving it is not part of the trade.</a:t>
             </a:r>
           </a:p>
         </p:txBody>
@@ -757,7 +757,7 @@
           <a:lstStyle/>
           <a:p>
             <a:r>
-              <a:t>The closest literature to the proposal. Rescheduling reconsiders a workflow at chosen points (Sakellariou &amp; Zhao); fog studies redistribute tasks on join/leave or uncertain events; dynamic shortest-path algorithms update routing after a graph change. None couples an infrastructure-node failure to the smallest affected region of the task DAG.</a:t>
+              <a:t>This is the thread closest to the proposal. Rescheduling work reconsiders a workflow at chosen points but remaps it globally. Fog studies redistribute tasks when nodes join or leave. And on the graph side, dynamic shortest-path updates repair routing after a change. None of them couples a node failure to the smallest affected region of the task DAG.</a:t>
             </a:r>
           </a:p>
         </p:txBody>
@@ -827,7 +827,7 @@
           <a:lstStyle/>
           <a:p>
             <a:r>
-              <a:t>Read each column as a capability. Classic schedulers place but neither price data per-link nor approximate nor repair. Fog schedulers add data-awareness. Our Paper 2 adds approximation. The last column — repairing only the affected region after a resource failure — is empty. That is the proposal.</a:t>
+              <a:t>Read each column as a capability. The classic schedulers place tasks but neither price data per link nor approximate nor repair. Fog schedulers add some data awareness. Our first two papers add approximation. The last column, repairing only the affected region after a resource fails, is empty. That is the proposal.</a:t>
             </a:r>
           </a:p>
         </p:txBody>
@@ -897,7 +897,7 @@
           <a:lstStyle/>
           <a:p>
             <a:r>
-              <a:t>Section 3. Before any algorithm: the system model and the formal problem statement — the same notation the MILP in Section 4 uses.</a:t>
+              <a:t>Section three. Before any algorithm, let me define the system model and state the problem formally, both the static core that the completed work solved and the dynamic extension this proposal adds.</a:t>
             </a:r>
           </a:p>
         </p:txBody>
@@ -967,7 +967,7 @@
           <a:lstStyle/>
           <a:p>
             <a:r>
-              <a:t>The task graph: nodes T_i, edges carry D_ji bytes of dependency data. The infrastructure graph: fog nodes f_a with capacity and eligibility, links (b,a) with bandwidth B_ba. The partition maps tasks to nodes; the failure event deletes a node from one graph and strands work in the other.</a:t>
+              <a:t>Two graphs. The task graph has the work: execution times, accuracies, eligibility, and data on every edge. The infrastructure graph has the machines and the links between them. A partition maps one onto the other; a failure deletes a node from one graph and strands work in the other.</a:t>
             </a:r>
           </a:p>
         </p:txBody>
@@ -1037,7 +1037,7 @@
           <a:lstStyle/>
           <a:p>
             <a:r>
-              <a:t>The completed work's problem, stated formally: given the two graphs and a deadline, choose an assignment and a fraction per task, finish before the deadline, maximize average accuracy. NP-hard — even on unrelated parallel machines.</a:t>
+              <a:t>The completed work solved this problem: given the two graphs and a deadline, choose where each task runs and how much of it runs, finish before the deadline, and maximize the average accuracy. It is NP-hard, so the exact solver is the benchmark, not the product.</a:t>
             </a:r>
           </a:p>
         </p:txBody>
@@ -1107,7 +1107,7 @@
           <a:lstStyle/>
           <a:p>
             <a:r>
-              <a:t>The proposal extends the same model with a failure event. At time tau a resource r* fails. Tasks partition into done, running, pending. Stranded = unfinished tasks on r*. The problem: find the smallest affected region A of the DAG and a repair assignment on surviving nodes that meets the deadline at minimum disturbance — done tasks never restart, unaffected assignments never move.</a:t>
+              <a:t>The proposal adds one event to the same model: at time tau a resource fails. The unfinished tasks on it are stranded. Now the question is which part of the DAG actually needs repair and where the stranded work should go, at minimum disturbance. Done work is never redone and healthy placements never move.</a:t>
             </a:r>
           </a:p>
         </p:txBody>
@@ -1177,7 +1177,7 @@
           <a:lstStyle/>
           <a:p>
             <a:r>
-              <a:t>Section 4. Completed work as preliminary results: the published Cloud Summit study, then the current data-aware paper — formulation, correctness, schedulers, setup, five experiments each with a take-away, and the limits that motivate the proposal.</a:t>
+              <a:t>Section four. The completed work as preliminary results: the published Cloud Summit study, then the current data-aware paper. I will show the formulation, the correctness argument, the four schedulers, the experimental setup, and then the five experiments, each with its take-away.</a:t>
             </a:r>
           </a:p>
         </p:txBody>
@@ -1247,7 +1247,7 @@
           <a:lstStyle/>
           <a:p>
             <a:r>
-              <a:t>IEEE Cloud Summit 2025. Established the model — placement coupled with data movement — an MILP with correctness proofs, and three scalable schedulers: LP relaxation with randomized rounding, a data-aware greedy, and a genetic algorithm.</a:t>
+              <a:t>IEEE Cloud Summit 2025. It established the model, placement coupled with data movement, an MILP with correctness proofs, and three scalable schedulers built around it.</a:t>
             </a:r>
           </a:p>
         </p:txBody>
@@ -1317,7 +1317,7 @@
           <a:lstStyle/>
           <a:p>
             <a:r>
-              <a:t>Seven sections. Sections 1-3 set up the problem. Section 4 reports completed work — the published Cloud Summit paper and the current data-aware study — as preliminary results. Sections 5-6 are the proposal itself. Section 7 concludes.</a:t>
+              <a:t>The first three sections set the problem up. Section four reports the completed work, which is two papers at this point. Sections five and six are the proposal itself, and the last section is what the work contributes.</a:t>
             </a:r>
           </a:p>
         </p:txBody>
@@ -1387,7 +1387,7 @@
           <a:lstStyle/>
           <a:p>
             <a:r>
-              <a:t>The MILP itself. Communication delay is piecewise: D over B across nodes, zero co-located. One eligible node per task; a successor waits for finish AND data arrival; completion inside the deadline; the objective is mean accuracy.</a:t>
+              <a:t>Here is the MILP itself. The communication cost is piecewise: D over B when the edge crosses nodes, zero when the tasks are co-located. Each task gets one eligible node; a task waits for its predecessors to finish and for their data to arrive; everything finishes by the deadline; the objective is mean accuracy.</a:t>
             </a:r>
           </a:p>
         </p:txBody>
@@ -1457,7 +1457,7 @@
           <a:lstStyle/>
           <a:p>
             <a:r>
-              <a:t>Two technical pieces worth showing. First, the products e*M are linearized with a big-M helper z; the non-obvious detail is z &gt;= 0 — without it, unassigned nodes could push z negative and fake a feasible completion time. Second, five lemmas: uniqueness of the assignment, one fraction per task, start-time correctness, precedence correctness, then the theorem that optimality equals the best feasible schedule.</a:t>
+              <a:t>Two technical details worth your attention. First, the product e times M is linearized with a big-M helper variable z. The subtle constraint is z at least zero: without it, an unassigned node could push z negative and fake an early completion time. Second, five lemmas chain from a unique assignment up to deadline feasibility, and the theorem follows.</a:t>
             </a:r>
           </a:p>
         </p:txBody>
@@ -1527,7 +1527,7 @@
           <a:lstStyle/>
           <a:p>
             <a:r>
-              <a:t>Same communication-cost model under every method, so differences are algorithmic, not accounting. MILP is the reference. LP rounding samples each task's node from the fractional solution, then re-solves fractions. Greedy uses priority and earliest-finish placement with a fraction-retry. The GA searches assignments and fractions together with a co-location repair.</a:t>
+              <a:t>Every method prices transfers the same way, so the differences are algorithmic, not accounting. The MILP is the reference. LP rounding samples each task's node from the fractional solution and then re-solves the fractions. The greedy places ready tasks by earliest finish and retries with a smaller fraction when the deadline is missed. The GA searches assignments and fractions together.</a:t>
             </a:r>
           </a:p>
         </p:txBody>
@@ -1597,7 +1597,7 @@
           <a:lstStyle/>
           <a:p>
             <a:r>
-              <a:t>The setup before the results. Discrete-event simulator, NumPy + SciPy HiGHS. Parameters chosen so a transfer can genuinely rival a task — the contested regime. Four datasets, five sweeps, five fresh instances per point. Metric is average accuracy against the max-accuracy bound, plus feasibility and wall time.</a:t>
+              <a:t>The setup before the results. A discrete-event simulator in NumPy with SciPy HiGHS. The parameters are chosen so a transfer can genuinely rival a task, which is the regime that matters. Four datasets, five sweeps, five fresh instances per point, and the score is measured against a max-accuracy bound.</a:t>
             </a:r>
           </a:p>
         </p:txBody>
@@ -1667,7 +1667,7 @@
           <a:lstStyle/>
           <a:p>
             <a:r>
-              <a:t>At alpha=1.0 the deadline barely fits: MILP 1.38 vs bound 1.43, rounding 1.25, greedy 1.23, GA 1.20. From alpha=1.2 greedy reaches the bound; MILP joins by 1.5. Take-away: method choice matters exactly where the deadline binds; at loose slack almost anything works.</a:t>
+              <a:t>When the deadline barely fits, the MILP leads and everything else trails. Once there is a little slack the greedy reaches the bound, and by alpha 1.5 the MILP joins it. So the method choice matters exactly where the deadline binds; at loose slack almost anything works.</a:t>
             </a:r>
           </a:p>
         </p:txBody>
@@ -1737,7 +1737,7 @@
           <a:lstStyle/>
           <a:p>
             <a:r>
-              <a:t>Two to ten nodes. MILP and greedy on the bound at every size. GA drifts 1.5% to ~8% below; rounding similar. Extra nodes enlarge the placement space but the search budget is fixed — they buy feasible placements, not accuracy.</a:t>
+              <a:t>Scaling the federation from two to ten nodes: the MILP and the greedy sit on the bound at every size. The GA and rounding drift further below as the placement space grows while their search budget stays fixed. Extra nodes buy feasible placements, not better scores.</a:t>
             </a:r>
           </a:p>
         </p:txBody>
@@ -1807,7 +1807,7 @@
           <a:lstStyle/>
           <a:p>
             <a:r>
-              <a:t>n=10: everyone on the bound. n=100: GA drifts first. n=1000: MILP past its ~800-variable cap; rounding survives at ~93 s per re-solve; GA falls to 1.10 in ~159 s. Greedy stays on the bound in 0.15 s — the only method both fast and bound-level.</a:t>
+              <a:t>Scaling the DAG: everyone is on the bound at ten tasks; at a thousand, only the greedy is still there, in a fifth of a second. Rounding survives but pays about ninety seconds per re-solve, and the GA falls to 1.10 while taking 159 seconds.</a:t>
             </a:r>
           </a:p>
         </p:txBody>
@@ -1877,7 +1877,7 @@
           <a:lstStyle/>
           <a:p>
             <a:r>
-              <a:t>Retry-once: a failed task reruns in place; accuracy is kept if the retry still meets the deadline. Scores are flat — watch feasibility. Greedy stays feasible at every rate because it finishes early; MILP and GA drop to ~60% at 0.5; rounding ~20%.</a:t>
+              <a:t>The failure model is retry-once: a failed task reruns in place and keeps its accuracy if the retry still meets the deadline. The scores are flat for everyone; feasibility is where they separate. The greedy stays feasible at every rate because it finishes early and leaves room for the retry.</a:t>
             </a:r>
           </a:p>
         </p:txBody>
@@ -1947,7 +1947,7 @@
           <a:lstStyle/>
           <a:p>
             <a:r>
-              <a:t>Degrade every link to 5% of nominal. The bandwidth-blind baseline is the cautionary tale: bound-level scores at every level — but its schedules are late. MILP stays feasible everywhere; greedy feasible to 0.1x paying accuracy; GA fails at 0.05x; rounding only above 0.5x.</a:t>
+              <a:t>This is the experiment the model was built for. Degrade every link down to five percent of nominal. The bandwidth-blind baseline reports bound-level scores at every level while its schedules go infeasible. The data-aware methods trade accuracy for feasibility and degrade gracefully.</a:t>
             </a:r>
           </a:p>
         </p:txBody>
@@ -2017,7 +2017,7 @@
           <a:lstStyle/>
           <a:p>
             <a:r>
-              <a:t>The per-dataset table agrees. Small: identical scores, greedy fastest. Medium: greedy's makespan is 43 vs ~61. Large and xlarge: only greedy and GA fit; greedy holds ~1.41 while the GA falls and pays 20-70 s of search.</a:t>
+              <a:t>The per-dataset table says the same thing. On the small instance everyone ties and the greedy is fastest. On medium, the greedy's makespan is 43 versus about 61 for the rest. On the large instances only the greedy and the GA even fit, and the greedy holds the bound while the GA pays twenty to seventy seconds of search.</a:t>
             </a:r>
           </a:p>
         </p:txBody>
@@ -2087,7 +2087,7 @@
           <a:lstStyle/>
           <a:p>
             <a:r>
-              <a:t>Section 1. The motivation in one paragraph: time-critical workflows must run when the network is at its worst, and nearby fog machines — federated — are the only capacity left.</a:t>
+              <a:t>Section one. The motivation in one paragraph: time-critical workflows have to run exactly when the network is at its worst, and nearby fog machines, federated together, are the only capacity left.</a:t>
             </a:r>
           </a:p>
         </p:txBody>
@@ -2157,7 +2157,7 @@
           <a:lstStyle/>
           <a:p>
             <a:r>
-              <a:t>Separately we stress-tested generation: million-task DAGs in ~3 s with depth growing like log n; million-node resource graphs in ~7 s. Structural instances only — honest boundary: schedulable dense instances stop where constraints and memory do.</a:t>
+              <a:t>Separately we stress-tested the generators: million-task DAGs in about three seconds with depth growing like log n, and million-node resource graphs in about seven. These are structural instances; the honest boundary is that schedulable dense instances stop where the constraint count and memory do.</a:t>
             </a:r>
           </a:p>
         </p:txBody>
@@ -2227,7 +2227,7 @@
           <a:lstStyle/>
           <a:p>
             <a:r>
-              <a:t>What we do not claim: the MILP is capped ~800 vars; the LP grows to ~10^5 rows; the GA has one budget; the failure model is retry-once-in-place — no resource loss, replication, or migration. That last limit is the bridge to the proposal.</a:t>
+              <a:t>What we do not claim: the MILP is capped near 800 variables, the LP grows to a hundred thousand rows, the GA runs on one budget, and the failure model is retry-once-in-place. No replication, no checkpointing, no migration. That last limit is the bridge to the proposal.</a:t>
             </a:r>
           </a:p>
         </p:txBody>
@@ -2297,7 +2297,7 @@
           <a:lstStyle/>
           <a:p>
             <a:r>
-              <a:t>Section 5 — the proposal itself. Formal problem, research questions, then the method in depth.</a:t>
+              <a:t>Section five is the proposal itself. The question in one line, the three research questions, and then the method in depth.</a:t>
             </a:r>
           </a:p>
         </p:txBody>
@@ -2367,7 +2367,7 @@
           <a:lstStyle/>
           <a:p>
             <a:r>
-              <a:t>The proposal in one callout, then three research questions that decompose it: the boundary rule, the repair optimization, and the incremental path update.</a:t>
+              <a:t>The proposal in one line, then the three research questions that decompose it: where the repair boundary lies, how to repartition that region, and how to update the paths without recomputing them.</a:t>
             </a:r>
           </a:p>
         </p:txBody>
@@ -2437,7 +2437,7 @@
           <a:lstStyle/>
           <a:p>
             <a:r>
-              <a:t>Monitoring detects the failed node. Stranded unfinished tasks must be rescued; completed work is never redone. The subtle decision is the boundary: check parents and children of stranded tasks — sometimes dependents must move too, for data locality or the deadline.</a:t>
+              <a:t>Monitoring detects the failed node. The stranded, unfinished tasks have to be rescued, and completed work is never redone. The subtle decision is the boundary: we check the parents and children of the stranded tasks, because sometimes a dependent has to move too, for data locality or to make the deadline.</a:t>
             </a:r>
           </a:p>
         </p:txBody>
@@ -2507,7 +2507,7 @@
           <a:lstStyle/>
           <a:p>
             <a:r>
-              <a:t>Seven steps: initial partition with the existing schedulers; detect; isolate the stranded set; grow the minimal affected subgraph under the boundary rule; pick replacements by capacity and shortest paths to parents and children; repartition under the recovery cost model; assign and update only affected paths; resume from the last good point.</a:t>
+              <a:t>Seven steps. The existing schedulers make the initial partition. When a failure is detected we isolate the stranded tasks, grow the minimal affected subgraph under the boundary rule, pick replacements by capacity and short paths to the parents and children, repartition under the recovery cost model, assign and update only the affected paths, and resume from the last good point.</a:t>
             </a:r>
           </a:p>
         </p:txBody>
@@ -2577,7 +2577,7 @@
           <a:lstStyle/>
           <a:p>
             <a:r>
-              <a:t>The technical heart of the proposal. S is mandatory — the stranded tasks. But dependents may have to move: a child whose input now crosses a long path, a parent re-shipping data, a co-located neighbor that loses its locality. The rule: expand from S while a node fails a stay-test — deadline slack or data-locality — capped so A stays minimal. Proving minimality vs 'big enough to repair well' is RQ1's deliverable.</a:t>
+              <a:t>The technical heart of the proposal. The stranded set S is mandatory. But some neighbors have to move too: a child whose input now crosses a long path, or a dependent that can no longer meet the deadline if it stays. The rule expands from S while a neighbor fails a stay-test, capped so the region stays small.</a:t>
             </a:r>
           </a:p>
         </p:txBody>
@@ -2647,7 +2647,7 @@
           <a:lstStyle/>
           <a:p>
             <a:r>
-              <a:t>The repair itself is a smaller instance of the same optimization family — which is the point: the Part II schedulers become solvers for the region. Recovery objective adds movement terms to the accuracy objective; constraints add 'boundary pins' — interface tasks that stayed put fix the arrival times the region must respect.</a:t>
+              <a:t>The repair itself is a smaller instance of the same optimization family, which is the point: the paper-two schedulers become the region solvers. The recovery objective adds movement terms to the accuracy objective, and the boundary pins enter as fixed arrival times the repair has to respect.</a:t>
             </a:r>
           </a:p>
         </p:txBody>
@@ -2717,7 +2717,7 @@
           <a:lstStyle/>
           <a:p>
             <a:r>
-              <a:t>Moved tasks need new communication paths to parents and children. Recomputing all-pairs shortest paths mid-workflow is too slow — so we reuse dynamic SPT updates (Riazi, Khanda, Bhowmick et al.): update only the paths touching the deleted node and the reassigned tasks. That is what makes partial repair fast enough to matter.</a:t>
+              <a:t>Moved tasks need new paths to their parents and children. Recomputing all shortest paths mid-workflow is too slow, so we reuse the dynamic SPT updates from Riazi, Khanda and Bhowmick: only the paths through the deleted node and the moved tasks get updated. That is what makes partial repair fast enough to matter.</a:t>
             </a:r>
           </a:p>
         </p:txBody>
@@ -2787,7 +2787,7 @@
           <a:lstStyle/>
           <a:p>
             <a:r>
-              <a:t>The pieces exist separately — dynamic path updates, fog rescheduling, join/leave redistribution, partial reconsideration — nobody couples them. The novelty is the two-graph mapping: infra failure to minimal DAG region.</a:t>
+              <a:t>The pieces exist separately: dynamic path updates, fog rescheduling, join-leave redistribution, partial reconsideration. Nobody couples them. The novelty is the two-graph mapping: a failure in the infrastructure becomes the smallest affected region in the task DAG.</a:t>
             </a:r>
           </a:p>
         </p:txBody>
@@ -2857,7 +2857,7 @@
           <a:lstStyle/>
           <a:p>
             <a:r>
-              <a:t>A river basin floods. The response workflow — sense, model, forecast, plan, alert — runs as a DAG. The deadline is hard: a forecast after the water is useless. And the uplink to the cloud is degraded or gone — the same event that creates the deadline also takes away the network.</a:t>
+              <a:t>Imagine a river basin starting to flood. The response workflow, sense, model, forecast, plan, alert, runs as a DAG of dependent tasks. The deadline is not a preference: a forecast that arrives after the water has risen is a forecast nobody uses. And the same event that creates the deadline also degrades or kills the link to the cloud.</a:t>
             </a:r>
           </a:p>
         </p:txBody>
@@ -2927,7 +2927,7 @@
           <a:lstStyle/>
           <a:p>
             <a:r>
-              <a:t>Section 6. The evaluation design, then the 12-month plan.</a:t>
+              <a:t>Section six. The evaluation design, then the twelve-month plan.</a:t>
             </a:r>
           </a:p>
         </p:txBody>
@@ -2997,7 +2997,7 @@
           <a:lstStyle/>
           <a:p>
             <a:r>
-              <a:t>Four baselines — complete repartition, greedy rescue, no-repair static, and MILP on small cases as the quality reference (Part II's stack supplies it). Metrics cover speed of recovery, quality of the repaired schedule, and cost of the disturbance.</a:t>
+              <a:t>Four baselines: complete repartition as the naive upper bound on disturbance, a greedy rescue as the cheapest possible repair, a no-repair static baseline as the quality floor, and the MILP on small cases as the reference. The metrics cover recovery speed, schedule quality, and the cost of the disturbance.</a:t>
             </a:r>
           </a:p>
         </p:txBody>
@@ -3067,7 +3067,7 @@
           <a:lstStyle/>
           <a:p>
             <a:r>
-              <a:t>Vary what makes recovery hard: where the failure hits (critical path vs periphery), how many resources fail at once, workflow and federation size, and how much slack remains. The hard case is late failure with little slack. Three hypotheses, each falsifiable.</a:t>
+              <a:t>We vary what makes recovery hard: where the failure hits, how many resources fail at once, how much slack remains, and the scales. The interesting case is a late failure on the critical path. Three hypotheses, each falsifiable.</a:t>
             </a:r>
           </a:p>
         </p:txBody>
@@ -3137,7 +3137,7 @@
           <a:lstStyle/>
           <a:p>
             <a:r>
-              <a:t>Four quarters: build, solve, evaluate, write. Deliverables land on the existing public repository; the paper targets the systems venues.</a:t>
+              <a:t>Four quarters: build, solve, evaluate, write. The deliverables land on the existing public repository and the paper targets the systems venues.</a:t>
             </a:r>
           </a:p>
         </p:txBody>
@@ -3207,7 +3207,7 @@
           <a:lstStyle/>
           <a:p>
             <a:r>
-              <a:t>Three honest risks: the boundary rule might degenerate to 'repartition everything' — mitigated by the cap and the sensitivity study. Incremental SPT may not pay off at small graphs — mitigated by measuring the break-even. Repair quality may trail MILP — mitigated by the hybrid: greedy for speed, MILP where the region is small.</a:t>
+              <a:t>Three honest risks. The boundary rule might expand to most of the DAG; the incremental SPT might not pay off on small graphs; the region repair might trail the MILP quality. Each has a mitigation built into the plan.</a:t>
             </a:r>
           </a:p>
         </p:txBody>
@@ -3277,7 +3277,7 @@
           <a:lstStyle/>
           <a:p>
             <a:r>
-              <a:t>Three contributions in one line each. A boundary rule for the smallest affected region. A repartitioning method that repairs only that region under the recovery cost model. And the first use of incremental shortest-path updates for workflow recovery — evaluated against four baselines on the platform that already exists.</a:t>
+              <a:t>To conclude. The completed work gives a proved, data-aware formulation, four schedulers on one cost model, and a reproducible platform. The proposal adds three contributions: a principled boundary rule, a minimal-region repartitioning method, and the first use of incremental path updates for workflow recovery.</a:t>
             </a:r>
           </a:p>
         </p:txBody>
@@ -3417,7 +3417,7 @@
           <a:lstStyle/>
           <a:p>
             <a:r>
-              <a:t>One fog site is rarely enough. Nearby sites keep fast links to each other even when the cloud link dies, so federating them creates a small local cloud. The price: every task now has a placement choice, and every choice ships data across a link.</a:t>
+              <a:t>A single fog site is rarely strong enough for the whole workflow. But nearby sites keep fast, stable links to each other even when the cloud link dies, so federating them creates a small local cloud. The price is a placement choice for every task, and every choice moves data across a link.</a:t>
             </a:r>
           </a:p>
         </p:txBody>
@@ -3487,7 +3487,7 @@
           <a:lstStyle/>
           <a:p>
             <a:r>
-              <a:t>Two levers define this problem. Lever one: data movement — transfer time D over B can rival a task's own runtime, so the 'fastest' node can be the worst once you pay to move the input. Lever two: approximate execution — a fraction of the work costs that fraction of the time and returns that fraction of the accuracy. The levers interact: placement decides transfers, fractions decide runtimes.</a:t>
+              <a:t>Two things make this problem genuinely hard. The first is data movement: every edge of the DAG carries data, and moving it across a link can take as long as the task itself, so the fastest node can end up being the worst choice. The second is approximation: tasks can run partially, a fraction of the work for a fraction of the accuracy. And the two interact, because placement decides the transfers while fractions decide the runtimes.</a:t>
             </a:r>
           </a:p>
         </p:txBody>
@@ -3557,7 +3557,7 @@
           <a:lstStyle/>
           <a:p>
             <a:r>
-              <a:t>The whole PhD is three papers on one arc. Paper 1 — published at Cloud Summit 2025 — built the model and four schedulers. Paper 2 — the current submission — hardened it: data-aware, bounded, stress-tested. Paper 3 — this proposal — repairs the smallest affected region when a whole resource fails. Each paper answers the question the previous one left open.</a:t>
+              <a:t>The whole PhD is three papers on one arc. The first, published at Cloud Summit 2025, built the model and four schedulers. The second hardened it: data-aware, bounded, stress-tested. The third, which is this proposal, repairs the smallest affected region when a whole resource fails. Each paper answers the question the previous one left open.</a:t>
             </a:r>
           </a:p>
         </p:txBody>
@@ -3627,7 +3627,7 @@
           <a:lstStyle/>
           <a:p>
             <a:r>
-              <a:t>Section 2. Related work in four threads: classic DAG scheduling, fog/edge placement, approximate computing, and failure recovery / rescheduling. Then the gap in one table.</a:t>
+              <a:t>Section two. I will go through four threads of related work: classic DAG scheduling, fog and edge placement, approximate computing, and failure recovery. Then the gap in one table.</a:t>
             </a:r>
           </a:p>
         </p:txBody>
@@ -3697,7 +3697,7 @@
           <a:lstStyle/>
           <a:p>
             <a:r>
-              <a:t>HEFT is the reference point: rank tasks by upward rank, place each where it finishes earliest. It is compute-centric in spirit — transfers appear only as static edge weights, tasks always run completely, and the plan is fixed at submission.</a:t>
+              <a:t>The reference point is HEFT: rank the tasks, place each one where it finishes earliest. It is a great algorithm, but it assumes tasks always run completely, transfers are static edge weights, and the plan is fixed before execution starts.</a:t>
             </a:r>
           </a:p>
         </p:txBody>
@@ -6948,7 +6948,7 @@
               </a:defRPr>
             </a:pPr>
             <a:r>
-              <a:t>Advisor: Mohsen Amini Salehi</a:t>
+              <a:t>Advisors: Dr. Mohsen Amini Salehi and Dr. Sanjukta Bhowmick</a:t>
             </a:r>
           </a:p>
           <a:p>
@@ -7094,14 +7094,14 @@
           <a:lstStyle/>
           <a:p>
             <a:pPr>
-              <a:defRPr sz="2600" b="1">
+              <a:defRPr sz="2700" b="1">
                 <a:solidFill>
                   <a:srgbClr val="FFFFFF"/>
                 </a:solidFill>
               </a:defRPr>
             </a:pPr>
             <a:r>
-              <a:t>Thread 2 — Fog / edge scheduling</a:t>
+              <a:t>Fog and edge scheduling</a:t>
             </a:r>
           </a:p>
         </p:txBody>
@@ -7200,76 +7200,76 @@
           <a:p>
             <a:pPr>
               <a:spcAft>
-                <a:spcPts val="700"/>
+                <a:spcPts val="800"/>
               </a:spcAft>
-              <a:defRPr sz="1700">
+              <a:defRPr sz="1800">
                 <a:solidFill>
                   <a:srgbClr val="232B33"/>
                 </a:solidFill>
               </a:defRPr>
             </a:pPr>
             <a:r>
-              <a:t>Fog/edge schedulers manage capacity, eligibility, heterogeneity across the compute continuum</a:t>
+              <a:t>Fog schedulers handle capacity, eligibility and heterogeneity across the edge, fog and cloud tiers</a:t>
             </a:r>
           </a:p>
           <a:p>
             <a:pPr>
               <a:spcAft>
-                <a:spcPts val="700"/>
+                <a:spcPts val="800"/>
               </a:spcAft>
-              <a:defRPr sz="1700">
+              <a:defRPr sz="1800">
                 <a:solidFill>
                   <a:srgbClr val="232B33"/>
                 </a:solidFill>
               </a:defRPr>
             </a:pPr>
             <a:r>
-              <a:t>Surveys (Mouradian et al. 2018) catalog placement policies for fog and edge</a:t>
+              <a:t>Surveys like Mouradian et al. (2018) catalog the placement policies</a:t>
             </a:r>
           </a:p>
           <a:p>
             <a:pPr>
               <a:spcAft>
-                <a:spcPts val="700"/>
+                <a:spcPts val="800"/>
               </a:spcAft>
-              <a:defRPr sz="1700">
+              <a:defRPr sz="1800">
                 <a:solidFill>
                   <a:srgbClr val="232B33"/>
                 </a:solidFill>
               </a:defRPr>
             </a:pPr>
             <a:r>
-              <a:t>Data-aware variants price locality — but rarely per-link bandwidth explicitly</a:t>
+              <a:t>Locality is priced in, but per-link bandwidth rarely is</a:t>
             </a:r>
           </a:p>
           <a:p>
             <a:pPr>
               <a:spcAft>
-                <a:spcPts val="700"/>
+                <a:spcPts val="800"/>
               </a:spcAft>
-              <a:defRPr sz="1700">
+              <a:defRPr sz="1800">
                 <a:solidFill>
                   <a:srgbClr val="232B33"/>
                 </a:solidFill>
               </a:defRPr>
             </a:pPr>
             <a:r>
-              <a:t>Tasks are atomic: run completely or not at all</a:t>
+              <a:t>And tasks are atomic: they run completely or not at all</a:t>
             </a:r>
           </a:p>
           <a:p>
             <a:pPr>
               <a:spcAft>
-                <a:spcPts val="700"/>
+                <a:spcPts val="800"/>
               </a:spcAft>
-              <a:defRPr sz="1700">
+              <a:defRPr sz="1800">
                 <a:solidFill>
                   <a:srgbClr val="232B33"/>
                 </a:solidFill>
               </a:defRPr>
             </a:pPr>
             <a:r>
-              <a:t>Schedules are decided up front — failures handled by restart, not repair</a:t>
+              <a:t>Failures are handled by restarting, not by repairing</a:t>
             </a:r>
           </a:p>
         </p:txBody>
@@ -7403,14 +7403,14 @@
           <a:lstStyle/>
           <a:p>
             <a:pPr>
-              <a:defRPr sz="2600" b="1">
+              <a:defRPr sz="2700" b="1">
                 <a:solidFill>
                   <a:srgbClr val="FFFFFF"/>
                 </a:solidFill>
               </a:defRPr>
             </a:pPr>
             <a:r>
-              <a:t>Thread 3 — Approximate computing</a:t>
+              <a:t>Approximate computing</a:t>
             </a:r>
           </a:p>
         </p:txBody>
@@ -7509,91 +7509,61 @@
           <a:p>
             <a:pPr>
               <a:spcAft>
-                <a:spcPts val="700"/>
+                <a:spcPts val="800"/>
               </a:spcAft>
-              <a:defRPr sz="1700">
+              <a:defRPr sz="1800">
                 <a:solidFill>
                   <a:srgbClr val="232B33"/>
                 </a:solidFill>
               </a:defRPr>
             </a:pPr>
             <a:r>
-              <a:t>Trades result quality for time or energy</a:t>
-            </a:r>
-          </a:p>
-          <a:p>
-            <a:pPr lvl="1">
-              <a:spcAft>
-                <a:spcPts val="700"/>
-              </a:spcAft>
-              <a:defRPr sz="1500">
-                <a:solidFill>
-                  <a:srgbClr val="5A646E"/>
-                </a:solidFill>
-              </a:defRPr>
-            </a:pPr>
-            <a:r>
-              <a:t>  loop truncation, reduced precision, early termination</a:t>
+              <a:t>Trades result quality for time or energy: loop truncation, reduced precision, early termination</a:t>
             </a:r>
           </a:p>
           <a:p>
             <a:pPr>
               <a:spcAft>
-                <a:spcPts val="700"/>
+                <a:spcPts val="800"/>
               </a:spcAft>
-              <a:defRPr sz="1700">
+              <a:defRPr sz="1800">
                 <a:solidFill>
                   <a:srgbClr val="232B33"/>
                 </a:solidFill>
               </a:defRPr>
             </a:pPr>
             <a:r>
-              <a:t>Makes accuracy a schedulable resource — exactly what tight deadlines need</a:t>
+              <a:t>That makes accuracy a schedulable resource, which is exactly what a tight deadline needs</a:t>
             </a:r>
           </a:p>
           <a:p>
             <a:pPr>
               <a:spcAft>
-                <a:spcPts val="700"/>
+                <a:spcPts val="800"/>
               </a:spcAft>
-              <a:defRPr sz="1700">
+              <a:defRPr sz="1800">
                 <a:solidFill>
                   <a:srgbClr val="232B33"/>
                 </a:solidFill>
               </a:defRPr>
             </a:pPr>
             <a:r>
-              <a:t>But: the literature assumes data is already in place</a:t>
-            </a:r>
-          </a:p>
-          <a:p>
-            <a:pPr lvl="1">
-              <a:spcAft>
-                <a:spcPts val="700"/>
-              </a:spcAft>
-              <a:defRPr sz="1500">
-                <a:solidFill>
-                  <a:srgbClr val="5A646E"/>
-                </a:solidFill>
-              </a:defRPr>
-            </a:pPr>
-            <a:r>
-              <a:t>  inter-node transfer cost is not part of the trade</a:t>
+              <a:t>But the literature assumes the data is already where it needs to be; the transfer cost is not part of the trade</a:t>
             </a:r>
           </a:p>
           <a:p>
             <a:pPr>
               <a:spcAft>
-                <a:spcPts val="700"/>
+                <a:spcPts val="800"/>
               </a:spcAft>
-              <a:defRPr sz="1700">
+              <a:defRPr sz="1800">
                 <a:solidFill>
                   <a:srgbClr val="232B33"/>
                 </a:solidFill>
               </a:defRPr>
             </a:pPr>
             <a:r>
-              <a:t>Ours: approximation + per-edge data + per-link bandwidth, jointly</a:t>
+              <a:t>We put the two together: approximation and data movement in one model</a:t>
             </a:r>
           </a:p>
         </p:txBody>
@@ -7727,14 +7697,14 @@
           <a:lstStyle/>
           <a:p>
             <a:pPr>
-              <a:defRPr sz="2600" b="1">
+              <a:defRPr sz="2700" b="1">
                 <a:solidFill>
                   <a:srgbClr val="FFFFFF"/>
                 </a:solidFill>
               </a:defRPr>
             </a:pPr>
             <a:r>
-              <a:t>Thread 4 — Failure recovery &amp; rescheduling</a:t>
+              <a:t>Failure recovery and rescheduling</a:t>
             </a:r>
           </a:p>
         </p:txBody>
@@ -7833,76 +7803,61 @@
           <a:p>
             <a:pPr>
               <a:spcAft>
-                <a:spcPts val="700"/>
+                <a:spcPts val="800"/>
               </a:spcAft>
-              <a:defRPr sz="1700">
+              <a:defRPr sz="1800">
                 <a:solidFill>
                   <a:srgbClr val="232B33"/>
                 </a:solidFill>
               </a:defRPr>
             </a:pPr>
             <a:r>
-              <a:t>Workflow rescheduling (Sakellariou &amp; Zhao 2004): reconsider the plan at chosen points — but re-map globally</a:t>
+              <a:t>Workflow rescheduling (Sakellariou and Zhao, 2004) reconsiders the plan at chosen points, but remaps it globally</a:t>
             </a:r>
           </a:p>
           <a:p>
             <a:pPr>
               <a:spcAft>
-                <a:spcPts val="700"/>
+                <a:spcPts val="800"/>
               </a:spcAft>
-              <a:defRPr sz="1700">
+              <a:defRPr sz="1800">
                 <a:solidFill>
                   <a:srgbClr val="232B33"/>
                 </a:solidFill>
               </a:defRPr>
             </a:pPr>
             <a:r>
-              <a:t>Fog task redistribution on node join/leave (Lee et al. 2019); uncertain-event rescheduling (Yang et al. 2024)</a:t>
+              <a:t>Fog studies redistribute tasks when nodes join or leave, or when uncertain events hit</a:t>
             </a:r>
           </a:p>
           <a:p>
             <a:pPr>
               <a:spcAft>
-                <a:spcPts val="700"/>
+                <a:spcPts val="800"/>
               </a:spcAft>
-              <a:defRPr sz="1700">
+              <a:defRPr sz="1800">
                 <a:solidFill>
                   <a:srgbClr val="232B33"/>
                 </a:solidFill>
               </a:defRPr>
             </a:pPr>
             <a:r>
-              <a:t>Checkpoint/restart and replication — recover work, at replication or recompute cost</a:t>
+              <a:t>Checkpointing and replication recover the work, at a real recompute or replication cost</a:t>
             </a:r>
           </a:p>
           <a:p>
             <a:pPr>
               <a:spcAft>
-                <a:spcPts val="700"/>
+                <a:spcPts val="800"/>
               </a:spcAft>
-              <a:defRPr sz="1700">
+              <a:defRPr sz="1800">
                 <a:solidFill>
                   <a:srgbClr val="232B33"/>
                 </a:solidFill>
               </a:defRPr>
             </a:pPr>
             <a:r>
-              <a:t>Dynamic shortest-path updates (Riazi, Bhowmick, Khanda et al.) — repair routing after graph change; never applied to workflow repartitioning</a:t>
-            </a:r>
-          </a:p>
-          <a:p>
-            <a:pPr>
-              <a:spcAft>
-                <a:spcPts val="700"/>
-              </a:spcAft>
-              <a:defRPr sz="1700">
-                <a:solidFill>
-                  <a:srgbClr val="232B33"/>
-                </a:solidFill>
-              </a:defRPr>
-            </a:pPr>
-            <a:r>
-              <a:t>Nobody couples: infra-node failure -&gt; smallest affected DAG region -&gt; repartition only that</a:t>
+              <a:t>Dynamic shortest-path updates (Riazi, Khanda, Bhowmick and colleagues) repair routing after a graph change; nobody has used them for workflow repartitioning</a:t>
             </a:r>
           </a:p>
         </p:txBody>
@@ -8036,7 +7991,7 @@
           <a:lstStyle/>
           <a:p>
             <a:pPr>
-              <a:defRPr sz="2600" b="1">
+              <a:defRPr sz="2700" b="1">
                 <a:solidFill>
                   <a:srgbClr val="FFFFFF"/>
                 </a:solidFill>
@@ -8150,7 +8105,7 @@
                     <a:lstStyle/>
                     <a:p>
                       <a:pPr>
-                        <a:defRPr sz="1300" b="1">
+                        <a:defRPr sz="1400" b="1">
                           <a:solidFill>
                             <a:srgbClr val="FFFFFF"/>
                           </a:solidFill>
@@ -8173,7 +8128,7 @@
                     <a:lstStyle/>
                     <a:p>
                       <a:pPr>
-                        <a:defRPr sz="1300" b="1">
+                        <a:defRPr sz="1400" b="1">
                           <a:solidFill>
                             <a:srgbClr val="FFFFFF"/>
                           </a:solidFill>
@@ -8196,7 +8151,7 @@
                     <a:lstStyle/>
                     <a:p>
                       <a:pPr>
-                        <a:defRPr sz="1300" b="1">
+                        <a:defRPr sz="1400" b="1">
                           <a:solidFill>
                             <a:srgbClr val="FFFFFF"/>
                           </a:solidFill>
@@ -8219,14 +8174,14 @@
                     <a:lstStyle/>
                     <a:p>
                       <a:pPr>
-                        <a:defRPr sz="1300" b="1">
+                        <a:defRPr sz="1400" b="1">
                           <a:solidFill>
                             <a:srgbClr val="FFFFFF"/>
                           </a:solidFill>
                         </a:defRPr>
                       </a:pPr>
                       <a:r>
-                        <a:t>Paper 1 + 2 (ours)</a:t>
+                        <a:t>Papers 1 + 2</a:t>
                       </a:r>
                     </a:p>
                   </a:txBody>
@@ -8242,7 +8197,7 @@
                     <a:lstStyle/>
                     <a:p>
                       <a:pPr>
-                        <a:defRPr sz="1300" b="1">
+                        <a:defRPr sz="1400" b="1">
                           <a:solidFill>
                             <a:srgbClr val="FFFFFF"/>
                           </a:solidFill>
@@ -8267,7 +8222,7 @@
                     <a:lstStyle/>
                     <a:p>
                       <a:pPr>
-                        <a:defRPr sz="1300" b="0">
+                        <a:defRPr sz="1400" b="0">
                           <a:solidFill>
                             <a:srgbClr val="232B33"/>
                           </a:solidFill>
@@ -8290,7 +8245,7 @@
                     <a:lstStyle/>
                     <a:p>
                       <a:pPr>
-                        <a:defRPr sz="1300" b="0">
+                        <a:defRPr sz="1400" b="0">
                           <a:solidFill>
                             <a:srgbClr val="232B33"/>
                           </a:solidFill>
@@ -8313,7 +8268,7 @@
                     <a:lstStyle/>
                     <a:p>
                       <a:pPr>
-                        <a:defRPr sz="1300" b="0">
+                        <a:defRPr sz="1400" b="0">
                           <a:solidFill>
                             <a:srgbClr val="232B33"/>
                           </a:solidFill>
@@ -8336,7 +8291,7 @@
                     <a:lstStyle/>
                     <a:p>
                       <a:pPr>
-                        <a:defRPr sz="1300" b="0">
+                        <a:defRPr sz="1400" b="0">
                           <a:solidFill>
                             <a:srgbClr val="232B33"/>
                           </a:solidFill>
@@ -8359,7 +8314,7 @@
                     <a:lstStyle/>
                     <a:p>
                       <a:pPr>
-                        <a:defRPr sz="1300" b="0">
+                        <a:defRPr sz="1400" b="0">
                           <a:solidFill>
                             <a:srgbClr val="232B33"/>
                           </a:solidFill>
@@ -8384,7 +8339,7 @@
                     <a:lstStyle/>
                     <a:p>
                       <a:pPr>
-                        <a:defRPr sz="1300" b="0">
+                        <a:defRPr sz="1400" b="0">
                           <a:solidFill>
                             <a:srgbClr val="232B33"/>
                           </a:solidFill>
@@ -8407,7 +8362,7 @@
                     <a:lstStyle/>
                     <a:p>
                       <a:pPr>
-                        <a:defRPr sz="1300" b="0">
+                        <a:defRPr sz="1400" b="0">
                           <a:solidFill>
                             <a:srgbClr val="232B33"/>
                           </a:solidFill>
@@ -8430,7 +8385,7 @@
                     <a:lstStyle/>
                     <a:p>
                       <a:pPr>
-                        <a:defRPr sz="1300" b="0">
+                        <a:defRPr sz="1400" b="0">
                           <a:solidFill>
                             <a:srgbClr val="232B33"/>
                           </a:solidFill>
@@ -8453,7 +8408,7 @@
                     <a:lstStyle/>
                     <a:p>
                       <a:pPr>
-                        <a:defRPr sz="1300" b="0">
+                        <a:defRPr sz="1400" b="0">
                           <a:solidFill>
                             <a:srgbClr val="232B33"/>
                           </a:solidFill>
@@ -8476,7 +8431,7 @@
                     <a:lstStyle/>
                     <a:p>
                       <a:pPr>
-                        <a:defRPr sz="1300" b="0">
+                        <a:defRPr sz="1400" b="0">
                           <a:solidFill>
                             <a:srgbClr val="232B33"/>
                           </a:solidFill>
@@ -8501,7 +8456,7 @@
                     <a:lstStyle/>
                     <a:p>
                       <a:pPr>
-                        <a:defRPr sz="1300" b="0">
+                        <a:defRPr sz="1400" b="0">
                           <a:solidFill>
                             <a:srgbClr val="232B33"/>
                           </a:solidFill>
@@ -8524,7 +8479,7 @@
                     <a:lstStyle/>
                     <a:p>
                       <a:pPr>
-                        <a:defRPr sz="1300" b="0">
+                        <a:defRPr sz="1400" b="0">
                           <a:solidFill>
                             <a:srgbClr val="232B33"/>
                           </a:solidFill>
@@ -8547,7 +8502,7 @@
                     <a:lstStyle/>
                     <a:p>
                       <a:pPr>
-                        <a:defRPr sz="1300" b="0">
+                        <a:defRPr sz="1400" b="0">
                           <a:solidFill>
                             <a:srgbClr val="232B33"/>
                           </a:solidFill>
@@ -8570,7 +8525,7 @@
                     <a:lstStyle/>
                     <a:p>
                       <a:pPr>
-                        <a:defRPr sz="1300" b="0">
+                        <a:defRPr sz="1400" b="0">
                           <a:solidFill>
                             <a:srgbClr val="232B33"/>
                           </a:solidFill>
@@ -8593,7 +8548,7 @@
                     <a:lstStyle/>
                     <a:p>
                       <a:pPr>
-                        <a:defRPr sz="1300" b="0">
+                        <a:defRPr sz="1400" b="0">
                           <a:solidFill>
                             <a:srgbClr val="232B33"/>
                           </a:solidFill>
@@ -8618,7 +8573,7 @@
                     <a:lstStyle/>
                     <a:p>
                       <a:pPr>
-                        <a:defRPr sz="1300" b="0">
+                        <a:defRPr sz="1400" b="0">
                           <a:solidFill>
                             <a:srgbClr val="232B33"/>
                           </a:solidFill>
@@ -8641,7 +8596,7 @@
                     <a:lstStyle/>
                     <a:p>
                       <a:pPr>
-                        <a:defRPr sz="1300" b="0">
+                        <a:defRPr sz="1400" b="0">
                           <a:solidFill>
                             <a:srgbClr val="232B33"/>
                           </a:solidFill>
@@ -8664,7 +8619,7 @@
                     <a:lstStyle/>
                     <a:p>
                       <a:pPr>
-                        <a:defRPr sz="1300" b="0">
+                        <a:defRPr sz="1400" b="0">
                           <a:solidFill>
                             <a:srgbClr val="232B33"/>
                           </a:solidFill>
@@ -8687,7 +8642,7 @@
                     <a:lstStyle/>
                     <a:p>
                       <a:pPr>
-                        <a:defRPr sz="1300" b="0">
+                        <a:defRPr sz="1400" b="0">
                           <a:solidFill>
                             <a:srgbClr val="232B33"/>
                           </a:solidFill>
@@ -8710,7 +8665,7 @@
                     <a:lstStyle/>
                     <a:p>
                       <a:pPr>
-                        <a:defRPr sz="1300" b="0">
+                        <a:defRPr sz="1400" b="0">
                           <a:solidFill>
                             <a:srgbClr val="232B33"/>
                           </a:solidFill>
@@ -8843,14 +8798,14 @@
           <a:lstStyle/>
           <a:p>
             <a:pPr>
-              <a:defRPr sz="1500" b="1">
+              <a:defRPr sz="1600" b="1">
                 <a:solidFill>
                   <a:srgbClr val="232B33"/>
                 </a:solidFill>
               </a:defRPr>
             </a:pPr>
             <a:r>
-              <a:t>Gap: no method couples an infrastructure-node failure to the smallest affected region of the task DAG.</a:t>
+              <a:t>The gap: nobody couples an infrastructure-node failure to the smallest affected region of the task DAG.</a:t>
             </a:r>
           </a:p>
         </p:txBody>
@@ -9054,7 +9009,7 @@
           <a:lstStyle/>
           <a:p>
             <a:pPr>
-              <a:defRPr sz="1800">
+              <a:defRPr sz="1900">
                 <a:solidFill>
                   <a:srgbClr val="EDF2F7"/>
                 </a:solidFill>
@@ -9195,14 +9150,14 @@
           <a:lstStyle/>
           <a:p>
             <a:pPr>
-              <a:defRPr sz="2600" b="1">
+              <a:defRPr sz="2700" b="1">
                 <a:solidFill>
                   <a:srgbClr val="FFFFFF"/>
                 </a:solidFill>
               </a:defRPr>
             </a:pPr>
             <a:r>
-              <a:t>System model — two graphs</a:t>
+              <a:t>System model: two graphs</a:t>
             </a:r>
           </a:p>
         </p:txBody>
@@ -9301,91 +9256,76 @@
           <a:p>
             <a:pPr>
               <a:spcAft>
-                <a:spcPts val="700"/>
+                <a:spcPts val="800"/>
               </a:spcAft>
-              <a:defRPr sz="1700">
+              <a:defRPr sz="1600">
                 <a:solidFill>
                   <a:srgbClr val="232B33"/>
                 </a:solidFill>
               </a:defRPr>
             </a:pPr>
             <a:r>
-              <a:t>Task graph  G_T = (T, E):  task T_i with exec time t_ia, accuracy A_i, eligibility P_ia</a:t>
+              <a:t>Task graph G_T = (T, E): each task has an execution time, a full-run accuracy, and a set of nodes it is allowed to run on</a:t>
             </a:r>
           </a:p>
           <a:p>
             <a:pPr lvl="1">
               <a:spcAft>
-                <a:spcPts val="700"/>
+                <a:spcPts val="800"/>
               </a:spcAft>
-              <a:defRPr sz="1500">
+              <a:defRPr sz="1400">
                 <a:solidFill>
                   <a:srgbClr val="5A646E"/>
                 </a:solidFill>
               </a:defRPr>
             </a:pPr>
             <a:r>
-              <a:t>  edge (j,i) carries D_ji bytes of dependency data</a:t>
+              <a:t>  every edge carries D_ji bytes of dependency data</a:t>
             </a:r>
           </a:p>
           <a:p>
             <a:pPr>
               <a:spcAft>
-                <a:spcPts val="700"/>
+                <a:spcPts val="800"/>
               </a:spcAft>
-              <a:defRPr sz="1700">
+              <a:defRPr sz="1600">
                 <a:solidFill>
                   <a:srgbClr val="232B33"/>
                 </a:solidFill>
               </a:defRPr>
             </a:pPr>
             <a:r>
-              <a:t>Infrastructure graph  G_R = (R, L):  node f_a with capacity, memory, availability</a:t>
-            </a:r>
-          </a:p>
-          <a:p>
-            <a:pPr lvl="1">
-              <a:spcAft>
-                <a:spcPts val="700"/>
-              </a:spcAft>
-              <a:defRPr sz="1500">
-                <a:solidFill>
-                  <a:srgbClr val="5A646E"/>
-                </a:solidFill>
-              </a:defRPr>
-            </a:pPr>
-            <a:r>
-              <a:t>  link (b,a) with bandwidth B_ba and delay</a:t>
+              <a:t>Infrastructure graph G_R = (R, L): each node has capacity, memory and availability; each link has bandwidth and delay</a:t>
             </a:r>
           </a:p>
           <a:p>
             <a:pPr>
               <a:spcAft>
-                <a:spcPts val="700"/>
+                <a:spcPts val="800"/>
               </a:spcAft>
-              <a:defRPr sz="1700">
+              <a:defRPr sz="1600">
                 <a:solidFill>
                   <a:srgbClr val="232B33"/>
                 </a:solidFill>
               </a:defRPr>
             </a:pPr>
             <a:r>
-              <a:t>Partition pi: T -&gt; R, one eligible node per task</a:t>
+              <a:t>A partition pi maps tasks onto nodes, one eligible node per task</a:t>
             </a:r>
           </a:p>
           <a:p>
             <a:pPr>
               <a:spcAft>
-                <a:spcPts val="700"/>
+                <a:spcPts val="800"/>
               </a:spcAft>
-              <a:defRPr sz="1700">
+              <a:defRPr sz="1600">
                 <a:solidFill>
                   <a:srgbClr val="232B33"/>
                 </a:solidFill>
               </a:defRPr>
             </a:pPr>
             <a:r>
-              <a:t>Failure event: delete a node r* from G_R -&gt; stranded tasks in G_T</a:t>
+              <a:t>A failure deletes a node from G_R and strands work in G_T</a:t>
             </a:r>
           </a:p>
         </p:txBody>
@@ -10403,14 +10343,14 @@
           <a:lstStyle/>
           <a:p>
             <a:pPr>
-              <a:defRPr sz="2600" b="1">
+              <a:defRPr sz="2700" b="1">
                 <a:solidFill>
                   <a:srgbClr val="FFFFFF"/>
                 </a:solidFill>
               </a:defRPr>
             </a:pPr>
             <a:r>
-              <a:t>Problem statement — the static core</a:t>
+              <a:t>The static core of the problem</a:t>
             </a:r>
           </a:p>
         </p:txBody>
@@ -10494,7 +10434,7 @@
         <p:spPr>
           <a:xfrm>
             <a:off x="731520" y="1234440"/>
-            <a:ext cx="10698480" cy="777240"/>
+            <a:ext cx="10698480" cy="822960"/>
           </a:xfrm>
           <a:prstGeom prst="rect">
             <a:avLst/>
@@ -10538,7 +10478,7 @@
         <p:spPr>
           <a:xfrm>
             <a:off x="731520" y="1234440"/>
-            <a:ext cx="109728" cy="777240"/>
+            <a:ext cx="109728" cy="822960"/>
           </a:xfrm>
           <a:prstGeom prst="rect">
             <a:avLst/>
@@ -10582,7 +10522,7 @@
         <p:spPr>
           <a:xfrm>
             <a:off x="1005840" y="1307592"/>
-            <a:ext cx="10241280" cy="630936"/>
+            <a:ext cx="10241280" cy="676656"/>
           </a:xfrm>
           <a:prstGeom prst="rect">
             <a:avLst/>
@@ -10596,14 +10536,14 @@
           <a:lstStyle/>
           <a:p>
             <a:pPr>
-              <a:defRPr sz="1400" b="0">
+              <a:defRPr sz="1500" b="0">
                 <a:solidFill>
                   <a:srgbClr val="232B33"/>
                 </a:solidFill>
               </a:defRPr>
             </a:pPr>
             <a:r>
-              <a:t>GIVEN:  task DAG (exec times, data sizes, accuracies, eligibility)  +  infra graph (capacities, bandwidths)  +  deadline t_max</a:t>
+              <a:t>GIVEN   the two graphs (tasks with times, accuracies, eligibility; nodes with capacities, links with bandwidths) and a deadline t_max</a:t>
             </a:r>
           </a:p>
         </p:txBody>
@@ -10616,8 +10556,8 @@
         </p:nvSpPr>
         <p:spPr>
           <a:xfrm>
-            <a:off x="731520" y="2148840"/>
-            <a:ext cx="10698480" cy="777240"/>
+            <a:off x="731520" y="2194560"/>
+            <a:ext cx="10698480" cy="822960"/>
           </a:xfrm>
           <a:prstGeom prst="rect">
             <a:avLst/>
@@ -10660,8 +10600,8 @@
         </p:nvSpPr>
         <p:spPr>
           <a:xfrm>
-            <a:off x="731520" y="2148840"/>
-            <a:ext cx="109728" cy="777240"/>
+            <a:off x="731520" y="2194560"/>
+            <a:ext cx="109728" cy="822960"/>
           </a:xfrm>
           <a:prstGeom prst="rect">
             <a:avLst/>
@@ -10704,8 +10644,8 @@
         </p:nvSpPr>
         <p:spPr>
           <a:xfrm>
-            <a:off x="1005840" y="2221992"/>
-            <a:ext cx="10241280" cy="630936"/>
+            <a:off x="1005840" y="2267712"/>
+            <a:ext cx="10241280" cy="676656"/>
           </a:xfrm>
           <a:prstGeom prst="rect">
             <a:avLst/>
@@ -10719,14 +10659,14 @@
           <a:lstStyle/>
           <a:p>
             <a:pPr>
-              <a:defRPr sz="1400" b="0">
+              <a:defRPr sz="1500" b="0">
                 <a:solidFill>
                   <a:srgbClr val="232B33"/>
                 </a:solidFill>
               </a:defRPr>
             </a:pPr>
             <a:r>
-              <a:t>DECIDE:  assignment e_ia in {0,1}   and   execution fraction l_ia in [0,1]   for every task i</a:t>
+              <a:t>DECIDE   for every task: which eligible node it runs on (e_ia) and how much of it runs (l_ia)</a:t>
             </a:r>
           </a:p>
         </p:txBody>
@@ -10739,8 +10679,8 @@
         </p:nvSpPr>
         <p:spPr>
           <a:xfrm>
-            <a:off x="731520" y="3063240"/>
-            <a:ext cx="10698480" cy="777240"/>
+            <a:off x="731520" y="3154680"/>
+            <a:ext cx="10698480" cy="822960"/>
           </a:xfrm>
           <a:prstGeom prst="rect">
             <a:avLst/>
@@ -10783,8 +10723,8 @@
         </p:nvSpPr>
         <p:spPr>
           <a:xfrm>
-            <a:off x="731520" y="3063240"/>
-            <a:ext cx="109728" cy="777240"/>
+            <a:off x="731520" y="3154680"/>
+            <a:ext cx="109728" cy="822960"/>
           </a:xfrm>
           <a:prstGeom prst="rect">
             <a:avLst/>
@@ -10827,8 +10767,8 @@
         </p:nvSpPr>
         <p:spPr>
           <a:xfrm>
-            <a:off x="1005840" y="3136392"/>
-            <a:ext cx="10241280" cy="630936"/>
+            <a:off x="1005840" y="3227832"/>
+            <a:ext cx="10241280" cy="676656"/>
           </a:xfrm>
           <a:prstGeom prst="rect">
             <a:avLst/>
@@ -10842,14 +10782,14 @@
           <a:lstStyle/>
           <a:p>
             <a:pPr>
-              <a:defRPr sz="1400" b="0">
+              <a:defRPr sz="1500" b="0">
                 <a:solidFill>
                   <a:srgbClr val="232B33"/>
                 </a:solidFill>
               </a:defRPr>
             </a:pPr>
             <a:r>
-              <a:t>SUBJECT TO:  one eligible node per task;  precedence + data-arrival order;  makespan &lt;= t_max</a:t>
+              <a:t>SUBJECT TO   one node per task; predecessors finish and their data arrives first; everything done by the deadline</a:t>
             </a:r>
           </a:p>
         </p:txBody>
@@ -10862,8 +10802,8 @@
         </p:nvSpPr>
         <p:spPr>
           <a:xfrm>
-            <a:off x="731520" y="3977639"/>
-            <a:ext cx="10698480" cy="777240"/>
+            <a:off x="731520" y="4114800"/>
+            <a:ext cx="10698480" cy="822960"/>
           </a:xfrm>
           <a:prstGeom prst="rect">
             <a:avLst/>
@@ -10906,8 +10846,8 @@
         </p:nvSpPr>
         <p:spPr>
           <a:xfrm>
-            <a:off x="731520" y="3977639"/>
-            <a:ext cx="109728" cy="777240"/>
+            <a:off x="731520" y="4114800"/>
+            <a:ext cx="109728" cy="822960"/>
           </a:xfrm>
           <a:prstGeom prst="rect">
             <a:avLst/>
@@ -10950,8 +10890,8 @@
         </p:nvSpPr>
         <p:spPr>
           <a:xfrm>
-            <a:off x="1005840" y="4050791"/>
-            <a:ext cx="10241280" cy="630936"/>
+            <a:off x="1005840" y="4187952"/>
+            <a:ext cx="10241280" cy="676656"/>
           </a:xfrm>
           <a:prstGeom prst="rect">
             <a:avLst/>
@@ -10965,14 +10905,14 @@
           <a:lstStyle/>
           <a:p>
             <a:pPr>
-              <a:defRPr sz="1400" b="1">
+              <a:defRPr sz="1500" b="1">
                 <a:solidFill>
                   <a:srgbClr val="232B33"/>
                 </a:solidFill>
               </a:defRPr>
             </a:pPr>
             <a:r>
-              <a:t>MAXIMIZE:  average accuracy  A_bar = (1/n) sum_i A_i * l_i</a:t>
+              <a:t>MAXIMIZE   the average accuracy  A_bar = (1/n) sum_i A_i l_i</a:t>
             </a:r>
           </a:p>
         </p:txBody>
@@ -10985,7 +10925,7 @@
         </p:nvSpPr>
         <p:spPr>
           <a:xfrm>
-            <a:off x="594360" y="5074920"/>
+            <a:off x="594360" y="5212080"/>
             <a:ext cx="10972800" cy="5120640"/>
           </a:xfrm>
           <a:prstGeom prst="rect">
@@ -11001,7 +10941,7 @@
           <a:p>
             <a:pPr>
               <a:spcAft>
-                <a:spcPts val="700"/>
+                <a:spcPts val="800"/>
               </a:spcAft>
               <a:defRPr sz="1500">
                 <a:solidFill>
@@ -11010,7 +10950,7 @@
               </a:defRPr>
             </a:pPr>
             <a:r>
-              <a:t>NP-hard even on unrelated parallel machines — exact solution is the benchmark, not the product</a:t>
+              <a:t>It is NP-hard even on unrelated parallel machines, so the exact solver is the benchmark, not the product</a:t>
             </a:r>
           </a:p>
         </p:txBody>
@@ -11144,14 +11084,14 @@
           <a:lstStyle/>
           <a:p>
             <a:pPr>
-              <a:defRPr sz="2600" b="1">
+              <a:defRPr sz="2700" b="1">
                 <a:solidFill>
                   <a:srgbClr val="FFFFFF"/>
                 </a:solidFill>
               </a:defRPr>
             </a:pPr>
             <a:r>
-              <a:t>Problem statement — the dynamic extension (the proposal)</a:t>
+              <a:t>The dynamic extension (the proposal)</a:t>
             </a:r>
           </a:p>
         </p:txBody>
@@ -11235,7 +11175,7 @@
         <p:spPr>
           <a:xfrm>
             <a:off x="731520" y="1234440"/>
-            <a:ext cx="10698480" cy="777240"/>
+            <a:ext cx="10698480" cy="822960"/>
           </a:xfrm>
           <a:prstGeom prst="rect">
             <a:avLst/>
@@ -11279,7 +11219,7 @@
         <p:spPr>
           <a:xfrm>
             <a:off x="731520" y="1234440"/>
-            <a:ext cx="109728" cy="777240"/>
+            <a:ext cx="109728" cy="822960"/>
           </a:xfrm>
           <a:prstGeom prst="rect">
             <a:avLst/>
@@ -11323,7 +11263,7 @@
         <p:spPr>
           <a:xfrm>
             <a:off x="1005840" y="1307592"/>
-            <a:ext cx="10241280" cy="630936"/>
+            <a:ext cx="10241280" cy="676656"/>
           </a:xfrm>
           <a:prstGeom prst="rect">
             <a:avLst/>
@@ -11337,14 +11277,14 @@
           <a:lstStyle/>
           <a:p>
             <a:pPr>
-              <a:defRPr sz="1400" b="0">
+              <a:defRPr sz="1500" b="0">
                 <a:solidFill>
                   <a:srgbClr val="232B33"/>
                 </a:solidFill>
               </a:defRPr>
             </a:pPr>
             <a:r>
-              <a:t>EVENT:  at time tau, resource r* fails  -&gt;  stranded set S = unfinished tasks on r*</a:t>
+              <a:t>EVENT   at time tau, resource r* fails; the unfinished tasks on it are stranded</a:t>
             </a:r>
           </a:p>
         </p:txBody>
@@ -11357,8 +11297,8 @@
         </p:nvSpPr>
         <p:spPr>
           <a:xfrm>
-            <a:off x="731520" y="2148840"/>
-            <a:ext cx="10698480" cy="777240"/>
+            <a:off x="731520" y="2194560"/>
+            <a:ext cx="10698480" cy="822960"/>
           </a:xfrm>
           <a:prstGeom prst="rect">
             <a:avLst/>
@@ -11401,8 +11341,8 @@
         </p:nvSpPr>
         <p:spPr>
           <a:xfrm>
-            <a:off x="731520" y="2148840"/>
-            <a:ext cx="109728" cy="777240"/>
+            <a:off x="731520" y="2194560"/>
+            <a:ext cx="109728" cy="822960"/>
           </a:xfrm>
           <a:prstGeom prst="rect">
             <a:avLst/>
@@ -11445,8 +11385,8 @@
         </p:nvSpPr>
         <p:spPr>
           <a:xfrm>
-            <a:off x="1005840" y="2221992"/>
-            <a:ext cx="10241280" cy="630936"/>
+            <a:off x="1005840" y="2267712"/>
+            <a:ext cx="10241280" cy="676656"/>
           </a:xfrm>
           <a:prstGeom prst="rect">
             <a:avLst/>
@@ -11460,14 +11400,14 @@
           <a:lstStyle/>
           <a:p>
             <a:pPr>
-              <a:defRPr sz="1400" b="0">
+              <a:defRPr sz="1500" b="0">
                 <a:solidFill>
                   <a:srgbClr val="232B33"/>
                 </a:solidFill>
               </a:defRPr>
             </a:pPr>
             <a:r>
-              <a:t>DECIDE:  the affected region A (superset of S, inside G_T)  +  repair assignment pi': A -&gt; R \ {r*}</a:t>
+              <a:t>DECIDE   which part of the DAG has to be repartitioned (the affected region A) and where its tasks go (pi' on surviving nodes)</a:t>
             </a:r>
           </a:p>
         </p:txBody>
@@ -11480,8 +11420,8 @@
         </p:nvSpPr>
         <p:spPr>
           <a:xfrm>
-            <a:off x="731520" y="3063240"/>
-            <a:ext cx="10698480" cy="777240"/>
+            <a:off x="731520" y="3154680"/>
+            <a:ext cx="10698480" cy="822960"/>
           </a:xfrm>
           <a:prstGeom prst="rect">
             <a:avLst/>
@@ -11524,8 +11464,8 @@
         </p:nvSpPr>
         <p:spPr>
           <a:xfrm>
-            <a:off x="731520" y="3063240"/>
-            <a:ext cx="109728" cy="777240"/>
+            <a:off x="731520" y="3154680"/>
+            <a:ext cx="109728" cy="822960"/>
           </a:xfrm>
           <a:prstGeom prst="rect">
             <a:avLst/>
@@ -11568,8 +11508,8 @@
         </p:nvSpPr>
         <p:spPr>
           <a:xfrm>
-            <a:off x="1005840" y="3136392"/>
-            <a:ext cx="10241280" cy="630936"/>
+            <a:off x="1005840" y="3227832"/>
+            <a:ext cx="10241280" cy="676656"/>
           </a:xfrm>
           <a:prstGeom prst="rect">
             <a:avLst/>
@@ -11583,14 +11523,14 @@
           <a:lstStyle/>
           <a:p>
             <a:pPr>
-              <a:defRPr sz="1400" b="0">
+              <a:defRPr sz="1500" b="0">
                 <a:solidFill>
                   <a:srgbClr val="232B33"/>
                 </a:solidFill>
               </a:defRPr>
             </a:pPr>
             <a:r>
-              <a:t>SUBJECT TO:  completed tasks never restart;  unaffected assignments never move;  deadline still met</a:t>
+              <a:t>SUBJECT TO   completed tasks never restart; healthy placements never move; the deadline still holds</a:t>
             </a:r>
           </a:p>
         </p:txBody>
@@ -11603,8 +11543,8 @@
         </p:nvSpPr>
         <p:spPr>
           <a:xfrm>
-            <a:off x="731520" y="3977639"/>
-            <a:ext cx="10698480" cy="777240"/>
+            <a:off x="731520" y="4114800"/>
+            <a:ext cx="10698480" cy="822960"/>
           </a:xfrm>
           <a:prstGeom prst="rect">
             <a:avLst/>
@@ -11647,8 +11587,8 @@
         </p:nvSpPr>
         <p:spPr>
           <a:xfrm>
-            <a:off x="731520" y="3977639"/>
-            <a:ext cx="109728" cy="777240"/>
+            <a:off x="731520" y="4114800"/>
+            <a:ext cx="109728" cy="822960"/>
           </a:xfrm>
           <a:prstGeom prst="rect">
             <a:avLst/>
@@ -11691,8 +11631,8 @@
         </p:nvSpPr>
         <p:spPr>
           <a:xfrm>
-            <a:off x="1005840" y="4050791"/>
-            <a:ext cx="10241280" cy="630936"/>
+            <a:off x="1005840" y="4187952"/>
+            <a:ext cx="10241280" cy="676656"/>
           </a:xfrm>
           <a:prstGeom prst="rect">
             <a:avLst/>
@@ -11706,14 +11646,14 @@
           <a:lstStyle/>
           <a:p>
             <a:pPr>
-              <a:defRPr sz="1400" b="1">
+              <a:defRPr sz="1500" b="1">
                 <a:solidFill>
                   <a:srgbClr val="232B33"/>
                 </a:solidFill>
               </a:defRPr>
             </a:pPr>
             <a:r>
-              <a:t>MINIMIZE:  recovery cost = added makespan + tasks moved + data re-shipped   while keeping accuracy</a:t>
+              <a:t>MINIMIZE   the recovery cost: added makespan + tasks moved + data re-shipped, while keeping the accuracy</a:t>
             </a:r>
           </a:p>
         </p:txBody>
@@ -11726,7 +11666,7 @@
         </p:nvSpPr>
         <p:spPr>
           <a:xfrm>
-            <a:off x="594360" y="5074920"/>
+            <a:off x="594360" y="5212080"/>
             <a:ext cx="10972800" cy="5120640"/>
           </a:xfrm>
           <a:prstGeom prst="rect">
@@ -11742,7 +11682,7 @@
           <a:p>
             <a:pPr>
               <a:spcAft>
-                <a:spcPts val="700"/>
+                <a:spcPts val="800"/>
               </a:spcAft>
               <a:defRPr sz="1500">
                 <a:solidFill>
@@ -11751,7 +11691,7 @@
               </a:defRPr>
             </a:pPr>
             <a:r>
-              <a:t>Two granularity shifts at once: task retry -&gt; resource loss;  whole-DAG placement -&gt; minimal-region repair</a:t>
+              <a:t>Two granularity shifts at once: a task retry becomes a resource loss, and whole-DAG placement becomes minimal-region repair</a:t>
             </a:r>
           </a:p>
         </p:txBody>
@@ -11955,14 +11895,14 @@
           <a:lstStyle/>
           <a:p>
             <a:pPr>
-              <a:defRPr sz="1800">
+              <a:defRPr sz="1900">
                 <a:solidFill>
                   <a:srgbClr val="EDF2F7"/>
                 </a:solidFill>
               </a:defRPr>
             </a:pPr>
             <a:r>
-              <a:t>Paper 1 (published) + Paper 2 (submitted): formulation, schedulers, and what the data shows</a:t>
+              <a:t>Paper 1 (published) and Paper 2 (in revision): the formulation, the schedulers, and what the data shows</a:t>
             </a:r>
           </a:p>
         </p:txBody>
@@ -12096,14 +12036,14 @@
           <a:lstStyle/>
           <a:p>
             <a:pPr>
-              <a:defRPr sz="2600" b="1">
+              <a:defRPr sz="2700" b="1">
                 <a:solidFill>
                   <a:srgbClr val="FFFFFF"/>
                 </a:solidFill>
               </a:defRPr>
             </a:pPr>
             <a:r>
-              <a:t>Paper 1 — the published foundation</a:t>
+              <a:t>Paper 1: the published foundation</a:t>
             </a:r>
           </a:p>
         </p:txBody>
@@ -12202,106 +12142,106 @@
           <a:p>
             <a:pPr>
               <a:spcAft>
-                <a:spcPts val="700"/>
+                <a:spcPts val="800"/>
               </a:spcAft>
-              <a:defRPr sz="1700">
+              <a:defRPr sz="1800">
                 <a:solidFill>
                   <a:srgbClr val="232B33"/>
                 </a:solidFill>
               </a:defRPr>
             </a:pPr>
             <a:r>
-              <a:t>IEEE Cloud Summit 2025: 'Towards efficient allocation of tasks in DAG-based workflows across federated fog systems'</a:t>
+              <a:t>Published at IEEE Cloud Summit 2025: 'Towards efficient allocation of tasks in DAG-based workflows across federated fog systems'</a:t>
             </a:r>
           </a:p>
           <a:p>
             <a:pPr>
               <a:spcAft>
-                <a:spcPts val="700"/>
+                <a:spcPts val="800"/>
               </a:spcAft>
-              <a:defRPr sz="1700">
+              <a:defRPr sz="1800">
                 <a:solidFill>
                   <a:srgbClr val="232B33"/>
                 </a:solidFill>
               </a:defRPr>
             </a:pPr>
             <a:r>
-              <a:t>Contribution: the model + four ways to solve it</a:t>
+              <a:t>Its contribution was the model plus four ways to solve it:</a:t>
             </a:r>
           </a:p>
           <a:p>
             <a:pPr lvl="1">
               <a:spcAft>
-                <a:spcPts val="700"/>
+                <a:spcPts val="800"/>
               </a:spcAft>
-              <a:defRPr sz="1500">
+              <a:defRPr sz="1600">
                 <a:solidFill>
                   <a:srgbClr val="5A646E"/>
                 </a:solidFill>
               </a:defRPr>
             </a:pPr>
             <a:r>
-              <a:t>  MILP — exact, with correctness proofs</a:t>
+              <a:t>  an exact MILP with correctness proofs</a:t>
             </a:r>
           </a:p>
           <a:p>
             <a:pPr lvl="1">
               <a:spcAft>
-                <a:spcPts val="700"/>
+                <a:spcPts val="800"/>
               </a:spcAft>
-              <a:defRPr sz="1500">
+              <a:defRPr sz="1600">
                 <a:solidFill>
                   <a:srgbClr val="5A646E"/>
                 </a:solidFill>
               </a:defRPr>
             </a:pPr>
             <a:r>
-              <a:t>  LP relaxation + randomized rounding</a:t>
+              <a:t>  an LP relaxation with randomized rounding</a:t>
             </a:r>
           </a:p>
           <a:p>
             <a:pPr lvl="1">
               <a:spcAft>
-                <a:spcPts val="700"/>
+                <a:spcPts val="800"/>
               </a:spcAft>
-              <a:defRPr sz="1500">
+              <a:defRPr sz="1600">
                 <a:solidFill>
                   <a:srgbClr val="5A646E"/>
                 </a:solidFill>
               </a:defRPr>
             </a:pPr>
             <a:r>
-              <a:t>  data-aware greedy — priority beta*A_i + (1-beta)*CP_i</a:t>
+              <a:t>  a data-aware greedy scheduler</a:t>
             </a:r>
           </a:p>
           <a:p>
             <a:pPr lvl="1">
               <a:spcAft>
-                <a:spcPts val="700"/>
+                <a:spcPts val="800"/>
               </a:spcAft>
-              <a:defRPr sz="1500">
+              <a:defRPr sz="1600">
                 <a:solidFill>
                   <a:srgbClr val="5A646E"/>
                 </a:solidFill>
               </a:defRPr>
             </a:pPr>
             <a:r>
-              <a:t>  genetic algorithm — assignment + fractions as one chromosome</a:t>
+              <a:t>  a genetic algorithm over assignments and fractions</a:t>
             </a:r>
           </a:p>
           <a:p>
             <a:pPr>
               <a:spcAft>
-                <a:spcPts val="700"/>
+                <a:spcPts val="800"/>
               </a:spcAft>
-              <a:defRPr sz="1700">
+              <a:defRPr sz="1800">
                 <a:solidFill>
                   <a:srgbClr val="232B33"/>
                 </a:solidFill>
               </a:defRPr>
             </a:pPr>
             <a:r>
-              <a:t>Left open: no bound, no link-degradation study, no resource-level failures</a:t>
+              <a:t>What it left open: no bound to score against, no link-degradation study, and no resource-level failures</a:t>
             </a:r>
           </a:p>
         </p:txBody>
@@ -12435,7 +12375,7 @@
           <a:lstStyle/>
           <a:p>
             <a:pPr>
-              <a:defRPr sz="2600" b="1">
+              <a:defRPr sz="2700" b="1">
                 <a:solidFill>
                   <a:srgbClr val="FFFFFF"/>
                 </a:solidFill>
@@ -12521,7 +12461,7 @@
               </a:defRPr>
             </a:pPr>
             <a:r>
-              <a:t>1   Introduction &amp; motivation</a:t>
+              <a:t>1   Introduction and motivation</a:t>
             </a:r>
           </a:p>
         </p:txBody>
@@ -12600,7 +12540,7 @@
               </a:defRPr>
             </a:pPr>
             <a:r>
-              <a:t>2   Related work — and the gap</a:t>
+              <a:t>2   Related work, and what is still missing</a:t>
             </a:r>
           </a:p>
         </p:txBody>
@@ -12758,7 +12698,7 @@
               </a:defRPr>
             </a:pPr>
             <a:r>
-              <a:t>4   Completed work &amp; preliminary results</a:t>
+              <a:t>4   Completed work and preliminary results</a:t>
             </a:r>
           </a:p>
         </p:txBody>
@@ -12837,7 +12777,7 @@
               </a:defRPr>
             </a:pPr>
             <a:r>
-              <a:t>5   Proposed research — dynamic partial repartitioning</a:t>
+              <a:t>5   Proposed research: dynamic partial repartitioning</a:t>
             </a:r>
           </a:p>
         </p:txBody>
@@ -12916,7 +12856,7 @@
               </a:defRPr>
             </a:pPr>
             <a:r>
-              <a:t>6   Evaluation plan &amp; timeline</a:t>
+              <a:t>6   Evaluation plan and timeline</a:t>
             </a:r>
           </a:p>
         </p:txBody>
@@ -12995,7 +12935,7 @@
               </a:defRPr>
             </a:pPr>
             <a:r>
-              <a:t>7   Conclusion — expected contributions</a:t>
+              <a:t>7   Conclusion: expected contributions</a:t>
             </a:r>
           </a:p>
         </p:txBody>
@@ -13129,14 +13069,14 @@
           <a:lstStyle/>
           <a:p>
             <a:pPr>
-              <a:defRPr sz="2600" b="1">
+              <a:defRPr sz="2700" b="1">
                 <a:solidFill>
                   <a:srgbClr val="FFFFFF"/>
                 </a:solidFill>
               </a:defRPr>
             </a:pPr>
             <a:r>
-              <a:t>Paper 2 — the formulation, written out</a:t>
+              <a:t>Paper 2: the formulation, written out</a:t>
             </a:r>
           </a:p>
         </p:txBody>
@@ -13235,91 +13175,91 @@
           <a:p>
             <a:pPr>
               <a:spcAft>
-                <a:spcPts val="700"/>
+                <a:spcPts val="800"/>
               </a:spcAft>
-              <a:defRPr sz="1600">
+              <a:defRPr sz="1700">
                 <a:solidFill>
                   <a:srgbClr val="232B33"/>
                 </a:solidFill>
               </a:defRPr>
             </a:pPr>
             <a:r>
-              <a:t>Communication:  c_ji^ba = D_ji / B_ba  if b != a,  0 if co-located</a:t>
+              <a:t>Communication cost:  c_ji = D_ji / B_ba when the edge crosses nodes, and 0 when the tasks are co-located</a:t>
             </a:r>
           </a:p>
           <a:p>
             <a:pPr>
               <a:spcAft>
-                <a:spcPts val="700"/>
+                <a:spcPts val="800"/>
               </a:spcAft>
-              <a:defRPr sz="1600">
+              <a:defRPr sz="1700">
                 <a:solidFill>
                   <a:srgbClr val="232B33"/>
                 </a:solidFill>
               </a:defRPr>
             </a:pPr>
             <a:r>
-              <a:t>Objective:  max  A_bar = (1/n) sum_i A_i sum_a l_ia</a:t>
+              <a:t>Objective:  maximize  A_bar = (1/n) sum_i A_i l_i</a:t>
             </a:r>
           </a:p>
           <a:p>
             <a:pPr>
               <a:spcAft>
-                <a:spcPts val="700"/>
+                <a:spcPts val="800"/>
               </a:spcAft>
-              <a:defRPr sz="1600">
+              <a:defRPr sz="1700">
                 <a:solidFill>
                   <a:srgbClr val="232B33"/>
                 </a:solidFill>
               </a:defRPr>
             </a:pPr>
             <a:r>
-              <a:t>Placement:  sum_a e_ia = 1   over eligible nodes only</a:t>
+              <a:t>Each task goes to exactly one eligible node</a:t>
             </a:r>
           </a:p>
           <a:p>
             <a:pPr>
               <a:spcAft>
-                <a:spcPts val="700"/>
+                <a:spcPts val="800"/>
               </a:spcAft>
-              <a:defRPr sz="1600">
+              <a:defRPr sz="1700">
                 <a:solidFill>
                   <a:srgbClr val="232B33"/>
                 </a:solidFill>
               </a:defRPr>
             </a:pPr>
             <a:r>
-              <a:t>Precedence + data:  M_ia &gt;= y_j + c_ji^ba * e_jb  for all edges (j,i)</a:t>
+              <a:t>A task waits for every predecessor to finish AND for its data to arrive</a:t>
             </a:r>
           </a:p>
           <a:p>
             <a:pPr>
               <a:spcAft>
-                <a:spcPts val="700"/>
+                <a:spcPts val="800"/>
               </a:spcAft>
-              <a:defRPr sz="1600">
+              <a:defRPr sz="1700">
                 <a:solidFill>
                   <a:srgbClr val="232B33"/>
                 </a:solidFill>
               </a:defRPr>
             </a:pPr>
             <a:r>
-              <a:t>Deadline:  y_i = sum_a e_ia (M_ia + t_ia l_ia) &lt;= t_max</a:t>
+              <a:t>Everything finishes by t_max</a:t>
             </a:r>
           </a:p>
           <a:p>
             <a:pPr>
               <a:spcAft>
-                <a:spcPts val="700"/>
+                <a:spcPts val="800"/>
               </a:spcAft>
-              <a:defRPr sz="1600">
+              <a:defRPr sz="1700">
                 <a:solidFill>
                   <a:srgbClr val="232B33"/>
                 </a:solidFill>
               </a:defRPr>
             </a:pPr>
             <a:r>
-              <a:t>Products e*M and e*l are bilinear -&gt; needs linearization (next slide)</a:t>
+              <a:t>The e*M and e*l products are bilinear, which is what the next slide is about</a:t>
             </a:r>
           </a:p>
         </p:txBody>
@@ -13453,14 +13393,14 @@
           <a:lstStyle/>
           <a:p>
             <a:pPr>
-              <a:defRPr sz="2600" b="1">
+              <a:defRPr sz="2700" b="1">
                 <a:solidFill>
                   <a:srgbClr val="FFFFFF"/>
                 </a:solidFill>
               </a:defRPr>
             </a:pPr>
             <a:r>
-              <a:t>Correctness — linearization and lemmas</a:t>
+              <a:t>Correctness: the linearization and the proofs</a:t>
             </a:r>
           </a:p>
         </p:txBody>
@@ -13559,76 +13499,61 @@
           <a:p>
             <a:pPr>
               <a:spcAft>
-                <a:spcPts val="700"/>
+                <a:spcPts val="800"/>
               </a:spcAft>
-              <a:defRPr sz="1600">
+              <a:defRPr sz="1700">
                 <a:solidFill>
                   <a:srgbClr val="232B33"/>
                 </a:solidFill>
               </a:defRPr>
             </a:pPr>
             <a:r>
-              <a:t>Linearization:  z_ia := e_ia * M_ia   via big-M</a:t>
+              <a:t>The product e*M is linearized with a helper z = e * M under big-M constraints</a:t>
             </a:r>
           </a:p>
           <a:p>
             <a:pPr lvl="1">
               <a:spcAft>
-                <a:spcPts val="700"/>
+                <a:spcPts val="800"/>
               </a:spcAft>
-              <a:defRPr sz="1400">
+              <a:defRPr sz="1500">
                 <a:solidFill>
                   <a:srgbClr val="5A646E"/>
                 </a:solidFill>
               </a:defRPr>
             </a:pPr>
             <a:r>
-              <a:t>  z &lt;= M_ia + t_max(1 - e);   z &gt;= M_ia - t_max(1 - e);   z &lt;= t_max * e;   z &gt;= 0</a:t>
-            </a:r>
-          </a:p>
-          <a:p>
-            <a:pPr lvl="1">
-              <a:spcAft>
-                <a:spcPts val="700"/>
-              </a:spcAft>
-              <a:defRPr sz="1400">
-                <a:solidFill>
-                  <a:srgbClr val="5A646E"/>
-                </a:solidFill>
-              </a:defRPr>
-            </a:pPr>
-            <a:r>
-              <a:t>  z &gt;= 0 matters: without it a negative z on an unassigned node could fake an early finish</a:t>
+              <a:t>  the subtle one is z &gt;= 0: without it, an unassigned node could push z negative and fake an early completion time</a:t>
             </a:r>
           </a:p>
           <a:p>
             <a:pPr>
               <a:spcAft>
-                <a:spcPts val="700"/>
+                <a:spcPts val="800"/>
               </a:spcAft>
-              <a:defRPr sz="1600">
+              <a:defRPr sz="1700">
                 <a:solidFill>
                   <a:srgbClr val="232B33"/>
                 </a:solidFill>
               </a:defRPr>
             </a:pPr>
             <a:r>
-              <a:t>Correctness chain:  L1 unique assignment -&gt; L2 single positive fraction -&gt; L3 l&gt;0 only on the assigned node -&gt; L4 precedence order -&gt; L5 deadline feasibility</a:t>
+              <a:t>Five lemmas: the assignment is unique, one positive fraction per task, the fraction lives only on the assigned node, precedence is respected, the deadline holds</a:t>
             </a:r>
           </a:p>
           <a:p>
             <a:pPr>
               <a:spcAft>
-                <a:spcPts val="700"/>
+                <a:spcPts val="800"/>
               </a:spcAft>
-              <a:defRPr sz="1600">
+              <a:defRPr sz="1700">
                 <a:solidFill>
                   <a:srgbClr val="232B33"/>
                 </a:solidFill>
               </a:defRPr>
             </a:pPr>
             <a:r>
-              <a:t>Theorem:  the MILP optimum is the maximum-accuracy feasible schedule</a:t>
+              <a:t>The theorem then says the MILP optimum is the maximum-accuracy feasible schedule</a:t>
             </a:r>
           </a:p>
         </p:txBody>
@@ -13762,14 +13687,14 @@
           <a:lstStyle/>
           <a:p>
             <a:pPr>
-              <a:defRPr sz="2600" b="1">
+              <a:defRPr sz="2700" b="1">
                 <a:solidFill>
                   <a:srgbClr val="FFFFFF"/>
                 </a:solidFill>
               </a:defRPr>
             </a:pPr>
             <a:r>
-              <a:t>Four schedulers on one cost model</a:t>
+              <a:t>Four schedulers, one cost model</a:t>
             </a:r>
           </a:p>
         </p:txBody>
@@ -13892,61 +13817,61 @@
           <a:p>
             <a:pPr>
               <a:spcAft>
-                <a:spcPts val="700"/>
+                <a:spcPts val="800"/>
               </a:spcAft>
-              <a:defRPr sz="1500">
+              <a:defRPr sz="1600">
                 <a:solidFill>
                   <a:srgbClr val="232B33"/>
                 </a:solidFill>
               </a:defRPr>
             </a:pPr>
             <a:r>
-              <a:t>MILP (HiGHS) — the benchmark</a:t>
+              <a:t>The MILP is the benchmark</a:t>
             </a:r>
           </a:p>
           <a:p>
             <a:pPr>
               <a:spcAft>
-                <a:spcPts val="700"/>
+                <a:spcPts val="800"/>
               </a:spcAft>
-              <a:defRPr sz="1500">
+              <a:defRPr sz="1600">
                 <a:solidFill>
                   <a:srgbClr val="232B33"/>
                 </a:solidFill>
               </a:defRPr>
             </a:pPr>
             <a:r>
-              <a:t>LP rounding — relax, sample node per task, re-solve fractions</a:t>
+              <a:t>LP rounding relaxes, samples a node per task, re-solves the fractions</a:t>
             </a:r>
           </a:p>
           <a:p>
             <a:pPr>
               <a:spcAft>
-                <a:spcPts val="700"/>
+                <a:spcPts val="800"/>
               </a:spcAft>
-              <a:defRPr sz="1500">
+              <a:defRPr sz="1600">
                 <a:solidFill>
                   <a:srgbClr val="232B33"/>
                 </a:solidFill>
               </a:defRPr>
             </a:pPr>
             <a:r>
-              <a:t>Greedy — priority + earliest finish; deadline miss -&gt; lower global fraction and retry</a:t>
+              <a:t>The greedy places ready tasks by earliest finish; on a deadline miss it lowers the global fraction and retries</a:t>
             </a:r>
           </a:p>
           <a:p>
             <a:pPr>
               <a:spcAft>
-                <a:spcPts val="700"/>
+                <a:spcPts val="800"/>
               </a:spcAft>
-              <a:defRPr sz="1500">
+              <a:defRPr sz="1600">
                 <a:solidFill>
                   <a:srgbClr val="232B33"/>
                 </a:solidFill>
               </a:defRPr>
             </a:pPr>
             <a:r>
-              <a:t>GA — chromosome = assignment + fractions; fitness = accuracy - lateness penalty</a:t>
+              <a:t>The GA searches assignments and fractions as one chromosome</a:t>
             </a:r>
           </a:p>
         </p:txBody>
@@ -14080,7 +14005,7 @@
           <a:lstStyle/>
           <a:p>
             <a:pPr>
-              <a:defRPr sz="2600" b="1">
+              <a:defRPr sz="2700" b="1">
                 <a:solidFill>
                   <a:srgbClr val="FFFFFF"/>
                 </a:solidFill>
@@ -14191,7 +14116,7 @@
                     <a:lstStyle/>
                     <a:p>
                       <a:pPr>
-                        <a:defRPr sz="1200" b="1">
+                        <a:defRPr sz="1300" b="1">
                           <a:solidFill>
                             <a:srgbClr val="FFFFFF"/>
                           </a:solidFill>
@@ -14214,7 +14139,7 @@
                     <a:lstStyle/>
                     <a:p>
                       <a:pPr>
-                        <a:defRPr sz="1200" b="1">
+                        <a:defRPr sz="1300" b="1">
                           <a:solidFill>
                             <a:srgbClr val="FFFFFF"/>
                           </a:solidFill>
@@ -14239,7 +14164,7 @@
                     <a:lstStyle/>
                     <a:p>
                       <a:pPr>
-                        <a:defRPr sz="1200" b="0">
+                        <a:defRPr sz="1300" b="0">
                           <a:solidFill>
                             <a:srgbClr val="232B33"/>
                           </a:solidFill>
@@ -14262,7 +14187,7 @@
                     <a:lstStyle/>
                     <a:p>
                       <a:pPr>
-                        <a:defRPr sz="1200" b="0">
+                        <a:defRPr sz="1300" b="0">
                           <a:solidFill>
                             <a:srgbClr val="232B33"/>
                           </a:solidFill>
@@ -14287,7 +14212,7 @@
                     <a:lstStyle/>
                     <a:p>
                       <a:pPr>
-                        <a:defRPr sz="1200" b="0">
+                        <a:defRPr sz="1300" b="0">
                           <a:solidFill>
                             <a:srgbClr val="232B33"/>
                           </a:solidFill>
@@ -14310,7 +14235,7 @@
                     <a:lstStyle/>
                     <a:p>
                       <a:pPr>
-                        <a:defRPr sz="1200" b="0">
+                        <a:defRPr sz="1300" b="0">
                           <a:solidFill>
                             <a:srgbClr val="232B33"/>
                           </a:solidFill>
@@ -14335,7 +14260,7 @@
                     <a:lstStyle/>
                     <a:p>
                       <a:pPr>
-                        <a:defRPr sz="1200" b="0">
+                        <a:defRPr sz="1300" b="0">
                           <a:solidFill>
                             <a:srgbClr val="232B33"/>
                           </a:solidFill>
@@ -14358,7 +14283,7 @@
                     <a:lstStyle/>
                     <a:p>
                       <a:pPr>
-                        <a:defRPr sz="1200" b="0">
+                        <a:defRPr sz="1300" b="0">
                           <a:solidFill>
                             <a:srgbClr val="232B33"/>
                           </a:solidFill>
@@ -14383,7 +14308,7 @@
                     <a:lstStyle/>
                     <a:p>
                       <a:pPr>
-                        <a:defRPr sz="1200" b="0">
+                        <a:defRPr sz="1300" b="0">
                           <a:solidFill>
                             <a:srgbClr val="232B33"/>
                           </a:solidFill>
@@ -14406,14 +14331,14 @@
                     <a:lstStyle/>
                     <a:p>
                       <a:pPr>
-                        <a:defRPr sz="1200" b="0">
+                        <a:defRPr sz="1300" b="0">
                           <a:solidFill>
                             <a:srgbClr val="232B33"/>
                           </a:solidFill>
                         </a:defRPr>
                       </a:pPr>
                       <a:r>
-                        <a:t>uniform [10, 100]  (transfer can rival a task)</a:t>
+                        <a:t>uniform [10, 100]  (a transfer can rival a task)</a:t>
                       </a:r>
                     </a:p>
                   </a:txBody>
@@ -14431,7 +14356,7 @@
                     <a:lstStyle/>
                     <a:p>
                       <a:pPr>
-                        <a:defRPr sz="1200" b="0">
+                        <a:defRPr sz="1300" b="0">
                           <a:solidFill>
                             <a:srgbClr val="232B33"/>
                           </a:solidFill>
@@ -14454,7 +14379,7 @@
                     <a:lstStyle/>
                     <a:p>
                       <a:pPr>
-                        <a:defRPr sz="1200" b="0">
+                        <a:defRPr sz="1300" b="0">
                           <a:solidFill>
                             <a:srgbClr val="232B33"/>
                           </a:solidFill>
@@ -14479,7 +14404,7 @@
                     <a:lstStyle/>
                     <a:p>
                       <a:pPr>
-                        <a:defRPr sz="1200" b="0">
+                        <a:defRPr sz="1300" b="0">
                           <a:solidFill>
                             <a:srgbClr val="232B33"/>
                           </a:solidFill>
@@ -14502,7 +14427,7 @@
                     <a:lstStyle/>
                     <a:p>
                       <a:pPr>
-                        <a:defRPr sz="1200" b="0">
+                        <a:defRPr sz="1300" b="0">
                           <a:solidFill>
                             <a:srgbClr val="232B33"/>
                           </a:solidFill>
@@ -14527,7 +14452,7 @@
                     <a:lstStyle/>
                     <a:p>
                       <a:pPr>
-                        <a:defRPr sz="1200" b="0">
+                        <a:defRPr sz="1300" b="0">
                           <a:solidFill>
                             <a:srgbClr val="232B33"/>
                           </a:solidFill>
@@ -14550,7 +14475,7 @@
                     <a:lstStyle/>
                     <a:p>
                       <a:pPr>
-                        <a:defRPr sz="1200" b="0">
+                        <a:defRPr sz="1300" b="0">
                           <a:solidFill>
                             <a:srgbClr val="232B33"/>
                           </a:solidFill>
@@ -14575,7 +14500,7 @@
                     <a:lstStyle/>
                     <a:p>
                       <a:pPr>
-                        <a:defRPr sz="1200" b="0">
+                        <a:defRPr sz="1300" b="0">
                           <a:solidFill>
                             <a:srgbClr val="232B33"/>
                           </a:solidFill>
@@ -14598,14 +14523,14 @@
                     <a:lstStyle/>
                     <a:p>
                       <a:pPr>
-                        <a:defRPr sz="1200" b="0">
+                        <a:defRPr sz="1300" b="0">
                           <a:solidFill>
                             <a:srgbClr val="232B33"/>
                           </a:solidFill>
                         </a:defRPr>
                       </a:pPr>
                       <a:r>
-                        <a:t>mean accuracy vs max-accuracy bound; feasibility; wall time</a:t>
+                        <a:t>mean accuracy vs the max-accuracy bound; feasibility; wall time</a:t>
                       </a:r>
                     </a:p>
                   </a:txBody>
@@ -14623,7 +14548,7 @@
                     <a:lstStyle/>
                     <a:p>
                       <a:pPr>
-                        <a:defRPr sz="1200" b="0">
+                        <a:defRPr sz="1300" b="0">
                           <a:solidFill>
                             <a:srgbClr val="232B33"/>
                           </a:solidFill>
@@ -14646,7 +14571,7 @@
                     <a:lstStyle/>
                     <a:p>
                       <a:pPr>
-                        <a:defRPr sz="1200" b="0">
+                        <a:defRPr sz="1300" b="0">
                           <a:solidFill>
                             <a:srgbClr val="232B33"/>
                           </a:solidFill>
@@ -14797,14 +14722,14 @@
           <a:lstStyle/>
           <a:p>
             <a:pPr>
-              <a:defRPr sz="2600" b="1">
+              <a:defRPr sz="2700" b="1">
                 <a:solidFill>
                   <a:srgbClr val="FFFFFF"/>
                 </a:solidFill>
               </a:defRPr>
             </a:pPr>
             <a:r>
-              <a:t>Q1 — Deadline slack: the scheduler matters exactly when it hurts</a:t>
+              <a:t>Deadline slack: the scheduler matters exactly when it hurts</a:t>
             </a:r>
           </a:p>
         </p:txBody>
@@ -14927,7 +14852,7 @@
           <a:p>
             <a:pPr>
               <a:spcAft>
-                <a:spcPts val="700"/>
+                <a:spcPts val="800"/>
               </a:spcAft>
               <a:defRPr sz="1500">
                 <a:solidFill>
@@ -14936,13 +14861,13 @@
               </a:defRPr>
             </a:pPr>
             <a:r>
-              <a:t>alpha = 1.0: MILP 1.38 vs bound 1.43; rounding 1.25, greedy 1.23, GA 1.20</a:t>
+              <a:t>At alpha = 1.0 the MILP leads at 1.38 against a bound of 1.43; rounding 1.25, greedy 1.23, GA 1.20</a:t>
             </a:r>
           </a:p>
           <a:p>
             <a:pPr>
               <a:spcAft>
-                <a:spcPts val="700"/>
+                <a:spcPts val="800"/>
               </a:spcAft>
               <a:defRPr sz="1500">
                 <a:solidFill>
@@ -14951,13 +14876,13 @@
               </a:defRPr>
             </a:pPr>
             <a:r>
-              <a:t>alpha &gt;= 1.2: greedy reaches the bound; MILP joins by 1.5</a:t>
+              <a:t>From alpha = 1.2 the greedy reaches the bound; the MILP joins it at 1.5</a:t>
             </a:r>
           </a:p>
           <a:p>
             <a:pPr>
               <a:spcAft>
-                <a:spcPts val="700"/>
+                <a:spcPts val="800"/>
               </a:spcAft>
               <a:defRPr sz="1500">
                 <a:solidFill>
@@ -14966,7 +14891,7 @@
               </a:defRPr>
             </a:pPr>
             <a:r>
-              <a:t>Rounding and GA trail 2.5-8% even at alpha = 2.0 — a fixed search budget cannot fully recover</a:t>
+              <a:t>Rounding and the GA still trail 2.5 to 8 percent at alpha = 2.0; a fixed search budget cannot fully recover</a:t>
             </a:r>
           </a:p>
         </p:txBody>
@@ -15082,14 +15007,14 @@
           <a:lstStyle/>
           <a:p>
             <a:pPr>
-              <a:defRPr sz="1400" b="0">
+              <a:defRPr sz="1500" b="0">
                 <a:solidFill>
                   <a:srgbClr val="232B33"/>
                 </a:solidFill>
               </a:defRPr>
             </a:pPr>
             <a:r>
-              <a:t>Take-away:  method choice matters most exactly where the deadline binds; at loose slack almost anything works</a:t>
+              <a:t>Take-away:  the method choice matters most exactly where the deadline binds; at loose slack almost anything works</a:t>
             </a:r>
           </a:p>
         </p:txBody>
@@ -15223,14 +15148,14 @@
           <a:lstStyle/>
           <a:p>
             <a:pPr>
-              <a:defRPr sz="2600" b="1">
+              <a:defRPr sz="2700" b="1">
                 <a:solidFill>
                   <a:srgbClr val="FFFFFF"/>
                 </a:solidFill>
               </a:defRPr>
             </a:pPr>
             <a:r>
-              <a:t>Q2 — Federation size: capacity buys feasibility, not accuracy</a:t>
+              <a:t>Federation size: capacity buys feasibility, not accuracy</a:t>
             </a:r>
           </a:p>
         </p:txBody>
@@ -15353,7 +15278,7 @@
           <a:p>
             <a:pPr>
               <a:spcAft>
-                <a:spcPts val="700"/>
+                <a:spcPts val="800"/>
               </a:spcAft>
               <a:defRPr sz="1500">
                 <a:solidFill>
@@ -15362,13 +15287,13 @@
               </a:defRPr>
             </a:pPr>
             <a:r>
-              <a:t>MILP and greedy match the bound at every N</a:t>
+              <a:t>The MILP and the greedy match the bound at every federation size</a:t>
             </a:r>
           </a:p>
           <a:p>
             <a:pPr>
               <a:spcAft>
-                <a:spcPts val="700"/>
+                <a:spcPts val="800"/>
               </a:spcAft>
               <a:defRPr sz="1500">
                 <a:solidFill>
@@ -15377,13 +15302,13 @@
               </a:defRPr>
             </a:pPr>
             <a:r>
-              <a:t>GA ~1.5% below bound at N=2 -&gt; ~8% at N=10; rounding similar</a:t>
+              <a:t>The GA drifts from 1.5% below the bound at N = 2 to about 8% at N = 10; rounding behaves the same way</a:t>
             </a:r>
           </a:p>
           <a:p>
             <a:pPr>
               <a:spcAft>
-                <a:spcPts val="700"/>
+                <a:spcPts val="800"/>
               </a:spcAft>
               <a:defRPr sz="1500">
                 <a:solidFill>
@@ -15392,7 +15317,7 @@
               </a:defRPr>
             </a:pPr>
             <a:r>
-              <a:t>Placement space grows with N; the search budget does not</a:t>
+              <a:t>The reason is that the placement space grows with N while the search budget stays fixed</a:t>
             </a:r>
           </a:p>
         </p:txBody>
@@ -15508,14 +15433,14 @@
           <a:lstStyle/>
           <a:p>
             <a:pPr>
-              <a:defRPr sz="1400" b="0">
+              <a:defRPr sz="1500" b="0">
                 <a:solidFill>
                   <a:srgbClr val="232B33"/>
                 </a:solidFill>
               </a:defRPr>
             </a:pPr>
             <a:r>
-              <a:t>Take-away:  federation buys feasibility, not accuracy — extra nodes never lift a method above the bound</a:t>
+              <a:t>Take-away:  federation buys feasibility, not accuracy; extra nodes never lift a method above the bound</a:t>
             </a:r>
           </a:p>
         </p:txBody>
@@ -15649,14 +15574,14 @@
           <a:lstStyle/>
           <a:p>
             <a:pPr>
-              <a:defRPr sz="2600" b="1">
+              <a:defRPr sz="2700" b="1">
                 <a:solidFill>
                   <a:srgbClr val="FFFFFF"/>
                 </a:solidFill>
               </a:defRPr>
             </a:pPr>
             <a:r>
-              <a:t>Q3 — Workflow size: the simple greedy holds up best</a:t>
+              <a:t>Workflow size: the simple greedy holds up best</a:t>
             </a:r>
           </a:p>
         </p:txBody>
@@ -15779,7 +15704,7 @@
           <a:p>
             <a:pPr>
               <a:spcAft>
-                <a:spcPts val="700"/>
+                <a:spcPts val="800"/>
               </a:spcAft>
               <a:defRPr sz="1500">
                 <a:solidFill>
@@ -15788,13 +15713,13 @@
               </a:defRPr>
             </a:pPr>
             <a:r>
-              <a:t>n = 10: all methods on the bound (1.41)</a:t>
+              <a:t>At n = 10 all four methods sit on the bound</a:t>
             </a:r>
           </a:p>
           <a:p>
             <a:pPr>
               <a:spcAft>
-                <a:spcPts val="700"/>
+                <a:spcPts val="800"/>
               </a:spcAft>
               <a:defRPr sz="1500">
                 <a:solidFill>
@@ -15803,13 +15728,13 @@
               </a:defRPr>
             </a:pPr>
             <a:r>
-              <a:t>n = 100: MILP + greedy on bound; GA drifts first (1.26)</a:t>
+              <a:t>At n = 100 the GA drifts first</a:t>
             </a:r>
           </a:p>
           <a:p>
             <a:pPr>
               <a:spcAft>
-                <a:spcPts val="700"/>
+                <a:spcPts val="800"/>
               </a:spcAft>
               <a:defRPr sz="1500">
                 <a:solidFill>
@@ -15818,7 +15743,7 @@
               </a:defRPr>
             </a:pPr>
             <a:r>
-              <a:t>n = 1000: MILP past its cap; greedy on bound in 0.15 s; rounding ~93 s/LP; GA 1.10 in ~159 s</a:t>
+              <a:t>At n = 1000 the MILP is past its cap; the greedy stays on the bound in 0.15 s; rounding needs ~93 s per re-solve; the GA falls to 1.10 in ~159 s</a:t>
             </a:r>
           </a:p>
         </p:txBody>
@@ -15934,14 +15859,14 @@
           <a:lstStyle/>
           <a:p>
             <a:pPr>
-              <a:defRPr sz="1400" b="0">
+              <a:defRPr sz="1500" b="0">
                 <a:solidFill>
                   <a:srgbClr val="232B33"/>
                 </a:solidFill>
               </a:defRPr>
             </a:pPr>
             <a:r>
-              <a:t>Take-away:  at 1000 tasks only the greedy is both fast (0.15 s) and bound-level — the only scalable accurate method</a:t>
+              <a:t>Take-away:  at a thousand tasks only the greedy is both fast and bound-level; that result surprised us too</a:t>
             </a:r>
           </a:p>
         </p:txBody>
@@ -16075,14 +16000,14 @@
           <a:lstStyle/>
           <a:p>
             <a:pPr>
-              <a:defRPr sz="2600" b="1">
+              <a:defRPr sz="2700" b="1">
                 <a:solidFill>
                   <a:srgbClr val="FFFFFF"/>
                 </a:solidFill>
               </a:defRPr>
             </a:pPr>
             <a:r>
-              <a:t>Q4 — Failures: scores stay flat; feasibility is the story</a:t>
+              <a:t>Failures: the scores stay flat; feasibility is the story</a:t>
             </a:r>
           </a:p>
         </p:txBody>
@@ -16205,7 +16130,7 @@
           <a:p>
             <a:pPr>
               <a:spcAft>
-                <a:spcPts val="700"/>
+                <a:spcPts val="800"/>
               </a:spcAft>
               <a:defRPr sz="1500">
                 <a:solidFill>
@@ -16214,13 +16139,13 @@
               </a:defRPr>
             </a:pPr>
             <a:r>
-              <a:t>Retry-once: failed task reruns in place; accuracy kept if the retry meets the deadline</a:t>
+              <a:t>Retry-once: a failed task reruns in place and keeps its accuracy if the retry still meets the deadline</a:t>
             </a:r>
           </a:p>
           <a:p>
             <a:pPr>
               <a:spcAft>
-                <a:spcPts val="700"/>
+                <a:spcPts val="800"/>
               </a:spcAft>
               <a:defRPr sz="1500">
                 <a:solidFill>
@@ -16229,13 +16154,13 @@
               </a:defRPr>
             </a:pPr>
             <a:r>
-              <a:t>Scores flat — retries preserve accuracy</a:t>
+              <a:t>The scores stay flat for everyone; feasibility is where they separate</a:t>
             </a:r>
           </a:p>
           <a:p>
             <a:pPr>
               <a:spcAft>
-                <a:spcPts val="700"/>
+                <a:spcPts val="800"/>
               </a:spcAft>
               <a:defRPr sz="1500">
                 <a:solidFill>
@@ -16244,13 +16169,13 @@
               </a:defRPr>
             </a:pPr>
             <a:r>
-              <a:t>Feasibility at rate 0.5: greedy 100%; MILP/GA ~60%; rounding ~20%</a:t>
+              <a:t>At failure rate 0.5: greedy 100%, MILP and GA around 60%, rounding around 20%</a:t>
             </a:r>
           </a:p>
           <a:p>
             <a:pPr>
               <a:spcAft>
-                <a:spcPts val="700"/>
+                <a:spcPts val="800"/>
               </a:spcAft>
               <a:defRPr sz="1500">
                 <a:solidFill>
@@ -16259,7 +16184,7 @@
               </a:defRPr>
             </a:pPr>
             <a:r>
-              <a:t>Greedy finishes early (makespan ~30 vs 40-80) — room for retries</a:t>
+              <a:t>The greedy finishes early, so a retry fits inside the deadline</a:t>
             </a:r>
           </a:p>
         </p:txBody>
@@ -16375,14 +16300,14 @@
           <a:lstStyle/>
           <a:p>
             <a:pPr>
-              <a:defRPr sz="1400" b="0">
+              <a:defRPr sz="1500" b="0">
                 <a:solidFill>
                   <a:srgbClr val="232B33"/>
                 </a:solidFill>
               </a:defRPr>
             </a:pPr>
             <a:r>
-              <a:t>Take-away:  under failures the differentiator is feasibility, not accuracy — early-finish headroom absorbs retries</a:t>
+              <a:t>Take-away:  under failures the differentiator is feasibility, not accuracy; early-finish headroom absorbs the retries</a:t>
             </a:r>
           </a:p>
         </p:txBody>
@@ -16516,14 +16441,14 @@
           <a:lstStyle/>
           <a:p>
             <a:pPr>
-              <a:defRPr sz="2600" b="1">
+              <a:defRPr sz="2700" b="1">
                 <a:solidFill>
                   <a:srgbClr val="FFFFFF"/>
                 </a:solidFill>
               </a:defRPr>
             </a:pPr>
             <a:r>
-              <a:t>Q5 — Bandwidth degradation: what data-awareness is worth</a:t>
+              <a:t>Link degradation: what data-awareness is worth</a:t>
             </a:r>
           </a:p>
         </p:txBody>
@@ -16646,7 +16571,7 @@
           <a:p>
             <a:pPr>
               <a:spcAft>
-                <a:spcPts val="700"/>
+                <a:spcPts val="800"/>
               </a:spcAft>
               <a:defRPr sz="1500">
                 <a:solidFill>
@@ -16655,13 +16580,13 @@
               </a:defRPr>
             </a:pPr>
             <a:r>
-              <a:t>Blind baseline: bound-level scores at every level — but infeasible (80% at 0.5x, 0% below 0.2x)</a:t>
+              <a:t>The blind baseline shows bound-level scores at every level, but it is infeasible: 80% at 0.5x, 0% below 0.2x</a:t>
             </a:r>
           </a:p>
           <a:p>
             <a:pPr>
               <a:spcAft>
-                <a:spcPts val="700"/>
+                <a:spcPts val="800"/>
               </a:spcAft>
               <a:defRPr sz="1500">
                 <a:solidFill>
@@ -16670,13 +16595,13 @@
               </a:defRPr>
             </a:pPr>
             <a:r>
-              <a:t>MILP: feasible at all levels, ~10% score loss at 0.05x</a:t>
+              <a:t>The MILP stays feasible at all levels and loses about 10% of score at 0.05x</a:t>
             </a:r>
           </a:p>
           <a:p>
             <a:pPr>
               <a:spcAft>
-                <a:spcPts val="700"/>
+                <a:spcPts val="800"/>
               </a:spcAft>
               <a:defRPr sz="1500">
                 <a:solidFill>
@@ -16685,13 +16610,13 @@
               </a:defRPr>
             </a:pPr>
             <a:r>
-              <a:t>Greedy: feasible to 0.1x paying accuracy; collapses at 0.05x</a:t>
+              <a:t>The greedy stays feasible to 0.1x by paying in accuracy; it collapses at 0.05x</a:t>
             </a:r>
           </a:p>
           <a:p>
             <a:pPr>
               <a:spcAft>
-                <a:spcPts val="700"/>
+                <a:spcPts val="800"/>
               </a:spcAft>
               <a:defRPr sz="1500">
                 <a:solidFill>
@@ -16700,7 +16625,7 @@
               </a:defRPr>
             </a:pPr>
             <a:r>
-              <a:t>GA holds to 0.1x; rounding survives only above 0.5x</a:t>
+              <a:t>The GA holds to 0.1x; rounding only survives above 0.5x</a:t>
             </a:r>
           </a:p>
         </p:txBody>
@@ -16816,14 +16741,14 @@
           <a:lstStyle/>
           <a:p>
             <a:pPr>
-              <a:defRPr sz="1400" b="0">
+              <a:defRPr sz="1500" b="0">
                 <a:solidFill>
                   <a:srgbClr val="232B33"/>
                 </a:solidFill>
               </a:defRPr>
             </a:pPr>
             <a:r>
-              <a:t>Take-away:  a scheduler that ignores the links reports a perfect score on a workflow that finishes late — high score + late = a missed alert</a:t>
+              <a:t>Take-away:  a scheduler that ignores the links reports a perfect score on a workflow that finishes late; a high score that is late is a missed alert, not a result</a:t>
             </a:r>
           </a:p>
         </p:txBody>
@@ -16957,14 +16882,14 @@
           <a:lstStyle/>
           <a:p>
             <a:pPr>
-              <a:defRPr sz="2600" b="1">
+              <a:defRPr sz="2700" b="1">
                 <a:solidFill>
                   <a:srgbClr val="FFFFFF"/>
                 </a:solidFill>
               </a:defRPr>
             </a:pPr>
             <a:r>
-              <a:t>Across datasets: the same story</a:t>
+              <a:t>The same story across the four datasets</a:t>
             </a:r>
           </a:p>
         </p:txBody>
@@ -17071,7 +16996,7 @@
                     <a:lstStyle/>
                     <a:p>
                       <a:pPr>
-                        <a:defRPr sz="1300" b="1">
+                        <a:defRPr sz="1400" b="1">
                           <a:solidFill>
                             <a:srgbClr val="FFFFFF"/>
                           </a:solidFill>
@@ -17094,7 +17019,7 @@
                     <a:lstStyle/>
                     <a:p>
                       <a:pPr>
-                        <a:defRPr sz="1300" b="1">
+                        <a:defRPr sz="1400" b="1">
                           <a:solidFill>
                             <a:srgbClr val="FFFFFF"/>
                           </a:solidFill>
@@ -17117,7 +17042,7 @@
                     <a:lstStyle/>
                     <a:p>
                       <a:pPr>
-                        <a:defRPr sz="1300" b="1">
+                        <a:defRPr sz="1400" b="1">
                           <a:solidFill>
                             <a:srgbClr val="FFFFFF"/>
                           </a:solidFill>
@@ -17140,7 +17065,7 @@
                     <a:lstStyle/>
                     <a:p>
                       <a:pPr>
-                        <a:defRPr sz="1300" b="1">
+                        <a:defRPr sz="1400" b="1">
                           <a:solidFill>
                             <a:srgbClr val="FFFFFF"/>
                           </a:solidFill>
@@ -17163,7 +17088,7 @@
                     <a:lstStyle/>
                     <a:p>
                       <a:pPr>
-                        <a:defRPr sz="1300" b="1">
+                        <a:defRPr sz="1400" b="1">
                           <a:solidFill>
                             <a:srgbClr val="FFFFFF"/>
                           </a:solidFill>
@@ -17188,7 +17113,7 @@
                     <a:lstStyle/>
                     <a:p>
                       <a:pPr>
-                        <a:defRPr sz="1300" b="0">
+                        <a:defRPr sz="1400" b="0">
                           <a:solidFill>
                             <a:srgbClr val="232B33"/>
                           </a:solidFill>
@@ -17211,7 +17136,7 @@
                     <a:lstStyle/>
                     <a:p>
                       <a:pPr>
-                        <a:defRPr sz="1300" b="0">
+                        <a:defRPr sz="1400" b="0">
                           <a:solidFill>
                             <a:srgbClr val="232B33"/>
                           </a:solidFill>
@@ -17234,7 +17159,7 @@
                     <a:lstStyle/>
                     <a:p>
                       <a:pPr>
-                        <a:defRPr sz="1300" b="0">
+                        <a:defRPr sz="1400" b="0">
                           <a:solidFill>
                             <a:srgbClr val="232B33"/>
                           </a:solidFill>
@@ -17257,7 +17182,7 @@
                     <a:lstStyle/>
                     <a:p>
                       <a:pPr>
-                        <a:defRPr sz="1300" b="0">
+                        <a:defRPr sz="1400" b="0">
                           <a:solidFill>
                             <a:srgbClr val="232B33"/>
                           </a:solidFill>
@@ -17280,7 +17205,7 @@
                     <a:lstStyle/>
                     <a:p>
                       <a:pPr>
-                        <a:defRPr sz="1300" b="0">
+                        <a:defRPr sz="1400" b="0">
                           <a:solidFill>
                             <a:srgbClr val="232B33"/>
                           </a:solidFill>
@@ -17305,7 +17230,7 @@
                     <a:lstStyle/>
                     <a:p>
                       <a:pPr>
-                        <a:defRPr sz="1300" b="0">
+                        <a:defRPr sz="1400" b="0">
                           <a:solidFill>
                             <a:srgbClr val="232B33"/>
                           </a:solidFill>
@@ -17328,7 +17253,7 @@
                     <a:lstStyle/>
                     <a:p>
                       <a:pPr>
-                        <a:defRPr sz="1300" b="0">
+                        <a:defRPr sz="1400" b="0">
                           <a:solidFill>
                             <a:srgbClr val="232B33"/>
                           </a:solidFill>
@@ -17351,7 +17276,7 @@
                     <a:lstStyle/>
                     <a:p>
                       <a:pPr>
-                        <a:defRPr sz="1300" b="0">
+                        <a:defRPr sz="1400" b="0">
                           <a:solidFill>
                             <a:srgbClr val="232B33"/>
                           </a:solidFill>
@@ -17374,7 +17299,7 @@
                     <a:lstStyle/>
                     <a:p>
                       <a:pPr>
-                        <a:defRPr sz="1300" b="0">
+                        <a:defRPr sz="1400" b="0">
                           <a:solidFill>
                             <a:srgbClr val="232B33"/>
                           </a:solidFill>
@@ -17397,7 +17322,7 @@
                     <a:lstStyle/>
                     <a:p>
                       <a:pPr>
-                        <a:defRPr sz="1300" b="0">
+                        <a:defRPr sz="1400" b="0">
                           <a:solidFill>
                             <a:srgbClr val="232B33"/>
                           </a:solidFill>
@@ -17422,7 +17347,7 @@
                     <a:lstStyle/>
                     <a:p>
                       <a:pPr>
-                        <a:defRPr sz="1300" b="0">
+                        <a:defRPr sz="1400" b="0">
                           <a:solidFill>
                             <a:srgbClr val="232B33"/>
                           </a:solidFill>
@@ -17445,7 +17370,7 @@
                     <a:lstStyle/>
                     <a:p>
                       <a:pPr>
-                        <a:defRPr sz="1300" b="0">
+                        <a:defRPr sz="1400" b="0">
                           <a:solidFill>
                             <a:srgbClr val="232B33"/>
                           </a:solidFill>
@@ -17468,7 +17393,7 @@
                     <a:lstStyle/>
                     <a:p>
                       <a:pPr>
-                        <a:defRPr sz="1300" b="0">
+                        <a:defRPr sz="1400" b="0">
                           <a:solidFill>
                             <a:srgbClr val="232B33"/>
                           </a:solidFill>
@@ -17491,7 +17416,7 @@
                     <a:lstStyle/>
                     <a:p>
                       <a:pPr>
-                        <a:defRPr sz="1300" b="0">
+                        <a:defRPr sz="1400" b="0">
                           <a:solidFill>
                             <a:srgbClr val="232B33"/>
                           </a:solidFill>
@@ -17514,7 +17439,7 @@
                     <a:lstStyle/>
                     <a:p>
                       <a:pPr>
-                        <a:defRPr sz="1300" b="0">
+                        <a:defRPr sz="1400" b="0">
                           <a:solidFill>
                             <a:srgbClr val="232B33"/>
                           </a:solidFill>
@@ -17539,7 +17464,7 @@
                     <a:lstStyle/>
                     <a:p>
                       <a:pPr>
-                        <a:defRPr sz="1300" b="0">
+                        <a:defRPr sz="1400" b="0">
                           <a:solidFill>
                             <a:srgbClr val="232B33"/>
                           </a:solidFill>
@@ -17562,7 +17487,7 @@
                     <a:lstStyle/>
                     <a:p>
                       <a:pPr>
-                        <a:defRPr sz="1300" b="0">
+                        <a:defRPr sz="1400" b="0">
                           <a:solidFill>
                             <a:srgbClr val="232B33"/>
                           </a:solidFill>
@@ -17585,7 +17510,7 @@
                     <a:lstStyle/>
                     <a:p>
                       <a:pPr>
-                        <a:defRPr sz="1300" b="0">
+                        <a:defRPr sz="1400" b="0">
                           <a:solidFill>
                             <a:srgbClr val="232B33"/>
                           </a:solidFill>
@@ -17608,7 +17533,7 @@
                     <a:lstStyle/>
                     <a:p>
                       <a:pPr>
-                        <a:defRPr sz="1300" b="0">
+                        <a:defRPr sz="1400" b="0">
                           <a:solidFill>
                             <a:srgbClr val="232B33"/>
                           </a:solidFill>
@@ -17631,7 +17556,7 @@
                     <a:lstStyle/>
                     <a:p>
                       <a:pPr>
-                        <a:defRPr sz="1300" b="0">
+                        <a:defRPr sz="1400" b="0">
                           <a:solidFill>
                             <a:srgbClr val="232B33"/>
                           </a:solidFill>
@@ -17656,7 +17581,7 @@
                     <a:lstStyle/>
                     <a:p>
                       <a:pPr>
-                        <a:defRPr sz="1300" b="0">
+                        <a:defRPr sz="1400" b="0">
                           <a:solidFill>
                             <a:srgbClr val="232B33"/>
                           </a:solidFill>
@@ -17679,7 +17604,7 @@
                     <a:lstStyle/>
                     <a:p>
                       <a:pPr>
-                        <a:defRPr sz="1300" b="0">
+                        <a:defRPr sz="1400" b="0">
                           <a:solidFill>
                             <a:srgbClr val="232B33"/>
                           </a:solidFill>
@@ -17702,7 +17627,7 @@
                     <a:lstStyle/>
                     <a:p>
                       <a:pPr>
-                        <a:defRPr sz="1300" b="0">
+                        <a:defRPr sz="1400" b="0">
                           <a:solidFill>
                             <a:srgbClr val="232B33"/>
                           </a:solidFill>
@@ -17725,7 +17650,7 @@
                     <a:lstStyle/>
                     <a:p>
                       <a:pPr>
-                        <a:defRPr sz="1300" b="0">
+                        <a:defRPr sz="1400" b="0">
                           <a:solidFill>
                             <a:srgbClr val="232B33"/>
                           </a:solidFill>
@@ -17748,7 +17673,7 @@
                     <a:lstStyle/>
                     <a:p>
                       <a:pPr>
-                        <a:defRPr sz="1300" b="0">
+                        <a:defRPr sz="1400" b="0">
                           <a:solidFill>
                             <a:srgbClr val="232B33"/>
                           </a:solidFill>
@@ -17881,14 +17806,14 @@
           <a:lstStyle/>
           <a:p>
             <a:pPr>
-              <a:defRPr sz="1400" b="0">
+              <a:defRPr sz="1500" b="0">
                 <a:solidFill>
                   <a:srgbClr val="232B33"/>
                 </a:solidFill>
               </a:defRPr>
             </a:pPr>
             <a:r>
-              <a:t>Take-away:  accuracy is not free in wall time — and neither is the makespan; the gap widens with scale</a:t>
+              <a:t>Take-away:  accuracy is not free in wall time, and neither is the makespan; the gap widens with scale</a:t>
             </a:r>
           </a:p>
         </p:txBody>
@@ -18092,7 +18017,7 @@
           <a:lstStyle/>
           <a:p>
             <a:pPr>
-              <a:defRPr sz="1800">
+              <a:defRPr sz="1900">
                 <a:solidFill>
                   <a:srgbClr val="EDF2F7"/>
                 </a:solidFill>
@@ -18233,14 +18158,14 @@
           <a:lstStyle/>
           <a:p>
             <a:pPr>
-              <a:defRPr sz="2600" b="1">
+              <a:defRPr sz="2700" b="1">
                 <a:solidFill>
                   <a:srgbClr val="FFFFFF"/>
                 </a:solidFill>
               </a:defRPr>
             </a:pPr>
             <a:r>
-              <a:t>Structural scale: generation to 10^6 vertices</a:t>
+              <a:t>Structural scale: generation to a million vertices</a:t>
             </a:r>
           </a:p>
         </p:txBody>
@@ -18339,61 +18264,61 @@
           <a:p>
             <a:pPr>
               <a:spcAft>
-                <a:spcPts val="700"/>
+                <a:spcPts val="800"/>
               </a:spcAft>
-              <a:defRPr sz="1700">
+              <a:defRPr sz="1600">
                 <a:solidFill>
                   <a:srgbClr val="232B33"/>
                 </a:solidFill>
               </a:defRPr>
             </a:pPr>
             <a:r>
-              <a:t>DAG generator: 10^6 tasks / ~3M edges in 3.1 s; depth ~ log n (24 -&gt; 91 for 10^2 -&gt; 10^6)</a:t>
+              <a:t>The DAG generator makes 10^6 tasks, about 3 million edges, in 3.1 s; depth grows like log n</a:t>
             </a:r>
           </a:p>
           <a:p>
             <a:pPr>
               <a:spcAft>
-                <a:spcPts val="700"/>
+                <a:spcPts val="800"/>
               </a:spcAft>
-              <a:defRPr sz="1700">
+              <a:defRPr sz="1600">
                 <a:solidFill>
                   <a:srgbClr val="232B33"/>
                 </a:solidFill>
               </a:defRPr>
             </a:pPr>
             <a:r>
-              <a:t>Resource graphs: 10^6 nodes / ~2.4M links in 7.3 s; avg degree ~5</a:t>
+              <a:t>Resource graphs: 10^6 nodes, about 2.4 million links, in 7.3 s; average degree around 5</a:t>
             </a:r>
           </a:p>
           <a:p>
             <a:pPr>
               <a:spcAft>
-                <a:spcPts val="700"/>
+                <a:spcPts val="800"/>
               </a:spcAft>
-              <a:defRPr sz="1700">
+              <a:defRPr sz="1600">
                 <a:solidFill>
                   <a:srgbClr val="232B33"/>
                 </a:solidFill>
               </a:defRPr>
             </a:pPr>
             <a:r>
-              <a:t>Schedulable dense instances stop where constraints do:</a:t>
+              <a:t>These are structural instances; schedulable dense instances stop where the constraints do</a:t>
             </a:r>
           </a:p>
           <a:p>
             <a:pPr lvl="1">
               <a:spcAft>
-                <a:spcPts val="700"/>
+                <a:spcPts val="800"/>
               </a:spcAft>
-              <a:defRPr sz="1500">
+              <a:defRPr sz="1400">
                 <a:solidFill>
                   <a:srgbClr val="5A646E"/>
                 </a:solidFill>
               </a:defRPr>
             </a:pPr>
             <a:r>
-              <a:t>  MILP ~800 assignment vars; LP ~10^5 rows at n=1000</a:t>
+              <a:t>  MILP near 800 assignment variables; the LP near 10^5 rows at n = 1000</a:t>
             </a:r>
           </a:p>
         </p:txBody>
@@ -18445,7 +18370,7 @@
           <a:lstStyle/>
           <a:p>
             <a:pPr algn="ctr">
-              <a:defRPr sz="1100" i="1">
+              <a:defRPr sz="1200" i="1">
                 <a:solidFill>
                   <a:srgbClr val="5A646E"/>
                 </a:solidFill>
@@ -18586,14 +18511,14 @@
           <a:lstStyle/>
           <a:p>
             <a:pPr>
-              <a:defRPr sz="2600" b="1">
+              <a:defRPr sz="2700" b="1">
                 <a:solidFill>
                   <a:srgbClr val="FFFFFF"/>
                 </a:solidFill>
               </a:defRPr>
             </a:pPr>
             <a:r>
-              <a:t>Honest limits — and what they leave open</a:t>
+              <a:t>Honest limits, and what they leave open</a:t>
             </a:r>
           </a:p>
         </p:txBody>
@@ -18692,69 +18617,69 @@
           <a:p>
             <a:pPr>
               <a:spcAft>
-                <a:spcPts val="700"/>
+                <a:spcPts val="800"/>
               </a:spcAft>
-              <a:defRPr sz="1700">
+              <a:defRPr sz="1600">
                 <a:solidFill>
                   <a:srgbClr val="232B33"/>
                 </a:solidFill>
               </a:defRPr>
             </a:pPr>
             <a:r>
-              <a:t>MILP capped at ~800 assignment variables — deliberate boundary, not oversight</a:t>
+              <a:t>The MILP is capped at about 800 assignment variables; that is a deliberate boundary, not an oversight</a:t>
             </a:r>
           </a:p>
           <a:p>
             <a:pPr>
               <a:spcAft>
-                <a:spcPts val="700"/>
+                <a:spcPts val="800"/>
               </a:spcAft>
-              <a:defRPr sz="1700">
+              <a:defRPr sz="1600">
                 <a:solidFill>
                   <a:srgbClr val="232B33"/>
                 </a:solidFill>
               </a:defRPr>
             </a:pPr>
             <a:r>
-              <a:t>LP ~10^5 rows at n=1000; GA uses one fixed budget</a:t>
+              <a:t>The LP reaches ~10^5 rows at n = 1000, and the GA runs on one fixed budget</a:t>
             </a:r>
           </a:p>
           <a:p>
             <a:pPr>
               <a:spcAft>
-                <a:spcPts val="700"/>
+                <a:spcPts val="800"/>
               </a:spcAft>
-              <a:defRPr sz="1700">
+              <a:defRPr sz="1600">
                 <a:solidFill>
                   <a:srgbClr val="232B33"/>
                 </a:solidFill>
               </a:defRPr>
             </a:pPr>
             <a:r>
-              <a:t>Failure model: retry-once-in-place — no replication, checkpointing, or migration</a:t>
+              <a:t>The failure model is retry-once-in-place: no replication, checkpointing, or migration yet</a:t>
             </a:r>
           </a:p>
           <a:p>
             <a:pPr>
               <a:spcAft>
-                <a:spcPts val="700"/>
+                <a:spcPts val="800"/>
               </a:spcAft>
-              <a:defRPr sz="1700">
+              <a:defRPr sz="1600">
                 <a:solidFill>
                   <a:srgbClr val="232B33"/>
                 </a:solidFill>
               </a:defRPr>
             </a:pPr>
             <a:r>
-              <a:t>Dense schedulable instances stop near 10^4 tasks; 10^6 experiments are structural</a:t>
+              <a:t>Dense schedulable instances stop near 10^4 tasks; the 10^6 experiments are structural</a:t>
             </a:r>
           </a:p>
           <a:p>
             <a:pPr>
               <a:spcAft>
-                <a:spcPts val="700"/>
+                <a:spcPts val="800"/>
               </a:spcAft>
-              <a:defRPr sz="1700">
+              <a:defRPr sz="1600">
                 <a:solidFill>
                   <a:srgbClr val="232B33"/>
                 </a:solidFill>
@@ -18764,16 +18689,16 @@
           <a:p>
             <a:pPr>
               <a:spcAft>
-                <a:spcPts val="700"/>
+                <a:spcPts val="800"/>
               </a:spcAft>
-              <a:defRPr sz="1700">
+              <a:defRPr sz="1600">
                 <a:solidFill>
                   <a:srgbClr val="232B33"/>
                 </a:solidFill>
               </a:defRPr>
             </a:pPr>
             <a:r>
-              <a:t>Open: a whole resource fails mid-workflow — the schedule is decided up front; repair is not</a:t>
+              <a:t>What is open: a whole resource fails mid-workflow, and the schedule was decided up front</a:t>
             </a:r>
           </a:p>
         </p:txBody>
@@ -18977,14 +18902,14 @@
           <a:lstStyle/>
           <a:p>
             <a:pPr>
-              <a:defRPr sz="1800">
+              <a:defRPr sz="1900">
                 <a:solidFill>
                   <a:srgbClr val="EDF2F7"/>
                 </a:solidFill>
               </a:defRPr>
             </a:pPr>
             <a:r>
-              <a:t>Repair the smallest affected region — leave everything else alone</a:t>
+              <a:t>Repair the smallest affected region and leave everything else alone</a:t>
             </a:r>
           </a:p>
         </p:txBody>
@@ -19118,14 +19043,14 @@
           <a:lstStyle/>
           <a:p>
             <a:pPr>
-              <a:defRPr sz="2600" b="1">
+              <a:defRPr sz="2700" b="1">
                 <a:solidFill>
                   <a:srgbClr val="FFFFFF"/>
                 </a:solidFill>
               </a:defRPr>
             </a:pPr>
             <a:r>
-              <a:t>The proposal in one line — and its questions</a:t>
+              <a:t>The proposal, and the questions it raises</a:t>
             </a:r>
           </a:p>
         </p:txBody>
@@ -19318,7 +19243,7 @@
               </a:defRPr>
             </a:pPr>
             <a:r>
-              <a:t>How can we quickly repartition and reschedule only the affected part of a DAG workflow after a fog resource fails — reducing recovery time, communication cost, task movement, and completion time?</a:t>
+              <a:t>How can we quickly repartition and reschedule only the affected part of a DAG workflow after a fog resource fails, while reducing recovery time, communication cost, task movement, and completion time?</a:t>
             </a:r>
           </a:p>
         </p:txBody>
@@ -19347,46 +19272,46 @@
           <a:p>
             <a:pPr>
               <a:spcAft>
-                <a:spcPts val="700"/>
+                <a:spcPts val="800"/>
               </a:spcAft>
-              <a:defRPr sz="1600">
+              <a:defRPr sz="1700">
                 <a:solidFill>
                   <a:srgbClr val="232B33"/>
                 </a:solidFill>
               </a:defRPr>
             </a:pPr>
             <a:r>
-              <a:t>RQ1 — Boundary:  what is the smallest DAG region that must be repartitioned? (stranded + dependents that must move)</a:t>
+              <a:t>RQ1, the boundary: what is the smallest DAG region that must be repartitioned?</a:t>
             </a:r>
           </a:p>
           <a:p>
             <a:pPr>
               <a:spcAft>
-                <a:spcPts val="700"/>
+                <a:spcPts val="800"/>
               </a:spcAft>
-              <a:defRPr sz="1600">
+              <a:defRPr sz="1700">
                 <a:solidFill>
                   <a:srgbClr val="232B33"/>
                 </a:solidFill>
               </a:defRPr>
             </a:pPr>
             <a:r>
-              <a:t>RQ2 — Repair:  how to repartition that region to surviving nodes with minimum recovery cost and the deadline still met?</a:t>
+              <a:t>RQ2, the repair: how do we repartition that region onto surviving nodes at minimum recovery cost and still meet the deadline?</a:t>
             </a:r>
           </a:p>
           <a:p>
             <a:pPr>
               <a:spcAft>
-                <a:spcPts val="700"/>
+                <a:spcPts val="800"/>
               </a:spcAft>
-              <a:defRPr sz="1600">
+              <a:defRPr sz="1700">
                 <a:solidFill>
                   <a:srgbClr val="232B33"/>
                 </a:solidFill>
               </a:defRPr>
             </a:pPr>
             <a:r>
-              <a:t>RQ3 — Paths:  how to update communication paths incrementally instead of recomputing them?</a:t>
+              <a:t>RQ3, the paths: how do we update communication paths incrementally instead of recomputing them?</a:t>
             </a:r>
           </a:p>
         </p:txBody>
@@ -19520,7 +19445,7 @@
           <a:lstStyle/>
           <a:p>
             <a:pPr>
-              <a:defRPr sz="2600" b="1">
+              <a:defRPr sz="2700" b="1">
                 <a:solidFill>
                   <a:srgbClr val="FFFFFF"/>
                 </a:solidFill>
@@ -20635,7 +20560,7 @@
           <a:p>
             <a:pPr>
               <a:spcAft>
-                <a:spcPts val="700"/>
+                <a:spcPts val="800"/>
               </a:spcAft>
               <a:defRPr sz="1600">
                 <a:solidFill>
@@ -20644,13 +20569,13 @@
               </a:defRPr>
             </a:pPr>
             <a:r>
-              <a:t>Completed tasks never restart; unaffected tasks never move</a:t>
+              <a:t>The invariant: completed tasks never restart, and healthy tasks never move</a:t>
             </a:r>
           </a:p>
           <a:p>
             <a:pPr>
               <a:spcAft>
-                <a:spcPts val="700"/>
+                <a:spcPts val="800"/>
               </a:spcAft>
               <a:defRPr sz="1600">
                 <a:solidFill>
@@ -20659,7 +20584,7 @@
               </a:defRPr>
             </a:pPr>
             <a:r>
-              <a:t>The boundary question (RQ1): is rescuing the stranded tasks enough, or must dependents move too?</a:t>
+              <a:t>The boundary question (RQ1): is rescuing just the stranded tasks enough, or do dependents have to move too?</a:t>
             </a:r>
           </a:p>
         </p:txBody>
@@ -20793,7 +20718,7 @@
           <a:lstStyle/>
           <a:p>
             <a:pPr>
-              <a:defRPr sz="2600" b="1">
+              <a:defRPr sz="2700" b="1">
                 <a:solidFill>
                   <a:srgbClr val="FFFFFF"/>
                 </a:solidFill>
@@ -22006,14 +21931,14 @@
           <a:lstStyle/>
           <a:p>
             <a:pPr>
-              <a:defRPr sz="1400" b="0">
+              <a:defRPr sz="1500" b="0">
                 <a:solidFill>
                   <a:srgbClr val="232B33"/>
                 </a:solidFill>
               </a:defRPr>
             </a:pPr>
             <a:r>
-              <a:t>Repartition cost model: added makespan + comm delay + data re-shipped + move cost + load balance — under the deadline</a:t>
+              <a:t>The repartition cost model: added makespan, communication delay, data re-shipped, move cost, load balance, all under the deadline</a:t>
             </a:r>
           </a:p>
         </p:txBody>
@@ -22129,14 +22054,14 @@
           <a:lstStyle/>
           <a:p>
             <a:pPr>
-              <a:defRPr sz="1400" b="0">
+              <a:defRPr sz="1500" b="0">
                 <a:solidFill>
                   <a:srgbClr val="232B33"/>
                 </a:solidFill>
               </a:defRPr>
             </a:pPr>
             <a:r>
-              <a:t>Invariant throughout: completed tasks never restart, unaffected assignments never move.</a:t>
+              <a:t>And one invariant throughout: completed tasks never restart, and unaffected assignments never move.</a:t>
             </a:r>
           </a:p>
         </p:txBody>
@@ -22270,14 +22195,14 @@
           <a:lstStyle/>
           <a:p>
             <a:pPr>
-              <a:defRPr sz="2600" b="1">
+              <a:defRPr sz="2700" b="1">
                 <a:solidFill>
                   <a:srgbClr val="FFFFFF"/>
                 </a:solidFill>
               </a:defRPr>
             </a:pPr>
             <a:r>
-              <a:t>RQ1 depth — the boundary rule</a:t>
+              <a:t>RQ1: where does the repair boundary lie?</a:t>
             </a:r>
           </a:p>
         </p:txBody>
@@ -22376,7 +22301,7 @@
           <a:p>
             <a:pPr>
               <a:spcAft>
-                <a:spcPts val="700"/>
+                <a:spcPts val="800"/>
               </a:spcAft>
               <a:defRPr sz="1600">
                 <a:solidFill>
@@ -22385,13 +22310,13 @@
               </a:defRPr>
             </a:pPr>
             <a:r>
-              <a:t>Start:  A = S  (stranded unfinished tasks)</a:t>
+              <a:t>Start with the stranded set S; that part is mandatory</a:t>
             </a:r>
           </a:p>
           <a:p>
             <a:pPr>
               <a:spcAft>
-                <a:spcPts val="700"/>
+                <a:spcPts val="800"/>
               </a:spcAft>
               <a:defRPr sz="1600">
                 <a:solidFill>
@@ -22400,13 +22325,13 @@
               </a:defRPr>
             </a:pPr>
             <a:r>
-              <a:t>Expand while some neighbor fails a stay-test:</a:t>
+              <a:t>Then admit a neighbor while it fails one of two stay-tests:</a:t>
             </a:r>
           </a:p>
           <a:p>
             <a:pPr lvl="1">
               <a:spcAft>
-                <a:spcPts val="700"/>
+                <a:spcPts val="800"/>
               </a:spcAft>
               <a:defRPr sz="1400">
                 <a:solidFill>
@@ -22415,13 +22340,13 @@
               </a:defRPr>
             </a:pPr>
             <a:r>
-              <a:t>  deadline test — staying makes its finish exceed the slack left at tau</a:t>
+              <a:t>  a deadline test: staying pushes its finish time past the slack remaining at tau</a:t>
             </a:r>
           </a:p>
           <a:p>
             <a:pPr lvl="1">
               <a:spcAft>
-                <a:spcPts val="700"/>
+                <a:spcPts val="800"/>
               </a:spcAft>
               <a:defRPr sz="1400">
                 <a:solidFill>
@@ -22430,13 +22355,13 @@
               </a:defRPr>
             </a:pPr>
             <a:r>
-              <a:t>  locality test — staying strands its input on a long path (D/B too large)</a:t>
+              <a:t>  a locality test: staying strands its input on a path too slow to serve it in time</a:t>
             </a:r>
           </a:p>
           <a:p>
             <a:pPr>
               <a:spcAft>
-                <a:spcPts val="700"/>
+                <a:spcPts val="800"/>
               </a:spcAft>
               <a:defRPr sz="1600">
                 <a:solidFill>
@@ -22445,13 +22370,13 @@
               </a:defRPr>
             </a:pPr>
             <a:r>
-              <a:t>Stop at a cap on |A| or when no neighbor fails a test — minimality is the claim to verify</a:t>
+              <a:t>Stop when no neighbor fails a test, or when the region hits a size cap; minimality is the claim we verify</a:t>
             </a:r>
           </a:p>
           <a:p>
             <a:pPr>
               <a:spcAft>
-                <a:spcPts val="700"/>
+                <a:spcPts val="800"/>
               </a:spcAft>
               <a:defRPr sz="1600">
                 <a:solidFill>
@@ -22460,7 +22385,7 @@
               </a:defRPr>
             </a:pPr>
             <a:r>
-              <a:t>Output:  affected subgraph A with its boundary dependencies — the only graph we repartition</a:t>
+              <a:t>The output is the affected subgraph plus its boundary pins: the tasks that stayed put and fix the arrival times the repair must respect</a:t>
             </a:r>
           </a:p>
         </p:txBody>
@@ -22594,14 +22519,14 @@
           <a:lstStyle/>
           <a:p>
             <a:pPr>
-              <a:defRPr sz="2600" b="1">
+              <a:defRPr sz="2700" b="1">
                 <a:solidFill>
                   <a:srgbClr val="FFFFFF"/>
                 </a:solidFill>
               </a:defRPr>
             </a:pPr>
             <a:r>
-              <a:t>RQ2 depth — repartitioning the region</a:t>
+              <a:t>RQ2: repartitioning the region</a:t>
             </a:r>
           </a:p>
         </p:txBody>
@@ -22700,7 +22625,7 @@
           <a:p>
             <a:pPr>
               <a:spcAft>
-                <a:spcPts val="700"/>
+                <a:spcPts val="800"/>
               </a:spcAft>
               <a:defRPr sz="1600">
                 <a:solidFill>
@@ -22709,13 +22634,13 @@
               </a:defRPr>
             </a:pPr>
             <a:r>
-              <a:t>Repair is a constrained re-optimization on A — the Part II schedulers become region solvers</a:t>
+              <a:t>Repair is a constrained re-optimization on the region; the paper-two schedulers become the region solvers</a:t>
             </a:r>
           </a:p>
           <a:p>
             <a:pPr>
               <a:spcAft>
-                <a:spcPts val="700"/>
+                <a:spcPts val="800"/>
               </a:spcAft>
               <a:defRPr sz="1600">
                 <a:solidFill>
@@ -22724,13 +22649,13 @@
               </a:defRPr>
             </a:pPr>
             <a:r>
-              <a:t>Objective:  min (added makespan + w1*tasks moved + w2*data re-shipped) s.t. accuracy and deadline</a:t>
+              <a:t>The objective minimizes added makespan plus moved tasks plus re-shipped data, subject to accuracy and the deadline</a:t>
             </a:r>
           </a:p>
           <a:p>
             <a:pPr>
               <a:spcAft>
-                <a:spcPts val="700"/>
+                <a:spcPts val="800"/>
               </a:spcAft>
               <a:defRPr sz="1600">
                 <a:solidFill>
@@ -22739,13 +22664,13 @@
               </a:defRPr>
             </a:pPr>
             <a:r>
-              <a:t>Boundary pins:  tasks that stayed fix the data-arrival times A must respect</a:t>
+              <a:t>The boundary pins enter as constants: the arrival times of data from tasks that stayed put</a:t>
             </a:r>
           </a:p>
           <a:p>
             <a:pPr>
               <a:spcAft>
-                <a:spcPts val="700"/>
+                <a:spcPts val="800"/>
               </a:spcAft>
               <a:defRPr sz="1600">
                 <a:solidFill>
@@ -22754,13 +22679,13 @@
               </a:defRPr>
             </a:pPr>
             <a:r>
-              <a:t>Replacement pool:  surviving nodes with capacity + short paths to where parents/children live</a:t>
+              <a:t>Replacement resources come from the surviving nodes with enough capacity and short paths to where the parents and children live</a:t>
             </a:r>
           </a:p>
           <a:p>
             <a:pPr>
               <a:spcAft>
-                <a:spcPts val="700"/>
+                <a:spcPts val="800"/>
               </a:spcAft>
               <a:defRPr sz="1600">
                 <a:solidFill>
@@ -22769,7 +22694,7 @@
               </a:defRPr>
             </a:pPr>
             <a:r>
-              <a:t>Greedy repair first (ms-scale), MILP repair as the small-region reference</a:t>
+              <a:t>A greedy repair gives millisecond-scale answers; the MILP repair is the reference for small regions</a:t>
             </a:r>
           </a:p>
         </p:txBody>
@@ -22903,14 +22828,14 @@
           <a:lstStyle/>
           <a:p>
             <a:pPr>
-              <a:defRPr sz="2600" b="1">
+              <a:defRPr sz="2700" b="1">
                 <a:solidFill>
                   <a:srgbClr val="FFFFFF"/>
                 </a:solidFill>
               </a:defRPr>
             </a:pPr>
             <a:r>
-              <a:t>RQ3 depth — incremental path updates</a:t>
+              <a:t>RQ3: updating the paths incrementally</a:t>
             </a:r>
           </a:p>
         </p:txBody>
@@ -23009,7 +22934,7 @@
           <a:p>
             <a:pPr>
               <a:spcAft>
-                <a:spcPts val="700"/>
+                <a:spcPts val="800"/>
               </a:spcAft>
               <a:defRPr sz="1600">
                 <a:solidFill>
@@ -23018,13 +22943,13 @@
               </a:defRPr>
             </a:pPr>
             <a:r>
-              <a:t>Moved tasks need new comm paths to parents and children</a:t>
+              <a:t>Moved tasks need new communication paths to their parents and children</a:t>
             </a:r>
           </a:p>
           <a:p>
             <a:pPr>
               <a:spcAft>
-                <a:spcPts val="700"/>
+                <a:spcPts val="800"/>
               </a:spcAft>
               <a:defRPr sz="1600">
                 <a:solidFill>
@@ -23033,13 +22958,13 @@
               </a:defRPr>
             </a:pPr>
             <a:r>
-              <a:t>Recomputing all shortest paths on G_R mid-workflow is too slow</a:t>
+              <a:t>Recomputing all shortest paths on the infrastructure graph mid-workflow is too slow</a:t>
             </a:r>
           </a:p>
           <a:p>
             <a:pPr>
               <a:spcAft>
-                <a:spcPts val="700"/>
+                <a:spcPts val="800"/>
               </a:spcAft>
               <a:defRPr sz="1600">
                 <a:solidFill>
@@ -23048,13 +22973,13 @@
               </a:defRPr>
             </a:pPr>
             <a:r>
-              <a:t>Instead: incremental/dynamic SPT update (Riazi, Bhowmick, Khanda et al.)</a:t>
+              <a:t>So we reuse dynamic single-source shortest-path updates (Riazi, Khanda, Bhowmick and colleagues)</a:t>
             </a:r>
           </a:p>
           <a:p>
             <a:pPr lvl="1">
               <a:spcAft>
-                <a:spcPts val="700"/>
+                <a:spcPts val="800"/>
               </a:spcAft>
               <a:defRPr sz="1400">
                 <a:solidFill>
@@ -23063,13 +22988,13 @@
               </a:defRPr>
             </a:pPr>
             <a:r>
-              <a:t>  touch only paths through the deleted node and the moved tasks</a:t>
+              <a:t>  only the paths through the deleted node and the moved tasks get updated</a:t>
             </a:r>
           </a:p>
           <a:p>
             <a:pPr>
               <a:spcAft>
-                <a:spcPts val="700"/>
+                <a:spcPts val="800"/>
               </a:spcAft>
               <a:defRPr sz="1600">
                 <a:solidFill>
@@ -23078,7 +23003,7 @@
               </a:defRPr>
             </a:pPr>
             <a:r>
-              <a:t>Novel application: dynamic SPT has never driven workflow repartitioning</a:t>
+              <a:t>Using dynamic SPT to drive workflow recovery is, as far as we know, new</a:t>
             </a:r>
           </a:p>
         </p:txBody>
@@ -23212,14 +23137,14 @@
           <a:lstStyle/>
           <a:p>
             <a:pPr>
-              <a:defRPr sz="2600" b="1">
+              <a:defRPr sz="2700" b="1">
                 <a:solidFill>
                   <a:srgbClr val="FFFFFF"/>
                 </a:solidFill>
               </a:defRPr>
             </a:pPr>
             <a:r>
-              <a:t>What is new — positioning</a:t>
+              <a:t>What is new, positioned against the literature</a:t>
             </a:r>
           </a:p>
         </p:txBody>
@@ -23318,7 +23243,7 @@
           <a:p>
             <a:pPr>
               <a:spcAft>
-                <a:spcPts val="700"/>
+                <a:spcPts val="800"/>
               </a:spcAft>
               <a:defRPr sz="1600">
                 <a:solidFill>
@@ -23327,13 +23252,13 @@
               </a:defRPr>
             </a:pPr>
             <a:r>
-              <a:t>Known: dynamic shortest-path updates — never applied to workflow repartitioning</a:t>
+              <a:t>Dynamic shortest-path updates exist, but have never driven workflow repartitioning</a:t>
             </a:r>
           </a:p>
           <a:p>
             <a:pPr>
               <a:spcAft>
-                <a:spcPts val="700"/>
+                <a:spcPts val="800"/>
               </a:spcAft>
               <a:defRPr sz="1600">
                 <a:solidFill>
@@ -23342,13 +23267,13 @@
               </a:defRPr>
             </a:pPr>
             <a:r>
-              <a:t>Known: fog rescheduling on uncertain events; redistribution on join/leave</a:t>
+              <a:t>Fog rescheduling and join-leave redistribution exist, but without the two-graph coupling</a:t>
             </a:r>
           </a:p>
           <a:p>
             <a:pPr>
               <a:spcAft>
-                <a:spcPts val="700"/>
+                <a:spcPts val="800"/>
               </a:spcAft>
               <a:defRPr sz="1600">
                 <a:solidFill>
@@ -23357,13 +23282,13 @@
               </a:defRPr>
             </a:pPr>
             <a:r>
-              <a:t>Known: partial workflow reconsideration — without the two-graph coupling</a:t>
+              <a:t>Partial workflow reconsideration exists, but not at failure granularity</a:t>
             </a:r>
           </a:p>
           <a:p>
             <a:pPr>
               <a:spcAft>
-                <a:spcPts val="700"/>
+                <a:spcPts val="800"/>
               </a:spcAft>
               <a:defRPr sz="1600">
                 <a:solidFill>
@@ -23375,7 +23300,7 @@
           <a:p>
             <a:pPr>
               <a:spcAft>
-                <a:spcPts val="700"/>
+                <a:spcPts val="800"/>
               </a:spcAft>
               <a:defRPr sz="1600">
                 <a:solidFill>
@@ -23384,7 +23309,7 @@
               </a:defRPr>
             </a:pPr>
             <a:r>
-              <a:t>New:  infra-node failure -&gt; smallest affected DAG region -&gt; repartition only that region -&gt; incremental path update -&gt; resume</a:t>
+              <a:t>What is new: an infrastructure-node failure maps to the smallest affected DAG region; only that region is repartitioned; the paths update incrementally; the workflow resumes</a:t>
             </a:r>
           </a:p>
         </p:txBody>
@@ -23518,7 +23443,7 @@
           <a:lstStyle/>
           <a:p>
             <a:pPr>
-              <a:defRPr sz="2600" b="1">
+              <a:defRPr sz="2700" b="1">
                 <a:solidFill>
                   <a:srgbClr val="FFFFFF"/>
                 </a:solidFill>
@@ -23624,46 +23549,46 @@
           <a:p>
             <a:pPr>
               <a:spcAft>
-                <a:spcPts val="700"/>
+                <a:spcPts val="800"/>
               </a:spcAft>
-              <a:defRPr sz="1700">
+              <a:defRPr sz="1800">
                 <a:solidFill>
                   <a:srgbClr val="232B33"/>
                 </a:solidFill>
               </a:defRPr>
             </a:pPr>
             <a:r>
-              <a:t>A disaster unfolds: flood, wildfire, offshore incident</a:t>
+              <a:t>A disaster is unfolding: a flood, a wildfire, an offshore incident</a:t>
             </a:r>
           </a:p>
           <a:p>
             <a:pPr>
               <a:spcAft>
-                <a:spcPts val="700"/>
+                <a:spcPts val="800"/>
               </a:spcAft>
-              <a:defRPr sz="1700">
+              <a:defRPr sz="1800">
                 <a:solidFill>
                   <a:srgbClr val="232B33"/>
                 </a:solidFill>
               </a:defRPr>
             </a:pPr>
             <a:r>
-              <a:t>The deadline is hard: a forecast that arrives late is a forecast nobody uses</a:t>
+              <a:t>The deadline is hard. A forecast that arrives late is a forecast nobody uses</a:t>
             </a:r>
           </a:p>
           <a:p>
             <a:pPr>
               <a:spcAft>
-                <a:spcPts val="700"/>
+                <a:spcPts val="800"/>
               </a:spcAft>
-              <a:defRPr sz="1700">
+              <a:defRPr sz="1800">
                 <a:solidFill>
                   <a:srgbClr val="232B33"/>
                 </a:solidFill>
               </a:defRPr>
             </a:pPr>
             <a:r>
-              <a:t>The uplink to the cloud is degraded or gone — the work must run on nearby fog machines</a:t>
+              <a:t>And the same event that creates the deadline also degrades or kills the link to the cloud</a:t>
             </a:r>
           </a:p>
         </p:txBody>
@@ -24479,7 +24404,7 @@
               </a:defRPr>
             </a:pPr>
             <a:r>
-              <a:t>How it will be tested — and when</a:t>
+              <a:t>How it will be tested, and when</a:t>
             </a:r>
           </a:p>
         </p:txBody>
@@ -24507,7 +24432,7 @@
           <a:lstStyle/>
           <a:p>
             <a:pPr>
-              <a:defRPr sz="1800">
+              <a:defRPr sz="1900">
                 <a:solidFill>
                   <a:srgbClr val="EDF2F7"/>
                 </a:solidFill>
@@ -24648,7 +24573,7 @@
           <a:lstStyle/>
           <a:p>
             <a:pPr>
-              <a:defRPr sz="2600" b="1">
+              <a:defRPr sz="2700" b="1">
                 <a:solidFill>
                   <a:srgbClr val="FFFFFF"/>
                 </a:solidFill>
@@ -24814,7 +24739,7 @@
                         </a:defRPr>
                       </a:pPr>
                       <a:r>
-                        <a:t>Complete repartition — reschedule the whole DAG</a:t>
+                        <a:t>Complete repartition: reschedule the whole DAG</a:t>
                       </a:r>
                     </a:p>
                   </a:txBody>
@@ -24837,7 +24762,7 @@
                         </a:defRPr>
                       </a:pPr>
                       <a:r>
-                        <a:t>Recovery time (failure detect -&gt; resume)</a:t>
+                        <a:t>Recovery time (detect to resume)</a:t>
                       </a:r>
                     </a:p>
                   </a:txBody>
@@ -24862,7 +24787,7 @@
                         </a:defRPr>
                       </a:pPr>
                       <a:r>
-                        <a:t>Greedy rescue — reassign stranded tasks one by one</a:t>
+                        <a:t>Greedy rescue: reassign stranded tasks one by one</a:t>
                       </a:r>
                     </a:p>
                   </a:txBody>
@@ -24885,7 +24810,7 @@
                         </a:defRPr>
                       </a:pPr>
                       <a:r>
-                        <a:t>Workflow completion time / deadline success rate</a:t>
+                        <a:t>Completion time / deadline success rate</a:t>
                       </a:r>
                     </a:p>
                   </a:txBody>
@@ -24910,7 +24835,7 @@
                         </a:defRPr>
                       </a:pPr>
                       <a:r>
-                        <a:t>Static — no repair (accuracy of whatever survives)</a:t>
+                        <a:t>Static, no repair: whatever survives</a:t>
                       </a:r>
                     </a:p>
                   </a:txBody>
@@ -24933,7 +24858,7 @@
                         </a:defRPr>
                       </a:pPr>
                       <a:r>
-                        <a:t>Communication cost + data re-shipped</a:t>
+                        <a:t>Communication cost and data re-shipped</a:t>
                       </a:r>
                     </a:p>
                   </a:txBody>
@@ -24958,7 +24883,7 @@
                         </a:defRPr>
                       </a:pPr>
                       <a:r>
-                        <a:t>MILP repair on small cases — the quality reference</a:t>
+                        <a:t>MILP repair on small cases: the reference</a:t>
                       </a:r>
                     </a:p>
                   </a:txBody>
@@ -25107,14 +25032,14 @@
           <a:lstStyle/>
           <a:p>
             <a:pPr>
-              <a:defRPr sz="1400" b="0">
+              <a:defRPr sz="1500" b="0">
                 <a:solidFill>
                   <a:srgbClr val="232B33"/>
                 </a:solidFill>
               </a:defRPr>
             </a:pPr>
             <a:r>
-              <a:t>Take-away:  the Part II platform supplies the baselines and the failure-injection machinery — the testbed already exists</a:t>
+              <a:t>Take-away:  the platform from paper two already supplies the baselines and the failure injection; the testbed exists</a:t>
             </a:r>
           </a:p>
         </p:txBody>
@@ -25248,14 +25173,14 @@
           <a:lstStyle/>
           <a:p>
             <a:pPr>
-              <a:defRPr sz="2600" b="1">
+              <a:defRPr sz="2700" b="1">
                 <a:solidFill>
                   <a:srgbClr val="FFFFFF"/>
                 </a:solidFill>
               </a:defRPr>
             </a:pPr>
             <a:r>
-              <a:t>Experiment design — and hypotheses</a:t>
+              <a:t>Experiment design, and the hypotheses</a:t>
             </a:r>
           </a:p>
         </p:txBody>
@@ -25354,7 +25279,7 @@
           <a:p>
             <a:pPr>
               <a:spcAft>
-                <a:spcPts val="700"/>
+                <a:spcPts val="800"/>
               </a:spcAft>
               <a:defRPr sz="1600">
                 <a:solidFill>
@@ -25369,7 +25294,7 @@
           <a:p>
             <a:pPr lvl="1">
               <a:spcAft>
-                <a:spcPts val="700"/>
+                <a:spcPts val="800"/>
               </a:spcAft>
               <a:defRPr sz="1400">
                 <a:solidFill>
@@ -25378,13 +25303,13 @@
               </a:defRPr>
             </a:pPr>
             <a:r>
-              <a:t>  location — critical-path resource vs peripheral</a:t>
+              <a:t>  where it hits: a resource on the critical path versus a peripheral one</a:t>
             </a:r>
           </a:p>
           <a:p>
             <a:pPr lvl="1">
               <a:spcAft>
-                <a:spcPts val="700"/>
+                <a:spcPts val="800"/>
               </a:spcAft>
               <a:defRPr sz="1400">
                 <a:solidFill>
@@ -25393,13 +25318,13 @@
               </a:defRPr>
             </a:pPr>
             <a:r>
-              <a:t>  count — single vs multi-resource failure</a:t>
+              <a:t>  how many: a single resource versus several at once</a:t>
             </a:r>
           </a:p>
           <a:p>
             <a:pPr lvl="1">
               <a:spcAft>
-                <a:spcPts val="700"/>
+                <a:spcPts val="800"/>
               </a:spcAft>
               <a:defRPr sz="1400">
                 <a:solidFill>
@@ -25408,13 +25333,13 @@
               </a:defRPr>
             </a:pPr>
             <a:r>
-              <a:t>  timing — how much deadline slack remains at tau</a:t>
+              <a:t>  when: how much deadline slack remains at tau</a:t>
             </a:r>
           </a:p>
           <a:p>
             <a:pPr>
               <a:spcAft>
-                <a:spcPts val="700"/>
+                <a:spcPts val="800"/>
               </a:spcAft>
               <a:defRPr sz="1600">
                 <a:solidFill>
@@ -25423,13 +25348,13 @@
               </a:defRPr>
             </a:pPr>
             <a:r>
-              <a:t>Scale: workflow n in {10, 100, 1000}; federation N in {2 ... 10}</a:t>
+              <a:t>Scale: workflows of 10, 100 and 1000 tasks, federations of 2 to 10 nodes</a:t>
             </a:r>
           </a:p>
           <a:p>
             <a:pPr>
               <a:spcAft>
-                <a:spcPts val="700"/>
+                <a:spcPts val="800"/>
               </a:spcAft>
               <a:defRPr sz="1600">
                 <a:solidFill>
@@ -25444,7 +25369,7 @@
           <a:p>
             <a:pPr lvl="1">
               <a:spcAft>
-                <a:spcPts val="700"/>
+                <a:spcPts val="800"/>
               </a:spcAft>
               <a:defRPr sz="1400">
                 <a:solidFill>
@@ -25453,13 +25378,13 @@
               </a:defRPr>
             </a:pPr>
             <a:r>
-              <a:t>  H1: recovery time &lt;&lt; complete repartition, growing with |A| not |T|</a:t>
+              <a:t>  H1: recovery time grows with the size of the region, not the size of the DAG</a:t>
             </a:r>
           </a:p>
           <a:p>
             <a:pPr lvl="1">
               <a:spcAft>
-                <a:spcPts val="700"/>
+                <a:spcPts val="800"/>
               </a:spcAft>
               <a:defRPr sz="1400">
                 <a:solidFill>
@@ -25468,13 +25393,13 @@
               </a:defRPr>
             </a:pPr>
             <a:r>
-              <a:t>  H2: tasks moved / data re-shipped &lt;&lt; baselines at equal feasibility</a:t>
+              <a:t>  H2: tasks moved and data re-shipped are far below the baselines at equal feasibility</a:t>
             </a:r>
           </a:p>
           <a:p>
             <a:pPr lvl="1">
               <a:spcAft>
-                <a:spcPts val="700"/>
+                <a:spcPts val="800"/>
               </a:spcAft>
               <a:defRPr sz="1400">
                 <a:solidFill>
@@ -25483,7 +25408,7 @@
               </a:defRPr>
             </a:pPr>
             <a:r>
-              <a:t>  H3: quality stays within x% of MILP repair on small cases</a:t>
+              <a:t>  H3: repair quality stays within a small margin of the MILP reference on small cases</a:t>
             </a:r>
           </a:p>
         </p:txBody>
@@ -25617,14 +25542,14 @@
           <a:lstStyle/>
           <a:p>
             <a:pPr>
-              <a:defRPr sz="2600" b="1">
+              <a:defRPr sz="2700" b="1">
                 <a:solidFill>
                   <a:srgbClr val="FFFFFF"/>
                 </a:solidFill>
               </a:defRPr>
             </a:pPr>
             <a:r>
-              <a:t>Timeline — 12 months</a:t>
+              <a:t>Timeline: twelve months</a:t>
             </a:r>
           </a:p>
         </p:txBody>
@@ -25729,7 +25654,7 @@
                     <a:lstStyle/>
                     <a:p>
                       <a:pPr>
-                        <a:defRPr sz="1200" b="1">
+                        <a:defRPr sz="1300" b="1">
                           <a:solidFill>
                             <a:srgbClr val="FFFFFF"/>
                           </a:solidFill>
@@ -25752,7 +25677,7 @@
                     <a:lstStyle/>
                     <a:p>
                       <a:pPr>
-                        <a:defRPr sz="1200" b="1">
+                        <a:defRPr sz="1300" b="1">
                           <a:solidFill>
                             <a:srgbClr val="FFFFFF"/>
                           </a:solidFill>
@@ -25775,7 +25700,7 @@
                     <a:lstStyle/>
                     <a:p>
                       <a:pPr>
-                        <a:defRPr sz="1200" b="1">
+                        <a:defRPr sz="1300" b="1">
                           <a:solidFill>
                             <a:srgbClr val="FFFFFF"/>
                           </a:solidFill>
@@ -25800,7 +25725,7 @@
                     <a:lstStyle/>
                     <a:p>
                       <a:pPr>
-                        <a:defRPr sz="1200" b="0">
+                        <a:defRPr sz="1300" b="0">
                           <a:solidFill>
                             <a:srgbClr val="232B33"/>
                           </a:solidFill>
@@ -25823,14 +25748,14 @@
                     <a:lstStyle/>
                     <a:p>
                       <a:pPr>
-                        <a:defRPr sz="1200" b="0">
+                        <a:defRPr sz="1300" b="0">
                           <a:solidFill>
                             <a:srgbClr val="232B33"/>
                           </a:solidFill>
                         </a:defRPr>
                       </a:pPr>
                       <a:r>
-                        <a:t>Extend simulator to resource failures; boundary rule + affected-subgraph extraction; complete-repartition baseline</a:t>
+                        <a:t>Extend the simulator to resource failures; boundary rule and affected-subgraph extraction; complete-repartition baseline</a:t>
                       </a:r>
                     </a:p>
                   </a:txBody>
@@ -25846,7 +25771,7 @@
                     <a:lstStyle/>
                     <a:p>
                       <a:pPr>
-                        <a:defRPr sz="1200" b="0">
+                        <a:defRPr sz="1300" b="0">
                           <a:solidFill>
                             <a:srgbClr val="232B33"/>
                           </a:solidFill>
@@ -25871,7 +25796,7 @@
                     <a:lstStyle/>
                     <a:p>
                       <a:pPr>
-                        <a:defRPr sz="1200" b="0">
+                        <a:defRPr sz="1300" b="0">
                           <a:solidFill>
                             <a:srgbClr val="232B33"/>
                           </a:solidFill>
@@ -25894,14 +25819,14 @@
                     <a:lstStyle/>
                     <a:p>
                       <a:pPr>
-                        <a:defRPr sz="1200" b="0">
+                        <a:defRPr sz="1300" b="0">
                           <a:solidFill>
                             <a:srgbClr val="232B33"/>
                           </a:solidFill>
                         </a:defRPr>
                       </a:pPr>
                       <a:r>
-                        <a:t>Repartition algorithm + replacement selection; incremental SPT update</a:t>
+                        <a:t>Repartition algorithm and replacement selection; incremental SPT update</a:t>
                       </a:r>
                     </a:p>
                   </a:txBody>
@@ -25917,14 +25842,14 @@
                     <a:lstStyle/>
                     <a:p>
                       <a:pPr>
-                        <a:defRPr sz="1200" b="0">
+                        <a:defRPr sz="1300" b="0">
                           <a:solidFill>
                             <a:srgbClr val="232B33"/>
                           </a:solidFill>
                         </a:defRPr>
                       </a:pPr>
                       <a:r>
-                        <a:t>RQ2 + RQ3 implemented</a:t>
+                        <a:t>RQ2 and RQ3 implemented</a:t>
                       </a:r>
                     </a:p>
                   </a:txBody>
@@ -25942,7 +25867,7 @@
                     <a:lstStyle/>
                     <a:p>
                       <a:pPr>
-                        <a:defRPr sz="1200" b="0">
+                        <a:defRPr sz="1300" b="0">
                           <a:solidFill>
                             <a:srgbClr val="232B33"/>
                           </a:solidFill>
@@ -25965,7 +25890,7 @@
                     <a:lstStyle/>
                     <a:p>
                       <a:pPr>
-                        <a:defRPr sz="1200" b="0">
+                        <a:defRPr sz="1300" b="0">
                           <a:solidFill>
                             <a:srgbClr val="232B33"/>
                           </a:solidFill>
@@ -25988,7 +25913,7 @@
                     <a:lstStyle/>
                     <a:p>
                       <a:pPr>
-                        <a:defRPr sz="1200" b="0">
+                        <a:defRPr sz="1300" b="0">
                           <a:solidFill>
                             <a:srgbClr val="232B33"/>
                           </a:solidFill>
@@ -26013,7 +25938,7 @@
                     <a:lstStyle/>
                     <a:p>
                       <a:pPr>
-                        <a:defRPr sz="1200" b="0">
+                        <a:defRPr sz="1300" b="0">
                           <a:solidFill>
                             <a:srgbClr val="232B33"/>
                           </a:solidFill>
@@ -26036,14 +25961,14 @@
                     <a:lstStyle/>
                     <a:p>
                       <a:pPr>
-                        <a:defRPr sz="1200" b="0">
+                        <a:defRPr sz="1300" b="0">
                           <a:solidFill>
                             <a:srgbClr val="232B33"/>
                           </a:solidFill>
                         </a:defRPr>
                       </a:pPr>
                       <a:r>
-                        <a:t>Write the paper; release code on the public repository; submit</a:t>
+                        <a:t>Write the paper; release the code on the public repository; submit</a:t>
                       </a:r>
                     </a:p>
                   </a:txBody>
@@ -26059,14 +25984,14 @@
                     <a:lstStyle/>
                     <a:p>
                       <a:pPr>
-                        <a:defRPr sz="1200" b="0">
+                        <a:defRPr sz="1300" b="0">
                           <a:solidFill>
                             <a:srgbClr val="232B33"/>
                           </a:solidFill>
                         </a:defRPr>
                       </a:pPr>
                       <a:r>
-                        <a:t>Paper + artifact</a:t>
+                        <a:t>Paper and artifact</a:t>
                       </a:r>
                     </a:p>
                   </a:txBody>
@@ -26210,14 +26135,14 @@
           <a:lstStyle/>
           <a:p>
             <a:pPr>
-              <a:defRPr sz="2600" b="1">
+              <a:defRPr sz="2700" b="1">
                 <a:solidFill>
                   <a:srgbClr val="FFFFFF"/>
                 </a:solidFill>
               </a:defRPr>
             </a:pPr>
             <a:r>
-              <a:t>Risks and mitigations</a:t>
+              <a:t>Risks, and how I plan to handle them</a:t>
             </a:r>
           </a:p>
         </p:txBody>
@@ -26316,7 +26241,7 @@
           <a:p>
             <a:pPr>
               <a:spcAft>
-                <a:spcPts val="700"/>
+                <a:spcPts val="800"/>
               </a:spcAft>
               <a:defRPr sz="1600">
                 <a:solidFill>
@@ -26325,13 +26250,13 @@
               </a:defRPr>
             </a:pPr>
             <a:r>
-              <a:t>Risk: boundary rule degenerates to 'repartition everything'</a:t>
+              <a:t>The boundary rule might degenerate into 'repartition everything'</a:t>
             </a:r>
           </a:p>
           <a:p>
             <a:pPr lvl="1">
               <a:spcAft>
-                <a:spcPts val="700"/>
+                <a:spcPts val="800"/>
               </a:spcAft>
               <a:defRPr sz="1400">
                 <a:solidFill>
@@ -26340,13 +26265,13 @@
               </a:defRPr>
             </a:pPr>
             <a:r>
-              <a:t>  mitigate: cap on |A|; sensitivity study vs failure location and slack</a:t>
+              <a:t>  so the cap on the region size is enforced, and the sensitivity study measures it against failure location and slack</a:t>
             </a:r>
           </a:p>
           <a:p>
             <a:pPr>
               <a:spcAft>
-                <a:spcPts val="700"/>
+                <a:spcPts val="800"/>
               </a:spcAft>
               <a:defRPr sz="1600">
                 <a:solidFill>
@@ -26355,13 +26280,13 @@
               </a:defRPr>
             </a:pPr>
             <a:r>
-              <a:t>Risk: incremental SPT does not pay at small graphs</a:t>
+              <a:t>Incremental SPT might not pay off on small graphs</a:t>
             </a:r>
           </a:p>
           <a:p>
             <a:pPr lvl="1">
               <a:spcAft>
-                <a:spcPts val="700"/>
+                <a:spcPts val="800"/>
               </a:spcAft>
               <a:defRPr sz="1400">
                 <a:solidFill>
@@ -26370,13 +26295,13 @@
               </a:defRPr>
             </a:pPr>
             <a:r>
-              <a:t>  mitigate: measure the break-even; keep full recompute as a baseline</a:t>
+              <a:t>  so we measure the break-even point and keep full recomputation as a baseline</a:t>
             </a:r>
           </a:p>
           <a:p>
             <a:pPr>
               <a:spcAft>
-                <a:spcPts val="700"/>
+                <a:spcPts val="800"/>
               </a:spcAft>
               <a:defRPr sz="1600">
                 <a:solidFill>
@@ -26385,13 +26310,13 @@
               </a:defRPr>
             </a:pPr>
             <a:r>
-              <a:t>Risk: region repair trails MILP quality</a:t>
+              <a:t>Region repair might trail the MILP quality</a:t>
             </a:r>
           </a:p>
           <a:p>
             <a:pPr lvl="1">
               <a:spcAft>
-                <a:spcPts val="700"/>
+                <a:spcPts val="800"/>
               </a:spcAft>
               <a:defRPr sz="1400">
                 <a:solidFill>
@@ -26400,7 +26325,7 @@
               </a:defRPr>
             </a:pPr>
             <a:r>
-              <a:t>  mitigate: hybrid — greedy repair at scale, MILP repair for small regions</a:t>
+              <a:t>  so the strategy is hybrid: greedy repair at scale, MILP repair where the region is small</a:t>
             </a:r>
           </a:p>
         </p:txBody>
@@ -26534,14 +26459,14 @@
           <a:lstStyle/>
           <a:p>
             <a:pPr>
-              <a:defRPr sz="2600" b="1">
+              <a:defRPr sz="2700" b="1">
                 <a:solidFill>
                   <a:srgbClr val="FFFFFF"/>
                 </a:solidFill>
               </a:defRPr>
             </a:pPr>
             <a:r>
-              <a:t>Conclusion — what this research contributes</a:t>
+              <a:t>Conclusion: what this research contributes</a:t>
             </a:r>
           </a:p>
         </p:txBody>
@@ -26640,7 +26565,7 @@
           <a:p>
             <a:pPr>
               <a:spcAft>
-                <a:spcPts val="700"/>
+                <a:spcPts val="800"/>
               </a:spcAft>
               <a:defRPr sz="1700">
                 <a:solidFill>
@@ -26649,13 +26574,13 @@
               </a:defRPr>
             </a:pPr>
             <a:r>
-              <a:t>Completed:  a proved, data-aware formulation + four schedulers + a reproducible platform</a:t>
+              <a:t>Already done: a proved, data-aware formulation, four schedulers on one cost model, and a reproducible platform</a:t>
             </a:r>
           </a:p>
           <a:p>
             <a:pPr>
               <a:spcAft>
-                <a:spcPts val="700"/>
+                <a:spcPts val="800"/>
               </a:spcAft>
               <a:defRPr sz="1700">
                 <a:solidFill>
@@ -26664,13 +26589,13 @@
               </a:defRPr>
             </a:pPr>
             <a:r>
-              <a:t>Proposed contribution 1:  a principled boundary rule for the smallest affected DAG region (RQ1)</a:t>
+              <a:t>Proposed contribution 1: a principled boundary rule for the smallest affected DAG region (RQ1)</a:t>
             </a:r>
           </a:p>
           <a:p>
             <a:pPr>
               <a:spcAft>
-                <a:spcPts val="700"/>
+                <a:spcPts val="800"/>
               </a:spcAft>
               <a:defRPr sz="1700">
                 <a:solidFill>
@@ -26679,13 +26604,13 @@
               </a:defRPr>
             </a:pPr>
             <a:r>
-              <a:t>Proposed contribution 2:  minimal-region repartitioning under a recovery cost model (RQ2)</a:t>
+              <a:t>Proposed contribution 2: minimal-region repartitioning under a recovery cost model (RQ2)</a:t>
             </a:r>
           </a:p>
           <a:p>
             <a:pPr>
               <a:spcAft>
-                <a:spcPts val="700"/>
+                <a:spcPts val="800"/>
               </a:spcAft>
               <a:defRPr sz="1700">
                 <a:solidFill>
@@ -26694,13 +26619,13 @@
               </a:defRPr>
             </a:pPr>
             <a:r>
-              <a:t>Proposed contribution 3:  incremental path updates for workflow recovery (RQ3)</a:t>
+              <a:t>Proposed contribution 3: incremental path updates for workflow recovery (RQ3)</a:t>
             </a:r>
           </a:p>
           <a:p>
             <a:pPr>
               <a:spcAft>
-                <a:spcPts val="700"/>
+                <a:spcPts val="800"/>
               </a:spcAft>
               <a:defRPr sz="1700">
                 <a:solidFill>
@@ -26709,13 +26634,13 @@
               </a:defRPr>
             </a:pPr>
             <a:r>
-              <a:t>Expected outcome:  faster recovery with less disturbance than full repartition, at near-reference quality</a:t>
+              <a:t>Expected outcome: recovery that is faster and less disturbing than a complete repartition, at near-reference quality</a:t>
             </a:r>
           </a:p>
           <a:p>
             <a:pPr>
               <a:spcAft>
-                <a:spcPts val="700"/>
+                <a:spcPts val="800"/>
               </a:spcAft>
               <a:defRPr sz="1700">
                 <a:solidFill>
@@ -26727,7 +26652,7 @@
           <a:p>
             <a:pPr>
               <a:spcAft>
-                <a:spcPts val="700"/>
+                <a:spcPts val="800"/>
               </a:spcAft>
               <a:defRPr sz="1700">
                 <a:solidFill>
@@ -26736,7 +26661,7 @@
               </a:defRPr>
             </a:pPr>
             <a:r>
-              <a:t>Paper 1 placed the workflow; Paper 2 priced its data and approximation; Paper 3 keeps it alive when the infrastructure fails.</a:t>
+              <a:t>Paper 1 placed the workflow; Paper 2 priced its data and its approximation; Paper 3 keeps it alive when the infrastructure fails.</a:t>
             </a:r>
           </a:p>
         </p:txBody>
@@ -27058,14 +26983,14 @@
           <a:lstStyle/>
           <a:p>
             <a:pPr>
-              <a:defRPr sz="2600" b="1">
+              <a:defRPr sz="2700" b="1">
                 <a:solidFill>
                   <a:srgbClr val="FFFFFF"/>
                 </a:solidFill>
               </a:defRPr>
             </a:pPr>
             <a:r>
-              <a:t>Federation is the answer — with a scheduling price</a:t>
+              <a:t>Federation is the answer, and it comes with a scheduling price</a:t>
             </a:r>
           </a:p>
         </p:txBody>
@@ -27164,61 +27089,76 @@
           <a:p>
             <a:pPr>
               <a:spcAft>
-                <a:spcPts val="700"/>
+                <a:spcPts val="800"/>
               </a:spcAft>
-              <a:defRPr sz="1700">
+              <a:defRPr sz="1800">
                 <a:solidFill>
                   <a:srgbClr val="232B33"/>
                 </a:solidFill>
               </a:defRPr>
             </a:pPr>
             <a:r>
-              <a:t>Fog sites near the event: cell-tower racks, roadside cabinets, platform servers</a:t>
+              <a:t>The fog sites near an event are things like cell-tower racks, roadside cabinets, platform servers</a:t>
             </a:r>
           </a:p>
           <a:p>
             <a:pPr>
               <a:spcAft>
-                <a:spcPts val="700"/>
+                <a:spcPts val="800"/>
               </a:spcAft>
-              <a:defRPr sz="1700">
+              <a:defRPr sz="1800">
                 <a:solidFill>
                   <a:srgbClr val="232B33"/>
                 </a:solidFill>
               </a:defRPr>
             </a:pPr>
             <a:r>
-              <a:t>Individually too weak — but they keep fast, stable links to each other even when the cloud link fails</a:t>
+              <a:t>Each one alone is too weak for the whole workflow</a:t>
             </a:r>
           </a:p>
           <a:p>
             <a:pPr>
               <a:spcAft>
-                <a:spcPts val="700"/>
+                <a:spcPts val="800"/>
               </a:spcAft>
-              <a:defRPr sz="1700">
+              <a:defRPr sz="1800">
                 <a:solidFill>
                   <a:srgbClr val="232B33"/>
                 </a:solidFill>
               </a:defRPr>
             </a:pPr>
             <a:r>
-              <a:t>Federation = a small local cloud built from nearby sites</a:t>
+              <a:t>But they keep fast, stable links to each other even when the cloud link fails</a:t>
             </a:r>
           </a:p>
           <a:p>
             <a:pPr>
               <a:spcAft>
-                <a:spcPts val="700"/>
+                <a:spcPts val="800"/>
               </a:spcAft>
-              <a:defRPr sz="1700">
+              <a:defRPr sz="1800">
                 <a:solidFill>
                   <a:srgbClr val="232B33"/>
                 </a:solidFill>
               </a:defRPr>
             </a:pPr>
             <a:r>
-              <a:t>The price: every task can run in many places, and wherever it runs, its input data has to get there first</a:t>
+              <a:t>Federating them creates a small local cloud</a:t>
+            </a:r>
+          </a:p>
+          <a:p>
+            <a:pPr>
+              <a:spcAft>
+                <a:spcPts val="800"/>
+              </a:spcAft>
+              <a:defRPr sz="1800">
+                <a:solidFill>
+                  <a:srgbClr val="232B33"/>
+                </a:solidFill>
+              </a:defRPr>
+            </a:pPr>
+            <a:r>
+              <a:t>The price: every task can now run in many places, and wherever it runs, its input data has to get there first</a:t>
             </a:r>
           </a:p>
         </p:txBody>
@@ -27270,7 +27210,7 @@
           <a:lstStyle/>
           <a:p>
             <a:pPr algn="ctr">
-              <a:defRPr sz="1100" i="1">
+              <a:defRPr sz="1200" i="1">
                 <a:solidFill>
                   <a:srgbClr val="5A646E"/>
                 </a:solidFill>
@@ -27411,14 +27351,14 @@
           <a:lstStyle/>
           <a:p>
             <a:pPr>
-              <a:defRPr sz="2600" b="1">
+              <a:defRPr sz="2700" b="1">
                 <a:solidFill>
                   <a:srgbClr val="FFFFFF"/>
                 </a:solidFill>
               </a:defRPr>
             </a:pPr>
             <a:r>
-              <a:t>Two interacting decisions</a:t>
+              <a:t>Two decisions, and they interact</a:t>
             </a:r>
           </a:p>
         </p:txBody>
@@ -27517,106 +27457,76 @@
           <a:p>
             <a:pPr>
               <a:spcAft>
-                <a:spcPts val="700"/>
+                <a:spcPts val="800"/>
               </a:spcAft>
-              <a:defRPr sz="1700">
+              <a:defRPr sz="1800">
                 <a:solidFill>
                   <a:srgbClr val="232B33"/>
                 </a:solidFill>
               </a:defRPr>
             </a:pPr>
             <a:r>
-              <a:t>Lever 1 — data movement</a:t>
+              <a:t>Data movement rivals computation</a:t>
             </a:r>
           </a:p>
           <a:p>
             <a:pPr lvl="1">
               <a:spcAft>
-                <a:spcPts val="700"/>
+                <a:spcPts val="800"/>
               </a:spcAft>
-              <a:defRPr sz="1500">
+              <a:defRPr sz="1600">
                 <a:solidFill>
                   <a:srgbClr val="5A646E"/>
                 </a:solidFill>
               </a:defRPr>
             </a:pPr>
             <a:r>
-              <a:t>  every edge carries D_ji across a link of bandwidth B</a:t>
+              <a:t>  every edge carries D_ji across a link of bandwidth B, so a transfer takes D_ji / B, often as long as the task itself</a:t>
+            </a:r>
+          </a:p>
+          <a:p>
+            <a:pPr>
+              <a:spcAft>
+                <a:spcPts val="800"/>
+              </a:spcAft>
+              <a:defRPr sz="1800">
+                <a:solidFill>
+                  <a:srgbClr val="232B33"/>
+                </a:solidFill>
+              </a:defRPr>
+            </a:pPr>
+            <a:r>
+              <a:t>Accuracy is a tradeable resource</a:t>
             </a:r>
           </a:p>
           <a:p>
             <a:pPr lvl="1">
               <a:spcAft>
-                <a:spcPts val="700"/>
+                <a:spcPts val="800"/>
               </a:spcAft>
-              <a:defRPr sz="1500">
+              <a:defRPr sz="1600">
                 <a:solidFill>
                   <a:srgbClr val="5A646E"/>
                 </a:solidFill>
               </a:defRPr>
             </a:pPr>
             <a:r>
-              <a:t>  transfer time D_ji/B can rival the task's own runtime</a:t>
+              <a:t>  running a fraction l of a task costs l of the time and returns l of the accuracy; a flood model at 80% fidelity still warns in time</a:t>
             </a:r>
           </a:p>
           <a:p>
             <a:pPr>
               <a:spcAft>
-                <a:spcPts val="700"/>
+                <a:spcPts val="800"/>
               </a:spcAft>
-              <a:defRPr sz="1700">
+              <a:defRPr sz="1800">
                 <a:solidFill>
                   <a:srgbClr val="232B33"/>
                 </a:solidFill>
               </a:defRPr>
             </a:pPr>
             <a:r>
-              <a:t>Lever 2 — approximate execution</a:t>
-            </a:r>
-          </a:p>
-          <a:p>
-            <a:pPr lvl="1">
-              <a:spcAft>
-                <a:spcPts val="700"/>
-              </a:spcAft>
-              <a:defRPr sz="1500">
-                <a:solidFill>
-                  <a:srgbClr val="5A646E"/>
-                </a:solidFill>
-              </a:defRPr>
-            </a:pPr>
-            <a:r>
-              <a:t>  run fraction l of a task -&gt; l of the time, l of the accuracy</a:t>
-            </a:r>
-          </a:p>
-          <a:p>
-            <a:pPr lvl="1">
-              <a:spcAft>
-                <a:spcPts val="700"/>
-              </a:spcAft>
-              <a:defRPr sz="1500">
-                <a:solidFill>
-                  <a:srgbClr val="5A646E"/>
-                </a:solidFill>
-              </a:defRPr>
-            </a:pPr>
-            <a:r>
-              <a:t>  a flood model at 80% fidelity still warns in time</a:t>
-            </a:r>
-          </a:p>
-          <a:p>
-            <a:pPr>
-              <a:spcAft>
-                <a:spcPts val="700"/>
-              </a:spcAft>
-              <a:defRPr sz="1700">
-                <a:solidFill>
-                  <a:srgbClr val="232B33"/>
-                </a:solidFill>
-              </a:defRPr>
-            </a:pPr>
-            <a:r>
-              <a:t>The levers interact: placement decides transfers; fractions decide runtimes</a:t>
+              <a:t>And the two interact: placement decides the transfers, fractions decide the runtimes</a:t>
             </a:r>
           </a:p>
         </p:txBody>
@@ -27750,7 +27660,7 @@
           <a:lstStyle/>
           <a:p>
             <a:pPr>
-              <a:defRPr sz="2600" b="1">
+              <a:defRPr sz="2700" b="1">
                 <a:solidFill>
                   <a:srgbClr val="FFFFFF"/>
                 </a:solidFill>
@@ -27941,7 +27851,7 @@
               </a:defRPr>
             </a:pPr>
             <a:r>
-              <a:t>Efficient DAG task allocation across federated fog — the model + 4 schedulers.  Published: IEEE Cloud Summit 2025</a:t>
+              <a:t>Efficient DAG task allocation across federated fog: the model plus four schedulers.  Published at IEEE Cloud Summit 2025</a:t>
             </a:r>
           </a:p>
         </p:txBody>
@@ -28055,7 +27965,7 @@
               </a:defRPr>
             </a:pPr>
             <a:r>
-              <a:t>Data-aware scheduling of approximate DAG workflows — bound, retry semantics, bandwidth degradation, scale limits.  Submitted: CCGrid 2027</a:t>
+              <a:t>Data-aware scheduling of approximate DAG workflows: an accuracy bound, retry semantics, bandwidth degradation, scalability limits.  In revision for CCGrid 2027</a:t>
             </a:r>
           </a:p>
         </p:txBody>
@@ -28169,7 +28079,7 @@
               </a:defRPr>
             </a:pPr>
             <a:r>
-              <a:t>Dynamic partial repartitioning after resource failure — minimal-region repair, incremental paths.  This proposal — target: IPDPS / CCGrid 2028</a:t>
+              <a:t>Dynamic partial repartitioning after a resource fails mid-workflow.  This proposal; the target is IPDPS or CCGrid 2028</a:t>
             </a:r>
           </a:p>
         </p:txBody>
@@ -28345,7 +28255,7 @@
               </a:defRPr>
             </a:pPr>
             <a:r>
-              <a:t>What is known — and what is missing</a:t>
+              <a:t>What is known, and what is missing</a:t>
             </a:r>
           </a:p>
         </p:txBody>
@@ -28373,7 +28283,7 @@
           <a:lstStyle/>
           <a:p>
             <a:pPr>
-              <a:defRPr sz="1800">
+              <a:defRPr sz="1900">
                 <a:solidFill>
                   <a:srgbClr val="EDF2F7"/>
                 </a:solidFill>
@@ -28514,14 +28424,14 @@
           <a:lstStyle/>
           <a:p>
             <a:pPr>
-              <a:defRPr sz="2600" b="1">
+              <a:defRPr sz="2700" b="1">
                 <a:solidFill>
                   <a:srgbClr val="FFFFFF"/>
                 </a:solidFill>
               </a:defRPr>
             </a:pPr>
             <a:r>
-              <a:t>Thread 1 — DAG scheduling &amp; placement</a:t>
+              <a:t>Classic DAG scheduling</a:t>
             </a:r>
           </a:p>
         </p:txBody>
@@ -28620,91 +28530,61 @@
           <a:p>
             <a:pPr>
               <a:spcAft>
-                <a:spcPts val="700"/>
+                <a:spcPts val="800"/>
               </a:spcAft>
-              <a:defRPr sz="1700">
+              <a:defRPr sz="1800">
                 <a:solidFill>
                   <a:srgbClr val="232B33"/>
                 </a:solidFill>
               </a:defRPr>
             </a:pPr>
             <a:r>
-              <a:t>HEFT (Topcuoglu et al. 2002) — the reference DAG scheduler</a:t>
-            </a:r>
-          </a:p>
-          <a:p>
-            <a:pPr lvl="1">
-              <a:spcAft>
-                <a:spcPts val="700"/>
-              </a:spcAft>
-              <a:defRPr sz="1500">
-                <a:solidFill>
-                  <a:srgbClr val="5A646E"/>
-                </a:solidFill>
-              </a:defRPr>
-            </a:pPr>
-            <a:r>
-              <a:t>  upward-rank priority; earliest-finish-time placement</a:t>
-            </a:r>
-          </a:p>
-          <a:p>
-            <a:pPr lvl="1">
-              <a:spcAft>
-                <a:spcPts val="700"/>
-              </a:spcAft>
-              <a:defRPr sz="1500">
-                <a:solidFill>
-                  <a:srgbClr val="5A646E"/>
-                </a:solidFill>
-              </a:defRPr>
-            </a:pPr>
-            <a:r>
-              <a:t>  transfers are static edge weights; full execution only</a:t>
+              <a:t>HEFT (Topcuoglu et al., 2002) is the reference algorithm: rank tasks, place each where it finishes earliest</a:t>
             </a:r>
           </a:p>
           <a:p>
             <a:pPr>
               <a:spcAft>
-                <a:spcPts val="700"/>
+                <a:spcPts val="800"/>
               </a:spcAft>
-              <a:defRPr sz="1700">
+              <a:defRPr sz="1800">
                 <a:solidFill>
                   <a:srgbClr val="232B33"/>
                 </a:solidFill>
               </a:defRPr>
             </a:pPr>
             <a:r>
-              <a:t>CPOP, PEFT and descendants — same template, refined priorities</a:t>
+              <a:t>CPOP, PEFT and the rest of that family refine the same template</a:t>
             </a:r>
           </a:p>
           <a:p>
             <a:pPr>
               <a:spcAft>
-                <a:spcPts val="700"/>
+                <a:spcPts val="800"/>
               </a:spcAft>
-              <a:defRPr sz="1700">
+              <a:defRPr sz="1800">
                 <a:solidFill>
                   <a:srgbClr val="232B33"/>
                 </a:solidFill>
               </a:defRPr>
             </a:pPr>
             <a:r>
-              <a:t>Federated-fog variants add eligibility and federation constraints (our Paper 1 builds here)</a:t>
+              <a:t>But all of them assume tasks run completely, transfers are static edge weights, and the plan is fixed before execution starts</a:t>
             </a:r>
           </a:p>
           <a:p>
             <a:pPr>
               <a:spcAft>
-                <a:spcPts val="700"/>
+                <a:spcPts val="800"/>
               </a:spcAft>
-              <a:defRPr sz="1700">
+              <a:defRPr sz="1800">
                 <a:solidFill>
                   <a:srgbClr val="232B33"/>
                 </a:solidFill>
               </a:defRPr>
             </a:pPr>
             <a:r>
-              <a:t>Common assumption: one static plan, decided before execution</a:t>
+              <a:t>Federated-fog variants add eligibility and federation constraints; that is where our first paper sits</a:t>
             </a:r>
           </a:p>
         </p:txBody>

--- a/slides/data-aware-scheduling.pptx
+++ b/slides/data-aware-scheduling.pptx
@@ -9265,7 +9265,7 @@
               </a:defRPr>
             </a:pPr>
             <a:r>
-              <a:t>Task graph G_T = (T, E): each task has an execution time, a full-run accuracy, and a set of nodes it is allowed to run on</a:t>
+              <a:t>The task graph has the work: each task has an execution time, a full-run accuracy, and a set of nodes it is allowed to run on</a:t>
             </a:r>
           </a:p>
           <a:p>
@@ -9280,7 +9280,7 @@
               </a:defRPr>
             </a:pPr>
             <a:r>
-              <a:t>  every edge carries D_ji bytes of dependency data</a:t>
+              <a:t>  every edge carries a chunk of dependency data</a:t>
             </a:r>
           </a:p>
           <a:p>
@@ -9295,7 +9295,7 @@
               </a:defRPr>
             </a:pPr>
             <a:r>
-              <a:t>Infrastructure graph G_R = (R, L): each node has capacity, memory and availability; each link has bandwidth and delay</a:t>
+              <a:t>The infrastructure graph has the machines: each node has capacity, memory and availability; each link has a bandwidth and a delay</a:t>
             </a:r>
           </a:p>
           <a:p>
@@ -9310,7 +9310,7 @@
               </a:defRPr>
             </a:pPr>
             <a:r>
-              <a:t>A partition pi maps tasks onto nodes, one eligible node per task</a:t>
+              <a:t>A placement maps tasks onto nodes, one eligible node per task</a:t>
             </a:r>
           </a:p>
           <a:p>
@@ -9325,7 +9325,7 @@
               </a:defRPr>
             </a:pPr>
             <a:r>
-              <a:t>A failure deletes a node from G_R and strands work in G_T</a:t>
+              <a:t>A failure deletes a node from one graph and strands work in the other</a:t>
             </a:r>
           </a:p>
         </p:txBody>
@@ -9380,7 +9380,7 @@
               </a:defRPr>
             </a:pPr>
             <a:r>
-              <a:t>Task DAG  G_T</a:t>
+              <a:t>Task DAG</a:t>
             </a:r>
           </a:p>
         </p:txBody>
@@ -9435,7 +9435,7 @@
               </a:defRPr>
             </a:pPr>
             <a:r>
-              <a:t>Infra  G_R</a:t>
+              <a:t>Infrastructure</a:t>
             </a:r>
           </a:p>
         </p:txBody>
@@ -27481,7 +27481,7 @@
               </a:defRPr>
             </a:pPr>
             <a:r>
-              <a:t>  every edge carries D_ji across a link of bandwidth B, so a transfer takes D_ji / B, often as long as the task itself</a:t>
+              <a:t>  every edge carries data that has to cross a link, and the transfer can take as long as the task itself</a:t>
             </a:r>
           </a:p>
           <a:p>
@@ -27511,7 +27511,7 @@
               </a:defRPr>
             </a:pPr>
             <a:r>
-              <a:t>  running a fraction l of a task costs l of the time and returns l of the accuracy; a flood model at 80% fidelity still warns in time</a:t>
+              <a:t>  running half of a task costs half the time and returns half the accuracy; a flood model at 80% fidelity still warns in time</a:t>
             </a:r>
           </a:p>
           <a:p>

--- a/slides/data-aware-scheduling.pptx
+++ b/slides/data-aware-scheduling.pptx
@@ -10985,40 +10985,16 @@
           </a:p>
         </p:txBody>
       </p:sp>
-      <p:pic>
-        <p:nvPicPr>
-          <p:cNvPr id="5" name="Picture 4" descr="scheduling-pipeline.png"/>
-          <p:cNvPicPr>
-            <a:picLocks noChangeAspect="1"/>
-          </p:cNvPicPr>
-          <p:nvPr/>
-        </p:nvPicPr>
-        <p:blipFill>
-          <a:blip r:embed="rId3"/>
-          <a:stretch>
-            <a:fillRect/>
-          </a:stretch>
-        </p:blipFill>
-        <p:spPr>
-          <a:xfrm>
-            <a:off x="640080" y="1188720"/>
-            <a:ext cx="6035040" cy="3688080"/>
-          </a:xfrm>
-          <a:prstGeom prst="rect">
-            <a:avLst/>
-          </a:prstGeom>
-        </p:spPr>
-      </p:pic>
-      <p:sp>
-        <p:nvSpPr>
-          <p:cNvPr id="6" name="TextBox 5"/>
+      <p:sp>
+        <p:nvSpPr>
+          <p:cNvPr id="5" name="TextBox 4"/>
           <p:cNvSpPr txBox="1"/>
           <p:nvPr/>
         </p:nvSpPr>
         <p:spPr>
           <a:xfrm>
-            <a:off x="7040880" y="1371600"/>
-            <a:ext cx="4754880" cy="5029200"/>
+            <a:off x="640080" y="1371600"/>
+            <a:ext cx="10972800" cy="5029200"/>
           </a:xfrm>
           <a:prstGeom prst="rect">
             <a:avLst/>
@@ -11035,14 +11011,14 @@
               <a:spcAft>
                 <a:spcPts val="1000"/>
               </a:spcAft>
-              <a:defRPr sz="1700">
+              <a:defRPr sz="2000">
                 <a:solidFill>
                   <a:srgbClr val="1A1A1A"/>
                 </a:solidFill>
               </a:defRPr>
             </a:pPr>
             <a:r>
-              <a:t>•  The exact solver is the benchmark</a:t>
+              <a:t>•  Every method prices transfers the same way, so the differences are algorithmic, not accounting</a:t>
             </a:r>
           </a:p>
           <a:p>
@@ -11050,14 +11026,14 @@
               <a:spcAft>
                 <a:spcPts val="1000"/>
               </a:spcAft>
-              <a:defRPr sz="1700">
+              <a:defRPr sz="2000">
                 <a:solidFill>
                   <a:srgbClr val="1A1A1A"/>
                 </a:solidFill>
               </a:defRPr>
             </a:pPr>
             <a:r>
-              <a:t>•  LP rounding relaxes, samples a machine per task, re-solves the fractions</a:t>
+              <a:t>•  The exact solver is the benchmark</a:t>
             </a:r>
           </a:p>
           <a:p>
@@ -11065,14 +11041,14 @@
               <a:spcAft>
                 <a:spcPts val="1000"/>
               </a:spcAft>
-              <a:defRPr sz="1700">
+              <a:defRPr sz="2000">
                 <a:solidFill>
                   <a:srgbClr val="1A1A1A"/>
                 </a:solidFill>
               </a:defRPr>
             </a:pPr>
             <a:r>
-              <a:t>•  The greedy places ready tasks by earliest finish; on a deadline miss it lowers the fraction and retries</a:t>
+              <a:t>•  LP rounding relaxes the integer choices, samples a machine per task, and re-solves the fractions</a:t>
             </a:r>
           </a:p>
           <a:p>
@@ -11080,7 +11056,22 @@
               <a:spcAft>
                 <a:spcPts val="1000"/>
               </a:spcAft>
-              <a:defRPr sz="1700">
+              <a:defRPr sz="2000">
+                <a:solidFill>
+                  <a:srgbClr val="1A1A1A"/>
+                </a:solidFill>
+              </a:defRPr>
+            </a:pPr>
+            <a:r>
+              <a:t>•  The greedy places ready tasks by earliest finish; on a deadline miss it lowers the fraction and retries</a:t>
+            </a:r>
+          </a:p>
+          <a:p>
+            <a:pPr>
+              <a:spcAft>
+                <a:spcPts val="1000"/>
+              </a:spcAft>
+              <a:defRPr sz="2000">
                 <a:solidFill>
                   <a:srgbClr val="1A1A1A"/>
                 </a:solidFill>

--- a/slides/data-aware-scheduling.pptx
+++ b/slides/data-aware-scheduling.pptx
@@ -53,6 +53,7 @@
     <p:sldId id="301" r:id="rId53"/>
     <p:sldId id="302" r:id="rId54"/>
     <p:sldId id="303" r:id="rId55"/>
+    <p:sldId id="304" r:id="rId56"/>
   </p:sldIdLst>
   <p:sldSz cx="12191695" cy="6858000" type="screen4x3"/>
   <p:notesSz cx="6858000" cy="9144000"/>
@@ -1039,7 +1040,7 @@
           <a:lstStyle/>
           <a:p>
             <a:r>
-              <a:t>The completed work solved this version. Given the two graphs and a deadline: decide where each task runs and how much of it runs, so that every task waits for its data and everything finishes on time — and maximize the average accuracy. It is NP-hard, so the exact solver is the benchmark, not the product.</a:t>
+              <a:t>Before the algorithms, the exact contract. The model takes the task times and accuracies, the data on every edge, and the bandwidth on every link as fixed inputs. It decides only two things per task: which machine it runs on, and how much of it runs. Everything the schedulers can change is in those two columns; everything else is data they must respect.</a:t>
             </a:r>
           </a:p>
         </p:txBody>
@@ -1109,7 +1110,7 @@
           <a:lstStyle/>
           <a:p>
             <a:r>
-              <a:t>The proposal adds one event to the same model. Partway through execution, a machine fails and whatever was unfinished on it is stranded. The question is no longer where to put everything — it is which part of the workflow actually needs repair, and where the stranded work should go, disturbing as little as possible. Done work is never redone. Healthy placements never move.</a:t>
+              <a:t>The completed work solved this version. Given the two graphs and a deadline: decide where each task runs and how much of it runs, so that every task waits for its data and everything finishes on time — and maximize the average accuracy. It is NP-hard, so the exact solver is the benchmark, not the product.</a:t>
             </a:r>
           </a:p>
         </p:txBody>
@@ -1179,7 +1180,7 @@
           <a:lstStyle/>
           <a:p>
             <a:r>
-              <a:t>Now the completed work. Paper one established the model and four ways to solve it.</a:t>
+              <a:t>The proposal adds one event to the same model. Partway through execution, a machine fails and whatever was unfinished on it is stranded. The question is no longer where to put everything — it is which part of the workflow actually needs repair, and where the stranded work should go, disturbing as little as possible. Done work is never redone. Healthy placements never move.</a:t>
             </a:r>
           </a:p>
         </p:txBody>
@@ -1249,7 +1250,7 @@
           <a:lstStyle/>
           <a:p>
             <a:r>
-              <a:t>Paper one made three contributions. It formulated the problem as a mixed-integer program with correctness proofs. It built three scalable schedulers around the same cost model so the differences between them are algorithmic rather than accounting differences. And it showed the formulation holds together on real instances.</a:t>
+              <a:t>Now the completed work. Paper one established the model and four ways to solve it.</a:t>
             </a:r>
           </a:p>
         </p:txBody>
@@ -1389,7 +1390,7 @@
           <a:lstStyle/>
           <a:p>
             <a:r>
-              <a:t>Four ways to solve the same problem. The mixed-integer program answers it exactly but does not scale — it is the reference. LP rounding drops the integer choices, solves the relaxed problem, and samples a machine per task from the fractional answer. The greedy walks the workflow in dependency order and puts each ready task where it finishes earliest, transfers included; when the deadline is missed it lowers the fraction and retries. The genetic algorithm encodes assignments and fractions as a chromosome and evolves it.</a:t>
+              <a:t>Paper one made three contributions. It formulated the problem as a mixed-integer program with correctness proofs. It built three scalable schedulers around the same cost model so the differences between them are algorithmic rather than accounting differences. And it showed the formulation holds together on real instances.</a:t>
             </a:r>
           </a:p>
         </p:txBody>
@@ -1459,7 +1460,7 @@
           <a:lstStyle/>
           <a:p>
             <a:r>
-              <a:t>Paper two hardened the model. The additions, the experimental setup, and then the five experiments, each with its take-away.</a:t>
+              <a:t>Four ways to solve the same problem. The mixed-integer program answers it exactly but does not scale — it is the reference. LP rounding drops the integer choices, solves the relaxed problem, and samples a machine per task from the fractional answer. The greedy walks the workflow in dependency order and puts each ready task where it finishes earliest, transfers included; when the deadline is missed it lowers the fraction and retries. The genetic algorithm encodes assignments and fractions as a chromosome and evolves it.</a:t>
             </a:r>
           </a:p>
         </p:txBody>
@@ -1529,7 +1530,7 @@
           <a:lstStyle/>
           <a:p>
             <a:r>
-              <a:t>Paper two added four things on top of paper one. A max-accuracy bound so a score finally means something. A bandwidth-blind baseline to show what data-awareness is worth. A retry-once failure model. And an honest account of where each method breaks.</a:t>
+              <a:t>Paper two hardened the model. The additions, the experimental setup, and then the five experiments, each with its take-away.</a:t>
             </a:r>
           </a:p>
         </p:txBody>
@@ -1599,7 +1600,7 @@
           <a:lstStyle/>
           <a:p>
             <a:r>
-              <a:t>Two additions make the results interpretable. The bound answers 'how good could the score possibly be': run every task completely and ignore the links. No feasible schedule can beat it, so every score is read against it. The blind baseline answers 'what is data-awareness worth': it reports bound-level scores on schedules that are actually infeasible, which is exactly the failure mode the model exists to prevent.</a:t>
+              <a:t>Paper two added four things on top of paper one. A max-accuracy bound so a score finally means something. A bandwidth-blind baseline to show what data-awareness is worth. A retry-once failure model. And an honest account of where each method breaks.</a:t>
             </a:r>
           </a:p>
         </p:txBody>
@@ -1669,7 +1670,7 @@
           <a:lstStyle/>
           <a:p>
             <a:r>
-              <a:t>Every method prices transfers the same way, so differences are algorithmic. The pipeline figure shows the flow: the two graphs go in, a scheduler decides the mapping, and the simulator plays out the transfers and the execution.</a:t>
+              <a:t>Two additions make the results interpretable. The bound answers 'how good could the score possibly be': run every task completely and ignore the links. No feasible schedule can beat it, so every score is read against it. The blind baseline answers 'what is data-awareness worth': it reports bound-level scores on schedules that are actually infeasible, which is exactly the failure mode the model exists to prevent.</a:t>
             </a:r>
           </a:p>
         </p:txBody>
@@ -1739,7 +1740,7 @@
           <a:lstStyle/>
           <a:p>
             <a:r>
-              <a:t>The setup before the results. A discrete-event simulator in NumPy with the HiGHS solver. The parameters are chosen so a transfer can genuinely rival a task, which is the regime that matters. Four datasets, five sweeps, five fresh instances per point.</a:t>
+              <a:t>Every method prices transfers the same way, so differences are algorithmic. The pipeline figure shows the flow: the two graphs go in, a scheduler decides the mapping, and the simulator plays out the transfers and the execution.</a:t>
             </a:r>
           </a:p>
         </p:txBody>
@@ -1809,7 +1810,7 @@
           <a:lstStyle/>
           <a:p>
             <a:r>
-              <a:t>Tighten the deadline. When it barely fits, the exact solver leads and everything else trails. Give it a little room and the greedy reaches the bound. So the method choice matters exactly where the deadline binds.</a:t>
+              <a:t>The setup before the results. A discrete-event simulator in NumPy with the HiGHS solver. The parameters are chosen so a transfer can genuinely rival a task, which is the regime that matters. Four datasets, five experiments, five fresh instances per point.</a:t>
             </a:r>
           </a:p>
         </p:txBody>
@@ -1879,7 +1880,7 @@
           <a:lstStyle/>
           <a:p>
             <a:r>
-              <a:t>Scale the federation from two to ten machines. The exact solver and the greedy sit on the bound throughout. The GA and rounding drift further below as the placement space grows while their search budget stays fixed.</a:t>
+              <a:t>Tighten the deadline. When it barely fits, the exact solver leads and everything else trails. Give it a little room and the greedy reaches the bound. So the method choice matters exactly where the deadline binds.</a:t>
             </a:r>
           </a:p>
         </p:txBody>
@@ -1949,7 +1950,7 @@
           <a:lstStyle/>
           <a:p>
             <a:r>
-              <a:t>Scale the workflow instead. At ten tasks everyone is on the bound. At a thousand, only the greedy is still there — in a fifth of a second. Rounding survives but pays about ninety seconds per re-solve, and the GA falls while taking over two minutes.</a:t>
+              <a:t>Scale the federation from two to ten machines. The exact solver and the greedy sit on the bound throughout. The GA and rounding drift further below as the placement space grows while their search budget stays fixed.</a:t>
             </a:r>
           </a:p>
         </p:txBody>
@@ -2019,7 +2020,7 @@
           <a:lstStyle/>
           <a:p>
             <a:r>
-              <a:t>The failure model is retry-once: a failed task reruns in place and keeps its accuracy if the retry still meets the deadline. Scores stay flat for everyone; feasibility is where the methods separate. The greedy stays feasible at every rate because it finishes early and leaves room for the retry.</a:t>
+              <a:t>Scale the workflow instead. At ten tasks everyone is on the bound. At a thousand, only the greedy is still there — in a fifth of a second. Rounding survives but pays about ninety seconds per re-solve, and the GA falls while taking over two minutes.</a:t>
             </a:r>
           </a:p>
         </p:txBody>
@@ -2159,7 +2160,7 @@
           <a:lstStyle/>
           <a:p>
             <a:r>
-              <a:t>The experiment the model was built for. Degrade every link down to five percent of nominal. The blind baseline reports bound-level scores on schedules that are infeasible. The data-aware methods trade accuracy for feasibility and degrade gracefully.</a:t>
+              <a:t>The failure model is retry-once: a failed task reruns in place and keeps its accuracy if the retry still meets the deadline. Scores stay flat for everyone; feasibility is where the methods separate. The greedy stays feasible at every rate because it finishes early and leaves room for the retry.</a:t>
             </a:r>
           </a:p>
         </p:txBody>
@@ -2229,7 +2230,7 @@
           <a:lstStyle/>
           <a:p>
             <a:r>
-              <a:t>The per-dataset table says the same thing. On small instances everyone ties. On medium, the greedy's makespan is 43 versus about 61 for the rest. At the large sizes only the greedy and the GA even fit in memory, and the greedy holds the bound while the GA pays tens of seconds.</a:t>
+              <a:t>The experiment the model was built for. Degrade every link down to five percent of nominal. The blind baseline reports bound-level scores on schedules that are infeasible. The data-aware methods trade accuracy for feasibility and degrade gracefully.</a:t>
             </a:r>
           </a:p>
         </p:txBody>
@@ -2299,7 +2300,7 @@
           <a:lstStyle/>
           <a:p>
             <a:r>
-              <a:t>What we do not claim. The exact solver caps near 800 assignment variables. The relaxation reaches a hundred thousand rows at a thousand tasks. The GA runs on one fixed budget. And the failure model is retry-once-in-place. That last limit is the bridge to the proposal.</a:t>
+              <a:t>The per-dataset table says the same thing. On small instances everyone ties. On medium, the greedy's makespan is 43 versus about 61 for the rest. At the large sizes only the greedy and the GA even fit in memory, and the greedy holds the bound while the GA pays tens of seconds.</a:t>
             </a:r>
           </a:p>
         </p:txBody>
@@ -2369,7 +2370,7 @@
           <a:lstStyle/>
           <a:p>
             <a:r>
-              <a:t>Now the proposal itself. The question, the three research questions inside it, and the method.</a:t>
+              <a:t>What we do not claim. The exact solver caps near 800 assignment variables. The relaxation reaches a hundred thousand rows at a thousand tasks. The GA runs on one fixed budget. And the failure model is retry-once-in-place. That last limit is the bridge to the proposal.</a:t>
             </a:r>
           </a:p>
         </p:txBody>
@@ -2439,7 +2440,7 @@
           <a:lstStyle/>
           <a:p>
             <a:r>
-              <a:t>The proposal in one sentence. When a fog machine fails mid-workflow, repartition and reschedule only the affected part — not the whole workflow — while keeping recovery time, moved tasks, and re-shipped data small. Three research questions decompose it.</a:t>
+              <a:t>Now the proposal itself. The question, the three research questions inside it, and the method.</a:t>
             </a:r>
           </a:p>
         </p:txBody>
@@ -2509,7 +2510,7 @@
           <a:lstStyle/>
           <a:p>
             <a:r>
-              <a:t>Monitoring detects the failed machine. Its unfinished tasks are stranded and have to be rescued; completed work is never redone. The subtle decision is the boundary: sometimes a task that ran fine still has to move, because its input now sits across a slow path, or because staying pushes it past the deadline.</a:t>
+              <a:t>The proposal in one sentence. When a fog machine fails mid-workflow, repartition and reschedule only the affected part — not the whole workflow — while keeping recovery time, moved tasks, and re-shipped data small. Three research questions decompose it.</a:t>
             </a:r>
           </a:p>
         </p:txBody>
@@ -2579,7 +2580,7 @@
           <a:lstStyle/>
           <a:p>
             <a:r>
-              <a:t>What 'minimum disturbance' means concretely. The recovery cost has three terms: how much later the workflow finishes, how many tasks changed machines, and how many bytes of data have to be re-shipped to the new machines. The repair minimizes that cost subject to the deadline and the accuracy. Each term is measurable, so the experiments can report them separately.</a:t>
+              <a:t>Monitoring detects the failed machine. Its unfinished tasks are stranded and have to be rescued; completed work is never redone. The subtle decision is the boundary: sometimes a task that ran fine still has to move, because its input now sits across a slow path, or because staying pushes it past the deadline.</a:t>
             </a:r>
           </a:p>
         </p:txBody>
@@ -2649,7 +2650,7 @@
           <a:lstStyle/>
           <a:p>
             <a:r>
-              <a:t>Seven steps. The existing schedulers make the initial partition — that is paper one. When a failure is detected we isolate the stranded tasks, grow the smallest affected region under the boundary rule, pick replacements by capacity and distance to the parents and children, repartition just that region under the recovery cost model, update only the affected paths, and resume from the last good point.</a:t>
+              <a:t>What 'minimum disturbance' means concretely. The recovery cost has three terms: how much later the workflow finishes, how many tasks changed machines, and how many bytes of data have to be re-shipped to the new machines. The repair minimizes that cost subject to the deadline and the accuracy. Each term is measurable, so the experiments can report them separately.</a:t>
             </a:r>
           </a:p>
         </p:txBody>
@@ -2719,7 +2720,7 @@
           <a:lstStyle/>
           <a:p>
             <a:r>
-              <a:t>The technical heart of the proposal. The stranded set is mandatory. Beyond that we grow the region while a neighbor fails one of two stay-tests: it cannot make the deadline if it stays, or its input can no longer reach it in time. We stop when nothing fails a test, or at a size cap. The minimality of that region is the claim we verify.</a:t>
+              <a:t>Seven steps. The existing schedulers make the initial partition — that is paper one. When a failure is detected we isolate the stranded tasks, grow the smallest affected region under the boundary rule, pick replacements by capacity and distance to the parents and children, repartition just that region under the recovery cost model, update only the affected paths, and resume from the last good point.</a:t>
             </a:r>
           </a:p>
         </p:txBody>
@@ -2789,7 +2790,7 @@
           <a:lstStyle/>
           <a:p>
             <a:r>
-              <a:t>The repair is a smaller instance of the same optimization family — which is the point: the paper-two schedulers become the region solvers. The recovery objective adds movement terms to the accuracy objective. The boundary anchors enter as fixed arrival times the repair must respect. A greedy repair answers in milliseconds; the exact solver is the reference on small regions.</a:t>
+              <a:t>The technical heart of the proposal. The stranded set is mandatory. Beyond that we grow the region while a neighbor fails one of two stay-tests: it cannot make the deadline if it stays, or its input can no longer reach it in time. We stop when nothing fails a test, or at a size cap. The minimality of that region is the claim we verify.</a:t>
             </a:r>
           </a:p>
         </p:txBody>
@@ -2929,7 +2930,7 @@
           <a:lstStyle/>
           <a:p>
             <a:r>
-              <a:t>Moved tasks need new communication paths to their parents and children. Recomputing all shortest paths mid-workflow is too slow, so we reuse dynamic shortest-path updates — the work of Riazi, Khanda, and Dr. Bhowmick's group. Only the paths through the deleted machine and the moved tasks get updated. Using them to drive workflow recovery is, as far as we know, new.</a:t>
+              <a:t>The repair is a smaller instance of the same optimization family — which is the point: the paper-two schedulers become the region solvers. The recovery objective adds movement terms to the accuracy objective. The boundary anchors enter as fixed arrival times the repair must respect. A greedy repair answers in milliseconds; the exact solver is the reference on small regions.</a:t>
             </a:r>
           </a:p>
         </p:txBody>
@@ -2999,7 +3000,7 @@
           <a:lstStyle/>
           <a:p>
             <a:r>
-              <a:t>The pieces exist separately: dynamic path updates, fog rescheduling, partial reconsideration. Nobody couples them. The novelty is the mapping: a failure in the machine graph becomes the smallest affected region in the task graph.</a:t>
+              <a:t>Moved tasks need new communication paths to their parents and children. Recomputing all shortest paths mid-workflow is too slow, so we reuse dynamic shortest-path updates — the work of Riazi, Khanda, and Dr. Bhowmick's group. Only the paths through the deleted machine and the moved tasks get updated. Using them to drive workflow recovery is, as far as we know, new.</a:t>
             </a:r>
           </a:p>
         </p:txBody>
@@ -3069,7 +3070,7 @@
           <a:lstStyle/>
           <a:p>
             <a:r>
-              <a:t>How I will test it, and when.</a:t>
+              <a:t>The pieces exist separately: dynamic path updates, fog rescheduling, partial reconsideration. Nobody couples them. The novelty is the mapping: a failure in the machine graph becomes the smallest affected region in the task graph.</a:t>
             </a:r>
           </a:p>
         </p:txBody>
@@ -3139,7 +3140,7 @@
           <a:lstStyle/>
           <a:p>
             <a:r>
-              <a:t>Four baselines: complete repartition, the naive upper bound on disturbance; greedy rescue, the cheapest possible repair; no repair at all, the quality floor; and the exact solver on small cases, the reference. The metrics cover recovery speed, schedule quality, and the cost of the disturbance itself.</a:t>
+              <a:t>How I will test it, and when.</a:t>
             </a:r>
           </a:p>
         </p:txBody>
@@ -3209,7 +3210,7 @@
           <a:lstStyle/>
           <a:p>
             <a:r>
-              <a:t>We vary what makes recovery hard: where the failure hits — the critical path is the interesting case; how many machines fail at once; how much slack remains; and the scales from paper two. Three hypotheses, each falsifiable.</a:t>
+              <a:t>Four baselines: complete repartition, the naive upper bound on disturbance; greedy rescue, the cheapest possible repair; no repair at all, the quality floor; and the exact solver on small cases, the reference. The metrics cover recovery speed, schedule quality, and the cost of the disturbance itself.</a:t>
             </a:r>
           </a:p>
         </p:txBody>
@@ -3279,7 +3280,7 @@
           <a:lstStyle/>
           <a:p>
             <a:r>
-              <a:t>Six months: build, solve, evaluate, write. It starts in August and finishes in Spring 2027. The deliverables land on the public repository, and the paper targets a systems venue such as Euro-Par or IPDPS.</a:t>
+              <a:t>We vary what makes recovery hard: where the failure hits — the critical path is the interesting case; how many machines fail at once; how much slack remains; and the scales from paper two. Three hypotheses, each falsifiable.</a:t>
             </a:r>
           </a:p>
         </p:txBody>
@@ -3349,7 +3350,7 @@
           <a:lstStyle/>
           <a:p>
             <a:r>
-              <a:t>Three honest risks. The boundary rule might expand to most of the workflow; incremental path updates might not pay off on small graphs; the region repair might trail the exact solver's quality. Each has a mitigation built into the plan.</a:t>
+              <a:t>Six months: build, solve, evaluate, write. It starts in August and finishes in Spring 2027. The deliverables land on the public repository, and the paper targets a systems venue such as Euro-Par or IPDPS.</a:t>
             </a:r>
           </a:p>
         </p:txBody>
@@ -3419,7 +3420,7 @@
           <a:lstStyle/>
           <a:p>
             <a:r>
-              <a:t>To conclude. The completed work gives a proved, data-aware formulation, four schedulers on one cost model, and a reproducible platform. The proposal adds three contributions: a principled boundary rule, minimal-region repartitioning, and the first use of incremental path updates for workflow recovery. Paper one placed the workflow, paper two priced its data and its approximation, and paper three keeps it alive when the infrastructure fails.</a:t>
+              <a:t>Three honest risks. The boundary rule might expand to most of the workflow; incremental path updates might not pay off on small graphs; the region repair might trail the exact solver's quality. Each has a mitigation built into the plan.</a:t>
             </a:r>
           </a:p>
         </p:txBody>
@@ -3445,6 +3446,76 @@
 </file>
 
 <file path=ppt/notesSlides/notesSlide48.xml><?xml version="1.0" encoding="utf-8"?>
+<p:notes xmlns:a="http://schemas.openxmlformats.org/drawingml/2006/main" xmlns:p="http://schemas.openxmlformats.org/presentationml/2006/main" xmlns:r="http://schemas.openxmlformats.org/officeDocument/2006/relationships">
+  <p:cSld>
+    <p:spTree>
+      <p:nvGrpSpPr>
+        <p:cNvPr id="1" name=""/>
+        <p:cNvGrpSpPr/>
+        <p:nvPr/>
+      </p:nvGrpSpPr>
+      <p:grpSpPr>
+        <a:xfrm>
+          <a:off x="0" y="0"/>
+          <a:ext cx="0" cy="0"/>
+          <a:chOff x="0" y="0"/>
+          <a:chExt cx="0" cy="0"/>
+        </a:xfrm>
+      </p:grpSpPr>
+      <p:sp>
+        <p:nvSpPr>
+          <p:cNvPr id="2" name="Slide Image Placeholder 1"/>
+          <p:cNvSpPr>
+            <a:spLocks noGrp="1"/>
+          </p:cNvSpPr>
+          <p:nvPr>
+            <p:ph type="sldImg" idx="2"/>
+          </p:nvPr>
+        </p:nvSpPr>
+        <p:spPr/>
+      </p:sp>
+      <p:sp>
+        <p:nvSpPr>
+          <p:cNvPr id="3" name="Notes Placeholder 2"/>
+          <p:cNvSpPr>
+            <a:spLocks noGrp="1"/>
+          </p:cNvSpPr>
+          <p:nvPr>
+            <p:ph type="body" idx="3" sz="quarter"/>
+          </p:nvPr>
+        </p:nvSpPr>
+        <p:spPr/>
+        <p:txBody>
+          <a:bodyPr/>
+          <a:lstStyle/>
+          <a:p>
+            <a:r>
+              <a:t>To conclude. The completed work gives a proved, data-aware formulation, four schedulers on one cost model, and a reproducible platform. The proposal adds three contributions: a principled boundary rule, minimal-region repartitioning, and the first use of incremental path updates for workflow recovery. Paper one placed the workflow, paper two priced its data and its approximation, and paper three keeps it alive when the infrastructure fails.</a:t>
+            </a:r>
+          </a:p>
+        </p:txBody>
+      </p:sp>
+      <p:sp>
+        <p:nvSpPr>
+          <p:cNvPr id="4" name="Slide Number Placeholder 3"/>
+          <p:cNvSpPr>
+            <a:spLocks noGrp="1"/>
+          </p:cNvSpPr>
+          <p:nvPr>
+            <p:ph type="sldNum" idx="5" sz="quarter"/>
+          </p:nvPr>
+        </p:nvSpPr>
+        <p:spPr/>
+      </p:sp>
+    </p:spTree>
+  </p:cSld>
+  <p:clrMapOvr>
+    <a:masterClrMapping/>
+  </p:clrMapOvr>
+</p:notes>
+</file>
+
+<file path=ppt/notesSlides/notesSlide49.xml><?xml version="1.0" encoding="utf-8"?>
 <p:notes xmlns:a="http://schemas.openxmlformats.org/drawingml/2006/main" xmlns:p="http://schemas.openxmlformats.org/presentationml/2006/main" xmlns:r="http://schemas.openxmlformats.org/officeDocument/2006/relationships">
   <p:cSld>
     <p:spTree>
@@ -7033,6 +7104,41 @@
         </p:nvSpPr>
         <p:spPr>
           <a:xfrm>
+            <a:off x="8046720" y="329184"/>
+            <a:ext cx="3657600" cy="274320"/>
+          </a:xfrm>
+          <a:prstGeom prst="rect">
+            <a:avLst/>
+          </a:prstGeom>
+          <a:noFill/>
+        </p:spPr>
+        <p:txBody>
+          <a:bodyPr wrap="none">
+            <a:spAutoFit/>
+          </a:bodyPr>
+          <a:lstStyle/>
+          <a:p>
+            <a:pPr algn="r">
+              <a:defRPr sz="1100">
+                <a:solidFill>
+                  <a:srgbClr val="595959"/>
+                </a:solidFill>
+              </a:defRPr>
+            </a:pPr>
+            <a:r>
+              <a:t>RELATED WORK</a:t>
+            </a:r>
+          </a:p>
+        </p:txBody>
+      </p:sp>
+      <p:sp>
+        <p:nvSpPr>
+          <p:cNvPr id="3" name="TextBox 2"/>
+          <p:cNvSpPr txBox="1"/>
+          <p:nvPr/>
+        </p:nvSpPr>
+        <p:spPr>
+          <a:xfrm>
             <a:off x="457200" y="201168"/>
             <a:ext cx="11338560" cy="685800"/>
           </a:xfrm>
@@ -7062,7 +7168,7 @@
       </p:sp>
       <p:cxnSp>
         <p:nvCxnSpPr>
-          <p:cNvPr id="3" name="Connector 2"/>
+          <p:cNvPr id="4" name="Connector 3"/>
           <p:cNvCxnSpPr/>
           <p:nvPr/>
         </p:nvCxnSpPr>
@@ -7097,7 +7203,7 @@
       </p:cxnSp>
       <p:sp>
         <p:nvSpPr>
-          <p:cNvPr id="4" name="TextBox 3"/>
+          <p:cNvPr id="5" name="TextBox 4"/>
           <p:cNvSpPr txBox="1"/>
           <p:nvPr/>
         </p:nvSpPr>
@@ -7132,7 +7238,7 @@
       </p:sp>
       <p:sp>
         <p:nvSpPr>
-          <p:cNvPr id="5" name="TextBox 4"/>
+          <p:cNvPr id="6" name="TextBox 5"/>
           <p:cNvSpPr txBox="1"/>
           <p:nvPr/>
         </p:nvSpPr>
@@ -7239,6 +7345,41 @@
         </p:nvSpPr>
         <p:spPr>
           <a:xfrm>
+            <a:off x="8046720" y="329184"/>
+            <a:ext cx="3657600" cy="274320"/>
+          </a:xfrm>
+          <a:prstGeom prst="rect">
+            <a:avLst/>
+          </a:prstGeom>
+          <a:noFill/>
+        </p:spPr>
+        <p:txBody>
+          <a:bodyPr wrap="none">
+            <a:spAutoFit/>
+          </a:bodyPr>
+          <a:lstStyle/>
+          <a:p>
+            <a:pPr algn="r">
+              <a:defRPr sz="1100">
+                <a:solidFill>
+                  <a:srgbClr val="595959"/>
+                </a:solidFill>
+              </a:defRPr>
+            </a:pPr>
+            <a:r>
+              <a:t>RELATED WORK</a:t>
+            </a:r>
+          </a:p>
+        </p:txBody>
+      </p:sp>
+      <p:sp>
+        <p:nvSpPr>
+          <p:cNvPr id="3" name="TextBox 2"/>
+          <p:cNvSpPr txBox="1"/>
+          <p:nvPr/>
+        </p:nvSpPr>
+        <p:spPr>
+          <a:xfrm>
             <a:off x="457200" y="201168"/>
             <a:ext cx="11338560" cy="685800"/>
           </a:xfrm>
@@ -7268,7 +7409,7 @@
       </p:sp>
       <p:cxnSp>
         <p:nvCxnSpPr>
-          <p:cNvPr id="3" name="Connector 2"/>
+          <p:cNvPr id="4" name="Connector 3"/>
           <p:cNvCxnSpPr/>
           <p:nvPr/>
         </p:nvCxnSpPr>
@@ -7303,7 +7444,7 @@
       </p:cxnSp>
       <p:sp>
         <p:nvSpPr>
-          <p:cNvPr id="4" name="TextBox 3"/>
+          <p:cNvPr id="5" name="TextBox 4"/>
           <p:cNvSpPr txBox="1"/>
           <p:nvPr/>
         </p:nvSpPr>
@@ -7338,7 +7479,7 @@
       </p:sp>
       <p:sp>
         <p:nvSpPr>
-          <p:cNvPr id="5" name="TextBox 4"/>
+          <p:cNvPr id="6" name="TextBox 5"/>
           <p:cNvSpPr txBox="1"/>
           <p:nvPr/>
         </p:nvSpPr>
@@ -7445,6 +7586,41 @@
         </p:nvSpPr>
         <p:spPr>
           <a:xfrm>
+            <a:off x="8046720" y="329184"/>
+            <a:ext cx="3657600" cy="274320"/>
+          </a:xfrm>
+          <a:prstGeom prst="rect">
+            <a:avLst/>
+          </a:prstGeom>
+          <a:noFill/>
+        </p:spPr>
+        <p:txBody>
+          <a:bodyPr wrap="none">
+            <a:spAutoFit/>
+          </a:bodyPr>
+          <a:lstStyle/>
+          <a:p>
+            <a:pPr algn="r">
+              <a:defRPr sz="1100">
+                <a:solidFill>
+                  <a:srgbClr val="595959"/>
+                </a:solidFill>
+              </a:defRPr>
+            </a:pPr>
+            <a:r>
+              <a:t>RELATED WORK</a:t>
+            </a:r>
+          </a:p>
+        </p:txBody>
+      </p:sp>
+      <p:sp>
+        <p:nvSpPr>
+          <p:cNvPr id="3" name="TextBox 2"/>
+          <p:cNvSpPr txBox="1"/>
+          <p:nvPr/>
+        </p:nvSpPr>
+        <p:spPr>
+          <a:xfrm>
             <a:off x="457200" y="201168"/>
             <a:ext cx="11338560" cy="685800"/>
           </a:xfrm>
@@ -7474,7 +7650,7 @@
       </p:sp>
       <p:cxnSp>
         <p:nvCxnSpPr>
-          <p:cNvPr id="3" name="Connector 2"/>
+          <p:cNvPr id="4" name="Connector 3"/>
           <p:cNvCxnSpPr/>
           <p:nvPr/>
         </p:nvCxnSpPr>
@@ -7509,7 +7685,7 @@
       </p:cxnSp>
       <p:sp>
         <p:nvSpPr>
-          <p:cNvPr id="4" name="TextBox 3"/>
+          <p:cNvPr id="5" name="TextBox 4"/>
           <p:cNvSpPr txBox="1"/>
           <p:nvPr/>
         </p:nvSpPr>
@@ -7544,7 +7720,7 @@
       </p:sp>
       <p:sp>
         <p:nvSpPr>
-          <p:cNvPr id="5" name="TextBox 4"/>
+          <p:cNvPr id="6" name="TextBox 5"/>
           <p:cNvSpPr txBox="1"/>
           <p:nvPr/>
         </p:nvSpPr>
@@ -7666,6 +7842,41 @@
         </p:nvSpPr>
         <p:spPr>
           <a:xfrm>
+            <a:off x="8046720" y="329184"/>
+            <a:ext cx="3657600" cy="274320"/>
+          </a:xfrm>
+          <a:prstGeom prst="rect">
+            <a:avLst/>
+          </a:prstGeom>
+          <a:noFill/>
+        </p:spPr>
+        <p:txBody>
+          <a:bodyPr wrap="none">
+            <a:spAutoFit/>
+          </a:bodyPr>
+          <a:lstStyle/>
+          <a:p>
+            <a:pPr algn="r">
+              <a:defRPr sz="1100">
+                <a:solidFill>
+                  <a:srgbClr val="595959"/>
+                </a:solidFill>
+              </a:defRPr>
+            </a:pPr>
+            <a:r>
+              <a:t>RELATED WORK</a:t>
+            </a:r>
+          </a:p>
+        </p:txBody>
+      </p:sp>
+      <p:sp>
+        <p:nvSpPr>
+          <p:cNvPr id="3" name="TextBox 2"/>
+          <p:cNvSpPr txBox="1"/>
+          <p:nvPr/>
+        </p:nvSpPr>
+        <p:spPr>
+          <a:xfrm>
             <a:off x="457200" y="201168"/>
             <a:ext cx="11338560" cy="685800"/>
           </a:xfrm>
@@ -7695,7 +7906,7 @@
       </p:sp>
       <p:cxnSp>
         <p:nvCxnSpPr>
-          <p:cNvPr id="3" name="Connector 2"/>
+          <p:cNvPr id="4" name="Connector 3"/>
           <p:cNvCxnSpPr/>
           <p:nvPr/>
         </p:nvCxnSpPr>
@@ -7730,7 +7941,7 @@
       </p:cxnSp>
       <p:sp>
         <p:nvSpPr>
-          <p:cNvPr id="4" name="TextBox 3"/>
+          <p:cNvPr id="5" name="TextBox 4"/>
           <p:cNvSpPr txBox="1"/>
           <p:nvPr/>
         </p:nvSpPr>
@@ -7765,7 +7976,7 @@
       </p:sp>
       <p:graphicFrame>
         <p:nvGraphicFramePr>
-          <p:cNvPr id="5" name="Table 4"/>
+          <p:cNvPr id="6" name="Table 5"/>
           <p:cNvGraphicFramePr>
             <a:graphicFrameLocks noGrp="1"/>
           </p:cNvGraphicFramePr>
@@ -8379,7 +8590,7 @@
       </p:graphicFrame>
       <p:sp>
         <p:nvSpPr>
-          <p:cNvPr id="6" name="TextBox 5"/>
+          <p:cNvPr id="7" name="TextBox 6"/>
           <p:cNvSpPr txBox="1"/>
           <p:nvPr/>
         </p:nvSpPr>
@@ -8460,7 +8671,7 @@
               </a:defRPr>
             </a:pPr>
             <a:r>
-              <a:t>The problem, stated precisely</a:t>
+              <a:t>3.  Problem definition</a:t>
             </a:r>
           </a:p>
         </p:txBody>
@@ -8561,6 +8772,41 @@
         </p:nvSpPr>
         <p:spPr>
           <a:xfrm>
+            <a:off x="8046720" y="329184"/>
+            <a:ext cx="3657600" cy="274320"/>
+          </a:xfrm>
+          <a:prstGeom prst="rect">
+            <a:avLst/>
+          </a:prstGeom>
+          <a:noFill/>
+        </p:spPr>
+        <p:txBody>
+          <a:bodyPr wrap="none">
+            <a:spAutoFit/>
+          </a:bodyPr>
+          <a:lstStyle/>
+          <a:p>
+            <a:pPr algn="r">
+              <a:defRPr sz="1100">
+                <a:solidFill>
+                  <a:srgbClr val="595959"/>
+                </a:solidFill>
+              </a:defRPr>
+            </a:pPr>
+            <a:r>
+              <a:t>PROBLEM DEFINITION</a:t>
+            </a:r>
+          </a:p>
+        </p:txBody>
+      </p:sp>
+      <p:sp>
+        <p:nvSpPr>
+          <p:cNvPr id="3" name="TextBox 2"/>
+          <p:cNvSpPr txBox="1"/>
+          <p:nvPr/>
+        </p:nvSpPr>
+        <p:spPr>
+          <a:xfrm>
             <a:off x="457200" y="201168"/>
             <a:ext cx="11338560" cy="685800"/>
           </a:xfrm>
@@ -8590,7 +8836,7 @@
       </p:sp>
       <p:cxnSp>
         <p:nvCxnSpPr>
-          <p:cNvPr id="3" name="Connector 2"/>
+          <p:cNvPr id="4" name="Connector 3"/>
           <p:cNvCxnSpPr/>
           <p:nvPr/>
         </p:nvCxnSpPr>
@@ -8625,7 +8871,7 @@
       </p:cxnSp>
       <p:sp>
         <p:nvSpPr>
-          <p:cNvPr id="4" name="TextBox 3"/>
+          <p:cNvPr id="5" name="TextBox 4"/>
           <p:cNvSpPr txBox="1"/>
           <p:nvPr/>
         </p:nvSpPr>
@@ -8660,14 +8906,14 @@
       </p:sp>
       <p:sp>
         <p:nvSpPr>
-          <p:cNvPr id="5" name="TextBox 4"/>
+          <p:cNvPr id="6" name="TextBox 5"/>
           <p:cNvSpPr txBox="1"/>
           <p:nvPr/>
         </p:nvSpPr>
         <p:spPr>
           <a:xfrm>
             <a:off x="640080" y="1234440"/>
-            <a:ext cx="10972800" cy="5029200"/>
+            <a:ext cx="5669280" cy="5029200"/>
           </a:xfrm>
           <a:prstGeom prst="rect">
             <a:avLst/>
@@ -8767,6 +9013,65 @@
             </a:pPr>
             <a:r>
               <a:t>•  A schedule maps tasks onto machines; a failure deletes a machine and strands whatever was on it</a:t>
+            </a:r>
+          </a:p>
+        </p:txBody>
+      </p:sp>
+      <p:pic>
+        <p:nvPicPr>
+          <p:cNvPr id="7" name="Picture 6" descr="disaster-response-dag.png"/>
+          <p:cNvPicPr>
+            <a:picLocks noChangeAspect="1"/>
+          </p:cNvPicPr>
+          <p:nvPr/>
+        </p:nvPicPr>
+        <p:blipFill>
+          <a:blip r:embed="rId3"/>
+          <a:stretch>
+            <a:fillRect/>
+          </a:stretch>
+        </p:blipFill>
+        <p:spPr>
+          <a:xfrm>
+            <a:off x="6675120" y="1280160"/>
+            <a:ext cx="5120640" cy="3833707"/>
+          </a:xfrm>
+          <a:prstGeom prst="rect">
+            <a:avLst/>
+          </a:prstGeom>
+        </p:spPr>
+      </p:pic>
+      <p:sp>
+        <p:nvSpPr>
+          <p:cNvPr id="8" name="TextBox 7"/>
+          <p:cNvSpPr txBox="1"/>
+          <p:nvPr/>
+        </p:nvSpPr>
+        <p:spPr>
+          <a:xfrm>
+            <a:off x="6675120" y="5989320"/>
+            <a:ext cx="5120640" cy="457200"/>
+          </a:xfrm>
+          <a:prstGeom prst="rect">
+            <a:avLst/>
+          </a:prstGeom>
+          <a:noFill/>
+        </p:spPr>
+        <p:txBody>
+          <a:bodyPr wrap="none">
+            <a:spAutoFit/>
+          </a:bodyPr>
+          <a:lstStyle/>
+          <a:p>
+            <a:pPr algn="ctr">
+              <a:defRPr sz="1300" i="1">
+                <a:solidFill>
+                  <a:srgbClr val="595959"/>
+                </a:solidFill>
+              </a:defRPr>
+            </a:pPr>
+            <a:r>
+              <a:t>A task graph (left) mapped onto the machine graph (right)</a:t>
             </a:r>
           </a:p>
         </p:txBody>
@@ -8797,6 +9102,41 @@
         </p:nvSpPr>
         <p:spPr>
           <a:xfrm>
+            <a:off x="8046720" y="329184"/>
+            <a:ext cx="3657600" cy="274320"/>
+          </a:xfrm>
+          <a:prstGeom prst="rect">
+            <a:avLst/>
+          </a:prstGeom>
+          <a:noFill/>
+        </p:spPr>
+        <p:txBody>
+          <a:bodyPr wrap="none">
+            <a:spAutoFit/>
+          </a:bodyPr>
+          <a:lstStyle/>
+          <a:p>
+            <a:pPr algn="r">
+              <a:defRPr sz="1100">
+                <a:solidFill>
+                  <a:srgbClr val="595959"/>
+                </a:solidFill>
+              </a:defRPr>
+            </a:pPr>
+            <a:r>
+              <a:t>PROBLEM DEFINITION</a:t>
+            </a:r>
+          </a:p>
+        </p:txBody>
+      </p:sp>
+      <p:sp>
+        <p:nvSpPr>
+          <p:cNvPr id="3" name="TextBox 2"/>
+          <p:cNvSpPr txBox="1"/>
+          <p:nvPr/>
+        </p:nvSpPr>
+        <p:spPr>
+          <a:xfrm>
             <a:off x="457200" y="201168"/>
             <a:ext cx="11338560" cy="685800"/>
           </a:xfrm>
@@ -8819,14 +9159,14 @@
               </a:defRPr>
             </a:pPr>
             <a:r>
-              <a:t>The static problem (Papers 1 and 2)</a:t>
+              <a:t>Inputs and decisions</a:t>
             </a:r>
           </a:p>
         </p:txBody>
       </p:sp>
       <p:cxnSp>
         <p:nvCxnSpPr>
-          <p:cNvPr id="3" name="Connector 2"/>
+          <p:cNvPr id="4" name="Connector 3"/>
           <p:cNvCxnSpPr/>
           <p:nvPr/>
         </p:nvCxnSpPr>
@@ -8861,7 +9201,7 @@
       </p:cxnSp>
       <p:sp>
         <p:nvSpPr>
-          <p:cNvPr id="4" name="TextBox 3"/>
+          <p:cNvPr id="5" name="TextBox 4"/>
           <p:cNvSpPr txBox="1"/>
           <p:nvPr/>
         </p:nvSpPr>
@@ -8894,16 +9234,504 @@
           </a:p>
         </p:txBody>
       </p:sp>
-      <p:sp>
-        <p:nvSpPr>
-          <p:cNvPr id="5" name="TextBox 4"/>
+      <p:graphicFrame>
+        <p:nvGraphicFramePr>
+          <p:cNvPr id="6" name="Table 5"/>
+          <p:cNvGraphicFramePr>
+            <a:graphicFrameLocks noGrp="1"/>
+          </p:cNvGraphicFramePr>
+          <p:nvPr/>
+        </p:nvGraphicFramePr>
+        <p:xfrm>
+          <a:off x="822960" y="1371600"/>
+          <a:ext cx="10515600" cy="3474720"/>
+        </p:xfrm>
+        <a:graphic>
+          <a:graphicData uri="http://schemas.openxmlformats.org/drawingml/2006/table">
+            <a:tbl>
+              <a:tblPr firstRow="1" bandRow="1">
+                <a:tableStyleId>{5C22544A-7EE6-4342-B048-85BDC9FD1C3A}</a:tableStyleId>
+              </a:tblPr>
+              <a:tblGrid>
+                <a:gridCol w="2011680"/>
+                <a:gridCol w="6217920"/>
+                <a:gridCol w="2286000"/>
+              </a:tblGrid>
+              <a:tr h="579120">
+                <a:tc>
+                  <a:txBody>
+                    <a:bodyPr wrap="square"/>
+                    <a:lstStyle/>
+                    <a:p>
+                      <a:pPr>
+                        <a:defRPr sz="1500" b="1">
+                          <a:solidFill>
+                            <a:srgbClr val="1A1A1A"/>
+                          </a:solidFill>
+                        </a:defRPr>
+                      </a:pPr>
+                      <a:r>
+                        <a:t>Symbol</a:t>
+                      </a:r>
+                    </a:p>
+                  </a:txBody>
+                  <a:tcPr marT="50800" marB="50800" marL="101600" marR="101600">
+                    <a:solidFill>
+                      <a:srgbClr val="E8E8E8"/>
+                    </a:solidFill>
+                  </a:tcPr>
+                </a:tc>
+                <a:tc>
+                  <a:txBody>
+                    <a:bodyPr wrap="square"/>
+                    <a:lstStyle/>
+                    <a:p>
+                      <a:pPr>
+                        <a:defRPr sz="1500" b="1">
+                          <a:solidFill>
+                            <a:srgbClr val="1A1A1A"/>
+                          </a:solidFill>
+                        </a:defRPr>
+                      </a:pPr>
+                      <a:r>
+                        <a:t>Meaning</a:t>
+                      </a:r>
+                    </a:p>
+                  </a:txBody>
+                  <a:tcPr marT="50800" marB="50800" marL="101600" marR="101600">
+                    <a:solidFill>
+                      <a:srgbClr val="E8E8E8"/>
+                    </a:solidFill>
+                  </a:tcPr>
+                </a:tc>
+                <a:tc>
+                  <a:txBody>
+                    <a:bodyPr wrap="square"/>
+                    <a:lstStyle/>
+                    <a:p>
+                      <a:pPr>
+                        <a:defRPr sz="1500" b="1">
+                          <a:solidFill>
+                            <a:srgbClr val="1A1A1A"/>
+                          </a:solidFill>
+                        </a:defRPr>
+                      </a:pPr>
+                      <a:r>
+                        <a:t>Fixed input or decided?</a:t>
+                      </a:r>
+                    </a:p>
+                  </a:txBody>
+                  <a:tcPr marT="50800" marB="50800" marL="101600" marR="101600">
+                    <a:solidFill>
+                      <a:srgbClr val="E8E8E8"/>
+                    </a:solidFill>
+                  </a:tcPr>
+                </a:tc>
+              </a:tr>
+              <a:tr h="579120">
+                <a:tc>
+                  <a:txBody>
+                    <a:bodyPr wrap="square"/>
+                    <a:lstStyle/>
+                    <a:p>
+                      <a:pPr>
+                        <a:defRPr sz="1500" b="0">
+                          <a:solidFill>
+                            <a:srgbClr val="1A1A1A"/>
+                          </a:solidFill>
+                        </a:defRPr>
+                      </a:pPr>
+                      <a:r>
+                        <a:t>T_i ,  A_i</a:t>
+                      </a:r>
+                    </a:p>
+                  </a:txBody>
+                  <a:tcPr marT="50800" marB="50800" marL="101600" marR="101600">
+                    <a:solidFill>
+                      <a:srgbClr val="FFFFFF"/>
+                    </a:solidFill>
+                  </a:tcPr>
+                </a:tc>
+                <a:tc>
+                  <a:txBody>
+                    <a:bodyPr wrap="square"/>
+                    <a:lstStyle/>
+                    <a:p>
+                      <a:pPr>
+                        <a:defRPr sz="1500" b="0">
+                          <a:solidFill>
+                            <a:srgbClr val="1A1A1A"/>
+                          </a:solidFill>
+                        </a:defRPr>
+                      </a:pPr>
+                      <a:r>
+                        <a:t>task runtime, and accuracy at a full run</a:t>
+                      </a:r>
+                    </a:p>
+                  </a:txBody>
+                  <a:tcPr marT="50800" marB="50800" marL="101600" marR="101600">
+                    <a:solidFill>
+                      <a:srgbClr val="FFFFFF"/>
+                    </a:solidFill>
+                  </a:tcPr>
+                </a:tc>
+                <a:tc>
+                  <a:txBody>
+                    <a:bodyPr wrap="square"/>
+                    <a:lstStyle/>
+                    <a:p>
+                      <a:pPr>
+                        <a:defRPr sz="1500" b="0">
+                          <a:solidFill>
+                            <a:srgbClr val="1A1A1A"/>
+                          </a:solidFill>
+                        </a:defRPr>
+                      </a:pPr>
+                      <a:r>
+                        <a:t>fixed input</a:t>
+                      </a:r>
+                    </a:p>
+                  </a:txBody>
+                  <a:tcPr marT="50800" marB="50800" marL="101600" marR="101600">
+                    <a:solidFill>
+                      <a:srgbClr val="FFFFFF"/>
+                    </a:solidFill>
+                  </a:tcPr>
+                </a:tc>
+              </a:tr>
+              <a:tr h="579120">
+                <a:tc>
+                  <a:txBody>
+                    <a:bodyPr wrap="square"/>
+                    <a:lstStyle/>
+                    <a:p>
+                      <a:pPr>
+                        <a:defRPr sz="1500" b="0">
+                          <a:solidFill>
+                            <a:srgbClr val="1A1A1A"/>
+                          </a:solidFill>
+                        </a:defRPr>
+                      </a:pPr>
+                      <a:r>
+                        <a:t>D_ji</a:t>
+                      </a:r>
+                    </a:p>
+                  </a:txBody>
+                  <a:tcPr marT="50800" marB="50800" marL="101600" marR="101600">
+                    <a:solidFill>
+                      <a:srgbClr val="FFFFFF"/>
+                    </a:solidFill>
+                  </a:tcPr>
+                </a:tc>
+                <a:tc>
+                  <a:txBody>
+                    <a:bodyPr wrap="square"/>
+                    <a:lstStyle/>
+                    <a:p>
+                      <a:pPr>
+                        <a:defRPr sz="1500" b="0">
+                          <a:solidFill>
+                            <a:srgbClr val="1A1A1A"/>
+                          </a:solidFill>
+                        </a:defRPr>
+                      </a:pPr>
+                      <a:r>
+                        <a:t>data size on each workflow edge</a:t>
+                      </a:r>
+                    </a:p>
+                  </a:txBody>
+                  <a:tcPr marT="50800" marB="50800" marL="101600" marR="101600">
+                    <a:solidFill>
+                      <a:srgbClr val="FFFFFF"/>
+                    </a:solidFill>
+                  </a:tcPr>
+                </a:tc>
+                <a:tc>
+                  <a:txBody>
+                    <a:bodyPr wrap="square"/>
+                    <a:lstStyle/>
+                    <a:p>
+                      <a:pPr>
+                        <a:defRPr sz="1500" b="0">
+                          <a:solidFill>
+                            <a:srgbClr val="1A1A1A"/>
+                          </a:solidFill>
+                        </a:defRPr>
+                      </a:pPr>
+                      <a:r>
+                        <a:t>fixed input</a:t>
+                      </a:r>
+                    </a:p>
+                  </a:txBody>
+                  <a:tcPr marT="50800" marB="50800" marL="101600" marR="101600">
+                    <a:solidFill>
+                      <a:srgbClr val="FFFFFF"/>
+                    </a:solidFill>
+                  </a:tcPr>
+                </a:tc>
+              </a:tr>
+              <a:tr h="579120">
+                <a:tc>
+                  <a:txBody>
+                    <a:bodyPr wrap="square"/>
+                    <a:lstStyle/>
+                    <a:p>
+                      <a:pPr>
+                        <a:defRPr sz="1500" b="0">
+                          <a:solidFill>
+                            <a:srgbClr val="1A1A1A"/>
+                          </a:solidFill>
+                        </a:defRPr>
+                      </a:pPr>
+                      <a:r>
+                        <a:t>B_ba</a:t>
+                      </a:r>
+                    </a:p>
+                  </a:txBody>
+                  <a:tcPr marT="50800" marB="50800" marL="101600" marR="101600">
+                    <a:solidFill>
+                      <a:srgbClr val="FFFFFF"/>
+                    </a:solidFill>
+                  </a:tcPr>
+                </a:tc>
+                <a:tc>
+                  <a:txBody>
+                    <a:bodyPr wrap="square"/>
+                    <a:lstStyle/>
+                    <a:p>
+                      <a:pPr>
+                        <a:defRPr sz="1500" b="0">
+                          <a:solidFill>
+                            <a:srgbClr val="1A1A1A"/>
+                          </a:solidFill>
+                        </a:defRPr>
+                      </a:pPr>
+                      <a:r>
+                        <a:t>bandwidth on each machine link</a:t>
+                      </a:r>
+                    </a:p>
+                  </a:txBody>
+                  <a:tcPr marT="50800" marB="50800" marL="101600" marR="101600">
+                    <a:solidFill>
+                      <a:srgbClr val="FFFFFF"/>
+                    </a:solidFill>
+                  </a:tcPr>
+                </a:tc>
+                <a:tc>
+                  <a:txBody>
+                    <a:bodyPr wrap="square"/>
+                    <a:lstStyle/>
+                    <a:p>
+                      <a:pPr>
+                        <a:defRPr sz="1500" b="0">
+                          <a:solidFill>
+                            <a:srgbClr val="1A1A1A"/>
+                          </a:solidFill>
+                        </a:defRPr>
+                      </a:pPr>
+                      <a:r>
+                        <a:t>fixed input</a:t>
+                      </a:r>
+                    </a:p>
+                  </a:txBody>
+                  <a:tcPr marT="50800" marB="50800" marL="101600" marR="101600">
+                    <a:solidFill>
+                      <a:srgbClr val="FFFFFF"/>
+                    </a:solidFill>
+                  </a:tcPr>
+                </a:tc>
+              </a:tr>
+              <a:tr h="579120">
+                <a:tc>
+                  <a:txBody>
+                    <a:bodyPr wrap="square"/>
+                    <a:lstStyle/>
+                    <a:p>
+                      <a:pPr>
+                        <a:defRPr sz="1500" b="0">
+                          <a:solidFill>
+                            <a:srgbClr val="1A1A1A"/>
+                          </a:solidFill>
+                        </a:defRPr>
+                      </a:pPr>
+                      <a:r>
+                        <a:t>e_ia</a:t>
+                      </a:r>
+                    </a:p>
+                  </a:txBody>
+                  <a:tcPr marT="50800" marB="50800" marL="101600" marR="101600">
+                    <a:solidFill>
+                      <a:srgbClr val="FFFFFF"/>
+                    </a:solidFill>
+                  </a:tcPr>
+                </a:tc>
+                <a:tc>
+                  <a:txBody>
+                    <a:bodyPr wrap="square"/>
+                    <a:lstStyle/>
+                    <a:p>
+                      <a:pPr>
+                        <a:defRPr sz="1500" b="0">
+                          <a:solidFill>
+                            <a:srgbClr val="1A1A1A"/>
+                          </a:solidFill>
+                        </a:defRPr>
+                      </a:pPr>
+                      <a:r>
+                        <a:t>which machine task i runs on</a:t>
+                      </a:r>
+                    </a:p>
+                  </a:txBody>
+                  <a:tcPr marT="50800" marB="50800" marL="101600" marR="101600">
+                    <a:solidFill>
+                      <a:srgbClr val="FFFFFF"/>
+                    </a:solidFill>
+                  </a:tcPr>
+                </a:tc>
+                <a:tc>
+                  <a:txBody>
+                    <a:bodyPr wrap="square"/>
+                    <a:lstStyle/>
+                    <a:p>
+                      <a:pPr>
+                        <a:defRPr sz="1500" b="0">
+                          <a:solidFill>
+                            <a:srgbClr val="1A1A1A"/>
+                          </a:solidFill>
+                        </a:defRPr>
+                      </a:pPr>
+                      <a:r>
+                        <a:t>decided</a:t>
+                      </a:r>
+                    </a:p>
+                  </a:txBody>
+                  <a:tcPr marT="50800" marB="50800" marL="101600" marR="101600">
+                    <a:solidFill>
+                      <a:srgbClr val="FFFFFF"/>
+                    </a:solidFill>
+                  </a:tcPr>
+                </a:tc>
+              </a:tr>
+              <a:tr h="579120">
+                <a:tc>
+                  <a:txBody>
+                    <a:bodyPr wrap="square"/>
+                    <a:lstStyle/>
+                    <a:p>
+                      <a:pPr>
+                        <a:defRPr sz="1500" b="0">
+                          <a:solidFill>
+                            <a:srgbClr val="1A1A1A"/>
+                          </a:solidFill>
+                        </a:defRPr>
+                      </a:pPr>
+                      <a:r>
+                        <a:t>l_ia</a:t>
+                      </a:r>
+                    </a:p>
+                  </a:txBody>
+                  <a:tcPr marT="50800" marB="50800" marL="101600" marR="101600">
+                    <a:solidFill>
+                      <a:srgbClr val="FFFFFF"/>
+                    </a:solidFill>
+                  </a:tcPr>
+                </a:tc>
+                <a:tc>
+                  <a:txBody>
+                    <a:bodyPr wrap="square"/>
+                    <a:lstStyle/>
+                    <a:p>
+                      <a:pPr>
+                        <a:defRPr sz="1500" b="0">
+                          <a:solidFill>
+                            <a:srgbClr val="1A1A1A"/>
+                          </a:solidFill>
+                        </a:defRPr>
+                      </a:pPr>
+                      <a:r>
+                        <a:t>what fraction of task i runs (0 to 1)</a:t>
+                      </a:r>
+                    </a:p>
+                  </a:txBody>
+                  <a:tcPr marT="50800" marB="50800" marL="101600" marR="101600">
+                    <a:solidFill>
+                      <a:srgbClr val="FFFFFF"/>
+                    </a:solidFill>
+                  </a:tcPr>
+                </a:tc>
+                <a:tc>
+                  <a:txBody>
+                    <a:bodyPr wrap="square"/>
+                    <a:lstStyle/>
+                    <a:p>
+                      <a:pPr>
+                        <a:defRPr sz="1500" b="0">
+                          <a:solidFill>
+                            <a:srgbClr val="1A1A1A"/>
+                          </a:solidFill>
+                        </a:defRPr>
+                      </a:pPr>
+                      <a:r>
+                        <a:t>decided</a:t>
+                      </a:r>
+                    </a:p>
+                  </a:txBody>
+                  <a:tcPr marT="50800" marB="50800" marL="101600" marR="101600">
+                    <a:solidFill>
+                      <a:srgbClr val="FFFFFF"/>
+                    </a:solidFill>
+                  </a:tcPr>
+                </a:tc>
+              </a:tr>
+            </a:tbl>
+          </a:graphicData>
+        </a:graphic>
+      </p:graphicFrame>
+      <p:cxnSp>
+        <p:nvCxnSpPr>
+          <p:cNvPr id="7" name="Connector 6"/>
+          <p:cNvCxnSpPr/>
+          <p:nvPr/>
+        </p:nvCxnSpPr>
+        <p:spPr>
+          <a:xfrm>
+            <a:off x="640080" y="5623560"/>
+            <a:ext cx="10881360" cy="0"/>
+          </a:xfrm>
+          <a:prstGeom prst="line">
+            <a:avLst/>
+          </a:prstGeom>
+          <a:ln w="9525">
+            <a:solidFill>
+              <a:srgbClr val="595959"/>
+            </a:solidFill>
+          </a:ln>
+        </p:spPr>
+        <p:style>
+          <a:lnRef idx="2">
+            <a:schemeClr val="accent1"/>
+          </a:lnRef>
+          <a:fillRef idx="0">
+            <a:schemeClr val="accent1"/>
+          </a:fillRef>
+          <a:effectRef idx="1">
+            <a:schemeClr val="accent1"/>
+          </a:effectRef>
+          <a:fontRef idx="minor">
+            <a:schemeClr val="tx1"/>
+          </a:fontRef>
+        </p:style>
+      </p:cxnSp>
+      <p:sp>
+        <p:nvSpPr>
+          <p:cNvPr id="8" name="TextBox 7"/>
           <p:cNvSpPr txBox="1"/>
           <p:nvPr/>
         </p:nvSpPr>
         <p:spPr>
           <a:xfrm>
-            <a:off x="640080" y="1371600"/>
-            <a:ext cx="10972800" cy="5029200"/>
+            <a:off x="640080" y="5715000"/>
+            <a:ext cx="10881360" cy="914400"/>
           </a:xfrm>
           <a:prstGeom prst="rect">
             <a:avLst/>
@@ -8917,84 +9745,14 @@
           <a:lstStyle/>
           <a:p>
             <a:pPr>
-              <a:spcAft>
-                <a:spcPts val="1000"/>
-              </a:spcAft>
-              <a:defRPr sz="2000">
+              <a:defRPr sz="1700" b="1">
                 <a:solidFill>
                   <a:srgbClr val="1A1A1A"/>
                 </a:solidFill>
               </a:defRPr>
             </a:pPr>
             <a:r>
-              <a:t>•  Given: the task graph, the infrastructure graph, and a deadline</a:t>
-            </a:r>
-          </a:p>
-          <a:p>
-            <a:pPr>
-              <a:spcAft>
-                <a:spcPts val="1000"/>
-              </a:spcAft>
-              <a:defRPr sz="2000">
-                <a:solidFill>
-                  <a:srgbClr val="1A1A1A"/>
-                </a:solidFill>
-              </a:defRPr>
-            </a:pPr>
-            <a:r>
-              <a:t>•  Decide: for every task, which eligible machine it runs on, and how much of it runs</a:t>
-            </a:r>
-          </a:p>
-          <a:p>
-            <a:pPr>
-              <a:spcAft>
-                <a:spcPts val="1000"/>
-              </a:spcAft>
-              <a:defRPr sz="2000">
-                <a:solidFill>
-                  <a:srgbClr val="1A1A1A"/>
-                </a:solidFill>
-              </a:defRPr>
-            </a:pPr>
-            <a:r>
-              <a:t>•  So that: a task starts only after its predecessors finish and their data arrives, and everything is done by the deadline</a:t>
-            </a:r>
-          </a:p>
-          <a:p>
-            <a:pPr>
-              <a:spcAft>
-                <a:spcPts val="1000"/>
-              </a:spcAft>
-              <a:defRPr sz="2000">
-                <a:solidFill>
-                  <a:srgbClr val="1A1A1A"/>
-                </a:solidFill>
-              </a:defRPr>
-            </a:pPr>
-            <a:r>
-              <a:t>•  Maximize: the average accuracy</a:t>
-            </a:r>
-          </a:p>
-          <a:p>
-            <a:pPr>
-              <a:spcAft>
-                <a:spcPts val="400"/>
-              </a:spcAft>
-            </a:pPr>
-          </a:p>
-          <a:p>
-            <a:pPr>
-              <a:spcAft>
-                <a:spcPts val="1000"/>
-              </a:spcAft>
-              <a:defRPr sz="2000">
-                <a:solidFill>
-                  <a:srgbClr val="1A1A1A"/>
-                </a:solidFill>
-              </a:defRPr>
-            </a:pPr>
-            <a:r>
-              <a:t>•  NP-hard even on parallel machines — the exact solver is a reference, not the product</a:t>
+              <a:t>Take-away:  data sizes and bandwidths are given; the only decisions are where each task runs and how much of it runs</a:t>
             </a:r>
           </a:p>
         </p:txBody>
@@ -9025,6 +9783,41 @@
         </p:nvSpPr>
         <p:spPr>
           <a:xfrm>
+            <a:off x="8046720" y="329184"/>
+            <a:ext cx="3657600" cy="274320"/>
+          </a:xfrm>
+          <a:prstGeom prst="rect">
+            <a:avLst/>
+          </a:prstGeom>
+          <a:noFill/>
+        </p:spPr>
+        <p:txBody>
+          <a:bodyPr wrap="none">
+            <a:spAutoFit/>
+          </a:bodyPr>
+          <a:lstStyle/>
+          <a:p>
+            <a:pPr algn="r">
+              <a:defRPr sz="1100">
+                <a:solidFill>
+                  <a:srgbClr val="595959"/>
+                </a:solidFill>
+              </a:defRPr>
+            </a:pPr>
+            <a:r>
+              <a:t>PROBLEM DEFINITION</a:t>
+            </a:r>
+          </a:p>
+        </p:txBody>
+      </p:sp>
+      <p:sp>
+        <p:nvSpPr>
+          <p:cNvPr id="3" name="TextBox 2"/>
+          <p:cNvSpPr txBox="1"/>
+          <p:nvPr/>
+        </p:nvSpPr>
+        <p:spPr>
+          <a:xfrm>
             <a:off x="457200" y="201168"/>
             <a:ext cx="11338560" cy="685800"/>
           </a:xfrm>
@@ -9047,14 +9840,14 @@
               </a:defRPr>
             </a:pPr>
             <a:r>
-              <a:t>The dynamic problem (Paper 3)</a:t>
+              <a:t>The static problem (Papers 1 and 2)</a:t>
             </a:r>
           </a:p>
         </p:txBody>
       </p:sp>
       <p:cxnSp>
         <p:nvCxnSpPr>
-          <p:cNvPr id="3" name="Connector 2"/>
+          <p:cNvPr id="4" name="Connector 3"/>
           <p:cNvCxnSpPr/>
           <p:nvPr/>
         </p:nvCxnSpPr>
@@ -9089,7 +9882,7 @@
       </p:cxnSp>
       <p:sp>
         <p:nvSpPr>
-          <p:cNvPr id="4" name="TextBox 3"/>
+          <p:cNvPr id="5" name="TextBox 4"/>
           <p:cNvSpPr txBox="1"/>
           <p:nvPr/>
         </p:nvSpPr>
@@ -9124,7 +9917,7 @@
       </p:sp>
       <p:sp>
         <p:nvSpPr>
-          <p:cNvPr id="5" name="TextBox 4"/>
+          <p:cNvPr id="6" name="TextBox 5"/>
           <p:cNvSpPr txBox="1"/>
           <p:nvPr/>
         </p:nvSpPr>
@@ -9155,7 +9948,7 @@
               </a:defRPr>
             </a:pPr>
             <a:r>
-              <a:t>•  Event: partway through the run, a machine fails; its unfinished tasks are stranded</a:t>
+              <a:t>•  Given: the task graph, the infrastructure graph, and a deadline</a:t>
             </a:r>
           </a:p>
           <a:p>
@@ -9170,7 +9963,7 @@
               </a:defRPr>
             </a:pPr>
             <a:r>
-              <a:t>•  Decide: which part of the workflow has to be repaired, and where its tasks go on the surviving machines</a:t>
+              <a:t>•  Decide: for every task, which eligible machine it runs on, and how much of it runs</a:t>
             </a:r>
           </a:p>
           <a:p>
@@ -9185,7 +9978,7 @@
               </a:defRPr>
             </a:pPr>
             <a:r>
-              <a:t>•  So that: completed work never restarts, healthy placements never move, and the deadline still holds</a:t>
+              <a:t>•  So that: a task starts only after its predecessors finish and their data arrives, and everything is done by the deadline</a:t>
             </a:r>
           </a:p>
           <a:p>
@@ -9200,7 +9993,99 @@
               </a:defRPr>
             </a:pPr>
             <a:r>
-              <a:t>•  Minimize: the recovery cost — added runtime, tasks moved, data re-shipped — while keeping the accuracy</a:t>
+              <a:t>•  Maximize: the average accuracy</a:t>
+            </a:r>
+          </a:p>
+          <a:p>
+            <a:pPr>
+              <a:spcAft>
+                <a:spcPts val="400"/>
+              </a:spcAft>
+            </a:pPr>
+          </a:p>
+          <a:p>
+            <a:pPr>
+              <a:spcAft>
+                <a:spcPts val="1000"/>
+              </a:spcAft>
+              <a:defRPr sz="2000">
+                <a:solidFill>
+                  <a:srgbClr val="1A1A1A"/>
+                </a:solidFill>
+              </a:defRPr>
+            </a:pPr>
+            <a:r>
+              <a:t>•  NP-hard even on parallel machines — the exact solver is a reference, not the product</a:t>
+            </a:r>
+          </a:p>
+        </p:txBody>
+      </p:sp>
+      <p:cxnSp>
+        <p:nvCxnSpPr>
+          <p:cNvPr id="7" name="Connector 6"/>
+          <p:cNvCxnSpPr/>
+          <p:nvPr/>
+        </p:nvCxnSpPr>
+        <p:spPr>
+          <a:xfrm>
+            <a:off x="640080" y="5623560"/>
+            <a:ext cx="10881360" cy="0"/>
+          </a:xfrm>
+          <a:prstGeom prst="line">
+            <a:avLst/>
+          </a:prstGeom>
+          <a:ln w="9525">
+            <a:solidFill>
+              <a:srgbClr val="595959"/>
+            </a:solidFill>
+          </a:ln>
+        </p:spPr>
+        <p:style>
+          <a:lnRef idx="2">
+            <a:schemeClr val="accent1"/>
+          </a:lnRef>
+          <a:fillRef idx="0">
+            <a:schemeClr val="accent1"/>
+          </a:fillRef>
+          <a:effectRef idx="1">
+            <a:schemeClr val="accent1"/>
+          </a:effectRef>
+          <a:fontRef idx="minor">
+            <a:schemeClr val="tx1"/>
+          </a:fontRef>
+        </p:style>
+      </p:cxnSp>
+      <p:sp>
+        <p:nvSpPr>
+          <p:cNvPr id="8" name="TextBox 7"/>
+          <p:cNvSpPr txBox="1"/>
+          <p:nvPr/>
+        </p:nvSpPr>
+        <p:spPr>
+          <a:xfrm>
+            <a:off x="640080" y="5715000"/>
+            <a:ext cx="10881360" cy="914400"/>
+          </a:xfrm>
+          <a:prstGeom prst="rect">
+            <a:avLst/>
+          </a:prstGeom>
+          <a:noFill/>
+        </p:spPr>
+        <p:txBody>
+          <a:bodyPr wrap="square">
+            <a:spAutoFit/>
+          </a:bodyPr>
+          <a:lstStyle/>
+          <a:p>
+            <a:pPr>
+              <a:defRPr sz="1700" b="1">
+                <a:solidFill>
+                  <a:srgbClr val="1A1A1A"/>
+                </a:solidFill>
+              </a:defRPr>
+            </a:pPr>
+            <a:r>
+              <a:t>Take-away:  choose a machine and a fraction for every task so the workflow is feasible and its accuracy is maximal</a:t>
             </a:r>
           </a:p>
         </p:txBody>
@@ -9231,8 +10116,148 @@
         </p:nvSpPr>
         <p:spPr>
           <a:xfrm>
-            <a:off x="914400" y="2377440"/>
-            <a:ext cx="10332720" cy="1280160"/>
+            <a:off x="8046720" y="329184"/>
+            <a:ext cx="3657600" cy="274320"/>
+          </a:xfrm>
+          <a:prstGeom prst="rect">
+            <a:avLst/>
+          </a:prstGeom>
+          <a:noFill/>
+        </p:spPr>
+        <p:txBody>
+          <a:bodyPr wrap="none">
+            <a:spAutoFit/>
+          </a:bodyPr>
+          <a:lstStyle/>
+          <a:p>
+            <a:pPr algn="r">
+              <a:defRPr sz="1100">
+                <a:solidFill>
+                  <a:srgbClr val="595959"/>
+                </a:solidFill>
+              </a:defRPr>
+            </a:pPr>
+            <a:r>
+              <a:t>PROBLEM DEFINITION</a:t>
+            </a:r>
+          </a:p>
+        </p:txBody>
+      </p:sp>
+      <p:sp>
+        <p:nvSpPr>
+          <p:cNvPr id="3" name="TextBox 2"/>
+          <p:cNvSpPr txBox="1"/>
+          <p:nvPr/>
+        </p:nvSpPr>
+        <p:spPr>
+          <a:xfrm>
+            <a:off x="457200" y="201168"/>
+            <a:ext cx="11338560" cy="685800"/>
+          </a:xfrm>
+          <a:prstGeom prst="rect">
+            <a:avLst/>
+          </a:prstGeom>
+          <a:noFill/>
+        </p:spPr>
+        <p:txBody>
+          <a:bodyPr wrap="none" anchor="ctr">
+            <a:spAutoFit/>
+          </a:bodyPr>
+          <a:lstStyle/>
+          <a:p>
+            <a:pPr>
+              <a:defRPr sz="3000" b="1">
+                <a:solidFill>
+                  <a:srgbClr val="1A1A1A"/>
+                </a:solidFill>
+              </a:defRPr>
+            </a:pPr>
+            <a:r>
+              <a:t>The dynamic problem (Paper 3)</a:t>
+            </a:r>
+          </a:p>
+        </p:txBody>
+      </p:sp>
+      <p:cxnSp>
+        <p:nvCxnSpPr>
+          <p:cNvPr id="4" name="Connector 3"/>
+          <p:cNvCxnSpPr/>
+          <p:nvPr/>
+        </p:nvCxnSpPr>
+        <p:spPr>
+          <a:xfrm>
+            <a:off x="502920" y="932688"/>
+            <a:ext cx="11201400" cy="0"/>
+          </a:xfrm>
+          <a:prstGeom prst="line">
+            <a:avLst/>
+          </a:prstGeom>
+          <a:ln w="12700">
+            <a:solidFill>
+              <a:srgbClr val="1A1A1A"/>
+            </a:solidFill>
+          </a:ln>
+        </p:spPr>
+        <p:style>
+          <a:lnRef idx="2">
+            <a:schemeClr val="accent1"/>
+          </a:lnRef>
+          <a:fillRef idx="0">
+            <a:schemeClr val="accent1"/>
+          </a:fillRef>
+          <a:effectRef idx="1">
+            <a:schemeClr val="accent1"/>
+          </a:effectRef>
+          <a:fontRef idx="minor">
+            <a:schemeClr val="tx1"/>
+          </a:fontRef>
+        </p:style>
+      </p:cxnSp>
+      <p:sp>
+        <p:nvSpPr>
+          <p:cNvPr id="5" name="TextBox 4"/>
+          <p:cNvSpPr txBox="1"/>
+          <p:nvPr/>
+        </p:nvSpPr>
+        <p:spPr>
+          <a:xfrm>
+            <a:off x="11430000" y="6492240"/>
+            <a:ext cx="640080" cy="274320"/>
+          </a:xfrm>
+          <a:prstGeom prst="rect">
+            <a:avLst/>
+          </a:prstGeom>
+          <a:noFill/>
+        </p:spPr>
+        <p:txBody>
+          <a:bodyPr wrap="none">
+            <a:spAutoFit/>
+          </a:bodyPr>
+          <a:lstStyle/>
+          <a:p>
+            <a:pPr algn="r">
+              <a:defRPr sz="1000">
+                <a:solidFill>
+                  <a:srgbClr val="595959"/>
+                </a:solidFill>
+              </a:defRPr>
+            </a:pPr>
+            <a:r>
+              <a:t>18</a:t>
+            </a:r>
+          </a:p>
+        </p:txBody>
+      </p:sp>
+      <p:sp>
+        <p:nvSpPr>
+          <p:cNvPr id="6" name="TextBox 5"/>
+          <p:cNvSpPr txBox="1"/>
+          <p:nvPr/>
+        </p:nvSpPr>
+        <p:spPr>
+          <a:xfrm>
+            <a:off x="640080" y="1371600"/>
+            <a:ext cx="10972800" cy="5029200"/>
           </a:xfrm>
           <a:prstGeom prst="rect">
             <a:avLst/>
@@ -9245,29 +10270,112 @@
           </a:bodyPr>
           <a:lstStyle/>
           <a:p>
-            <a:pPr algn="ctr">
-              <a:defRPr sz="3800" b="1">
+            <a:pPr>
+              <a:spcAft>
+                <a:spcPts val="1000"/>
+              </a:spcAft>
+              <a:defRPr sz="2000">
                 <a:solidFill>
                   <a:srgbClr val="1A1A1A"/>
                 </a:solidFill>
               </a:defRPr>
             </a:pPr>
             <a:r>
-              <a:t>Paper 1</a:t>
-            </a:r>
-          </a:p>
-        </p:txBody>
-      </p:sp>
-      <p:sp>
-        <p:nvSpPr>
-          <p:cNvPr id="3" name="TextBox 2"/>
+              <a:t>•  Event: partway through the run, a machine fails; its unfinished tasks are stranded</a:t>
+            </a:r>
+          </a:p>
+          <a:p>
+            <a:pPr>
+              <a:spcAft>
+                <a:spcPts val="1000"/>
+              </a:spcAft>
+              <a:defRPr sz="2000">
+                <a:solidFill>
+                  <a:srgbClr val="1A1A1A"/>
+                </a:solidFill>
+              </a:defRPr>
+            </a:pPr>
+            <a:r>
+              <a:t>•  Decide: which part of the workflow has to be repaired, and where its tasks go on the surviving machines</a:t>
+            </a:r>
+          </a:p>
+          <a:p>
+            <a:pPr>
+              <a:spcAft>
+                <a:spcPts val="1000"/>
+              </a:spcAft>
+              <a:defRPr sz="2000">
+                <a:solidFill>
+                  <a:srgbClr val="1A1A1A"/>
+                </a:solidFill>
+              </a:defRPr>
+            </a:pPr>
+            <a:r>
+              <a:t>•  So that: completed work never restarts, healthy placements never move, and the deadline still holds</a:t>
+            </a:r>
+          </a:p>
+          <a:p>
+            <a:pPr>
+              <a:spcAft>
+                <a:spcPts val="1000"/>
+              </a:spcAft>
+              <a:defRPr sz="2000">
+                <a:solidFill>
+                  <a:srgbClr val="1A1A1A"/>
+                </a:solidFill>
+              </a:defRPr>
+            </a:pPr>
+            <a:r>
+              <a:t>•  Minimize: the recovery cost — added runtime, tasks moved, data re-shipped — while keeping the accuracy</a:t>
+            </a:r>
+          </a:p>
+        </p:txBody>
+      </p:sp>
+      <p:cxnSp>
+        <p:nvCxnSpPr>
+          <p:cNvPr id="7" name="Connector 6"/>
+          <p:cNvCxnSpPr/>
+          <p:nvPr/>
+        </p:nvCxnSpPr>
+        <p:spPr>
+          <a:xfrm>
+            <a:off x="640080" y="5623560"/>
+            <a:ext cx="10881360" cy="0"/>
+          </a:xfrm>
+          <a:prstGeom prst="line">
+            <a:avLst/>
+          </a:prstGeom>
+          <a:ln w="9525">
+            <a:solidFill>
+              <a:srgbClr val="595959"/>
+            </a:solidFill>
+          </a:ln>
+        </p:spPr>
+        <p:style>
+          <a:lnRef idx="2">
+            <a:schemeClr val="accent1"/>
+          </a:lnRef>
+          <a:fillRef idx="0">
+            <a:schemeClr val="accent1"/>
+          </a:fillRef>
+          <a:effectRef idx="1">
+            <a:schemeClr val="accent1"/>
+          </a:effectRef>
+          <a:fontRef idx="minor">
+            <a:schemeClr val="tx1"/>
+          </a:fontRef>
+        </p:style>
+      </p:cxnSp>
+      <p:sp>
+        <p:nvSpPr>
+          <p:cNvPr id="8" name="TextBox 7"/>
           <p:cNvSpPr txBox="1"/>
           <p:nvPr/>
         </p:nvSpPr>
         <p:spPr>
           <a:xfrm>
-            <a:off x="914400" y="3657600"/>
-            <a:ext cx="10332720" cy="1097280"/>
+            <a:off x="640080" y="5715000"/>
+            <a:ext cx="10881360" cy="914400"/>
           </a:xfrm>
           <a:prstGeom prst="rect">
             <a:avLst/>
@@ -9280,50 +10388,15 @@
           </a:bodyPr>
           <a:lstStyle/>
           <a:p>
-            <a:pPr algn="ctr">
-              <a:defRPr sz="2000">
-                <a:solidFill>
-                  <a:srgbClr val="595959"/>
-                </a:solidFill>
-              </a:defRPr>
-            </a:pPr>
-            <a:r>
-              <a:t>Task allocation across federated fog — published at IEEE Cloud Summit 2025</a:t>
-            </a:r>
-          </a:p>
-        </p:txBody>
-      </p:sp>
-      <p:sp>
-        <p:nvSpPr>
-          <p:cNvPr id="4" name="TextBox 3"/>
-          <p:cNvSpPr txBox="1"/>
-          <p:nvPr/>
-        </p:nvSpPr>
-        <p:spPr>
-          <a:xfrm>
-            <a:off x="11430000" y="6492240"/>
-            <a:ext cx="640080" cy="274320"/>
-          </a:xfrm>
-          <a:prstGeom prst="rect">
-            <a:avLst/>
-          </a:prstGeom>
-          <a:noFill/>
-        </p:spPr>
-        <p:txBody>
-          <a:bodyPr wrap="none">
-            <a:spAutoFit/>
-          </a:bodyPr>
-          <a:lstStyle/>
-          <a:p>
-            <a:pPr algn="r">
-              <a:defRPr sz="1000">
-                <a:solidFill>
-                  <a:srgbClr val="595959"/>
-                </a:solidFill>
-              </a:defRPr>
-            </a:pPr>
-            <a:r>
-              <a:t>18</a:t>
+            <a:pPr>
+              <a:defRPr sz="1700" b="1">
+                <a:solidFill>
+                  <a:srgbClr val="1A1A1A"/>
+                </a:solidFill>
+              </a:defRPr>
+            </a:pPr>
+            <a:r>
+              <a:t>Take-away:  repair only what the failure broke — done work is never redone and healthy placements never move</a:t>
             </a:r>
           </a:p>
         </p:txBody>
@@ -9354,8 +10427,8 @@
         </p:nvSpPr>
         <p:spPr>
           <a:xfrm>
-            <a:off x="457200" y="201168"/>
-            <a:ext cx="11338560" cy="685800"/>
+            <a:off x="914400" y="2377440"/>
+            <a:ext cx="10332720" cy="1280160"/>
           </a:xfrm>
           <a:prstGeom prst="rect">
             <a:avLst/>
@@ -9363,59 +10436,59 @@
           <a:noFill/>
         </p:spPr>
         <p:txBody>
-          <a:bodyPr wrap="none" anchor="ctr">
+          <a:bodyPr wrap="square">
             <a:spAutoFit/>
           </a:bodyPr>
           <a:lstStyle/>
           <a:p>
-            <a:pPr>
-              <a:defRPr sz="3000" b="1">
+            <a:pPr algn="ctr">
+              <a:defRPr sz="3800" b="1">
                 <a:solidFill>
                   <a:srgbClr val="1A1A1A"/>
                 </a:solidFill>
               </a:defRPr>
             </a:pPr>
             <a:r>
-              <a:t>What Paper 1 did</a:t>
-            </a:r>
-          </a:p>
-        </p:txBody>
-      </p:sp>
-      <p:cxnSp>
-        <p:nvCxnSpPr>
-          <p:cNvPr id="3" name="Connector 2"/>
-          <p:cNvCxnSpPr/>
-          <p:nvPr/>
-        </p:nvCxnSpPr>
-        <p:spPr>
-          <a:xfrm>
-            <a:off x="502920" y="932688"/>
-            <a:ext cx="11201400" cy="0"/>
-          </a:xfrm>
-          <a:prstGeom prst="line">
-            <a:avLst/>
-          </a:prstGeom>
-          <a:ln w="12700">
-            <a:solidFill>
-              <a:srgbClr val="1A1A1A"/>
-            </a:solidFill>
-          </a:ln>
-        </p:spPr>
-        <p:style>
-          <a:lnRef idx="2">
-            <a:schemeClr val="accent1"/>
-          </a:lnRef>
-          <a:fillRef idx="0">
-            <a:schemeClr val="accent1"/>
-          </a:fillRef>
-          <a:effectRef idx="1">
-            <a:schemeClr val="accent1"/>
-          </a:effectRef>
-          <a:fontRef idx="minor">
-            <a:schemeClr val="tx1"/>
-          </a:fontRef>
-        </p:style>
-      </p:cxnSp>
+              <a:t>4.  Paper 1 — completed work</a:t>
+            </a:r>
+          </a:p>
+        </p:txBody>
+      </p:sp>
+      <p:sp>
+        <p:nvSpPr>
+          <p:cNvPr id="3" name="TextBox 2"/>
+          <p:cNvSpPr txBox="1"/>
+          <p:nvPr/>
+        </p:nvSpPr>
+        <p:spPr>
+          <a:xfrm>
+            <a:off x="914400" y="3657600"/>
+            <a:ext cx="10332720" cy="1097280"/>
+          </a:xfrm>
+          <a:prstGeom prst="rect">
+            <a:avLst/>
+          </a:prstGeom>
+          <a:noFill/>
+        </p:spPr>
+        <p:txBody>
+          <a:bodyPr wrap="square">
+            <a:spAutoFit/>
+          </a:bodyPr>
+          <a:lstStyle/>
+          <a:p>
+            <a:pPr algn="ctr">
+              <a:defRPr sz="2000">
+                <a:solidFill>
+                  <a:srgbClr val="595959"/>
+                </a:solidFill>
+              </a:defRPr>
+            </a:pPr>
+            <a:r>
+              <a:t>Task allocation across federated fog — published at IEEE Cloud Summit 2025</a:t>
+            </a:r>
+          </a:p>
+        </p:txBody>
+      </p:sp>
       <p:sp>
         <p:nvSpPr>
           <p:cNvPr id="4" name="TextBox 3"/>
@@ -9447,111 +10520,6 @@
             </a:pPr>
             <a:r>
               <a:t>19</a:t>
-            </a:r>
-          </a:p>
-        </p:txBody>
-      </p:sp>
-      <p:sp>
-        <p:nvSpPr>
-          <p:cNvPr id="5" name="TextBox 4"/>
-          <p:cNvSpPr txBox="1"/>
-          <p:nvPr/>
-        </p:nvSpPr>
-        <p:spPr>
-          <a:xfrm>
-            <a:off x="640080" y="1234440"/>
-            <a:ext cx="10972800" cy="5029200"/>
-          </a:xfrm>
-          <a:prstGeom prst="rect">
-            <a:avLst/>
-          </a:prstGeom>
-          <a:noFill/>
-        </p:spPr>
-        <p:txBody>
-          <a:bodyPr wrap="square">
-            <a:spAutoFit/>
-          </a:bodyPr>
-          <a:lstStyle/>
-          <a:p>
-            <a:pPr>
-              <a:spcAft>
-                <a:spcPts val="1000"/>
-              </a:spcAft>
-              <a:defRPr sz="2000">
-                <a:solidFill>
-                  <a:srgbClr val="1A1A1A"/>
-                </a:solidFill>
-              </a:defRPr>
-            </a:pPr>
-            <a:r>
-              <a:t>•  Formulated the joint problem — where each task runs and how much of it runs — as a mixed-integer program</a:t>
-            </a:r>
-          </a:p>
-          <a:p>
-            <a:pPr>
-              <a:spcAft>
-                <a:spcPts val="1000"/>
-              </a:spcAft>
-              <a:defRPr sz="2000">
-                <a:solidFill>
-                  <a:srgbClr val="1A1A1A"/>
-                </a:solidFill>
-              </a:defRPr>
-            </a:pPr>
-            <a:r>
-              <a:t>•  Proved the formulation correct: unique assignment, respected precedence, held deadline, optimal accuracy</a:t>
-            </a:r>
-          </a:p>
-          <a:p>
-            <a:pPr>
-              <a:spcAft>
-                <a:spcPts val="1000"/>
-              </a:spcAft>
-              <a:defRPr sz="2000">
-                <a:solidFill>
-                  <a:srgbClr val="1A1A1A"/>
-                </a:solidFill>
-              </a:defRPr>
-            </a:pPr>
-            <a:r>
-              <a:t>•  Built three scalable schedulers on the same cost model: LP rounding, a data-aware greedy, and a genetic algorithm</a:t>
-            </a:r>
-          </a:p>
-          <a:p>
-            <a:pPr>
-              <a:spcAft>
-                <a:spcPts val="1000"/>
-              </a:spcAft>
-              <a:defRPr sz="2000">
-                <a:solidFill>
-                  <a:srgbClr val="1A1A1A"/>
-                </a:solidFill>
-              </a:defRPr>
-            </a:pPr>
-            <a:r>
-              <a:t>•  Published at IEEE Cloud Summit 2025</a:t>
-            </a:r>
-          </a:p>
-          <a:p>
-            <a:pPr>
-              <a:spcAft>
-                <a:spcPts val="400"/>
-              </a:spcAft>
-            </a:pPr>
-          </a:p>
-          <a:p>
-            <a:pPr>
-              <a:spcAft>
-                <a:spcPts val="1000"/>
-              </a:spcAft>
-              <a:defRPr sz="2000">
-                <a:solidFill>
-                  <a:srgbClr val="1A1A1A"/>
-                </a:solidFill>
-              </a:defRPr>
-            </a:pPr>
-            <a:r>
-              <a:t>•  What it left open: no bound to score against, no link-degradation study, no machine-level failures</a:t>
             </a:r>
           </a:p>
         </p:txBody>
@@ -9705,14 +10673,14 @@
               <a:spcAft>
                 <a:spcPts val="1000"/>
               </a:spcAft>
-              <a:defRPr sz="2000">
+              <a:defRPr sz="1900">
                 <a:solidFill>
                   <a:srgbClr val="1A1A1A"/>
                 </a:solidFill>
               </a:defRPr>
             </a:pPr>
             <a:r>
-              <a:t>•  The setting — disaster-response workflows on federated fog</a:t>
+              <a:t>•  1.  Motivation — disaster-response workflows on federated fog</a:t>
             </a:r>
           </a:p>
           <a:p>
@@ -9720,14 +10688,14 @@
               <a:spcAft>
                 <a:spcPts val="1000"/>
               </a:spcAft>
-              <a:defRPr sz="2000">
+              <a:defRPr sz="1900">
                 <a:solidFill>
                   <a:srgbClr val="1A1A1A"/>
                 </a:solidFill>
               </a:defRPr>
             </a:pPr>
             <a:r>
-              <a:t>•  Related work, and what is still missing</a:t>
+              <a:t>•  2.  Related work, and what is still missing</a:t>
             </a:r>
           </a:p>
           <a:p>
@@ -9735,14 +10703,14 @@
               <a:spcAft>
                 <a:spcPts val="1000"/>
               </a:spcAft>
-              <a:defRPr sz="2000">
+              <a:defRPr sz="1900">
                 <a:solidFill>
                   <a:srgbClr val="1A1A1A"/>
                 </a:solidFill>
               </a:defRPr>
             </a:pPr>
             <a:r>
-              <a:t>•  The problem, stated precisely</a:t>
+              <a:t>•  3.  Problem definition — inputs, decisions, objective</a:t>
             </a:r>
           </a:p>
           <a:p>
@@ -9750,14 +10718,14 @@
               <a:spcAft>
                 <a:spcPts val="1000"/>
               </a:spcAft>
-              <a:defRPr sz="2000">
+              <a:defRPr sz="1900">
                 <a:solidFill>
                   <a:srgbClr val="1A1A1A"/>
                 </a:solidFill>
               </a:defRPr>
             </a:pPr>
             <a:r>
-              <a:t>•  Paper 1 – task allocation across federated fog (published, IEEE Cloud Summit 2025)</a:t>
+              <a:t>•  4.  Completed work: Paper 1 (published, IEEE Cloud Summit 2025)</a:t>
             </a:r>
           </a:p>
           <a:p>
@@ -9765,14 +10733,14 @@
               <a:spcAft>
                 <a:spcPts val="1000"/>
               </a:spcAft>
-              <a:defRPr sz="2000">
+              <a:defRPr sz="1900">
                 <a:solidFill>
                   <a:srgbClr val="1A1A1A"/>
                 </a:solidFill>
               </a:defRPr>
             </a:pPr>
             <a:r>
-              <a:t>•  Paper 2 – data-aware scheduling with approximate execution (in revision, CCGrid 2027)</a:t>
+              <a:t>•  5.  Completed work: Paper 2 (in revision, CCGrid 2027), with experimental results</a:t>
             </a:r>
           </a:p>
           <a:p>
@@ -9780,14 +10748,14 @@
               <a:spcAft>
                 <a:spcPts val="1000"/>
               </a:spcAft>
-              <a:defRPr sz="2000">
+              <a:defRPr sz="1900">
                 <a:solidFill>
                   <a:srgbClr val="1A1A1A"/>
                 </a:solidFill>
               </a:defRPr>
             </a:pPr>
             <a:r>
-              <a:t>•  Paper 3 – the proposal: partial repartitioning after a resource failure</a:t>
+              <a:t>•  6.  Proposed research: dynamic partial repartitioning after node failures</a:t>
             </a:r>
           </a:p>
           <a:p>
@@ -9795,14 +10763,14 @@
               <a:spcAft>
                 <a:spcPts val="1000"/>
               </a:spcAft>
-              <a:defRPr sz="2000">
+              <a:defRPr sz="1900">
                 <a:solidFill>
                   <a:srgbClr val="1A1A1A"/>
                 </a:solidFill>
               </a:defRPr>
             </a:pPr>
             <a:r>
-              <a:t>•  Evaluation plan, timeline, and expected contributions</a:t>
+              <a:t>•  7.  Evaluation plan, timeline, risks, and expected contributions</a:t>
             </a:r>
           </a:p>
         </p:txBody>
@@ -9833,6 +10801,41 @@
         </p:nvSpPr>
         <p:spPr>
           <a:xfrm>
+            <a:off x="8046720" y="329184"/>
+            <a:ext cx="3657600" cy="274320"/>
+          </a:xfrm>
+          <a:prstGeom prst="rect">
+            <a:avLst/>
+          </a:prstGeom>
+          <a:noFill/>
+        </p:spPr>
+        <p:txBody>
+          <a:bodyPr wrap="none">
+            <a:spAutoFit/>
+          </a:bodyPr>
+          <a:lstStyle/>
+          <a:p>
+            <a:pPr algn="r">
+              <a:defRPr sz="1100">
+                <a:solidFill>
+                  <a:srgbClr val="595959"/>
+                </a:solidFill>
+              </a:defRPr>
+            </a:pPr>
+            <a:r>
+              <a:t>PAPER 1 · COMPLETED</a:t>
+            </a:r>
+          </a:p>
+        </p:txBody>
+      </p:sp>
+      <p:sp>
+        <p:nvSpPr>
+          <p:cNvPr id="3" name="TextBox 2"/>
+          <p:cNvSpPr txBox="1"/>
+          <p:nvPr/>
+        </p:nvSpPr>
+        <p:spPr>
+          <a:xfrm>
             <a:off x="457200" y="201168"/>
             <a:ext cx="11338560" cy="685800"/>
           </a:xfrm>
@@ -9855,14 +10858,14 @@
               </a:defRPr>
             </a:pPr>
             <a:r>
-              <a:t>The four schedulers, in plain terms</a:t>
+              <a:t>What Paper 1 did</a:t>
             </a:r>
           </a:p>
         </p:txBody>
       </p:sp>
       <p:cxnSp>
         <p:nvCxnSpPr>
-          <p:cNvPr id="3" name="Connector 2"/>
+          <p:cNvPr id="4" name="Connector 3"/>
           <p:cNvCxnSpPr/>
           <p:nvPr/>
         </p:nvCxnSpPr>
@@ -9897,7 +10900,7 @@
       </p:cxnSp>
       <p:sp>
         <p:nvSpPr>
-          <p:cNvPr id="4" name="TextBox 3"/>
+          <p:cNvPr id="5" name="TextBox 4"/>
           <p:cNvSpPr txBox="1"/>
           <p:nvPr/>
         </p:nvSpPr>
@@ -9930,9 +10933,342 @@
           </a:p>
         </p:txBody>
       </p:sp>
+      <p:sp>
+        <p:nvSpPr>
+          <p:cNvPr id="6" name="TextBox 5"/>
+          <p:cNvSpPr txBox="1"/>
+          <p:nvPr/>
+        </p:nvSpPr>
+        <p:spPr>
+          <a:xfrm>
+            <a:off x="640080" y="1234440"/>
+            <a:ext cx="10972800" cy="5029200"/>
+          </a:xfrm>
+          <a:prstGeom prst="rect">
+            <a:avLst/>
+          </a:prstGeom>
+          <a:noFill/>
+        </p:spPr>
+        <p:txBody>
+          <a:bodyPr wrap="square">
+            <a:spAutoFit/>
+          </a:bodyPr>
+          <a:lstStyle/>
+          <a:p>
+            <a:pPr>
+              <a:spcAft>
+                <a:spcPts val="1000"/>
+              </a:spcAft>
+              <a:defRPr sz="2000">
+                <a:solidFill>
+                  <a:srgbClr val="1A1A1A"/>
+                </a:solidFill>
+              </a:defRPr>
+            </a:pPr>
+            <a:r>
+              <a:t>•  Formulated the joint problem — where each task runs and how much of it runs — as a mixed-integer program</a:t>
+            </a:r>
+          </a:p>
+          <a:p>
+            <a:pPr>
+              <a:spcAft>
+                <a:spcPts val="1000"/>
+              </a:spcAft>
+              <a:defRPr sz="2000">
+                <a:solidFill>
+                  <a:srgbClr val="1A1A1A"/>
+                </a:solidFill>
+              </a:defRPr>
+            </a:pPr>
+            <a:r>
+              <a:t>•  Proved the formulation correct: unique assignment, respected precedence, held deadline, optimal accuracy</a:t>
+            </a:r>
+          </a:p>
+          <a:p>
+            <a:pPr>
+              <a:spcAft>
+                <a:spcPts val="1000"/>
+              </a:spcAft>
+              <a:defRPr sz="2000">
+                <a:solidFill>
+                  <a:srgbClr val="1A1A1A"/>
+                </a:solidFill>
+              </a:defRPr>
+            </a:pPr>
+            <a:r>
+              <a:t>•  Built three scalable schedulers on the same cost model: LP rounding, a data-aware greedy, and a genetic algorithm</a:t>
+            </a:r>
+          </a:p>
+          <a:p>
+            <a:pPr>
+              <a:spcAft>
+                <a:spcPts val="1000"/>
+              </a:spcAft>
+              <a:defRPr sz="2000">
+                <a:solidFill>
+                  <a:srgbClr val="1A1A1A"/>
+                </a:solidFill>
+              </a:defRPr>
+            </a:pPr>
+            <a:r>
+              <a:t>•  Published at IEEE Cloud Summit 2025</a:t>
+            </a:r>
+          </a:p>
+          <a:p>
+            <a:pPr>
+              <a:spcAft>
+                <a:spcPts val="400"/>
+              </a:spcAft>
+            </a:pPr>
+          </a:p>
+          <a:p>
+            <a:pPr>
+              <a:spcAft>
+                <a:spcPts val="1000"/>
+              </a:spcAft>
+              <a:defRPr sz="2000">
+                <a:solidFill>
+                  <a:srgbClr val="1A1A1A"/>
+                </a:solidFill>
+              </a:defRPr>
+            </a:pPr>
+            <a:r>
+              <a:t>•  What it left open: no bound to score against, no link-degradation study, no machine-level failures</a:t>
+            </a:r>
+          </a:p>
+        </p:txBody>
+      </p:sp>
+      <p:cxnSp>
+        <p:nvCxnSpPr>
+          <p:cNvPr id="7" name="Connector 6"/>
+          <p:cNvCxnSpPr/>
+          <p:nvPr/>
+        </p:nvCxnSpPr>
+        <p:spPr>
+          <a:xfrm>
+            <a:off x="640080" y="5623560"/>
+            <a:ext cx="10881360" cy="0"/>
+          </a:xfrm>
+          <a:prstGeom prst="line">
+            <a:avLst/>
+          </a:prstGeom>
+          <a:ln w="9525">
+            <a:solidFill>
+              <a:srgbClr val="595959"/>
+            </a:solidFill>
+          </a:ln>
+        </p:spPr>
+        <p:style>
+          <a:lnRef idx="2">
+            <a:schemeClr val="accent1"/>
+          </a:lnRef>
+          <a:fillRef idx="0">
+            <a:schemeClr val="accent1"/>
+          </a:fillRef>
+          <a:effectRef idx="1">
+            <a:schemeClr val="accent1"/>
+          </a:effectRef>
+          <a:fontRef idx="minor">
+            <a:schemeClr val="tx1"/>
+          </a:fontRef>
+        </p:style>
+      </p:cxnSp>
+      <p:sp>
+        <p:nvSpPr>
+          <p:cNvPr id="8" name="TextBox 7"/>
+          <p:cNvSpPr txBox="1"/>
+          <p:nvPr/>
+        </p:nvSpPr>
+        <p:spPr>
+          <a:xfrm>
+            <a:off x="640080" y="5715000"/>
+            <a:ext cx="10881360" cy="914400"/>
+          </a:xfrm>
+          <a:prstGeom prst="rect">
+            <a:avLst/>
+          </a:prstGeom>
+          <a:noFill/>
+        </p:spPr>
+        <p:txBody>
+          <a:bodyPr wrap="square">
+            <a:spAutoFit/>
+          </a:bodyPr>
+          <a:lstStyle/>
+          <a:p>
+            <a:pPr>
+              <a:defRPr sz="1700" b="1">
+                <a:solidFill>
+                  <a:srgbClr val="1A1A1A"/>
+                </a:solidFill>
+              </a:defRPr>
+            </a:pPr>
+            <a:r>
+              <a:t>Take-away:  paper 1 delivered the model, the proofs, and four schedulers on one cost model</a:t>
+            </a:r>
+          </a:p>
+        </p:txBody>
+      </p:sp>
+    </p:spTree>
+  </p:cSld>
+  <p:clrMapOvr>
+    <a:masterClrMapping/>
+  </p:clrMapOvr>
+</p:sld>
+</file>
+
+<file path=ppt/slides/slide21.xml><?xml version="1.0" encoding="utf-8"?>
+<p:sld xmlns:a="http://schemas.openxmlformats.org/drawingml/2006/main" xmlns:p="http://schemas.openxmlformats.org/presentationml/2006/main" xmlns:r="http://schemas.openxmlformats.org/officeDocument/2006/relationships">
+  <p:cSld>
+    <p:spTree>
+      <p:nvGrpSpPr>
+        <p:cNvPr id="1" name=""/>
+        <p:cNvGrpSpPr/>
+        <p:nvPr/>
+      </p:nvGrpSpPr>
+      <p:grpSpPr/>
+      <p:sp>
+        <p:nvSpPr>
+          <p:cNvPr id="2" name="TextBox 1"/>
+          <p:cNvSpPr txBox="1"/>
+          <p:nvPr/>
+        </p:nvSpPr>
+        <p:spPr>
+          <a:xfrm>
+            <a:off x="8046720" y="329184"/>
+            <a:ext cx="3657600" cy="274320"/>
+          </a:xfrm>
+          <a:prstGeom prst="rect">
+            <a:avLst/>
+          </a:prstGeom>
+          <a:noFill/>
+        </p:spPr>
+        <p:txBody>
+          <a:bodyPr wrap="none">
+            <a:spAutoFit/>
+          </a:bodyPr>
+          <a:lstStyle/>
+          <a:p>
+            <a:pPr algn="r">
+              <a:defRPr sz="1100">
+                <a:solidFill>
+                  <a:srgbClr val="595959"/>
+                </a:solidFill>
+              </a:defRPr>
+            </a:pPr>
+            <a:r>
+              <a:t>PAPER 1 · COMPLETED</a:t>
+            </a:r>
+          </a:p>
+        </p:txBody>
+      </p:sp>
+      <p:sp>
+        <p:nvSpPr>
+          <p:cNvPr id="3" name="TextBox 2"/>
+          <p:cNvSpPr txBox="1"/>
+          <p:nvPr/>
+        </p:nvSpPr>
+        <p:spPr>
+          <a:xfrm>
+            <a:off x="457200" y="201168"/>
+            <a:ext cx="11338560" cy="685800"/>
+          </a:xfrm>
+          <a:prstGeom prst="rect">
+            <a:avLst/>
+          </a:prstGeom>
+          <a:noFill/>
+        </p:spPr>
+        <p:txBody>
+          <a:bodyPr wrap="none" anchor="ctr">
+            <a:spAutoFit/>
+          </a:bodyPr>
+          <a:lstStyle/>
+          <a:p>
+            <a:pPr>
+              <a:defRPr sz="3000" b="1">
+                <a:solidFill>
+                  <a:srgbClr val="1A1A1A"/>
+                </a:solidFill>
+              </a:defRPr>
+            </a:pPr>
+            <a:r>
+              <a:t>The four schedulers, in plain terms</a:t>
+            </a:r>
+          </a:p>
+        </p:txBody>
+      </p:sp>
+      <p:cxnSp>
+        <p:nvCxnSpPr>
+          <p:cNvPr id="4" name="Connector 3"/>
+          <p:cNvCxnSpPr/>
+          <p:nvPr/>
+        </p:nvCxnSpPr>
+        <p:spPr>
+          <a:xfrm>
+            <a:off x="502920" y="932688"/>
+            <a:ext cx="11201400" cy="0"/>
+          </a:xfrm>
+          <a:prstGeom prst="line">
+            <a:avLst/>
+          </a:prstGeom>
+          <a:ln w="12700">
+            <a:solidFill>
+              <a:srgbClr val="1A1A1A"/>
+            </a:solidFill>
+          </a:ln>
+        </p:spPr>
+        <p:style>
+          <a:lnRef idx="2">
+            <a:schemeClr val="accent1"/>
+          </a:lnRef>
+          <a:fillRef idx="0">
+            <a:schemeClr val="accent1"/>
+          </a:fillRef>
+          <a:effectRef idx="1">
+            <a:schemeClr val="accent1"/>
+          </a:effectRef>
+          <a:fontRef idx="minor">
+            <a:schemeClr val="tx1"/>
+          </a:fontRef>
+        </p:style>
+      </p:cxnSp>
+      <p:sp>
+        <p:nvSpPr>
+          <p:cNvPr id="5" name="TextBox 4"/>
+          <p:cNvSpPr txBox="1"/>
+          <p:nvPr/>
+        </p:nvSpPr>
+        <p:spPr>
+          <a:xfrm>
+            <a:off x="11430000" y="6492240"/>
+            <a:ext cx="640080" cy="274320"/>
+          </a:xfrm>
+          <a:prstGeom prst="rect">
+            <a:avLst/>
+          </a:prstGeom>
+          <a:noFill/>
+        </p:spPr>
+        <p:txBody>
+          <a:bodyPr wrap="none">
+            <a:spAutoFit/>
+          </a:bodyPr>
+          <a:lstStyle/>
+          <a:p>
+            <a:pPr algn="r">
+              <a:defRPr sz="1000">
+                <a:solidFill>
+                  <a:srgbClr val="595959"/>
+                </a:solidFill>
+              </a:defRPr>
+            </a:pPr>
+            <a:r>
+              <a:t>21</a:t>
+            </a:r>
+          </a:p>
+        </p:txBody>
+      </p:sp>
       <p:graphicFrame>
         <p:nvGraphicFramePr>
-          <p:cNvPr id="5" name="Table 4"/>
+          <p:cNvPr id="6" name="Table 5"/>
           <p:cNvGraphicFramePr>
             <a:graphicFrameLocks noGrp="1"/>
           </p:cNvGraphicFramePr>
@@ -10320,129 +11656,6 @@
 </p:sld>
 </file>
 
-<file path=ppt/slides/slide21.xml><?xml version="1.0" encoding="utf-8"?>
-<p:sld xmlns:a="http://schemas.openxmlformats.org/drawingml/2006/main" xmlns:p="http://schemas.openxmlformats.org/presentationml/2006/main" xmlns:r="http://schemas.openxmlformats.org/officeDocument/2006/relationships">
-  <p:cSld>
-    <p:spTree>
-      <p:nvGrpSpPr>
-        <p:cNvPr id="1" name=""/>
-        <p:cNvGrpSpPr/>
-        <p:nvPr/>
-      </p:nvGrpSpPr>
-      <p:grpSpPr/>
-      <p:sp>
-        <p:nvSpPr>
-          <p:cNvPr id="2" name="TextBox 1"/>
-          <p:cNvSpPr txBox="1"/>
-          <p:nvPr/>
-        </p:nvSpPr>
-        <p:spPr>
-          <a:xfrm>
-            <a:off x="914400" y="2377440"/>
-            <a:ext cx="10332720" cy="1280160"/>
-          </a:xfrm>
-          <a:prstGeom prst="rect">
-            <a:avLst/>
-          </a:prstGeom>
-          <a:noFill/>
-        </p:spPr>
-        <p:txBody>
-          <a:bodyPr wrap="square">
-            <a:spAutoFit/>
-          </a:bodyPr>
-          <a:lstStyle/>
-          <a:p>
-            <a:pPr algn="ctr">
-              <a:defRPr sz="3800" b="1">
-                <a:solidFill>
-                  <a:srgbClr val="1A1A1A"/>
-                </a:solidFill>
-              </a:defRPr>
-            </a:pPr>
-            <a:r>
-              <a:t>Paper 2</a:t>
-            </a:r>
-          </a:p>
-        </p:txBody>
-      </p:sp>
-      <p:sp>
-        <p:nvSpPr>
-          <p:cNvPr id="3" name="TextBox 2"/>
-          <p:cNvSpPr txBox="1"/>
-          <p:nvPr/>
-        </p:nvSpPr>
-        <p:spPr>
-          <a:xfrm>
-            <a:off x="914400" y="3657600"/>
-            <a:ext cx="10332720" cy="1097280"/>
-          </a:xfrm>
-          <a:prstGeom prst="rect">
-            <a:avLst/>
-          </a:prstGeom>
-          <a:noFill/>
-        </p:spPr>
-        <p:txBody>
-          <a:bodyPr wrap="square">
-            <a:spAutoFit/>
-          </a:bodyPr>
-          <a:lstStyle/>
-          <a:p>
-            <a:pPr algn="ctr">
-              <a:defRPr sz="2000">
-                <a:solidFill>
-                  <a:srgbClr val="595959"/>
-                </a:solidFill>
-              </a:defRPr>
-            </a:pPr>
-            <a:r>
-              <a:t>Data-aware scheduling of approximate DAG workflows — in revision for CCGrid 2027</a:t>
-            </a:r>
-          </a:p>
-        </p:txBody>
-      </p:sp>
-      <p:sp>
-        <p:nvSpPr>
-          <p:cNvPr id="4" name="TextBox 3"/>
-          <p:cNvSpPr txBox="1"/>
-          <p:nvPr/>
-        </p:nvSpPr>
-        <p:spPr>
-          <a:xfrm>
-            <a:off x="11430000" y="6492240"/>
-            <a:ext cx="640080" cy="274320"/>
-          </a:xfrm>
-          <a:prstGeom prst="rect">
-            <a:avLst/>
-          </a:prstGeom>
-          <a:noFill/>
-        </p:spPr>
-        <p:txBody>
-          <a:bodyPr wrap="none">
-            <a:spAutoFit/>
-          </a:bodyPr>
-          <a:lstStyle/>
-          <a:p>
-            <a:pPr algn="r">
-              <a:defRPr sz="1000">
-                <a:solidFill>
-                  <a:srgbClr val="595959"/>
-                </a:solidFill>
-              </a:defRPr>
-            </a:pPr>
-            <a:r>
-              <a:t>21</a:t>
-            </a:r>
-          </a:p>
-        </p:txBody>
-      </p:sp>
-    </p:spTree>
-  </p:cSld>
-  <p:clrMapOvr>
-    <a:masterClrMapping/>
-  </p:clrMapOvr>
-</p:sld>
-</file>
-
 <file path=ppt/slides/slide22.xml><?xml version="1.0" encoding="utf-8"?>
 <p:sld xmlns:a="http://schemas.openxmlformats.org/drawingml/2006/main" xmlns:p="http://schemas.openxmlformats.org/presentationml/2006/main" xmlns:r="http://schemas.openxmlformats.org/officeDocument/2006/relationships">
   <p:cSld>
@@ -10461,8 +11674,8 @@
         </p:nvSpPr>
         <p:spPr>
           <a:xfrm>
-            <a:off x="457200" y="201168"/>
-            <a:ext cx="11338560" cy="685800"/>
+            <a:off x="914400" y="2377440"/>
+            <a:ext cx="10332720" cy="1280160"/>
           </a:xfrm>
           <a:prstGeom prst="rect">
             <a:avLst/>
@@ -10470,59 +11683,59 @@
           <a:noFill/>
         </p:spPr>
         <p:txBody>
-          <a:bodyPr wrap="none" anchor="ctr">
+          <a:bodyPr wrap="square">
             <a:spAutoFit/>
           </a:bodyPr>
           <a:lstStyle/>
           <a:p>
-            <a:pPr>
-              <a:defRPr sz="3000" b="1">
+            <a:pPr algn="ctr">
+              <a:defRPr sz="3800" b="1">
                 <a:solidFill>
                   <a:srgbClr val="1A1A1A"/>
                 </a:solidFill>
               </a:defRPr>
             </a:pPr>
             <a:r>
-              <a:t>What Paper 2 added</a:t>
-            </a:r>
-          </a:p>
-        </p:txBody>
-      </p:sp>
-      <p:cxnSp>
-        <p:nvCxnSpPr>
-          <p:cNvPr id="3" name="Connector 2"/>
-          <p:cNvCxnSpPr/>
-          <p:nvPr/>
-        </p:nvCxnSpPr>
-        <p:spPr>
-          <a:xfrm>
-            <a:off x="502920" y="932688"/>
-            <a:ext cx="11201400" cy="0"/>
-          </a:xfrm>
-          <a:prstGeom prst="line">
-            <a:avLst/>
-          </a:prstGeom>
-          <a:ln w="12700">
-            <a:solidFill>
-              <a:srgbClr val="1A1A1A"/>
-            </a:solidFill>
-          </a:ln>
-        </p:spPr>
-        <p:style>
-          <a:lnRef idx="2">
-            <a:schemeClr val="accent1"/>
-          </a:lnRef>
-          <a:fillRef idx="0">
-            <a:schemeClr val="accent1"/>
-          </a:fillRef>
-          <a:effectRef idx="1">
-            <a:schemeClr val="accent1"/>
-          </a:effectRef>
-          <a:fontRef idx="minor">
-            <a:schemeClr val="tx1"/>
-          </a:fontRef>
-        </p:style>
-      </p:cxnSp>
+              <a:t>5.  Paper 2 — completed work</a:t>
+            </a:r>
+          </a:p>
+        </p:txBody>
+      </p:sp>
+      <p:sp>
+        <p:nvSpPr>
+          <p:cNvPr id="3" name="TextBox 2"/>
+          <p:cNvSpPr txBox="1"/>
+          <p:nvPr/>
+        </p:nvSpPr>
+        <p:spPr>
+          <a:xfrm>
+            <a:off x="914400" y="3657600"/>
+            <a:ext cx="10332720" cy="1097280"/>
+          </a:xfrm>
+          <a:prstGeom prst="rect">
+            <a:avLst/>
+          </a:prstGeom>
+          <a:noFill/>
+        </p:spPr>
+        <p:txBody>
+          <a:bodyPr wrap="square">
+            <a:spAutoFit/>
+          </a:bodyPr>
+          <a:lstStyle/>
+          <a:p>
+            <a:pPr algn="ctr">
+              <a:defRPr sz="2000">
+                <a:solidFill>
+                  <a:srgbClr val="595959"/>
+                </a:solidFill>
+              </a:defRPr>
+            </a:pPr>
+            <a:r>
+              <a:t>Data-aware scheduling of approximate DAG workflows — in revision for CCGrid 2027</a:t>
+            </a:r>
+          </a:p>
+        </p:txBody>
+      </p:sp>
       <p:sp>
         <p:nvSpPr>
           <p:cNvPr id="4" name="TextBox 3"/>
@@ -10554,89 +11767,6 @@
             </a:pPr>
             <a:r>
               <a:t>22</a:t>
-            </a:r>
-          </a:p>
-        </p:txBody>
-      </p:sp>
-      <p:sp>
-        <p:nvSpPr>
-          <p:cNvPr id="5" name="TextBox 4"/>
-          <p:cNvSpPr txBox="1"/>
-          <p:nvPr/>
-        </p:nvSpPr>
-        <p:spPr>
-          <a:xfrm>
-            <a:off x="640080" y="1234440"/>
-            <a:ext cx="10972800" cy="5029200"/>
-          </a:xfrm>
-          <a:prstGeom prst="rect">
-            <a:avLst/>
-          </a:prstGeom>
-          <a:noFill/>
-        </p:spPr>
-        <p:txBody>
-          <a:bodyPr wrap="square">
-            <a:spAutoFit/>
-          </a:bodyPr>
-          <a:lstStyle/>
-          <a:p>
-            <a:pPr>
-              <a:spcAft>
-                <a:spcPts val="1000"/>
-              </a:spcAft>
-              <a:defRPr sz="2000">
-                <a:solidFill>
-                  <a:srgbClr val="1A1A1A"/>
-                </a:solidFill>
-              </a:defRPr>
-            </a:pPr>
-            <a:r>
-              <a:t>•  A max-accuracy bound, so a reported score finally means something</a:t>
-            </a:r>
-          </a:p>
-          <a:p>
-            <a:pPr>
-              <a:spcAft>
-                <a:spcPts val="1000"/>
-              </a:spcAft>
-              <a:defRPr sz="2000">
-                <a:solidFill>
-                  <a:srgbClr val="1A1A1A"/>
-                </a:solidFill>
-              </a:defRPr>
-            </a:pPr>
-            <a:r>
-              <a:t>•  A bandwidth-blind baseline — a scheduler that ignores the links — to measure what data-awareness buys</a:t>
-            </a:r>
-          </a:p>
-          <a:p>
-            <a:pPr>
-              <a:spcAft>
-                <a:spcPts val="1000"/>
-              </a:spcAft>
-              <a:defRPr sz="2000">
-                <a:solidFill>
-                  <a:srgbClr val="1A1A1A"/>
-                </a:solidFill>
-              </a:defRPr>
-            </a:pPr>
-            <a:r>
-              <a:t>•  A retry-once failure model at task level</a:t>
-            </a:r>
-          </a:p>
-          <a:p>
-            <a:pPr>
-              <a:spcAft>
-                <a:spcPts val="1000"/>
-              </a:spcAft>
-              <a:defRPr sz="2000">
-                <a:solidFill>
-                  <a:srgbClr val="1A1A1A"/>
-                </a:solidFill>
-              </a:defRPr>
-            </a:pPr>
-            <a:r>
-              <a:t>•  An honest account of where each method breaks: solver caps, search budgets, dense-storage limits</a:t>
             </a:r>
           </a:p>
         </p:txBody>
@@ -10667,6 +11797,41 @@
         </p:nvSpPr>
         <p:spPr>
           <a:xfrm>
+            <a:off x="8046720" y="329184"/>
+            <a:ext cx="3657600" cy="274320"/>
+          </a:xfrm>
+          <a:prstGeom prst="rect">
+            <a:avLst/>
+          </a:prstGeom>
+          <a:noFill/>
+        </p:spPr>
+        <p:txBody>
+          <a:bodyPr wrap="none">
+            <a:spAutoFit/>
+          </a:bodyPr>
+          <a:lstStyle/>
+          <a:p>
+            <a:pPr algn="r">
+              <a:defRPr sz="1100">
+                <a:solidFill>
+                  <a:srgbClr val="595959"/>
+                </a:solidFill>
+              </a:defRPr>
+            </a:pPr>
+            <a:r>
+              <a:t>PAPER 2 · COMPLETED</a:t>
+            </a:r>
+          </a:p>
+        </p:txBody>
+      </p:sp>
+      <p:sp>
+        <p:nvSpPr>
+          <p:cNvPr id="3" name="TextBox 2"/>
+          <p:cNvSpPr txBox="1"/>
+          <p:nvPr/>
+        </p:nvSpPr>
+        <p:spPr>
+          <a:xfrm>
             <a:off x="457200" y="201168"/>
             <a:ext cx="11338560" cy="685800"/>
           </a:xfrm>
@@ -10689,14 +11854,14 @@
               </a:defRPr>
             </a:pPr>
             <a:r>
-              <a:t>The bound and the blind baseline</a:t>
+              <a:t>What Paper 2 added</a:t>
             </a:r>
           </a:p>
         </p:txBody>
       </p:sp>
       <p:cxnSp>
         <p:nvCxnSpPr>
-          <p:cNvPr id="3" name="Connector 2"/>
+          <p:cNvPr id="4" name="Connector 3"/>
           <p:cNvCxnSpPr/>
           <p:nvPr/>
         </p:nvCxnSpPr>
@@ -10731,7 +11896,7 @@
       </p:cxnSp>
       <p:sp>
         <p:nvSpPr>
-          <p:cNvPr id="4" name="TextBox 3"/>
+          <p:cNvPr id="5" name="TextBox 4"/>
           <p:cNvSpPr txBox="1"/>
           <p:nvPr/>
         </p:nvSpPr>
@@ -10766,13 +11931,13 @@
       </p:sp>
       <p:sp>
         <p:nvSpPr>
-          <p:cNvPr id="5" name="TextBox 4"/>
+          <p:cNvPr id="6" name="TextBox 5"/>
           <p:cNvSpPr txBox="1"/>
           <p:nvPr/>
         </p:nvSpPr>
         <p:spPr>
           <a:xfrm>
-            <a:off x="640080" y="1371600"/>
+            <a:off x="640080" y="1234440"/>
             <a:ext cx="10972800" cy="5029200"/>
           </a:xfrm>
           <a:prstGeom prst="rect">
@@ -10797,22 +11962,7 @@
               </a:defRPr>
             </a:pPr>
             <a:r>
-              <a:t>•  The bound: run every task completely and ignore the links — the best score any schedule could report</a:t>
-            </a:r>
-          </a:p>
-          <a:p>
-            <a:pPr>
-              <a:spcAft>
-                <a:spcPts val="1000"/>
-              </a:spcAft>
-              <a:defRPr sz="1800">
-                <a:solidFill>
-                  <a:srgbClr val="595959"/>
-                </a:solidFill>
-              </a:defRPr>
-            </a:pPr>
-            <a:r>
-              <a:t>      – no feasible schedule can beat it; every score is read against it</a:t>
+              <a:t>•  A max-accuracy bound, so a reported score finally means something</a:t>
             </a:r>
           </a:p>
           <a:p>
@@ -10827,22 +11977,7 @@
               </a:defRPr>
             </a:pPr>
             <a:r>
-              <a:t>•  The blind baseline: prices computation but not the links</a:t>
-            </a:r>
-          </a:p>
-          <a:p>
-            <a:pPr>
-              <a:spcAft>
-                <a:spcPts val="1000"/>
-              </a:spcAft>
-              <a:defRPr sz="1800">
-                <a:solidFill>
-                  <a:srgbClr val="595959"/>
-                </a:solidFill>
-              </a:defRPr>
-            </a:pPr>
-            <a:r>
-              <a:t>      – it reports bound-level scores on schedules that are actually infeasible</a:t>
+              <a:t>•  A bandwidth-blind baseline — a scheduler that ignores the links — to measure what data-awareness buys</a:t>
             </a:r>
           </a:p>
           <a:p>
@@ -10857,7 +11992,92 @@
               </a:defRPr>
             </a:pPr>
             <a:r>
-              <a:t>•  Together they frame the question the experiments answer: how close can each method get, and at what cost?</a:t>
+              <a:t>•  A retry-once failure model at task level</a:t>
+            </a:r>
+          </a:p>
+          <a:p>
+            <a:pPr>
+              <a:spcAft>
+                <a:spcPts val="1000"/>
+              </a:spcAft>
+              <a:defRPr sz="2000">
+                <a:solidFill>
+                  <a:srgbClr val="1A1A1A"/>
+                </a:solidFill>
+              </a:defRPr>
+            </a:pPr>
+            <a:r>
+              <a:t>•  An honest account of where each method breaks: solver caps, search budgets, dense-storage limits</a:t>
+            </a:r>
+          </a:p>
+        </p:txBody>
+      </p:sp>
+      <p:cxnSp>
+        <p:nvCxnSpPr>
+          <p:cNvPr id="7" name="Connector 6"/>
+          <p:cNvCxnSpPr/>
+          <p:nvPr/>
+        </p:nvCxnSpPr>
+        <p:spPr>
+          <a:xfrm>
+            <a:off x="640080" y="5623560"/>
+            <a:ext cx="10881360" cy="0"/>
+          </a:xfrm>
+          <a:prstGeom prst="line">
+            <a:avLst/>
+          </a:prstGeom>
+          <a:ln w="9525">
+            <a:solidFill>
+              <a:srgbClr val="595959"/>
+            </a:solidFill>
+          </a:ln>
+        </p:spPr>
+        <p:style>
+          <a:lnRef idx="2">
+            <a:schemeClr val="accent1"/>
+          </a:lnRef>
+          <a:fillRef idx="0">
+            <a:schemeClr val="accent1"/>
+          </a:fillRef>
+          <a:effectRef idx="1">
+            <a:schemeClr val="accent1"/>
+          </a:effectRef>
+          <a:fontRef idx="minor">
+            <a:schemeClr val="tx1"/>
+          </a:fontRef>
+        </p:style>
+      </p:cxnSp>
+      <p:sp>
+        <p:nvSpPr>
+          <p:cNvPr id="8" name="TextBox 7"/>
+          <p:cNvSpPr txBox="1"/>
+          <p:nvPr/>
+        </p:nvSpPr>
+        <p:spPr>
+          <a:xfrm>
+            <a:off x="640080" y="5715000"/>
+            <a:ext cx="10881360" cy="914400"/>
+          </a:xfrm>
+          <a:prstGeom prst="rect">
+            <a:avLst/>
+          </a:prstGeom>
+          <a:noFill/>
+        </p:spPr>
+        <p:txBody>
+          <a:bodyPr wrap="square">
+            <a:spAutoFit/>
+          </a:bodyPr>
+          <a:lstStyle/>
+          <a:p>
+            <a:pPr>
+              <a:defRPr sz="1700" b="1">
+                <a:solidFill>
+                  <a:srgbClr val="1A1A1A"/>
+                </a:solidFill>
+              </a:defRPr>
+            </a:pPr>
+            <a:r>
+              <a:t>Take-away:  paper 2 made every score interpretable — a bound, a blind baseline, a failure model, and stated limits</a:t>
             </a:r>
           </a:p>
         </p:txBody>
@@ -10888,6 +12108,41 @@
         </p:nvSpPr>
         <p:spPr>
           <a:xfrm>
+            <a:off x="8046720" y="329184"/>
+            <a:ext cx="3657600" cy="274320"/>
+          </a:xfrm>
+          <a:prstGeom prst="rect">
+            <a:avLst/>
+          </a:prstGeom>
+          <a:noFill/>
+        </p:spPr>
+        <p:txBody>
+          <a:bodyPr wrap="none">
+            <a:spAutoFit/>
+          </a:bodyPr>
+          <a:lstStyle/>
+          <a:p>
+            <a:pPr algn="r">
+              <a:defRPr sz="1100">
+                <a:solidFill>
+                  <a:srgbClr val="595959"/>
+                </a:solidFill>
+              </a:defRPr>
+            </a:pPr>
+            <a:r>
+              <a:t>PAPER 2 · COMPLETED</a:t>
+            </a:r>
+          </a:p>
+        </p:txBody>
+      </p:sp>
+      <p:sp>
+        <p:nvSpPr>
+          <p:cNvPr id="3" name="TextBox 2"/>
+          <p:cNvSpPr txBox="1"/>
+          <p:nvPr/>
+        </p:nvSpPr>
+        <p:spPr>
+          <a:xfrm>
             <a:off x="457200" y="201168"/>
             <a:ext cx="11338560" cy="685800"/>
           </a:xfrm>
@@ -10910,14 +12165,14 @@
               </a:defRPr>
             </a:pPr>
             <a:r>
-              <a:t>Four schedulers, one cost model</a:t>
+              <a:t>The bound and the blind baseline</a:t>
             </a:r>
           </a:p>
         </p:txBody>
       </p:sp>
       <p:cxnSp>
         <p:nvCxnSpPr>
-          <p:cNvPr id="3" name="Connector 2"/>
+          <p:cNvPr id="4" name="Connector 3"/>
           <p:cNvCxnSpPr/>
           <p:nvPr/>
         </p:nvCxnSpPr>
@@ -10952,7 +12207,7 @@
       </p:cxnSp>
       <p:sp>
         <p:nvSpPr>
-          <p:cNvPr id="4" name="TextBox 3"/>
+          <p:cNvPr id="5" name="TextBox 4"/>
           <p:cNvSpPr txBox="1"/>
           <p:nvPr/>
         </p:nvSpPr>
@@ -10987,7 +12242,7 @@
       </p:sp>
       <p:sp>
         <p:nvSpPr>
-          <p:cNvPr id="5" name="TextBox 4"/>
+          <p:cNvPr id="6" name="TextBox 5"/>
           <p:cNvSpPr txBox="1"/>
           <p:nvPr/>
         </p:nvSpPr>
@@ -11018,7 +12273,22 @@
               </a:defRPr>
             </a:pPr>
             <a:r>
-              <a:t>•  Every method prices transfers the same way, so the differences are algorithmic, not accounting</a:t>
+              <a:t>•  The bound: run every task completely and ignore the links — the best score any schedule could report</a:t>
+            </a:r>
+          </a:p>
+          <a:p>
+            <a:pPr>
+              <a:spcAft>
+                <a:spcPts val="1000"/>
+              </a:spcAft>
+              <a:defRPr sz="1800">
+                <a:solidFill>
+                  <a:srgbClr val="595959"/>
+                </a:solidFill>
+              </a:defRPr>
+            </a:pPr>
+            <a:r>
+              <a:t>      – no feasible schedule can beat it; every score is read against it</a:t>
             </a:r>
           </a:p>
           <a:p>
@@ -11033,7 +12303,22 @@
               </a:defRPr>
             </a:pPr>
             <a:r>
-              <a:t>•  The exact solver is the benchmark</a:t>
+              <a:t>•  The blind baseline: prices computation but not the links</a:t>
+            </a:r>
+          </a:p>
+          <a:p>
+            <a:pPr>
+              <a:spcAft>
+                <a:spcPts val="1000"/>
+              </a:spcAft>
+              <a:defRPr sz="1800">
+                <a:solidFill>
+                  <a:srgbClr val="595959"/>
+                </a:solidFill>
+              </a:defRPr>
+            </a:pPr>
+            <a:r>
+              <a:t>      – it reports bound-level scores on schedules that are actually infeasible</a:t>
             </a:r>
           </a:p>
           <a:p>
@@ -11048,37 +12333,7 @@
               </a:defRPr>
             </a:pPr>
             <a:r>
-              <a:t>•  LP rounding relaxes the integer choices, samples a machine per task, and re-solves the fractions</a:t>
-            </a:r>
-          </a:p>
-          <a:p>
-            <a:pPr>
-              <a:spcAft>
-                <a:spcPts val="1000"/>
-              </a:spcAft>
-              <a:defRPr sz="2000">
-                <a:solidFill>
-                  <a:srgbClr val="1A1A1A"/>
-                </a:solidFill>
-              </a:defRPr>
-            </a:pPr>
-            <a:r>
-              <a:t>•  The greedy places ready tasks by earliest finish; on a deadline miss it lowers the fraction and retries</a:t>
-            </a:r>
-          </a:p>
-          <a:p>
-            <a:pPr>
-              <a:spcAft>
-                <a:spcPts val="1000"/>
-              </a:spcAft>
-              <a:defRPr sz="2000">
-                <a:solidFill>
-                  <a:srgbClr val="1A1A1A"/>
-                </a:solidFill>
-              </a:defRPr>
-            </a:pPr>
-            <a:r>
-              <a:t>•  The GA searches assignments and fractions as one chromosome</a:t>
+              <a:t>•  Together they frame the question the experiments answer: how close can each method get, and at what cost?</a:t>
             </a:r>
           </a:p>
         </p:txBody>
@@ -11109,6 +12364,41 @@
         </p:nvSpPr>
         <p:spPr>
           <a:xfrm>
+            <a:off x="8046720" y="329184"/>
+            <a:ext cx="3657600" cy="274320"/>
+          </a:xfrm>
+          <a:prstGeom prst="rect">
+            <a:avLst/>
+          </a:prstGeom>
+          <a:noFill/>
+        </p:spPr>
+        <p:txBody>
+          <a:bodyPr wrap="none">
+            <a:spAutoFit/>
+          </a:bodyPr>
+          <a:lstStyle/>
+          <a:p>
+            <a:pPr algn="r">
+              <a:defRPr sz="1100">
+                <a:solidFill>
+                  <a:srgbClr val="595959"/>
+                </a:solidFill>
+              </a:defRPr>
+            </a:pPr>
+            <a:r>
+              <a:t>PAPER 2 · COMPLETED</a:t>
+            </a:r>
+          </a:p>
+        </p:txBody>
+      </p:sp>
+      <p:sp>
+        <p:nvSpPr>
+          <p:cNvPr id="3" name="TextBox 2"/>
+          <p:cNvSpPr txBox="1"/>
+          <p:nvPr/>
+        </p:nvSpPr>
+        <p:spPr>
+          <a:xfrm>
             <a:off x="457200" y="201168"/>
             <a:ext cx="11338560" cy="685800"/>
           </a:xfrm>
@@ -11131,14 +12421,14 @@
               </a:defRPr>
             </a:pPr>
             <a:r>
-              <a:t>Experimental setup</a:t>
+              <a:t>Four schedulers, one cost model</a:t>
             </a:r>
           </a:p>
         </p:txBody>
       </p:sp>
       <p:cxnSp>
         <p:nvCxnSpPr>
-          <p:cNvPr id="3" name="Connector 2"/>
+          <p:cNvPr id="4" name="Connector 3"/>
           <p:cNvCxnSpPr/>
           <p:nvPr/>
         </p:nvCxnSpPr>
@@ -11173,7 +12463,7 @@
       </p:cxnSp>
       <p:sp>
         <p:nvSpPr>
-          <p:cNvPr id="4" name="TextBox 3"/>
+          <p:cNvPr id="5" name="TextBox 4"/>
           <p:cNvSpPr txBox="1"/>
           <p:nvPr/>
         </p:nvSpPr>
@@ -11206,9 +12496,324 @@
           </a:p>
         </p:txBody>
       </p:sp>
+      <p:sp>
+        <p:nvSpPr>
+          <p:cNvPr id="6" name="TextBox 5"/>
+          <p:cNvSpPr txBox="1"/>
+          <p:nvPr/>
+        </p:nvSpPr>
+        <p:spPr>
+          <a:xfrm>
+            <a:off x="640080" y="1371600"/>
+            <a:ext cx="5303520" cy="5029200"/>
+          </a:xfrm>
+          <a:prstGeom prst="rect">
+            <a:avLst/>
+          </a:prstGeom>
+          <a:noFill/>
+        </p:spPr>
+        <p:txBody>
+          <a:bodyPr wrap="square">
+            <a:spAutoFit/>
+          </a:bodyPr>
+          <a:lstStyle/>
+          <a:p>
+            <a:pPr>
+              <a:spcAft>
+                <a:spcPts val="1000"/>
+              </a:spcAft>
+              <a:defRPr sz="1900">
+                <a:solidFill>
+                  <a:srgbClr val="1A1A1A"/>
+                </a:solidFill>
+              </a:defRPr>
+            </a:pPr>
+            <a:r>
+              <a:t>•  Every method prices transfers the same way, so the differences are algorithmic, not accounting</a:t>
+            </a:r>
+          </a:p>
+          <a:p>
+            <a:pPr>
+              <a:spcAft>
+                <a:spcPts val="1000"/>
+              </a:spcAft>
+              <a:defRPr sz="1900">
+                <a:solidFill>
+                  <a:srgbClr val="1A1A1A"/>
+                </a:solidFill>
+              </a:defRPr>
+            </a:pPr>
+            <a:r>
+              <a:t>•  The exact solver is the benchmark</a:t>
+            </a:r>
+          </a:p>
+          <a:p>
+            <a:pPr>
+              <a:spcAft>
+                <a:spcPts val="1000"/>
+              </a:spcAft>
+              <a:defRPr sz="1900">
+                <a:solidFill>
+                  <a:srgbClr val="1A1A1A"/>
+                </a:solidFill>
+              </a:defRPr>
+            </a:pPr>
+            <a:r>
+              <a:t>•  LP rounding relaxes the integer choices, samples a machine per task, and re-solves the fractions</a:t>
+            </a:r>
+          </a:p>
+          <a:p>
+            <a:pPr>
+              <a:spcAft>
+                <a:spcPts val="1000"/>
+              </a:spcAft>
+              <a:defRPr sz="1900">
+                <a:solidFill>
+                  <a:srgbClr val="1A1A1A"/>
+                </a:solidFill>
+              </a:defRPr>
+            </a:pPr>
+            <a:r>
+              <a:t>•  The greedy places ready tasks by earliest finish; on a deadline miss it lowers the fraction and retries</a:t>
+            </a:r>
+          </a:p>
+          <a:p>
+            <a:pPr>
+              <a:spcAft>
+                <a:spcPts val="1000"/>
+              </a:spcAft>
+              <a:defRPr sz="1900">
+                <a:solidFill>
+                  <a:srgbClr val="1A1A1A"/>
+                </a:solidFill>
+              </a:defRPr>
+            </a:pPr>
+            <a:r>
+              <a:t>•  The GA searches assignments and fractions as one chromosome</a:t>
+            </a:r>
+          </a:p>
+        </p:txBody>
+      </p:sp>
+      <p:pic>
+        <p:nvPicPr>
+          <p:cNvPr id="7" name="Picture 6" descr="scheduling-pipeline.png"/>
+          <p:cNvPicPr>
+            <a:picLocks noChangeAspect="1"/>
+          </p:cNvPicPr>
+          <p:nvPr/>
+        </p:nvPicPr>
+        <p:blipFill>
+          <a:blip r:embed="rId3"/>
+          <a:stretch>
+            <a:fillRect/>
+          </a:stretch>
+        </p:blipFill>
+        <p:spPr>
+          <a:xfrm>
+            <a:off x="6400800" y="1554480"/>
+            <a:ext cx="5486400" cy="3352800"/>
+          </a:xfrm>
+          <a:prstGeom prst="rect">
+            <a:avLst/>
+          </a:prstGeom>
+        </p:spPr>
+      </p:pic>
+      <p:sp>
+        <p:nvSpPr>
+          <p:cNvPr id="8" name="TextBox 7"/>
+          <p:cNvSpPr txBox="1"/>
+          <p:nvPr/>
+        </p:nvSpPr>
+        <p:spPr>
+          <a:xfrm>
+            <a:off x="6400800" y="5760720"/>
+            <a:ext cx="5486400" cy="457200"/>
+          </a:xfrm>
+          <a:prstGeom prst="rect">
+            <a:avLst/>
+          </a:prstGeom>
+          <a:noFill/>
+        </p:spPr>
+        <p:txBody>
+          <a:bodyPr wrap="none">
+            <a:spAutoFit/>
+          </a:bodyPr>
+          <a:lstStyle/>
+          <a:p>
+            <a:pPr algn="ctr">
+              <a:defRPr sz="1300" i="1">
+                <a:solidFill>
+                  <a:srgbClr val="595959"/>
+                </a:solidFill>
+              </a:defRPr>
+            </a:pPr>
+            <a:r>
+              <a:t>The pipeline every method runs through</a:t>
+            </a:r>
+          </a:p>
+        </p:txBody>
+      </p:sp>
+    </p:spTree>
+  </p:cSld>
+  <p:clrMapOvr>
+    <a:masterClrMapping/>
+  </p:clrMapOvr>
+</p:sld>
+</file>
+
+<file path=ppt/slides/slide26.xml><?xml version="1.0" encoding="utf-8"?>
+<p:sld xmlns:a="http://schemas.openxmlformats.org/drawingml/2006/main" xmlns:p="http://schemas.openxmlformats.org/presentationml/2006/main" xmlns:r="http://schemas.openxmlformats.org/officeDocument/2006/relationships">
+  <p:cSld>
+    <p:spTree>
+      <p:nvGrpSpPr>
+        <p:cNvPr id="1" name=""/>
+        <p:cNvGrpSpPr/>
+        <p:nvPr/>
+      </p:nvGrpSpPr>
+      <p:grpSpPr/>
+      <p:sp>
+        <p:nvSpPr>
+          <p:cNvPr id="2" name="TextBox 1"/>
+          <p:cNvSpPr txBox="1"/>
+          <p:nvPr/>
+        </p:nvSpPr>
+        <p:spPr>
+          <a:xfrm>
+            <a:off x="8046720" y="329184"/>
+            <a:ext cx="3657600" cy="274320"/>
+          </a:xfrm>
+          <a:prstGeom prst="rect">
+            <a:avLst/>
+          </a:prstGeom>
+          <a:noFill/>
+        </p:spPr>
+        <p:txBody>
+          <a:bodyPr wrap="none">
+            <a:spAutoFit/>
+          </a:bodyPr>
+          <a:lstStyle/>
+          <a:p>
+            <a:pPr algn="r">
+              <a:defRPr sz="1100">
+                <a:solidFill>
+                  <a:srgbClr val="595959"/>
+                </a:solidFill>
+              </a:defRPr>
+            </a:pPr>
+            <a:r>
+              <a:t>PAPER 2 · COMPLETED</a:t>
+            </a:r>
+          </a:p>
+        </p:txBody>
+      </p:sp>
+      <p:sp>
+        <p:nvSpPr>
+          <p:cNvPr id="3" name="TextBox 2"/>
+          <p:cNvSpPr txBox="1"/>
+          <p:nvPr/>
+        </p:nvSpPr>
+        <p:spPr>
+          <a:xfrm>
+            <a:off x="457200" y="201168"/>
+            <a:ext cx="11338560" cy="685800"/>
+          </a:xfrm>
+          <a:prstGeom prst="rect">
+            <a:avLst/>
+          </a:prstGeom>
+          <a:noFill/>
+        </p:spPr>
+        <p:txBody>
+          <a:bodyPr wrap="none" anchor="ctr">
+            <a:spAutoFit/>
+          </a:bodyPr>
+          <a:lstStyle/>
+          <a:p>
+            <a:pPr>
+              <a:defRPr sz="3000" b="1">
+                <a:solidFill>
+                  <a:srgbClr val="1A1A1A"/>
+                </a:solidFill>
+              </a:defRPr>
+            </a:pPr>
+            <a:r>
+              <a:t>Experimental setup</a:t>
+            </a:r>
+          </a:p>
+        </p:txBody>
+      </p:sp>
+      <p:cxnSp>
+        <p:nvCxnSpPr>
+          <p:cNvPr id="4" name="Connector 3"/>
+          <p:cNvCxnSpPr/>
+          <p:nvPr/>
+        </p:nvCxnSpPr>
+        <p:spPr>
+          <a:xfrm>
+            <a:off x="502920" y="932688"/>
+            <a:ext cx="11201400" cy="0"/>
+          </a:xfrm>
+          <a:prstGeom prst="line">
+            <a:avLst/>
+          </a:prstGeom>
+          <a:ln w="12700">
+            <a:solidFill>
+              <a:srgbClr val="1A1A1A"/>
+            </a:solidFill>
+          </a:ln>
+        </p:spPr>
+        <p:style>
+          <a:lnRef idx="2">
+            <a:schemeClr val="accent1"/>
+          </a:lnRef>
+          <a:fillRef idx="0">
+            <a:schemeClr val="accent1"/>
+          </a:fillRef>
+          <a:effectRef idx="1">
+            <a:schemeClr val="accent1"/>
+          </a:effectRef>
+          <a:fontRef idx="minor">
+            <a:schemeClr val="tx1"/>
+          </a:fontRef>
+        </p:style>
+      </p:cxnSp>
+      <p:sp>
+        <p:nvSpPr>
+          <p:cNvPr id="5" name="TextBox 4"/>
+          <p:cNvSpPr txBox="1"/>
+          <p:nvPr/>
+        </p:nvSpPr>
+        <p:spPr>
+          <a:xfrm>
+            <a:off x="11430000" y="6492240"/>
+            <a:ext cx="640080" cy="274320"/>
+          </a:xfrm>
+          <a:prstGeom prst="rect">
+            <a:avLst/>
+          </a:prstGeom>
+          <a:noFill/>
+        </p:spPr>
+        <p:txBody>
+          <a:bodyPr wrap="none">
+            <a:spAutoFit/>
+          </a:bodyPr>
+          <a:lstStyle/>
+          <a:p>
+            <a:pPr algn="r">
+              <a:defRPr sz="1000">
+                <a:solidFill>
+                  <a:srgbClr val="595959"/>
+                </a:solidFill>
+              </a:defRPr>
+            </a:pPr>
+            <a:r>
+              <a:t>26</a:t>
+            </a:r>
+          </a:p>
+        </p:txBody>
+      </p:sp>
       <p:graphicFrame>
         <p:nvGraphicFramePr>
-          <p:cNvPr id="5" name="Table 4"/>
+          <p:cNvPr id="6" name="Table 5"/>
           <p:cNvGraphicFramePr>
             <a:graphicFrameLocks noGrp="1"/>
           </p:cNvGraphicFramePr>
@@ -11530,7 +13135,7 @@
                         </a:defRPr>
                       </a:pPr>
                       <a:r>
-                        <a:t>Sweeps</a:t>
+                        <a:t>Experiments</a:t>
                       </a:r>
                     </a:p>
                   </a:txBody>
@@ -11624,7 +13229,7 @@
 </p:sld>
 </file>
 
-<file path=ppt/slides/slide26.xml><?xml version="1.0" encoding="utf-8"?>
+<file path=ppt/slides/slide27.xml><?xml version="1.0" encoding="utf-8"?>
 <p:sld xmlns:a="http://schemas.openxmlformats.org/drawingml/2006/main" xmlns:p="http://schemas.openxmlformats.org/presentationml/2006/main" xmlns:r="http://schemas.openxmlformats.org/officeDocument/2006/relationships">
   <p:cSld>
     <p:spTree>
@@ -11642,6 +13247,41 @@
         </p:nvSpPr>
         <p:spPr>
           <a:xfrm>
+            <a:off x="8046720" y="329184"/>
+            <a:ext cx="3657600" cy="274320"/>
+          </a:xfrm>
+          <a:prstGeom prst="rect">
+            <a:avLst/>
+          </a:prstGeom>
+          <a:noFill/>
+        </p:spPr>
+        <p:txBody>
+          <a:bodyPr wrap="none">
+            <a:spAutoFit/>
+          </a:bodyPr>
+          <a:lstStyle/>
+          <a:p>
+            <a:pPr algn="r">
+              <a:defRPr sz="1100">
+                <a:solidFill>
+                  <a:srgbClr val="595959"/>
+                </a:solidFill>
+              </a:defRPr>
+            </a:pPr>
+            <a:r>
+              <a:t>PAPER 2 · COMPLETED</a:t>
+            </a:r>
+          </a:p>
+        </p:txBody>
+      </p:sp>
+      <p:sp>
+        <p:nvSpPr>
+          <p:cNvPr id="3" name="TextBox 2"/>
+          <p:cNvSpPr txBox="1"/>
+          <p:nvPr/>
+        </p:nvSpPr>
+        <p:spPr>
+          <a:xfrm>
             <a:off x="457200" y="201168"/>
             <a:ext cx="11338560" cy="685800"/>
           </a:xfrm>
@@ -11671,7 +13311,7 @@
       </p:sp>
       <p:cxnSp>
         <p:nvCxnSpPr>
-          <p:cNvPr id="3" name="Connector 2"/>
+          <p:cNvPr id="4" name="Connector 3"/>
           <p:cNvCxnSpPr/>
           <p:nvPr/>
         </p:nvCxnSpPr>
@@ -11706,7 +13346,7 @@
       </p:cxnSp>
       <p:sp>
         <p:nvSpPr>
-          <p:cNvPr id="4" name="TextBox 3"/>
+          <p:cNvPr id="5" name="TextBox 4"/>
           <p:cNvSpPr txBox="1"/>
           <p:nvPr/>
         </p:nvSpPr>
@@ -11734,14 +13374,14 @@
               </a:defRPr>
             </a:pPr>
             <a:r>
-              <a:t>26</a:t>
+              <a:t>27</a:t>
             </a:r>
           </a:p>
         </p:txBody>
       </p:sp>
       <p:pic>
         <p:nvPicPr>
-          <p:cNvPr id="5" name="Picture 4" descr="perf_slack_accuracy.png"/>
+          <p:cNvPr id="6" name="Picture 5" descr="perf_slack_accuracy.png"/>
           <p:cNvPicPr>
             <a:picLocks noChangeAspect="1"/>
           </p:cNvPicPr>
@@ -11756,7 +13396,7 @@
         <p:spPr>
           <a:xfrm>
             <a:off x="640080" y="1097280"/>
-            <a:ext cx="6126480" cy="4509185"/>
+            <a:ext cx="6126480" cy="5076226"/>
           </a:xfrm>
           <a:prstGeom prst="rect">
             <a:avLst/>
@@ -11765,7 +13405,7 @@
       </p:pic>
       <p:sp>
         <p:nvSpPr>
-          <p:cNvPr id="6" name="TextBox 5"/>
+          <p:cNvPr id="7" name="TextBox 6"/>
           <p:cNvSpPr txBox="1"/>
           <p:nvPr/>
         </p:nvSpPr>
@@ -11833,7 +13473,7 @@
       </p:sp>
       <p:cxnSp>
         <p:nvCxnSpPr>
-          <p:cNvPr id="7" name="Connector 6"/>
+          <p:cNvPr id="8" name="Connector 7"/>
           <p:cNvCxnSpPr/>
           <p:nvPr/>
         </p:nvCxnSpPr>
@@ -11868,7 +13508,7 @@
       </p:cxnSp>
       <p:sp>
         <p:nvSpPr>
-          <p:cNvPr id="8" name="TextBox 7"/>
+          <p:cNvPr id="9" name="TextBox 8"/>
           <p:cNvSpPr txBox="1"/>
           <p:nvPr/>
         </p:nvSpPr>
@@ -11897,291 +13537,6 @@
             </a:pPr>
             <a:r>
               <a:t>Take-away:  the method choice matters exactly where the deadline binds; with loose slack almost anything works</a:t>
-            </a:r>
-          </a:p>
-        </p:txBody>
-      </p:sp>
-    </p:spTree>
-  </p:cSld>
-  <p:clrMapOvr>
-    <a:masterClrMapping/>
-  </p:clrMapOvr>
-</p:sld>
-</file>
-
-<file path=ppt/slides/slide27.xml><?xml version="1.0" encoding="utf-8"?>
-<p:sld xmlns:a="http://schemas.openxmlformats.org/drawingml/2006/main" xmlns:p="http://schemas.openxmlformats.org/presentationml/2006/main" xmlns:r="http://schemas.openxmlformats.org/officeDocument/2006/relationships">
-  <p:cSld>
-    <p:spTree>
-      <p:nvGrpSpPr>
-        <p:cNvPr id="1" name=""/>
-        <p:cNvGrpSpPr/>
-        <p:nvPr/>
-      </p:nvGrpSpPr>
-      <p:grpSpPr/>
-      <p:sp>
-        <p:nvSpPr>
-          <p:cNvPr id="2" name="TextBox 1"/>
-          <p:cNvSpPr txBox="1"/>
-          <p:nvPr/>
-        </p:nvSpPr>
-        <p:spPr>
-          <a:xfrm>
-            <a:off x="457200" y="201168"/>
-            <a:ext cx="11338560" cy="685800"/>
-          </a:xfrm>
-          <a:prstGeom prst="rect">
-            <a:avLst/>
-          </a:prstGeom>
-          <a:noFill/>
-        </p:spPr>
-        <p:txBody>
-          <a:bodyPr wrap="none" anchor="ctr">
-            <a:spAutoFit/>
-          </a:bodyPr>
-          <a:lstStyle/>
-          <a:p>
-            <a:pPr>
-              <a:defRPr sz="3000" b="1">
-                <a:solidFill>
-                  <a:srgbClr val="1A1A1A"/>
-                </a:solidFill>
-              </a:defRPr>
-            </a:pPr>
-            <a:r>
-              <a:t>Experiment 2: federation size</a:t>
-            </a:r>
-          </a:p>
-        </p:txBody>
-      </p:sp>
-      <p:cxnSp>
-        <p:nvCxnSpPr>
-          <p:cNvPr id="3" name="Connector 2"/>
-          <p:cNvCxnSpPr/>
-          <p:nvPr/>
-        </p:nvCxnSpPr>
-        <p:spPr>
-          <a:xfrm>
-            <a:off x="502920" y="932688"/>
-            <a:ext cx="11201400" cy="0"/>
-          </a:xfrm>
-          <a:prstGeom prst="line">
-            <a:avLst/>
-          </a:prstGeom>
-          <a:ln w="12700">
-            <a:solidFill>
-              <a:srgbClr val="1A1A1A"/>
-            </a:solidFill>
-          </a:ln>
-        </p:spPr>
-        <p:style>
-          <a:lnRef idx="2">
-            <a:schemeClr val="accent1"/>
-          </a:lnRef>
-          <a:fillRef idx="0">
-            <a:schemeClr val="accent1"/>
-          </a:fillRef>
-          <a:effectRef idx="1">
-            <a:schemeClr val="accent1"/>
-          </a:effectRef>
-          <a:fontRef idx="minor">
-            <a:schemeClr val="tx1"/>
-          </a:fontRef>
-        </p:style>
-      </p:cxnSp>
-      <p:sp>
-        <p:nvSpPr>
-          <p:cNvPr id="4" name="TextBox 3"/>
-          <p:cNvSpPr txBox="1"/>
-          <p:nvPr/>
-        </p:nvSpPr>
-        <p:spPr>
-          <a:xfrm>
-            <a:off x="11430000" y="6492240"/>
-            <a:ext cx="640080" cy="274320"/>
-          </a:xfrm>
-          <a:prstGeom prst="rect">
-            <a:avLst/>
-          </a:prstGeom>
-          <a:noFill/>
-        </p:spPr>
-        <p:txBody>
-          <a:bodyPr wrap="none">
-            <a:spAutoFit/>
-          </a:bodyPr>
-          <a:lstStyle/>
-          <a:p>
-            <a:pPr algn="r">
-              <a:defRPr sz="1000">
-                <a:solidFill>
-                  <a:srgbClr val="595959"/>
-                </a:solidFill>
-              </a:defRPr>
-            </a:pPr>
-            <a:r>
-              <a:t>27</a:t>
-            </a:r>
-          </a:p>
-        </p:txBody>
-      </p:sp>
-      <p:pic>
-        <p:nvPicPr>
-          <p:cNvPr id="5" name="Picture 4" descr="perf_nodes_accuracy.png"/>
-          <p:cNvPicPr>
-            <a:picLocks noChangeAspect="1"/>
-          </p:cNvPicPr>
-          <p:nvPr/>
-        </p:nvPicPr>
-        <p:blipFill>
-          <a:blip r:embed="rId3"/>
-          <a:stretch>
-            <a:fillRect/>
-          </a:stretch>
-        </p:blipFill>
-        <p:spPr>
-          <a:xfrm>
-            <a:off x="640080" y="1097280"/>
-            <a:ext cx="6126480" cy="4504765"/>
-          </a:xfrm>
-          <a:prstGeom prst="rect">
-            <a:avLst/>
-          </a:prstGeom>
-        </p:spPr>
-      </p:pic>
-      <p:sp>
-        <p:nvSpPr>
-          <p:cNvPr id="6" name="TextBox 5"/>
-          <p:cNvSpPr txBox="1"/>
-          <p:nvPr/>
-        </p:nvSpPr>
-        <p:spPr>
-          <a:xfrm>
-            <a:off x="7132320" y="1371600"/>
-            <a:ext cx="4572000" cy="5029200"/>
-          </a:xfrm>
-          <a:prstGeom prst="rect">
-            <a:avLst/>
-          </a:prstGeom>
-          <a:noFill/>
-        </p:spPr>
-        <p:txBody>
-          <a:bodyPr wrap="square">
-            <a:spAutoFit/>
-          </a:bodyPr>
-          <a:lstStyle/>
-          <a:p>
-            <a:pPr>
-              <a:spcAft>
-                <a:spcPts val="1000"/>
-              </a:spcAft>
-              <a:defRPr sz="1600">
-                <a:solidFill>
-                  <a:srgbClr val="1A1A1A"/>
-                </a:solidFill>
-              </a:defRPr>
-            </a:pPr>
-            <a:r>
-              <a:t>•  The exact solver and the greedy match the bound at every size</a:t>
-            </a:r>
-          </a:p>
-          <a:p>
-            <a:pPr>
-              <a:spcAft>
-                <a:spcPts val="1000"/>
-              </a:spcAft>
-              <a:defRPr sz="1600">
-                <a:solidFill>
-                  <a:srgbClr val="1A1A1A"/>
-                </a:solidFill>
-              </a:defRPr>
-            </a:pPr>
-            <a:r>
-              <a:t>•  The GA drifts from 1.5% below the bound at two machines to about 8% at ten</a:t>
-            </a:r>
-          </a:p>
-          <a:p>
-            <a:pPr>
-              <a:spcAft>
-                <a:spcPts val="1000"/>
-              </a:spcAft>
-              <a:defRPr sz="1600">
-                <a:solidFill>
-                  <a:srgbClr val="1A1A1A"/>
-                </a:solidFill>
-              </a:defRPr>
-            </a:pPr>
-            <a:r>
-              <a:t>•  A bigger placement space with a fixed search budget just means a worse search</a:t>
-            </a:r>
-          </a:p>
-        </p:txBody>
-      </p:sp>
-      <p:cxnSp>
-        <p:nvCxnSpPr>
-          <p:cNvPr id="7" name="Connector 6"/>
-          <p:cNvCxnSpPr/>
-          <p:nvPr/>
-        </p:nvCxnSpPr>
-        <p:spPr>
-          <a:xfrm>
-            <a:off x="640080" y="5623560"/>
-            <a:ext cx="10881360" cy="0"/>
-          </a:xfrm>
-          <a:prstGeom prst="line">
-            <a:avLst/>
-          </a:prstGeom>
-          <a:ln w="9525">
-            <a:solidFill>
-              <a:srgbClr val="595959"/>
-            </a:solidFill>
-          </a:ln>
-        </p:spPr>
-        <p:style>
-          <a:lnRef idx="2">
-            <a:schemeClr val="accent1"/>
-          </a:lnRef>
-          <a:fillRef idx="0">
-            <a:schemeClr val="accent1"/>
-          </a:fillRef>
-          <a:effectRef idx="1">
-            <a:schemeClr val="accent1"/>
-          </a:effectRef>
-          <a:fontRef idx="minor">
-            <a:schemeClr val="tx1"/>
-          </a:fontRef>
-        </p:style>
-      </p:cxnSp>
-      <p:sp>
-        <p:nvSpPr>
-          <p:cNvPr id="8" name="TextBox 7"/>
-          <p:cNvSpPr txBox="1"/>
-          <p:nvPr/>
-        </p:nvSpPr>
-        <p:spPr>
-          <a:xfrm>
-            <a:off x="640080" y="5715000"/>
-            <a:ext cx="10881360" cy="914400"/>
-          </a:xfrm>
-          <a:prstGeom prst="rect">
-            <a:avLst/>
-          </a:prstGeom>
-          <a:noFill/>
-        </p:spPr>
-        <p:txBody>
-          <a:bodyPr wrap="square">
-            <a:spAutoFit/>
-          </a:bodyPr>
-          <a:lstStyle/>
-          <a:p>
-            <a:pPr>
-              <a:defRPr sz="1700" b="1">
-                <a:solidFill>
-                  <a:srgbClr val="1A1A1A"/>
-                </a:solidFill>
-              </a:defRPr>
-            </a:pPr>
-            <a:r>
-              <a:t>Take-away:  more machines buy feasibility, not accuracy — extra capacity never lifts a method above the bound</a:t>
             </a:r>
           </a:p>
         </p:txBody>
@@ -12212,6 +13567,41 @@
         </p:nvSpPr>
         <p:spPr>
           <a:xfrm>
+            <a:off x="8046720" y="329184"/>
+            <a:ext cx="3657600" cy="274320"/>
+          </a:xfrm>
+          <a:prstGeom prst="rect">
+            <a:avLst/>
+          </a:prstGeom>
+          <a:noFill/>
+        </p:spPr>
+        <p:txBody>
+          <a:bodyPr wrap="none">
+            <a:spAutoFit/>
+          </a:bodyPr>
+          <a:lstStyle/>
+          <a:p>
+            <a:pPr algn="r">
+              <a:defRPr sz="1100">
+                <a:solidFill>
+                  <a:srgbClr val="595959"/>
+                </a:solidFill>
+              </a:defRPr>
+            </a:pPr>
+            <a:r>
+              <a:t>PAPER 2 · COMPLETED</a:t>
+            </a:r>
+          </a:p>
+        </p:txBody>
+      </p:sp>
+      <p:sp>
+        <p:nvSpPr>
+          <p:cNvPr id="3" name="TextBox 2"/>
+          <p:cNvSpPr txBox="1"/>
+          <p:nvPr/>
+        </p:nvSpPr>
+        <p:spPr>
+          <a:xfrm>
             <a:off x="457200" y="201168"/>
             <a:ext cx="11338560" cy="685800"/>
           </a:xfrm>
@@ -12234,14 +13624,14 @@
               </a:defRPr>
             </a:pPr>
             <a:r>
-              <a:t>Experiment 3: workflow size</a:t>
+              <a:t>Experiment 2: federation size</a:t>
             </a:r>
           </a:p>
         </p:txBody>
       </p:sp>
       <p:cxnSp>
         <p:nvCxnSpPr>
-          <p:cNvPr id="3" name="Connector 2"/>
+          <p:cNvPr id="4" name="Connector 3"/>
           <p:cNvCxnSpPr/>
           <p:nvPr/>
         </p:nvCxnSpPr>
@@ -12276,7 +13666,7 @@
       </p:cxnSp>
       <p:sp>
         <p:nvSpPr>
-          <p:cNvPr id="4" name="TextBox 3"/>
+          <p:cNvPr id="5" name="TextBox 4"/>
           <p:cNvSpPr txBox="1"/>
           <p:nvPr/>
         </p:nvSpPr>
@@ -12311,7 +13701,7 @@
       </p:sp>
       <p:pic>
         <p:nvPicPr>
-          <p:cNvPr id="5" name="Picture 4" descr="perf_task_size_accuracy.png"/>
+          <p:cNvPr id="6" name="Picture 5" descr="perf_nodes_accuracy.png"/>
           <p:cNvPicPr>
             <a:picLocks noChangeAspect="1"/>
           </p:cNvPicPr>
@@ -12326,7 +13716,7 @@
         <p:spPr>
           <a:xfrm>
             <a:off x="640080" y="1097280"/>
-            <a:ext cx="6126480" cy="4504765"/>
+            <a:ext cx="6126480" cy="5076226"/>
           </a:xfrm>
           <a:prstGeom prst="rect">
             <a:avLst/>
@@ -12335,7 +13725,7 @@
       </p:pic>
       <p:sp>
         <p:nvSpPr>
-          <p:cNvPr id="6" name="TextBox 5"/>
+          <p:cNvPr id="7" name="TextBox 6"/>
           <p:cNvSpPr txBox="1"/>
           <p:nvPr/>
         </p:nvSpPr>
@@ -12366,7 +13756,7 @@
               </a:defRPr>
             </a:pPr>
             <a:r>
-              <a:t>•  At 10 tasks all four methods sit on the bound</a:t>
+              <a:t>•  The exact solver and the greedy match the bound at every size</a:t>
             </a:r>
           </a:p>
           <a:p>
@@ -12381,7 +13771,7 @@
               </a:defRPr>
             </a:pPr>
             <a:r>
-              <a:t>•  At 1000 tasks the exact solver is past its cap; the greedy stays on the bound in 0.15 s</a:t>
+              <a:t>•  The GA drifts from 1.5% below the bound at two machines to about 8% at ten</a:t>
             </a:r>
           </a:p>
           <a:p>
@@ -12396,14 +13786,14 @@
               </a:defRPr>
             </a:pPr>
             <a:r>
-              <a:t>•  Rounding needs ~93 s per re-solve; the GA drops to 1.10 in ~159 s</a:t>
+              <a:t>•  A bigger placement space with a fixed search budget just means a worse search</a:t>
             </a:r>
           </a:p>
         </p:txBody>
       </p:sp>
       <p:cxnSp>
         <p:nvCxnSpPr>
-          <p:cNvPr id="7" name="Connector 6"/>
+          <p:cNvPr id="8" name="Connector 7"/>
           <p:cNvCxnSpPr/>
           <p:nvPr/>
         </p:nvCxnSpPr>
@@ -12438,7 +13828,7 @@
       </p:cxnSp>
       <p:sp>
         <p:nvSpPr>
-          <p:cNvPr id="8" name="TextBox 7"/>
+          <p:cNvPr id="9" name="TextBox 8"/>
           <p:cNvSpPr txBox="1"/>
           <p:nvPr/>
         </p:nvSpPr>
@@ -12466,7 +13856,7 @@
               </a:defRPr>
             </a:pPr>
             <a:r>
-              <a:t>Take-away:  at scale only the greedy is both fast and bound-level</a:t>
+              <a:t>Take-away:  more machines buy feasibility, not accuracy — extra capacity never lifts a method above the bound</a:t>
             </a:r>
           </a:p>
         </p:txBody>
@@ -12497,6 +13887,41 @@
         </p:nvSpPr>
         <p:spPr>
           <a:xfrm>
+            <a:off x="8046720" y="329184"/>
+            <a:ext cx="3657600" cy="274320"/>
+          </a:xfrm>
+          <a:prstGeom prst="rect">
+            <a:avLst/>
+          </a:prstGeom>
+          <a:noFill/>
+        </p:spPr>
+        <p:txBody>
+          <a:bodyPr wrap="none">
+            <a:spAutoFit/>
+          </a:bodyPr>
+          <a:lstStyle/>
+          <a:p>
+            <a:pPr algn="r">
+              <a:defRPr sz="1100">
+                <a:solidFill>
+                  <a:srgbClr val="595959"/>
+                </a:solidFill>
+              </a:defRPr>
+            </a:pPr>
+            <a:r>
+              <a:t>PAPER 2 · COMPLETED</a:t>
+            </a:r>
+          </a:p>
+        </p:txBody>
+      </p:sp>
+      <p:sp>
+        <p:nvSpPr>
+          <p:cNvPr id="3" name="TextBox 2"/>
+          <p:cNvSpPr txBox="1"/>
+          <p:nvPr/>
+        </p:nvSpPr>
+        <p:spPr>
+          <a:xfrm>
             <a:off x="457200" y="201168"/>
             <a:ext cx="11338560" cy="685800"/>
           </a:xfrm>
@@ -12519,14 +13944,14 @@
               </a:defRPr>
             </a:pPr>
             <a:r>
-              <a:t>Experiment 4: task failures</a:t>
+              <a:t>Experiment 3: workflow size</a:t>
             </a:r>
           </a:p>
         </p:txBody>
       </p:sp>
       <p:cxnSp>
         <p:nvCxnSpPr>
-          <p:cNvPr id="3" name="Connector 2"/>
+          <p:cNvPr id="4" name="Connector 3"/>
           <p:cNvCxnSpPr/>
           <p:nvPr/>
         </p:nvCxnSpPr>
@@ -12561,7 +13986,7 @@
       </p:cxnSp>
       <p:sp>
         <p:nvSpPr>
-          <p:cNvPr id="4" name="TextBox 3"/>
+          <p:cNvPr id="5" name="TextBox 4"/>
           <p:cNvSpPr txBox="1"/>
           <p:nvPr/>
         </p:nvSpPr>
@@ -12596,7 +14021,7 @@
       </p:sp>
       <p:pic>
         <p:nvPicPr>
-          <p:cNvPr id="5" name="Picture 4" descr="perf_failure_accuracy.png"/>
+          <p:cNvPr id="6" name="Picture 5" descr="perf_task_size_accuracy.png"/>
           <p:cNvPicPr>
             <a:picLocks noChangeAspect="1"/>
           </p:cNvPicPr>
@@ -12611,7 +14036,7 @@
         <p:spPr>
           <a:xfrm>
             <a:off x="640080" y="1097280"/>
-            <a:ext cx="6126480" cy="2357547"/>
+            <a:ext cx="6126480" cy="2505894"/>
           </a:xfrm>
           <a:prstGeom prst="rect">
             <a:avLst/>
@@ -12620,7 +14045,7 @@
       </p:pic>
       <p:sp>
         <p:nvSpPr>
-          <p:cNvPr id="6" name="TextBox 5"/>
+          <p:cNvPr id="7" name="TextBox 6"/>
           <p:cNvSpPr txBox="1"/>
           <p:nvPr/>
         </p:nvSpPr>
@@ -12651,7 +14076,7 @@
               </a:defRPr>
             </a:pPr>
             <a:r>
-              <a:t>•  Retry-once: a failed task reruns in place, keeping its accuracy if the retry still meets the deadline</a:t>
+              <a:t>•  At 10 tasks all four methods sit on the bound</a:t>
             </a:r>
           </a:p>
           <a:p>
@@ -12666,7 +14091,7 @@
               </a:defRPr>
             </a:pPr>
             <a:r>
-              <a:t>•  Scores stay flat for everyone; feasibility is where they separate</a:t>
+              <a:t>•  At 1000 tasks the exact solver is past its cap; the greedy stays on the bound</a:t>
             </a:r>
           </a:p>
           <a:p>
@@ -12681,14 +14106,14 @@
               </a:defRPr>
             </a:pPr>
             <a:r>
-              <a:t>•  At the highest failure rate: greedy still 100% feasible, the others drop to ~60% and ~20%</a:t>
+              <a:t>•  The right panel prices the run: greedy answers in 0.15 s, rounding needs ~93 s, and the GA takes ~159 s for a worse score</a:t>
             </a:r>
           </a:p>
         </p:txBody>
       </p:sp>
       <p:cxnSp>
         <p:nvCxnSpPr>
-          <p:cNvPr id="7" name="Connector 6"/>
+          <p:cNvPr id="8" name="Connector 7"/>
           <p:cNvCxnSpPr/>
           <p:nvPr/>
         </p:nvCxnSpPr>
@@ -12723,7 +14148,7 @@
       </p:cxnSp>
       <p:sp>
         <p:nvSpPr>
-          <p:cNvPr id="8" name="TextBox 7"/>
+          <p:cNvPr id="9" name="TextBox 8"/>
           <p:cNvSpPr txBox="1"/>
           <p:nvPr/>
         </p:nvSpPr>
@@ -12751,7 +14176,7 @@
               </a:defRPr>
             </a:pPr>
             <a:r>
-              <a:t>Take-away:  under failures the differentiator is feasibility — finishing early is what absorbs the retries</a:t>
+              <a:t>Take-away:  at scale only the greedy is both fast and bound-level</a:t>
             </a:r>
           </a:p>
         </p:txBody>
@@ -12804,7 +14229,7 @@
               </a:defRPr>
             </a:pPr>
             <a:r>
-              <a:t>The setting</a:t>
+              <a:t>1.  Motivation</a:t>
             </a:r>
           </a:p>
         </p:txBody>
@@ -12905,6 +14330,41 @@
         </p:nvSpPr>
         <p:spPr>
           <a:xfrm>
+            <a:off x="8046720" y="329184"/>
+            <a:ext cx="3657600" cy="274320"/>
+          </a:xfrm>
+          <a:prstGeom prst="rect">
+            <a:avLst/>
+          </a:prstGeom>
+          <a:noFill/>
+        </p:spPr>
+        <p:txBody>
+          <a:bodyPr wrap="none">
+            <a:spAutoFit/>
+          </a:bodyPr>
+          <a:lstStyle/>
+          <a:p>
+            <a:pPr algn="r">
+              <a:defRPr sz="1100">
+                <a:solidFill>
+                  <a:srgbClr val="595959"/>
+                </a:solidFill>
+              </a:defRPr>
+            </a:pPr>
+            <a:r>
+              <a:t>PAPER 2 · COMPLETED</a:t>
+            </a:r>
+          </a:p>
+        </p:txBody>
+      </p:sp>
+      <p:sp>
+        <p:nvSpPr>
+          <p:cNvPr id="3" name="TextBox 2"/>
+          <p:cNvSpPr txBox="1"/>
+          <p:nvPr/>
+        </p:nvSpPr>
+        <p:spPr>
+          <a:xfrm>
             <a:off x="457200" y="201168"/>
             <a:ext cx="11338560" cy="685800"/>
           </a:xfrm>
@@ -12927,14 +14387,14 @@
               </a:defRPr>
             </a:pPr>
             <a:r>
-              <a:t>Experiment 5: link degradation</a:t>
+              <a:t>Experiment 4: task failures</a:t>
             </a:r>
           </a:p>
         </p:txBody>
       </p:sp>
       <p:cxnSp>
         <p:nvCxnSpPr>
-          <p:cNvPr id="3" name="Connector 2"/>
+          <p:cNvPr id="4" name="Connector 3"/>
           <p:cNvCxnSpPr/>
           <p:nvPr/>
         </p:nvCxnSpPr>
@@ -12969,7 +14429,7 @@
       </p:cxnSp>
       <p:sp>
         <p:nvSpPr>
-          <p:cNvPr id="4" name="TextBox 3"/>
+          <p:cNvPr id="5" name="TextBox 4"/>
           <p:cNvSpPr txBox="1"/>
           <p:nvPr/>
         </p:nvSpPr>
@@ -13004,7 +14464,7 @@
       </p:sp>
       <p:pic>
         <p:nvPicPr>
-          <p:cNvPr id="5" name="Picture 4" descr="perf_bandwidth_accuracy.png"/>
+          <p:cNvPr id="6" name="Picture 5" descr="perf_failure_accuracy.png"/>
           <p:cNvPicPr>
             <a:picLocks noChangeAspect="1"/>
           </p:cNvPicPr>
@@ -13019,7 +14479,7 @@
         <p:spPr>
           <a:xfrm>
             <a:off x="640080" y="1097280"/>
-            <a:ext cx="6126480" cy="2353197"/>
+            <a:ext cx="6126480" cy="2503540"/>
           </a:xfrm>
           <a:prstGeom prst="rect">
             <a:avLst/>
@@ -13028,7 +14488,7 @@
       </p:pic>
       <p:sp>
         <p:nvSpPr>
-          <p:cNvPr id="6" name="TextBox 5"/>
+          <p:cNvPr id="7" name="TextBox 6"/>
           <p:cNvSpPr txBox="1"/>
           <p:nvPr/>
         </p:nvSpPr>
@@ -13059,7 +14519,7 @@
               </a:defRPr>
             </a:pPr>
             <a:r>
-              <a:t>•  The bandwidth-blind baseline shows bound-level scores at every level — while going fully infeasible below a fifth of nominal</a:t>
+              <a:t>•  Retry-once: a failed task reruns in place, keeping its accuracy if the retry still meets the deadline</a:t>
             </a:r>
           </a:p>
           <a:p>
@@ -13074,7 +14534,7 @@
               </a:defRPr>
             </a:pPr>
             <a:r>
-              <a:t>•  The exact solver stays feasible throughout and loses only ~10% of score</a:t>
+              <a:t>•  Scores stay flat for everyone; feasibility is where they separate</a:t>
             </a:r>
           </a:p>
           <a:p>
@@ -13089,14 +14549,14 @@
               </a:defRPr>
             </a:pPr>
             <a:r>
-              <a:t>•  The greedy stays feasible to a tenth by paying in accuracy</a:t>
+              <a:t>•  At the highest failure rate: greedy still 100% feasible, the others drop to ~60% and ~20%</a:t>
             </a:r>
           </a:p>
         </p:txBody>
       </p:sp>
       <p:cxnSp>
         <p:nvCxnSpPr>
-          <p:cNvPr id="7" name="Connector 6"/>
+          <p:cNvPr id="8" name="Connector 7"/>
           <p:cNvCxnSpPr/>
           <p:nvPr/>
         </p:nvCxnSpPr>
@@ -13131,7 +14591,7 @@
       </p:cxnSp>
       <p:sp>
         <p:nvSpPr>
-          <p:cNvPr id="8" name="TextBox 7"/>
+          <p:cNvPr id="9" name="TextBox 8"/>
           <p:cNvSpPr txBox="1"/>
           <p:nvPr/>
         </p:nvSpPr>
@@ -13159,7 +14619,7 @@
               </a:defRPr>
             </a:pPr>
             <a:r>
-              <a:t>Take-away:  a scheduler that ignores the links reports a perfect score on a workflow that finishes late</a:t>
+              <a:t>Take-away:  under failures the differentiator is feasibility — finishing early is what absorbs the retries</a:t>
             </a:r>
           </a:p>
         </p:txBody>
@@ -13190,6 +14650,41 @@
         </p:nvSpPr>
         <p:spPr>
           <a:xfrm>
+            <a:off x="8046720" y="329184"/>
+            <a:ext cx="3657600" cy="274320"/>
+          </a:xfrm>
+          <a:prstGeom prst="rect">
+            <a:avLst/>
+          </a:prstGeom>
+          <a:noFill/>
+        </p:spPr>
+        <p:txBody>
+          <a:bodyPr wrap="none">
+            <a:spAutoFit/>
+          </a:bodyPr>
+          <a:lstStyle/>
+          <a:p>
+            <a:pPr algn="r">
+              <a:defRPr sz="1100">
+                <a:solidFill>
+                  <a:srgbClr val="595959"/>
+                </a:solidFill>
+              </a:defRPr>
+            </a:pPr>
+            <a:r>
+              <a:t>PAPER 2 · COMPLETED</a:t>
+            </a:r>
+          </a:p>
+        </p:txBody>
+      </p:sp>
+      <p:sp>
+        <p:nvSpPr>
+          <p:cNvPr id="3" name="TextBox 2"/>
+          <p:cNvSpPr txBox="1"/>
+          <p:nvPr/>
+        </p:nvSpPr>
+        <p:spPr>
+          <a:xfrm>
             <a:off x="457200" y="201168"/>
             <a:ext cx="11338560" cy="685800"/>
           </a:xfrm>
@@ -13212,14 +14707,14 @@
               </a:defRPr>
             </a:pPr>
             <a:r>
-              <a:t>The same story at every scale</a:t>
+              <a:t>Experiment 5: link degradation</a:t>
             </a:r>
           </a:p>
         </p:txBody>
       </p:sp>
       <p:cxnSp>
         <p:nvCxnSpPr>
-          <p:cNvPr id="3" name="Connector 2"/>
+          <p:cNvPr id="4" name="Connector 3"/>
           <p:cNvCxnSpPr/>
           <p:nvPr/>
         </p:nvCxnSpPr>
@@ -13254,7 +14749,7 @@
       </p:cxnSp>
       <p:sp>
         <p:nvSpPr>
-          <p:cNvPr id="4" name="TextBox 3"/>
+          <p:cNvPr id="5" name="TextBox 4"/>
           <p:cNvSpPr txBox="1"/>
           <p:nvPr/>
         </p:nvSpPr>
@@ -13287,9 +14782,329 @@
           </a:p>
         </p:txBody>
       </p:sp>
+      <p:pic>
+        <p:nvPicPr>
+          <p:cNvPr id="6" name="Picture 5" descr="perf_bandwidth_accuracy.png"/>
+          <p:cNvPicPr>
+            <a:picLocks noChangeAspect="1"/>
+          </p:cNvPicPr>
+          <p:nvPr/>
+        </p:nvPicPr>
+        <p:blipFill>
+          <a:blip r:embed="rId3"/>
+          <a:stretch>
+            <a:fillRect/>
+          </a:stretch>
+        </p:blipFill>
+        <p:spPr>
+          <a:xfrm>
+            <a:off x="640080" y="1097280"/>
+            <a:ext cx="6126480" cy="2502365"/>
+          </a:xfrm>
+          <a:prstGeom prst="rect">
+            <a:avLst/>
+          </a:prstGeom>
+        </p:spPr>
+      </p:pic>
+      <p:sp>
+        <p:nvSpPr>
+          <p:cNvPr id="7" name="TextBox 6"/>
+          <p:cNvSpPr txBox="1"/>
+          <p:nvPr/>
+        </p:nvSpPr>
+        <p:spPr>
+          <a:xfrm>
+            <a:off x="7132320" y="1371600"/>
+            <a:ext cx="4572000" cy="5029200"/>
+          </a:xfrm>
+          <a:prstGeom prst="rect">
+            <a:avLst/>
+          </a:prstGeom>
+          <a:noFill/>
+        </p:spPr>
+        <p:txBody>
+          <a:bodyPr wrap="square">
+            <a:spAutoFit/>
+          </a:bodyPr>
+          <a:lstStyle/>
+          <a:p>
+            <a:pPr>
+              <a:spcAft>
+                <a:spcPts val="1000"/>
+              </a:spcAft>
+              <a:defRPr sz="1600">
+                <a:solidFill>
+                  <a:srgbClr val="1A1A1A"/>
+                </a:solidFill>
+              </a:defRPr>
+            </a:pPr>
+            <a:r>
+              <a:t>•  The bandwidth-blind baseline shows bound-level scores at every level — while going fully infeasible below a fifth of nominal</a:t>
+            </a:r>
+          </a:p>
+          <a:p>
+            <a:pPr>
+              <a:spcAft>
+                <a:spcPts val="1000"/>
+              </a:spcAft>
+              <a:defRPr sz="1600">
+                <a:solidFill>
+                  <a:srgbClr val="1A1A1A"/>
+                </a:solidFill>
+              </a:defRPr>
+            </a:pPr>
+            <a:r>
+              <a:t>•  The exact solver stays feasible throughout and loses only ~10% of score</a:t>
+            </a:r>
+          </a:p>
+          <a:p>
+            <a:pPr>
+              <a:spcAft>
+                <a:spcPts val="1000"/>
+              </a:spcAft>
+              <a:defRPr sz="1600">
+                <a:solidFill>
+                  <a:srgbClr val="1A1A1A"/>
+                </a:solidFill>
+              </a:defRPr>
+            </a:pPr>
+            <a:r>
+              <a:t>•  The greedy stays feasible to a tenth by paying in accuracy</a:t>
+            </a:r>
+          </a:p>
+        </p:txBody>
+      </p:sp>
+      <p:cxnSp>
+        <p:nvCxnSpPr>
+          <p:cNvPr id="8" name="Connector 7"/>
+          <p:cNvCxnSpPr/>
+          <p:nvPr/>
+        </p:nvCxnSpPr>
+        <p:spPr>
+          <a:xfrm>
+            <a:off x="640080" y="5623560"/>
+            <a:ext cx="10881360" cy="0"/>
+          </a:xfrm>
+          <a:prstGeom prst="line">
+            <a:avLst/>
+          </a:prstGeom>
+          <a:ln w="9525">
+            <a:solidFill>
+              <a:srgbClr val="595959"/>
+            </a:solidFill>
+          </a:ln>
+        </p:spPr>
+        <p:style>
+          <a:lnRef idx="2">
+            <a:schemeClr val="accent1"/>
+          </a:lnRef>
+          <a:fillRef idx="0">
+            <a:schemeClr val="accent1"/>
+          </a:fillRef>
+          <a:effectRef idx="1">
+            <a:schemeClr val="accent1"/>
+          </a:effectRef>
+          <a:fontRef idx="minor">
+            <a:schemeClr val="tx1"/>
+          </a:fontRef>
+        </p:style>
+      </p:cxnSp>
+      <p:sp>
+        <p:nvSpPr>
+          <p:cNvPr id="9" name="TextBox 8"/>
+          <p:cNvSpPr txBox="1"/>
+          <p:nvPr/>
+        </p:nvSpPr>
+        <p:spPr>
+          <a:xfrm>
+            <a:off x="640080" y="5715000"/>
+            <a:ext cx="10881360" cy="914400"/>
+          </a:xfrm>
+          <a:prstGeom prst="rect">
+            <a:avLst/>
+          </a:prstGeom>
+          <a:noFill/>
+        </p:spPr>
+        <p:txBody>
+          <a:bodyPr wrap="square">
+            <a:spAutoFit/>
+          </a:bodyPr>
+          <a:lstStyle/>
+          <a:p>
+            <a:pPr>
+              <a:defRPr sz="1700" b="1">
+                <a:solidFill>
+                  <a:srgbClr val="1A1A1A"/>
+                </a:solidFill>
+              </a:defRPr>
+            </a:pPr>
+            <a:r>
+              <a:t>Take-away:  a scheduler that ignores the links reports a perfect score on a workflow that finishes late</a:t>
+            </a:r>
+          </a:p>
+        </p:txBody>
+      </p:sp>
+    </p:spTree>
+  </p:cSld>
+  <p:clrMapOvr>
+    <a:masterClrMapping/>
+  </p:clrMapOvr>
+</p:sld>
+</file>
+
+<file path=ppt/slides/slide32.xml><?xml version="1.0" encoding="utf-8"?>
+<p:sld xmlns:a="http://schemas.openxmlformats.org/drawingml/2006/main" xmlns:p="http://schemas.openxmlformats.org/presentationml/2006/main" xmlns:r="http://schemas.openxmlformats.org/officeDocument/2006/relationships">
+  <p:cSld>
+    <p:spTree>
+      <p:nvGrpSpPr>
+        <p:cNvPr id="1" name=""/>
+        <p:cNvGrpSpPr/>
+        <p:nvPr/>
+      </p:nvGrpSpPr>
+      <p:grpSpPr/>
+      <p:sp>
+        <p:nvSpPr>
+          <p:cNvPr id="2" name="TextBox 1"/>
+          <p:cNvSpPr txBox="1"/>
+          <p:nvPr/>
+        </p:nvSpPr>
+        <p:spPr>
+          <a:xfrm>
+            <a:off x="8046720" y="329184"/>
+            <a:ext cx="3657600" cy="274320"/>
+          </a:xfrm>
+          <a:prstGeom prst="rect">
+            <a:avLst/>
+          </a:prstGeom>
+          <a:noFill/>
+        </p:spPr>
+        <p:txBody>
+          <a:bodyPr wrap="none">
+            <a:spAutoFit/>
+          </a:bodyPr>
+          <a:lstStyle/>
+          <a:p>
+            <a:pPr algn="r">
+              <a:defRPr sz="1100">
+                <a:solidFill>
+                  <a:srgbClr val="595959"/>
+                </a:solidFill>
+              </a:defRPr>
+            </a:pPr>
+            <a:r>
+              <a:t>PAPER 2 · COMPLETED</a:t>
+            </a:r>
+          </a:p>
+        </p:txBody>
+      </p:sp>
+      <p:sp>
+        <p:nvSpPr>
+          <p:cNvPr id="3" name="TextBox 2"/>
+          <p:cNvSpPr txBox="1"/>
+          <p:nvPr/>
+        </p:nvSpPr>
+        <p:spPr>
+          <a:xfrm>
+            <a:off x="457200" y="201168"/>
+            <a:ext cx="11338560" cy="685800"/>
+          </a:xfrm>
+          <a:prstGeom prst="rect">
+            <a:avLst/>
+          </a:prstGeom>
+          <a:noFill/>
+        </p:spPr>
+        <p:txBody>
+          <a:bodyPr wrap="none" anchor="ctr">
+            <a:spAutoFit/>
+          </a:bodyPr>
+          <a:lstStyle/>
+          <a:p>
+            <a:pPr>
+              <a:defRPr sz="3000" b="1">
+                <a:solidFill>
+                  <a:srgbClr val="1A1A1A"/>
+                </a:solidFill>
+              </a:defRPr>
+            </a:pPr>
+            <a:r>
+              <a:t>The same story at every scale</a:t>
+            </a:r>
+          </a:p>
+        </p:txBody>
+      </p:sp>
+      <p:cxnSp>
+        <p:nvCxnSpPr>
+          <p:cNvPr id="4" name="Connector 3"/>
+          <p:cNvCxnSpPr/>
+          <p:nvPr/>
+        </p:nvCxnSpPr>
+        <p:spPr>
+          <a:xfrm>
+            <a:off x="502920" y="932688"/>
+            <a:ext cx="11201400" cy="0"/>
+          </a:xfrm>
+          <a:prstGeom prst="line">
+            <a:avLst/>
+          </a:prstGeom>
+          <a:ln w="12700">
+            <a:solidFill>
+              <a:srgbClr val="1A1A1A"/>
+            </a:solidFill>
+          </a:ln>
+        </p:spPr>
+        <p:style>
+          <a:lnRef idx="2">
+            <a:schemeClr val="accent1"/>
+          </a:lnRef>
+          <a:fillRef idx="0">
+            <a:schemeClr val="accent1"/>
+          </a:fillRef>
+          <a:effectRef idx="1">
+            <a:schemeClr val="accent1"/>
+          </a:effectRef>
+          <a:fontRef idx="minor">
+            <a:schemeClr val="tx1"/>
+          </a:fontRef>
+        </p:style>
+      </p:cxnSp>
+      <p:sp>
+        <p:nvSpPr>
+          <p:cNvPr id="5" name="TextBox 4"/>
+          <p:cNvSpPr txBox="1"/>
+          <p:nvPr/>
+        </p:nvSpPr>
+        <p:spPr>
+          <a:xfrm>
+            <a:off x="11430000" y="6492240"/>
+            <a:ext cx="640080" cy="274320"/>
+          </a:xfrm>
+          <a:prstGeom prst="rect">
+            <a:avLst/>
+          </a:prstGeom>
+          <a:noFill/>
+        </p:spPr>
+        <p:txBody>
+          <a:bodyPr wrap="none">
+            <a:spAutoFit/>
+          </a:bodyPr>
+          <a:lstStyle/>
+          <a:p>
+            <a:pPr algn="r">
+              <a:defRPr sz="1000">
+                <a:solidFill>
+                  <a:srgbClr val="595959"/>
+                </a:solidFill>
+              </a:defRPr>
+            </a:pPr>
+            <a:r>
+              <a:t>32</a:t>
+            </a:r>
+          </a:p>
+        </p:txBody>
+      </p:sp>
       <p:graphicFrame>
         <p:nvGraphicFramePr>
-          <p:cNvPr id="5" name="Table 4"/>
+          <p:cNvPr id="6" name="Table 5"/>
           <p:cNvGraphicFramePr>
             <a:graphicFrameLocks noGrp="1"/>
           </p:cNvGraphicFramePr>
@@ -14020,7 +15835,7 @@
       </p:graphicFrame>
       <p:cxnSp>
         <p:nvCxnSpPr>
-          <p:cNvPr id="6" name="Connector 5"/>
+          <p:cNvPr id="7" name="Connector 6"/>
           <p:cNvCxnSpPr/>
           <p:nvPr/>
         </p:nvCxnSpPr>
@@ -14055,7 +15870,7 @@
       </p:cxnSp>
       <p:sp>
         <p:nvSpPr>
-          <p:cNvPr id="7" name="TextBox 6"/>
+          <p:cNvPr id="8" name="TextBox 7"/>
           <p:cNvSpPr txBox="1"/>
           <p:nvPr/>
         </p:nvSpPr>
@@ -14084,234 +15899,6 @@
             </a:pPr>
             <a:r>
               <a:t>Take-away:  accuracy is not free in wall time, and neither is the makespan — the gap widens with scale</a:t>
-            </a:r>
-          </a:p>
-        </p:txBody>
-      </p:sp>
-    </p:spTree>
-  </p:cSld>
-  <p:clrMapOvr>
-    <a:masterClrMapping/>
-  </p:clrMapOvr>
-</p:sld>
-</file>
-
-<file path=ppt/slides/slide32.xml><?xml version="1.0" encoding="utf-8"?>
-<p:sld xmlns:a="http://schemas.openxmlformats.org/drawingml/2006/main" xmlns:p="http://schemas.openxmlformats.org/presentationml/2006/main" xmlns:r="http://schemas.openxmlformats.org/officeDocument/2006/relationships">
-  <p:cSld>
-    <p:spTree>
-      <p:nvGrpSpPr>
-        <p:cNvPr id="1" name=""/>
-        <p:cNvGrpSpPr/>
-        <p:nvPr/>
-      </p:nvGrpSpPr>
-      <p:grpSpPr/>
-      <p:sp>
-        <p:nvSpPr>
-          <p:cNvPr id="2" name="TextBox 1"/>
-          <p:cNvSpPr txBox="1"/>
-          <p:nvPr/>
-        </p:nvSpPr>
-        <p:spPr>
-          <a:xfrm>
-            <a:off x="457200" y="201168"/>
-            <a:ext cx="11338560" cy="685800"/>
-          </a:xfrm>
-          <a:prstGeom prst="rect">
-            <a:avLst/>
-          </a:prstGeom>
-          <a:noFill/>
-        </p:spPr>
-        <p:txBody>
-          <a:bodyPr wrap="none" anchor="ctr">
-            <a:spAutoFit/>
-          </a:bodyPr>
-          <a:lstStyle/>
-          <a:p>
-            <a:pPr>
-              <a:defRPr sz="3000" b="1">
-                <a:solidFill>
-                  <a:srgbClr val="1A1A1A"/>
-                </a:solidFill>
-              </a:defRPr>
-            </a:pPr>
-            <a:r>
-              <a:t>Honest limits, and what they leave open</a:t>
-            </a:r>
-          </a:p>
-        </p:txBody>
-      </p:sp>
-      <p:cxnSp>
-        <p:nvCxnSpPr>
-          <p:cNvPr id="3" name="Connector 2"/>
-          <p:cNvCxnSpPr/>
-          <p:nvPr/>
-        </p:nvCxnSpPr>
-        <p:spPr>
-          <a:xfrm>
-            <a:off x="502920" y="932688"/>
-            <a:ext cx="11201400" cy="0"/>
-          </a:xfrm>
-          <a:prstGeom prst="line">
-            <a:avLst/>
-          </a:prstGeom>
-          <a:ln w="12700">
-            <a:solidFill>
-              <a:srgbClr val="1A1A1A"/>
-            </a:solidFill>
-          </a:ln>
-        </p:spPr>
-        <p:style>
-          <a:lnRef idx="2">
-            <a:schemeClr val="accent1"/>
-          </a:lnRef>
-          <a:fillRef idx="0">
-            <a:schemeClr val="accent1"/>
-          </a:fillRef>
-          <a:effectRef idx="1">
-            <a:schemeClr val="accent1"/>
-          </a:effectRef>
-          <a:fontRef idx="minor">
-            <a:schemeClr val="tx1"/>
-          </a:fontRef>
-        </p:style>
-      </p:cxnSp>
-      <p:sp>
-        <p:nvSpPr>
-          <p:cNvPr id="4" name="TextBox 3"/>
-          <p:cNvSpPr txBox="1"/>
-          <p:nvPr/>
-        </p:nvSpPr>
-        <p:spPr>
-          <a:xfrm>
-            <a:off x="11430000" y="6492240"/>
-            <a:ext cx="640080" cy="274320"/>
-          </a:xfrm>
-          <a:prstGeom prst="rect">
-            <a:avLst/>
-          </a:prstGeom>
-          <a:noFill/>
-        </p:spPr>
-        <p:txBody>
-          <a:bodyPr wrap="none">
-            <a:spAutoFit/>
-          </a:bodyPr>
-          <a:lstStyle/>
-          <a:p>
-            <a:pPr algn="r">
-              <a:defRPr sz="1000">
-                <a:solidFill>
-                  <a:srgbClr val="595959"/>
-                </a:solidFill>
-              </a:defRPr>
-            </a:pPr>
-            <a:r>
-              <a:t>32</a:t>
-            </a:r>
-          </a:p>
-        </p:txBody>
-      </p:sp>
-      <p:sp>
-        <p:nvSpPr>
-          <p:cNvPr id="5" name="TextBox 4"/>
-          <p:cNvSpPr txBox="1"/>
-          <p:nvPr/>
-        </p:nvSpPr>
-        <p:spPr>
-          <a:xfrm>
-            <a:off x="640080" y="1234440"/>
-            <a:ext cx="10972800" cy="5029200"/>
-          </a:xfrm>
-          <a:prstGeom prst="rect">
-            <a:avLst/>
-          </a:prstGeom>
-          <a:noFill/>
-        </p:spPr>
-        <p:txBody>
-          <a:bodyPr wrap="square">
-            <a:spAutoFit/>
-          </a:bodyPr>
-          <a:lstStyle/>
-          <a:p>
-            <a:pPr>
-              <a:spcAft>
-                <a:spcPts val="1000"/>
-              </a:spcAft>
-              <a:defRPr sz="2000">
-                <a:solidFill>
-                  <a:srgbClr val="1A1A1A"/>
-                </a:solidFill>
-              </a:defRPr>
-            </a:pPr>
-            <a:r>
-              <a:t>•  The exact solver is capped near 800 assignment variables — a deliberate boundary</a:t>
-            </a:r>
-          </a:p>
-          <a:p>
-            <a:pPr>
-              <a:spcAft>
-                <a:spcPts val="1000"/>
-              </a:spcAft>
-              <a:defRPr sz="2000">
-                <a:solidFill>
-                  <a:srgbClr val="1A1A1A"/>
-                </a:solidFill>
-              </a:defRPr>
-            </a:pPr>
-            <a:r>
-              <a:t>•  The relaxation reaches ~100,000 rows at 1,000 tasks; the GA runs on one fixed budget</a:t>
-            </a:r>
-          </a:p>
-          <a:p>
-            <a:pPr>
-              <a:spcAft>
-                <a:spcPts val="1000"/>
-              </a:spcAft>
-              <a:defRPr sz="2000">
-                <a:solidFill>
-                  <a:srgbClr val="1A1A1A"/>
-                </a:solidFill>
-              </a:defRPr>
-            </a:pPr>
-            <a:r>
-              <a:t>•  The failure model is retry-once-in-place: no replication, checkpointing, or migration</a:t>
-            </a:r>
-          </a:p>
-          <a:p>
-            <a:pPr>
-              <a:spcAft>
-                <a:spcPts val="1000"/>
-              </a:spcAft>
-              <a:defRPr sz="2000">
-                <a:solidFill>
-                  <a:srgbClr val="1A1A1A"/>
-                </a:solidFill>
-              </a:defRPr>
-            </a:pPr>
-            <a:r>
-              <a:t>•  Schedulable instances stop near 10,000 tasks; the million-task experiments are structural</a:t>
-            </a:r>
-          </a:p>
-          <a:p>
-            <a:pPr>
-              <a:spcAft>
-                <a:spcPts val="400"/>
-              </a:spcAft>
-            </a:pPr>
-          </a:p>
-          <a:p>
-            <a:pPr>
-              <a:spcAft>
-                <a:spcPts val="1000"/>
-              </a:spcAft>
-              <a:defRPr sz="2000">
-                <a:solidFill>
-                  <a:srgbClr val="1A1A1A"/>
-                </a:solidFill>
-              </a:defRPr>
-            </a:pPr>
-            <a:r>
-              <a:t>•  What is open: a whole machine fails mid-run, and the schedule was decided up front</a:t>
             </a:r>
           </a:p>
         </p:txBody>
@@ -14342,8 +15929,148 @@
         </p:nvSpPr>
         <p:spPr>
           <a:xfrm>
-            <a:off x="914400" y="2377440"/>
-            <a:ext cx="10332720" cy="1280160"/>
+            <a:off x="8046720" y="329184"/>
+            <a:ext cx="3657600" cy="274320"/>
+          </a:xfrm>
+          <a:prstGeom prst="rect">
+            <a:avLst/>
+          </a:prstGeom>
+          <a:noFill/>
+        </p:spPr>
+        <p:txBody>
+          <a:bodyPr wrap="none">
+            <a:spAutoFit/>
+          </a:bodyPr>
+          <a:lstStyle/>
+          <a:p>
+            <a:pPr algn="r">
+              <a:defRPr sz="1100">
+                <a:solidFill>
+                  <a:srgbClr val="595959"/>
+                </a:solidFill>
+              </a:defRPr>
+            </a:pPr>
+            <a:r>
+              <a:t>PAPER 2 · COMPLETED</a:t>
+            </a:r>
+          </a:p>
+        </p:txBody>
+      </p:sp>
+      <p:sp>
+        <p:nvSpPr>
+          <p:cNvPr id="3" name="TextBox 2"/>
+          <p:cNvSpPr txBox="1"/>
+          <p:nvPr/>
+        </p:nvSpPr>
+        <p:spPr>
+          <a:xfrm>
+            <a:off x="457200" y="201168"/>
+            <a:ext cx="11338560" cy="685800"/>
+          </a:xfrm>
+          <a:prstGeom prst="rect">
+            <a:avLst/>
+          </a:prstGeom>
+          <a:noFill/>
+        </p:spPr>
+        <p:txBody>
+          <a:bodyPr wrap="none" anchor="ctr">
+            <a:spAutoFit/>
+          </a:bodyPr>
+          <a:lstStyle/>
+          <a:p>
+            <a:pPr>
+              <a:defRPr sz="3000" b="1">
+                <a:solidFill>
+                  <a:srgbClr val="1A1A1A"/>
+                </a:solidFill>
+              </a:defRPr>
+            </a:pPr>
+            <a:r>
+              <a:t>Honest limits, and what they leave open</a:t>
+            </a:r>
+          </a:p>
+        </p:txBody>
+      </p:sp>
+      <p:cxnSp>
+        <p:nvCxnSpPr>
+          <p:cNvPr id="4" name="Connector 3"/>
+          <p:cNvCxnSpPr/>
+          <p:nvPr/>
+        </p:nvCxnSpPr>
+        <p:spPr>
+          <a:xfrm>
+            <a:off x="502920" y="932688"/>
+            <a:ext cx="11201400" cy="0"/>
+          </a:xfrm>
+          <a:prstGeom prst="line">
+            <a:avLst/>
+          </a:prstGeom>
+          <a:ln w="12700">
+            <a:solidFill>
+              <a:srgbClr val="1A1A1A"/>
+            </a:solidFill>
+          </a:ln>
+        </p:spPr>
+        <p:style>
+          <a:lnRef idx="2">
+            <a:schemeClr val="accent1"/>
+          </a:lnRef>
+          <a:fillRef idx="0">
+            <a:schemeClr val="accent1"/>
+          </a:fillRef>
+          <a:effectRef idx="1">
+            <a:schemeClr val="accent1"/>
+          </a:effectRef>
+          <a:fontRef idx="minor">
+            <a:schemeClr val="tx1"/>
+          </a:fontRef>
+        </p:style>
+      </p:cxnSp>
+      <p:sp>
+        <p:nvSpPr>
+          <p:cNvPr id="5" name="TextBox 4"/>
+          <p:cNvSpPr txBox="1"/>
+          <p:nvPr/>
+        </p:nvSpPr>
+        <p:spPr>
+          <a:xfrm>
+            <a:off x="11430000" y="6492240"/>
+            <a:ext cx="640080" cy="274320"/>
+          </a:xfrm>
+          <a:prstGeom prst="rect">
+            <a:avLst/>
+          </a:prstGeom>
+          <a:noFill/>
+        </p:spPr>
+        <p:txBody>
+          <a:bodyPr wrap="none">
+            <a:spAutoFit/>
+          </a:bodyPr>
+          <a:lstStyle/>
+          <a:p>
+            <a:pPr algn="r">
+              <a:defRPr sz="1000">
+                <a:solidFill>
+                  <a:srgbClr val="595959"/>
+                </a:solidFill>
+              </a:defRPr>
+            </a:pPr>
+            <a:r>
+              <a:t>33</a:t>
+            </a:r>
+          </a:p>
+        </p:txBody>
+      </p:sp>
+      <p:sp>
+        <p:nvSpPr>
+          <p:cNvPr id="6" name="TextBox 5"/>
+          <p:cNvSpPr txBox="1"/>
+          <p:nvPr/>
+        </p:nvSpPr>
+        <p:spPr>
+          <a:xfrm>
+            <a:off x="640080" y="1234440"/>
+            <a:ext cx="10972800" cy="5029200"/>
           </a:xfrm>
           <a:prstGeom prst="rect">
             <a:avLst/>
@@ -14356,85 +16083,85 @@
           </a:bodyPr>
           <a:lstStyle/>
           <a:p>
-            <a:pPr algn="ctr">
-              <a:defRPr sz="3800" b="1">
+            <a:pPr>
+              <a:spcAft>
+                <a:spcPts val="1000"/>
+              </a:spcAft>
+              <a:defRPr sz="2000">
                 <a:solidFill>
                   <a:srgbClr val="1A1A1A"/>
                 </a:solidFill>
               </a:defRPr>
             </a:pPr>
             <a:r>
-              <a:t>Paper 3 — the proposal</a:t>
-            </a:r>
-          </a:p>
-        </p:txBody>
-      </p:sp>
-      <p:sp>
-        <p:nvSpPr>
-          <p:cNvPr id="3" name="TextBox 2"/>
-          <p:cNvSpPr txBox="1"/>
-          <p:nvPr/>
-        </p:nvSpPr>
-        <p:spPr>
-          <a:xfrm>
-            <a:off x="914400" y="3657600"/>
-            <a:ext cx="10332720" cy="1097280"/>
-          </a:xfrm>
-          <a:prstGeom prst="rect">
-            <a:avLst/>
-          </a:prstGeom>
-          <a:noFill/>
-        </p:spPr>
-        <p:txBody>
-          <a:bodyPr wrap="square">
-            <a:spAutoFit/>
-          </a:bodyPr>
-          <a:lstStyle/>
-          <a:p>
-            <a:pPr algn="ctr">
+              <a:t>•  The exact solver is capped near 800 assignment variables — a deliberate boundary</a:t>
+            </a:r>
+          </a:p>
+          <a:p>
+            <a:pPr>
+              <a:spcAft>
+                <a:spcPts val="1000"/>
+              </a:spcAft>
               <a:defRPr sz="2000">
                 <a:solidFill>
-                  <a:srgbClr val="595959"/>
-                </a:solidFill>
-              </a:defRPr>
-            </a:pPr>
-            <a:r>
-              <a:t>Dynamic partial repartitioning after a resource failure</a:t>
-            </a:r>
-          </a:p>
-        </p:txBody>
-      </p:sp>
-      <p:sp>
-        <p:nvSpPr>
-          <p:cNvPr id="4" name="TextBox 3"/>
-          <p:cNvSpPr txBox="1"/>
-          <p:nvPr/>
-        </p:nvSpPr>
-        <p:spPr>
-          <a:xfrm>
-            <a:off x="11430000" y="6492240"/>
-            <a:ext cx="640080" cy="274320"/>
-          </a:xfrm>
-          <a:prstGeom prst="rect">
-            <a:avLst/>
-          </a:prstGeom>
-          <a:noFill/>
-        </p:spPr>
-        <p:txBody>
-          <a:bodyPr wrap="none">
-            <a:spAutoFit/>
-          </a:bodyPr>
-          <a:lstStyle/>
-          <a:p>
-            <a:pPr algn="r">
-              <a:defRPr sz="1000">
-                <a:solidFill>
-                  <a:srgbClr val="595959"/>
-                </a:solidFill>
-              </a:defRPr>
-            </a:pPr>
-            <a:r>
-              <a:t>33</a:t>
+                  <a:srgbClr val="1A1A1A"/>
+                </a:solidFill>
+              </a:defRPr>
+            </a:pPr>
+            <a:r>
+              <a:t>•  The relaxation reaches ~100,000 rows at 1,000 tasks; the GA runs on one fixed budget</a:t>
+            </a:r>
+          </a:p>
+          <a:p>
+            <a:pPr>
+              <a:spcAft>
+                <a:spcPts val="1000"/>
+              </a:spcAft>
+              <a:defRPr sz="2000">
+                <a:solidFill>
+                  <a:srgbClr val="1A1A1A"/>
+                </a:solidFill>
+              </a:defRPr>
+            </a:pPr>
+            <a:r>
+              <a:t>•  The failure model is retry-once-in-place: no replication, checkpointing, or migration</a:t>
+            </a:r>
+          </a:p>
+          <a:p>
+            <a:pPr>
+              <a:spcAft>
+                <a:spcPts val="1000"/>
+              </a:spcAft>
+              <a:defRPr sz="2000">
+                <a:solidFill>
+                  <a:srgbClr val="1A1A1A"/>
+                </a:solidFill>
+              </a:defRPr>
+            </a:pPr>
+            <a:r>
+              <a:t>•  Schedulable instances stop near 10,000 tasks; the million-task experiments are structural</a:t>
+            </a:r>
+          </a:p>
+          <a:p>
+            <a:pPr>
+              <a:spcAft>
+                <a:spcPts val="400"/>
+              </a:spcAft>
+            </a:pPr>
+          </a:p>
+          <a:p>
+            <a:pPr>
+              <a:spcAft>
+                <a:spcPts val="1000"/>
+              </a:spcAft>
+              <a:defRPr sz="2000">
+                <a:solidFill>
+                  <a:srgbClr val="1A1A1A"/>
+                </a:solidFill>
+              </a:defRPr>
+            </a:pPr>
+            <a:r>
+              <a:t>•  What is open: a whole machine fails mid-run, and the schedule was decided up front</a:t>
             </a:r>
           </a:p>
         </p:txBody>
@@ -14465,8 +16192,8 @@
         </p:nvSpPr>
         <p:spPr>
           <a:xfrm>
-            <a:off x="457200" y="201168"/>
-            <a:ext cx="11338560" cy="685800"/>
+            <a:off x="914400" y="2377440"/>
+            <a:ext cx="10332720" cy="1280160"/>
           </a:xfrm>
           <a:prstGeom prst="rect">
             <a:avLst/>
@@ -14474,59 +16201,59 @@
           <a:noFill/>
         </p:spPr>
         <p:txBody>
-          <a:bodyPr wrap="none" anchor="ctr">
+          <a:bodyPr wrap="square">
             <a:spAutoFit/>
           </a:bodyPr>
           <a:lstStyle/>
           <a:p>
-            <a:pPr>
-              <a:defRPr sz="3000" b="1">
+            <a:pPr algn="ctr">
+              <a:defRPr sz="3800" b="1">
                 <a:solidFill>
                   <a:srgbClr val="1A1A1A"/>
                 </a:solidFill>
               </a:defRPr>
             </a:pPr>
             <a:r>
-              <a:t>The question</a:t>
-            </a:r>
-          </a:p>
-        </p:txBody>
-      </p:sp>
-      <p:cxnSp>
-        <p:nvCxnSpPr>
-          <p:cNvPr id="3" name="Connector 2"/>
-          <p:cNvCxnSpPr/>
-          <p:nvPr/>
-        </p:nvCxnSpPr>
-        <p:spPr>
-          <a:xfrm>
-            <a:off x="502920" y="932688"/>
-            <a:ext cx="11201400" cy="0"/>
-          </a:xfrm>
-          <a:prstGeom prst="line">
-            <a:avLst/>
-          </a:prstGeom>
-          <a:ln w="12700">
-            <a:solidFill>
-              <a:srgbClr val="1A1A1A"/>
-            </a:solidFill>
-          </a:ln>
-        </p:spPr>
-        <p:style>
-          <a:lnRef idx="2">
-            <a:schemeClr val="accent1"/>
-          </a:lnRef>
-          <a:fillRef idx="0">
-            <a:schemeClr val="accent1"/>
-          </a:fillRef>
-          <a:effectRef idx="1">
-            <a:schemeClr val="accent1"/>
-          </a:effectRef>
-          <a:fontRef idx="minor">
-            <a:schemeClr val="tx1"/>
-          </a:fontRef>
-        </p:style>
-      </p:cxnSp>
+              <a:t>6.  Paper 3 — the proposed research</a:t>
+            </a:r>
+          </a:p>
+        </p:txBody>
+      </p:sp>
+      <p:sp>
+        <p:nvSpPr>
+          <p:cNvPr id="3" name="TextBox 2"/>
+          <p:cNvSpPr txBox="1"/>
+          <p:nvPr/>
+        </p:nvSpPr>
+        <p:spPr>
+          <a:xfrm>
+            <a:off x="914400" y="3657600"/>
+            <a:ext cx="10332720" cy="1097280"/>
+          </a:xfrm>
+          <a:prstGeom prst="rect">
+            <a:avLst/>
+          </a:prstGeom>
+          <a:noFill/>
+        </p:spPr>
+        <p:txBody>
+          <a:bodyPr wrap="square">
+            <a:spAutoFit/>
+          </a:bodyPr>
+          <a:lstStyle/>
+          <a:p>
+            <a:pPr algn="ctr">
+              <a:defRPr sz="2000">
+                <a:solidFill>
+                  <a:srgbClr val="595959"/>
+                </a:solidFill>
+              </a:defRPr>
+            </a:pPr>
+            <a:r>
+              <a:t>Dynamic partial repartitioning after a node failure</a:t>
+            </a:r>
+          </a:p>
+        </p:txBody>
+      </p:sp>
       <p:sp>
         <p:nvSpPr>
           <p:cNvPr id="4" name="TextBox 3"/>
@@ -14558,109 +16285,6 @@
             </a:pPr>
             <a:r>
               <a:t>34</a:t>
-            </a:r>
-          </a:p>
-        </p:txBody>
-      </p:sp>
-      <p:sp>
-        <p:nvSpPr>
-          <p:cNvPr id="5" name="TextBox 4"/>
-          <p:cNvSpPr txBox="1"/>
-          <p:nvPr/>
-        </p:nvSpPr>
-        <p:spPr>
-          <a:xfrm>
-            <a:off x="640080" y="1280160"/>
-            <a:ext cx="10972800" cy="1463040"/>
-          </a:xfrm>
-          <a:prstGeom prst="rect">
-            <a:avLst/>
-          </a:prstGeom>
-          <a:noFill/>
-        </p:spPr>
-        <p:txBody>
-          <a:bodyPr wrap="square">
-            <a:spAutoFit/>
-          </a:bodyPr>
-          <a:lstStyle/>
-          <a:p>
-            <a:pPr>
-              <a:defRPr sz="2100" b="1" i="0">
-                <a:solidFill>
-                  <a:srgbClr val="1A1A1A"/>
-                </a:solidFill>
-              </a:defRPr>
-            </a:pPr>
-            <a:r>
-              <a:t>How can we repartition and reschedule only the affected part of a DAG workflow after a fog resource fails — while keeping recovery time, task movement, data re-shipped, and completion time small?</a:t>
-            </a:r>
-          </a:p>
-        </p:txBody>
-      </p:sp>
-      <p:sp>
-        <p:nvSpPr>
-          <p:cNvPr id="6" name="TextBox 5"/>
-          <p:cNvSpPr txBox="1"/>
-          <p:nvPr/>
-        </p:nvSpPr>
-        <p:spPr>
-          <a:xfrm>
-            <a:off x="640080" y="3200400"/>
-            <a:ext cx="10972800" cy="5029200"/>
-          </a:xfrm>
-          <a:prstGeom prst="rect">
-            <a:avLst/>
-          </a:prstGeom>
-          <a:noFill/>
-        </p:spPr>
-        <p:txBody>
-          <a:bodyPr wrap="square">
-            <a:spAutoFit/>
-          </a:bodyPr>
-          <a:lstStyle/>
-          <a:p>
-            <a:pPr>
-              <a:spcAft>
-                <a:spcPts val="1000"/>
-              </a:spcAft>
-              <a:defRPr sz="2000">
-                <a:solidFill>
-                  <a:srgbClr val="1A1A1A"/>
-                </a:solidFill>
-              </a:defRPr>
-            </a:pPr>
-            <a:r>
-              <a:t>•  RQ1 – the boundary: what is the smallest part of the workflow that must be repartitioned?</a:t>
-            </a:r>
-          </a:p>
-          <a:p>
-            <a:pPr>
-              <a:spcAft>
-                <a:spcPts val="1000"/>
-              </a:spcAft>
-              <a:defRPr sz="2000">
-                <a:solidFill>
-                  <a:srgbClr val="1A1A1A"/>
-                </a:solidFill>
-              </a:defRPr>
-            </a:pPr>
-            <a:r>
-              <a:t>•  RQ2 – the repair: how do we repartition it onto surviving machines at minimum cost and still meet the deadline?</a:t>
-            </a:r>
-          </a:p>
-          <a:p>
-            <a:pPr>
-              <a:spcAft>
-                <a:spcPts val="1000"/>
-              </a:spcAft>
-              <a:defRPr sz="2000">
-                <a:solidFill>
-                  <a:srgbClr val="1A1A1A"/>
-                </a:solidFill>
-              </a:defRPr>
-            </a:pPr>
-            <a:r>
-              <a:t>•  RQ3 – the paths: how do we update communication paths incrementally instead of recomputing them?</a:t>
             </a:r>
           </a:p>
         </p:txBody>
@@ -14691,6 +16315,41 @@
         </p:nvSpPr>
         <p:spPr>
           <a:xfrm>
+            <a:off x="8046720" y="329184"/>
+            <a:ext cx="3657600" cy="274320"/>
+          </a:xfrm>
+          <a:prstGeom prst="rect">
+            <a:avLst/>
+          </a:prstGeom>
+          <a:noFill/>
+        </p:spPr>
+        <p:txBody>
+          <a:bodyPr wrap="none">
+            <a:spAutoFit/>
+          </a:bodyPr>
+          <a:lstStyle/>
+          <a:p>
+            <a:pPr algn="r">
+              <a:defRPr sz="1100">
+                <a:solidFill>
+                  <a:srgbClr val="595959"/>
+                </a:solidFill>
+              </a:defRPr>
+            </a:pPr>
+            <a:r>
+              <a:t>PAPER 3 · PROPOSAL</a:t>
+            </a:r>
+          </a:p>
+        </p:txBody>
+      </p:sp>
+      <p:sp>
+        <p:nvSpPr>
+          <p:cNvPr id="3" name="TextBox 2"/>
+          <p:cNvSpPr txBox="1"/>
+          <p:nvPr/>
+        </p:nvSpPr>
+        <p:spPr>
+          <a:xfrm>
             <a:off x="457200" y="201168"/>
             <a:ext cx="11338560" cy="685800"/>
           </a:xfrm>
@@ -14713,14 +16372,14 @@
               </a:defRPr>
             </a:pPr>
             <a:r>
-              <a:t>What a failure looks like mid-run</a:t>
+              <a:t>The question</a:t>
             </a:r>
           </a:p>
         </p:txBody>
       </p:sp>
       <p:cxnSp>
         <p:nvCxnSpPr>
-          <p:cNvPr id="3" name="Connector 2"/>
+          <p:cNvPr id="4" name="Connector 3"/>
           <p:cNvCxnSpPr/>
           <p:nvPr/>
         </p:nvCxnSpPr>
@@ -14755,7 +16414,7 @@
       </p:cxnSp>
       <p:sp>
         <p:nvSpPr>
-          <p:cNvPr id="4" name="TextBox 3"/>
+          <p:cNvPr id="5" name="TextBox 4"/>
           <p:cNvSpPr txBox="1"/>
           <p:nvPr/>
         </p:nvSpPr>
@@ -14790,13 +16449,48 @@
       </p:sp>
       <p:sp>
         <p:nvSpPr>
-          <p:cNvPr id="5" name="TextBox 4"/>
+          <p:cNvPr id="6" name="TextBox 5"/>
           <p:cNvSpPr txBox="1"/>
           <p:nvPr/>
         </p:nvSpPr>
         <p:spPr>
           <a:xfrm>
-            <a:off x="640080" y="1371600"/>
+            <a:off x="640080" y="1280160"/>
+            <a:ext cx="10972800" cy="1463040"/>
+          </a:xfrm>
+          <a:prstGeom prst="rect">
+            <a:avLst/>
+          </a:prstGeom>
+          <a:noFill/>
+        </p:spPr>
+        <p:txBody>
+          <a:bodyPr wrap="square">
+            <a:spAutoFit/>
+          </a:bodyPr>
+          <a:lstStyle/>
+          <a:p>
+            <a:pPr>
+              <a:defRPr sz="2100" b="1" i="0">
+                <a:solidFill>
+                  <a:srgbClr val="1A1A1A"/>
+                </a:solidFill>
+              </a:defRPr>
+            </a:pPr>
+            <a:r>
+              <a:t>How can we repartition and reschedule only the affected part of a DAG workflow after a fog resource fails — while keeping recovery time, task movement, data re-shipped, and completion time small?</a:t>
+            </a:r>
+          </a:p>
+        </p:txBody>
+      </p:sp>
+      <p:sp>
+        <p:nvSpPr>
+          <p:cNvPr id="7" name="TextBox 6"/>
+          <p:cNvSpPr txBox="1"/>
+          <p:nvPr/>
+        </p:nvSpPr>
+        <p:spPr>
+          <a:xfrm>
+            <a:off x="640080" y="3200400"/>
             <a:ext cx="10972800" cy="5029200"/>
           </a:xfrm>
           <a:prstGeom prst="rect">
@@ -14821,7 +16515,7 @@
               </a:defRPr>
             </a:pPr>
             <a:r>
-              <a:t>•  A machine dies with work still queued or running on it</a:t>
+              <a:t>•  RQ1 – the boundary: what is the smallest part of the workflow that must be repartitioned?</a:t>
             </a:r>
           </a:p>
           <a:p>
@@ -14836,7 +16530,7 @@
               </a:defRPr>
             </a:pPr>
             <a:r>
-              <a:t>•  The stranded tasks must move — that part is mandatory</a:t>
+              <a:t>•  RQ2 – the repair: how do we repartition it onto surviving machines at minimum cost and still meet the deadline?</a:t>
             </a:r>
           </a:p>
           <a:p>
@@ -14851,52 +16545,7 @@
               </a:defRPr>
             </a:pPr>
             <a:r>
-              <a:t>•  But some neighbors may have to move too:</a:t>
-            </a:r>
-          </a:p>
-          <a:p>
-            <a:pPr>
-              <a:spcAft>
-                <a:spcPts val="1000"/>
-              </a:spcAft>
-              <a:defRPr sz="1800">
-                <a:solidFill>
-                  <a:srgbClr val="595959"/>
-                </a:solidFill>
-              </a:defRPr>
-            </a:pPr>
-            <a:r>
-              <a:t>      – a task whose input now crosses a path too slow to serve it in time</a:t>
-            </a:r>
-          </a:p>
-          <a:p>
-            <a:pPr>
-              <a:spcAft>
-                <a:spcPts val="1000"/>
-              </a:spcAft>
-              <a:defRPr sz="1800">
-                <a:solidFill>
-                  <a:srgbClr val="595959"/>
-                </a:solidFill>
-              </a:defRPr>
-            </a:pPr>
-            <a:r>
-              <a:t>      – a task that can no longer finish by the deadline if it stays</a:t>
-            </a:r>
-          </a:p>
-          <a:p>
-            <a:pPr>
-              <a:spcAft>
-                <a:spcPts val="1000"/>
-              </a:spcAft>
-              <a:defRPr sz="2000">
-                <a:solidFill>
-                  <a:srgbClr val="1A1A1A"/>
-                </a:solidFill>
-              </a:defRPr>
-            </a:pPr>
-            <a:r>
-              <a:t>•  The invariant throughout: completed work never restarts, and tasks that are fine never move</a:t>
+              <a:t>•  RQ3 – the paths: how do we update communication paths incrementally instead of recomputing them?</a:t>
             </a:r>
           </a:p>
         </p:txBody>
@@ -14927,6 +16576,41 @@
         </p:nvSpPr>
         <p:spPr>
           <a:xfrm>
+            <a:off x="8046720" y="329184"/>
+            <a:ext cx="3657600" cy="274320"/>
+          </a:xfrm>
+          <a:prstGeom prst="rect">
+            <a:avLst/>
+          </a:prstGeom>
+          <a:noFill/>
+        </p:spPr>
+        <p:txBody>
+          <a:bodyPr wrap="none">
+            <a:spAutoFit/>
+          </a:bodyPr>
+          <a:lstStyle/>
+          <a:p>
+            <a:pPr algn="r">
+              <a:defRPr sz="1100">
+                <a:solidFill>
+                  <a:srgbClr val="595959"/>
+                </a:solidFill>
+              </a:defRPr>
+            </a:pPr>
+            <a:r>
+              <a:t>PAPER 3 · PROPOSAL</a:t>
+            </a:r>
+          </a:p>
+        </p:txBody>
+      </p:sp>
+      <p:sp>
+        <p:nvSpPr>
+          <p:cNvPr id="3" name="TextBox 2"/>
+          <p:cNvSpPr txBox="1"/>
+          <p:nvPr/>
+        </p:nvSpPr>
+        <p:spPr>
+          <a:xfrm>
             <a:off x="457200" y="201168"/>
             <a:ext cx="11338560" cy="685800"/>
           </a:xfrm>
@@ -14949,14 +16633,14 @@
               </a:defRPr>
             </a:pPr>
             <a:r>
-              <a:t>The recovery cost model</a:t>
+              <a:t>What a failure looks like mid-run</a:t>
             </a:r>
           </a:p>
         </p:txBody>
       </p:sp>
       <p:cxnSp>
         <p:nvCxnSpPr>
-          <p:cNvPr id="3" name="Connector 2"/>
+          <p:cNvPr id="4" name="Connector 3"/>
           <p:cNvCxnSpPr/>
           <p:nvPr/>
         </p:nvCxnSpPr>
@@ -14991,7 +16675,7 @@
       </p:cxnSp>
       <p:sp>
         <p:nvSpPr>
-          <p:cNvPr id="4" name="TextBox 3"/>
+          <p:cNvPr id="5" name="TextBox 4"/>
           <p:cNvSpPr txBox="1"/>
           <p:nvPr/>
         </p:nvSpPr>
@@ -15026,14 +16710,14 @@
       </p:sp>
       <p:sp>
         <p:nvSpPr>
-          <p:cNvPr id="5" name="TextBox 4"/>
+          <p:cNvPr id="6" name="TextBox 5"/>
           <p:cNvSpPr txBox="1"/>
           <p:nvPr/>
         </p:nvSpPr>
         <p:spPr>
           <a:xfrm>
             <a:off x="640080" y="1371600"/>
-            <a:ext cx="10972800" cy="5029200"/>
+            <a:ext cx="6035040" cy="5029200"/>
           </a:xfrm>
           <a:prstGeom prst="rect">
             <a:avLst/>
@@ -15045,81 +16729,6 @@
             <a:spAutoFit/>
           </a:bodyPr>
           <a:lstStyle/>
-          <a:p>
-            <a:pPr>
-              <a:spcAft>
-                <a:spcPts val="1000"/>
-              </a:spcAft>
-              <a:defRPr sz="2000">
-                <a:solidFill>
-                  <a:srgbClr val="1A1A1A"/>
-                </a:solidFill>
-              </a:defRPr>
-            </a:pPr>
-            <a:r>
-              <a:t>•  Recovery cost = added makespan + tasks moved + data re-shipped</a:t>
-            </a:r>
-          </a:p>
-          <a:p>
-            <a:pPr>
-              <a:spcAft>
-                <a:spcPts val="1000"/>
-              </a:spcAft>
-              <a:defRPr sz="2000">
-                <a:solidFill>
-                  <a:srgbClr val="1A1A1A"/>
-                </a:solidFill>
-              </a:defRPr>
-            </a:pPr>
-            <a:r>
-              <a:t>•  Added makespan — how much later the workflow finishes</a:t>
-            </a:r>
-          </a:p>
-          <a:p>
-            <a:pPr>
-              <a:spcAft>
-                <a:spcPts val="1000"/>
-              </a:spcAft>
-              <a:defRPr sz="2000">
-                <a:solidFill>
-                  <a:srgbClr val="1A1A1A"/>
-                </a:solidFill>
-              </a:defRPr>
-            </a:pPr>
-            <a:r>
-              <a:t>•  Tasks moved — how many placements had to change</a:t>
-            </a:r>
-          </a:p>
-          <a:p>
-            <a:pPr>
-              <a:spcAft>
-                <a:spcPts val="1000"/>
-              </a:spcAft>
-              <a:defRPr sz="2000">
-                <a:solidFill>
-                  <a:srgbClr val="1A1A1A"/>
-                </a:solidFill>
-              </a:defRPr>
-            </a:pPr>
-            <a:r>
-              <a:t>•  Data re-shipped — the bytes that must travel to the new machines</a:t>
-            </a:r>
-          </a:p>
-          <a:p>
-            <a:pPr>
-              <a:spcAft>
-                <a:spcPts val="1000"/>
-              </a:spcAft>
-              <a:defRPr sz="2000">
-                <a:solidFill>
-                  <a:srgbClr val="1A1A1A"/>
-                </a:solidFill>
-              </a:defRPr>
-            </a:pPr>
-            <a:r>
-              <a:t>•  Minimized subject to the deadline and the accuracy</a:t>
-            </a:r>
-          </a:p>
           <a:p>
             <a:pPr>
               <a:spcAft>
@@ -15127,12 +16736,319 @@
               </a:spcAft>
               <a:defRPr sz="1800">
                 <a:solidFill>
+                  <a:srgbClr val="1A1A1A"/>
+                </a:solidFill>
+              </a:defRPr>
+            </a:pPr>
+            <a:r>
+              <a:t>•  A machine dies with work still queued or running on it</a:t>
+            </a:r>
+          </a:p>
+          <a:p>
+            <a:pPr>
+              <a:spcAft>
+                <a:spcPts val="1000"/>
+              </a:spcAft>
+              <a:defRPr sz="1800">
+                <a:solidFill>
+                  <a:srgbClr val="1A1A1A"/>
+                </a:solidFill>
+              </a:defRPr>
+            </a:pPr>
+            <a:r>
+              <a:t>•  The stranded tasks must move — that part is mandatory</a:t>
+            </a:r>
+          </a:p>
+          <a:p>
+            <a:pPr>
+              <a:spcAft>
+                <a:spcPts val="1000"/>
+              </a:spcAft>
+              <a:defRPr sz="1800">
+                <a:solidFill>
+                  <a:srgbClr val="1A1A1A"/>
+                </a:solidFill>
+              </a:defRPr>
+            </a:pPr>
+            <a:r>
+              <a:t>•  But some neighbors may have to move too:</a:t>
+            </a:r>
+          </a:p>
+          <a:p>
+            <a:pPr>
+              <a:spcAft>
+                <a:spcPts val="1000"/>
+              </a:spcAft>
+              <a:defRPr sz="1600">
+                <a:solidFill>
                   <a:srgbClr val="595959"/>
                 </a:solidFill>
               </a:defRPr>
             </a:pPr>
             <a:r>
-              <a:t>      – each term is measured separately in the evaluation</a:t>
+              <a:t>      – a task whose input now crosses a path too slow to serve it in time</a:t>
+            </a:r>
+          </a:p>
+          <a:p>
+            <a:pPr>
+              <a:spcAft>
+                <a:spcPts val="1000"/>
+              </a:spcAft>
+              <a:defRPr sz="1600">
+                <a:solidFill>
+                  <a:srgbClr val="595959"/>
+                </a:solidFill>
+              </a:defRPr>
+            </a:pPr>
+            <a:r>
+              <a:t>      – a task that can no longer finish by the deadline if it stays</a:t>
+            </a:r>
+          </a:p>
+          <a:p>
+            <a:pPr>
+              <a:spcAft>
+                <a:spcPts val="1000"/>
+              </a:spcAft>
+              <a:defRPr sz="1800">
+                <a:solidFill>
+                  <a:srgbClr val="1A1A1A"/>
+                </a:solidFill>
+              </a:defRPr>
+            </a:pPr>
+            <a:r>
+              <a:t>•  The invariant throughout: completed work never restarts, and tasks that are fine never move</a:t>
+            </a:r>
+          </a:p>
+        </p:txBody>
+      </p:sp>
+      <p:sp>
+        <p:nvSpPr>
+          <p:cNvPr id="7" name="Rounded Rectangle 6"/>
+          <p:cNvSpPr/>
+          <p:nvPr/>
+        </p:nvSpPr>
+        <p:spPr>
+          <a:xfrm>
+            <a:off x="7132320" y="1463040"/>
+            <a:ext cx="4206240" cy="868680"/>
+          </a:xfrm>
+          <a:prstGeom prst="roundRect">
+            <a:avLst/>
+          </a:prstGeom>
+          <a:solidFill>
+            <a:srgbClr val="FFFFFF"/>
+          </a:solidFill>
+          <a:ln w="12700">
+            <a:solidFill>
+              <a:srgbClr val="1A1A1A"/>
+            </a:solidFill>
+          </a:ln>
+        </p:spPr>
+        <p:style>
+          <a:lnRef idx="1">
+            <a:schemeClr val="accent1"/>
+          </a:lnRef>
+          <a:fillRef idx="3">
+            <a:schemeClr val="accent1"/>
+          </a:fillRef>
+          <a:effectRef idx="2">
+            <a:schemeClr val="accent1"/>
+          </a:effectRef>
+          <a:fontRef idx="minor">
+            <a:schemeClr val="lt1"/>
+          </a:fontRef>
+        </p:style>
+        <p:txBody>
+          <a:bodyPr rtlCol="0" anchor="ctr" wrap="square"/>
+          <a:lstStyle/>
+          <a:p>
+            <a:pPr algn="ctr">
+              <a:defRPr sz="1300" b="0">
+                <a:solidFill>
+                  <a:srgbClr val="1A1A1A"/>
+                </a:solidFill>
+              </a:defRPr>
+            </a:pPr>
+            <a:r>
+              <a:t>Workflow runs under the initial schedule</a:t>
+            </a:r>
+          </a:p>
+        </p:txBody>
+      </p:sp>
+      <p:cxnSp>
+        <p:nvCxnSpPr>
+          <p:cNvPr id="8" name="Connector 7"/>
+          <p:cNvCxnSpPr/>
+          <p:nvPr/>
+        </p:nvCxnSpPr>
+        <p:spPr>
+          <a:xfrm>
+            <a:off x="9235440" y="2331720"/>
+            <a:ext cx="0" cy="411480"/>
+          </a:xfrm>
+          <a:prstGeom prst="line">
+            <a:avLst/>
+          </a:prstGeom>
+          <a:ln w="15875">
+            <a:solidFill>
+              <a:srgbClr val="595959"/>
+            </a:solidFill>
+          </a:ln>
+        </p:spPr>
+        <p:style>
+          <a:lnRef idx="2">
+            <a:schemeClr val="accent1"/>
+          </a:lnRef>
+          <a:fillRef idx="0">
+            <a:schemeClr val="accent1"/>
+          </a:fillRef>
+          <a:effectRef idx="1">
+            <a:schemeClr val="accent1"/>
+          </a:effectRef>
+          <a:fontRef idx="minor">
+            <a:schemeClr val="tx1"/>
+          </a:fontRef>
+        </p:style>
+      </p:cxnSp>
+      <p:sp>
+        <p:nvSpPr>
+          <p:cNvPr id="9" name="Rounded Rectangle 8"/>
+          <p:cNvSpPr/>
+          <p:nvPr/>
+        </p:nvSpPr>
+        <p:spPr>
+          <a:xfrm>
+            <a:off x="7132320" y="2743200"/>
+            <a:ext cx="4206240" cy="868680"/>
+          </a:xfrm>
+          <a:prstGeom prst="roundRect">
+            <a:avLst/>
+          </a:prstGeom>
+          <a:solidFill>
+            <a:srgbClr val="FFFFFF"/>
+          </a:solidFill>
+          <a:ln w="12700">
+            <a:solidFill>
+              <a:srgbClr val="1A1A1A"/>
+            </a:solidFill>
+          </a:ln>
+        </p:spPr>
+        <p:style>
+          <a:lnRef idx="1">
+            <a:schemeClr val="accent1"/>
+          </a:lnRef>
+          <a:fillRef idx="3">
+            <a:schemeClr val="accent1"/>
+          </a:fillRef>
+          <a:effectRef idx="2">
+            <a:schemeClr val="accent1"/>
+          </a:effectRef>
+          <a:fontRef idx="minor">
+            <a:schemeClr val="lt1"/>
+          </a:fontRef>
+        </p:style>
+        <p:txBody>
+          <a:bodyPr rtlCol="0" anchor="ctr" wrap="square"/>
+          <a:lstStyle/>
+          <a:p>
+            <a:pPr algn="ctr">
+              <a:defRPr sz="1300" b="1">
+                <a:solidFill>
+                  <a:srgbClr val="1A1A1A"/>
+                </a:solidFill>
+              </a:defRPr>
+            </a:pPr>
+            <a:r>
+              <a:t>A node fails — its unfinished tasks are stranded</a:t>
+            </a:r>
+          </a:p>
+        </p:txBody>
+      </p:sp>
+      <p:cxnSp>
+        <p:nvCxnSpPr>
+          <p:cNvPr id="10" name="Connector 9"/>
+          <p:cNvCxnSpPr/>
+          <p:nvPr/>
+        </p:nvCxnSpPr>
+        <p:spPr>
+          <a:xfrm>
+            <a:off x="9235440" y="3611880"/>
+            <a:ext cx="0" cy="411480"/>
+          </a:xfrm>
+          <a:prstGeom prst="line">
+            <a:avLst/>
+          </a:prstGeom>
+          <a:ln w="15875">
+            <a:solidFill>
+              <a:srgbClr val="595959"/>
+            </a:solidFill>
+          </a:ln>
+        </p:spPr>
+        <p:style>
+          <a:lnRef idx="2">
+            <a:schemeClr val="accent1"/>
+          </a:lnRef>
+          <a:fillRef idx="0">
+            <a:schemeClr val="accent1"/>
+          </a:fillRef>
+          <a:effectRef idx="1">
+            <a:schemeClr val="accent1"/>
+          </a:effectRef>
+          <a:fontRef idx="minor">
+            <a:schemeClr val="tx1"/>
+          </a:fontRef>
+        </p:style>
+      </p:cxnSp>
+      <p:sp>
+        <p:nvSpPr>
+          <p:cNvPr id="11" name="Rounded Rectangle 10"/>
+          <p:cNvSpPr/>
+          <p:nvPr/>
+        </p:nvSpPr>
+        <p:spPr>
+          <a:xfrm>
+            <a:off x="7132320" y="4023360"/>
+            <a:ext cx="4206240" cy="868680"/>
+          </a:xfrm>
+          <a:prstGeom prst="roundRect">
+            <a:avLst/>
+          </a:prstGeom>
+          <a:solidFill>
+            <a:srgbClr val="FFFFFF"/>
+          </a:solidFill>
+          <a:ln w="12700">
+            <a:solidFill>
+              <a:srgbClr val="1A1A1A"/>
+            </a:solidFill>
+          </a:ln>
+        </p:spPr>
+        <p:style>
+          <a:lnRef idx="1">
+            <a:schemeClr val="accent1"/>
+          </a:lnRef>
+          <a:fillRef idx="3">
+            <a:schemeClr val="accent1"/>
+          </a:fillRef>
+          <a:effectRef idx="2">
+            <a:schemeClr val="accent1"/>
+          </a:effectRef>
+          <a:fontRef idx="minor">
+            <a:schemeClr val="lt1"/>
+          </a:fontRef>
+        </p:style>
+        <p:txBody>
+          <a:bodyPr rtlCol="0" anchor="ctr" wrap="square"/>
+          <a:lstStyle/>
+          <a:p>
+            <a:pPr algn="ctr">
+              <a:defRPr sz="1300" b="0">
+                <a:solidFill>
+                  <a:srgbClr val="1A1A1A"/>
+                </a:solidFill>
+              </a:defRPr>
+            </a:pPr>
+            <a:r>
+              <a:t>Repair only the affected region, then resume</a:t>
             </a:r>
           </a:p>
         </p:txBody>
@@ -15163,6 +17079,41 @@
         </p:nvSpPr>
         <p:spPr>
           <a:xfrm>
+            <a:off x="8046720" y="329184"/>
+            <a:ext cx="3657600" cy="274320"/>
+          </a:xfrm>
+          <a:prstGeom prst="rect">
+            <a:avLst/>
+          </a:prstGeom>
+          <a:noFill/>
+        </p:spPr>
+        <p:txBody>
+          <a:bodyPr wrap="none">
+            <a:spAutoFit/>
+          </a:bodyPr>
+          <a:lstStyle/>
+          <a:p>
+            <a:pPr algn="r">
+              <a:defRPr sz="1100">
+                <a:solidFill>
+                  <a:srgbClr val="595959"/>
+                </a:solidFill>
+              </a:defRPr>
+            </a:pPr>
+            <a:r>
+              <a:t>PAPER 3 · PROPOSAL</a:t>
+            </a:r>
+          </a:p>
+        </p:txBody>
+      </p:sp>
+      <p:sp>
+        <p:nvSpPr>
+          <p:cNvPr id="3" name="TextBox 2"/>
+          <p:cNvSpPr txBox="1"/>
+          <p:nvPr/>
+        </p:nvSpPr>
+        <p:spPr>
+          <a:xfrm>
             <a:off x="457200" y="201168"/>
             <a:ext cx="11338560" cy="685800"/>
           </a:xfrm>
@@ -15185,14 +17136,14 @@
               </a:defRPr>
             </a:pPr>
             <a:r>
-              <a:t>The method, in seven steps</a:t>
+              <a:t>The recovery cost model</a:t>
             </a:r>
           </a:p>
         </p:txBody>
       </p:sp>
       <p:cxnSp>
         <p:nvCxnSpPr>
-          <p:cNvPr id="3" name="Connector 2"/>
+          <p:cNvPr id="4" name="Connector 3"/>
           <p:cNvCxnSpPr/>
           <p:nvPr/>
         </p:nvCxnSpPr>
@@ -15227,7 +17178,7 @@
       </p:cxnSp>
       <p:sp>
         <p:nvSpPr>
-          <p:cNvPr id="4" name="TextBox 3"/>
+          <p:cNvPr id="5" name="TextBox 4"/>
           <p:cNvSpPr txBox="1"/>
           <p:nvPr/>
         </p:nvSpPr>
@@ -15262,13 +17213,13 @@
       </p:sp>
       <p:sp>
         <p:nvSpPr>
-          <p:cNvPr id="5" name="TextBox 4"/>
+          <p:cNvPr id="6" name="TextBox 5"/>
           <p:cNvSpPr txBox="1"/>
           <p:nvPr/>
         </p:nvSpPr>
         <p:spPr>
           <a:xfrm>
-            <a:off x="640080" y="1280160"/>
+            <a:off x="640080" y="1371600"/>
             <a:ext cx="10972800" cy="5029200"/>
           </a:xfrm>
           <a:prstGeom prst="rect">
@@ -15286,14 +17237,14 @@
               <a:spcAft>
                 <a:spcPts val="1000"/>
               </a:spcAft>
-              <a:defRPr sz="1900">
+              <a:defRPr sz="2000">
                 <a:solidFill>
                   <a:srgbClr val="1A1A1A"/>
                 </a:solidFill>
               </a:defRPr>
             </a:pPr>
             <a:r>
-              <a:t>•  1.  Make the initial partition (any paper-1 scheduler)</a:t>
+              <a:t>•  Recovery cost = added makespan + tasks moved + data re-shipped</a:t>
             </a:r>
           </a:p>
           <a:p>
@@ -15301,14 +17252,14 @@
               <a:spcAft>
                 <a:spcPts val="1000"/>
               </a:spcAft>
-              <a:defRPr sz="1900">
+              <a:defRPr sz="2000">
                 <a:solidFill>
                   <a:srgbClr val="1A1A1A"/>
                 </a:solidFill>
               </a:defRPr>
             </a:pPr>
             <a:r>
-              <a:t>•  2.  Detect the failure</a:t>
+              <a:t>•  Added makespan — how much later the workflow finishes</a:t>
             </a:r>
           </a:p>
           <a:p>
@@ -15316,14 +17267,14 @@
               <a:spcAft>
                 <a:spcPts val="1000"/>
               </a:spcAft>
-              <a:defRPr sz="1900">
+              <a:defRPr sz="2000">
                 <a:solidFill>
                   <a:srgbClr val="1A1A1A"/>
                 </a:solidFill>
               </a:defRPr>
             </a:pPr>
             <a:r>
-              <a:t>•  3.  Isolate the affected region — stranded tasks plus neighbors that fail a stay-test</a:t>
+              <a:t>•  Tasks moved — how many placements had to change</a:t>
             </a:r>
           </a:p>
           <a:p>
@@ -15331,14 +17282,14 @@
               <a:spcAft>
                 <a:spcPts val="1000"/>
               </a:spcAft>
-              <a:defRPr sz="1900">
+              <a:defRPr sz="2000">
                 <a:solidFill>
                   <a:srgbClr val="1A1A1A"/>
                 </a:solidFill>
               </a:defRPr>
             </a:pPr>
             <a:r>
-              <a:t>•  4.  Pick replacement machines by capacity and distance to the parents and children</a:t>
+              <a:t>•  Data re-shipped — the bytes that must travel to the new machines</a:t>
             </a:r>
           </a:p>
           <a:p>
@@ -15346,14 +17297,14 @@
               <a:spcAft>
                 <a:spcPts val="1000"/>
               </a:spcAft>
-              <a:defRPr sz="1900">
+              <a:defRPr sz="2000">
                 <a:solidFill>
                   <a:srgbClr val="1A1A1A"/>
                 </a:solidFill>
               </a:defRPr>
             </a:pPr>
             <a:r>
-              <a:t>•  5.  Repartition only that region under the recovery cost model</a:t>
+              <a:t>•  Minimized subject to the deadline and the accuracy</a:t>
             </a:r>
           </a:p>
           <a:p>
@@ -15361,29 +17312,14 @@
               <a:spcAft>
                 <a:spcPts val="1000"/>
               </a:spcAft>
-              <a:defRPr sz="1900">
-                <a:solidFill>
-                  <a:srgbClr val="1A1A1A"/>
-                </a:solidFill>
-              </a:defRPr>
-            </a:pPr>
-            <a:r>
-              <a:t>•  6.  Update only the affected communication paths</a:t>
-            </a:r>
-          </a:p>
-          <a:p>
-            <a:pPr>
-              <a:spcAft>
-                <a:spcPts val="1000"/>
-              </a:spcAft>
-              <a:defRPr sz="1900">
-                <a:solidFill>
-                  <a:srgbClr val="1A1A1A"/>
-                </a:solidFill>
-              </a:defRPr>
-            </a:pPr>
-            <a:r>
-              <a:t>•  7.  Resume from the last good point</a:t>
+              <a:defRPr sz="1800">
+                <a:solidFill>
+                  <a:srgbClr val="595959"/>
+                </a:solidFill>
+              </a:defRPr>
+            </a:pPr>
+            <a:r>
+              <a:t>      – each term is measured separately in the evaluation</a:t>
             </a:r>
           </a:p>
         </p:txBody>
@@ -15414,6 +17350,41 @@
         </p:nvSpPr>
         <p:spPr>
           <a:xfrm>
+            <a:off x="8046720" y="329184"/>
+            <a:ext cx="3657600" cy="274320"/>
+          </a:xfrm>
+          <a:prstGeom prst="rect">
+            <a:avLst/>
+          </a:prstGeom>
+          <a:noFill/>
+        </p:spPr>
+        <p:txBody>
+          <a:bodyPr wrap="none">
+            <a:spAutoFit/>
+          </a:bodyPr>
+          <a:lstStyle/>
+          <a:p>
+            <a:pPr algn="r">
+              <a:defRPr sz="1100">
+                <a:solidFill>
+                  <a:srgbClr val="595959"/>
+                </a:solidFill>
+              </a:defRPr>
+            </a:pPr>
+            <a:r>
+              <a:t>PAPER 3 · PROPOSAL</a:t>
+            </a:r>
+          </a:p>
+        </p:txBody>
+      </p:sp>
+      <p:sp>
+        <p:nvSpPr>
+          <p:cNvPr id="3" name="TextBox 2"/>
+          <p:cNvSpPr txBox="1"/>
+          <p:nvPr/>
+        </p:nvSpPr>
+        <p:spPr>
+          <a:xfrm>
             <a:off x="457200" y="201168"/>
             <a:ext cx="11338560" cy="685800"/>
           </a:xfrm>
@@ -15436,14 +17407,14 @@
               </a:defRPr>
             </a:pPr>
             <a:r>
-              <a:t>RQ1: where does the boundary lie?</a:t>
+              <a:t>The method, in seven steps</a:t>
             </a:r>
           </a:p>
         </p:txBody>
       </p:sp>
       <p:cxnSp>
         <p:nvCxnSpPr>
-          <p:cNvPr id="3" name="Connector 2"/>
+          <p:cNvPr id="4" name="Connector 3"/>
           <p:cNvCxnSpPr/>
           <p:nvPr/>
         </p:nvCxnSpPr>
@@ -15478,7 +17449,7 @@
       </p:cxnSp>
       <p:sp>
         <p:nvSpPr>
-          <p:cNvPr id="4" name="TextBox 3"/>
+          <p:cNvPr id="5" name="TextBox 4"/>
           <p:cNvSpPr txBox="1"/>
           <p:nvPr/>
         </p:nvSpPr>
@@ -15513,13 +17484,13 @@
       </p:sp>
       <p:sp>
         <p:nvSpPr>
-          <p:cNvPr id="5" name="TextBox 4"/>
+          <p:cNvPr id="6" name="TextBox 5"/>
           <p:cNvSpPr txBox="1"/>
           <p:nvPr/>
         </p:nvSpPr>
         <p:spPr>
           <a:xfrm>
-            <a:off x="640080" y="1371600"/>
+            <a:off x="640080" y="1280160"/>
             <a:ext cx="10972800" cy="5029200"/>
           </a:xfrm>
           <a:prstGeom prst="rect">
@@ -15532,36 +17503,6 @@
             <a:spAutoFit/>
           </a:bodyPr>
           <a:lstStyle/>
-          <a:p>
-            <a:pPr>
-              <a:spcAft>
-                <a:spcPts val="1000"/>
-              </a:spcAft>
-              <a:defRPr sz="2000">
-                <a:solidFill>
-                  <a:srgbClr val="1A1A1A"/>
-                </a:solidFill>
-              </a:defRPr>
-            </a:pPr>
-            <a:r>
-              <a:t>•  Start with the stranded tasks — mandatory</a:t>
-            </a:r>
-          </a:p>
-          <a:p>
-            <a:pPr>
-              <a:spcAft>
-                <a:spcPts val="1000"/>
-              </a:spcAft>
-              <a:defRPr sz="2000">
-                <a:solidFill>
-                  <a:srgbClr val="1A1A1A"/>
-                </a:solidFill>
-              </a:defRPr>
-            </a:pPr>
-            <a:r>
-              <a:t>•  Then admit a neighbor only while it fails a stay-test:</a:t>
-            </a:r>
-          </a:p>
           <a:p>
             <a:pPr>
               <a:spcAft>
@@ -15569,12 +17510,12 @@
               </a:spcAft>
               <a:defRPr sz="1800">
                 <a:solidFill>
-                  <a:srgbClr val="595959"/>
-                </a:solidFill>
-              </a:defRPr>
-            </a:pPr>
-            <a:r>
-              <a:t>      – deadline test – staying pushes its finish time past the remaining slack</a:t>
+                  <a:srgbClr val="1A1A1A"/>
+                </a:solidFill>
+              </a:defRPr>
+            </a:pPr>
+            <a:r>
+              <a:t>•  1.  Build the initial partition with any paper-1 scheduler — that part is already done</a:t>
             </a:r>
           </a:p>
           <a:p>
@@ -15584,12 +17525,12 @@
               </a:spcAft>
               <a:defRPr sz="1800">
                 <a:solidFill>
-                  <a:srgbClr val="595959"/>
-                </a:solidFill>
-              </a:defRPr>
-            </a:pPr>
-            <a:r>
-              <a:t>      – locality test – staying strands its input on a path too slow to serve it in time</a:t>
+                  <a:srgbClr val="1A1A1A"/>
+                </a:solidFill>
+              </a:defRPr>
+            </a:pPr>
+            <a:r>
+              <a:t>•  2.  Detect the failure and mark the tasks stranded on the failed node</a:t>
             </a:r>
           </a:p>
           <a:p>
@@ -15597,14 +17538,14 @@
               <a:spcAft>
                 <a:spcPts val="1000"/>
               </a:spcAft>
-              <a:defRPr sz="2000">
+              <a:defRPr sz="1800">
                 <a:solidFill>
                   <a:srgbClr val="1A1A1A"/>
                 </a:solidFill>
               </a:defRPr>
             </a:pPr>
             <a:r>
-              <a:t>•  Stop when no neighbor fails, or at a size cap</a:t>
+              <a:t>•  3.  Grow the affected region: stranded tasks, plus any neighbor that fails a stay-test</a:t>
             </a:r>
           </a:p>
           <a:p>
@@ -15612,14 +17553,129 @@
               <a:spcAft>
                 <a:spcPts val="1000"/>
               </a:spcAft>
-              <a:defRPr sz="2000">
+              <a:defRPr sz="1800">
                 <a:solidFill>
                   <a:srgbClr val="1A1A1A"/>
                 </a:solidFill>
               </a:defRPr>
             </a:pPr>
             <a:r>
-              <a:t>•  The tasks that stayed put become fixed anchors the repair must respect</a:t>
+              <a:t>•  4.  Choose replacement nodes by spare capacity and by distance to the parents and children</a:t>
+            </a:r>
+          </a:p>
+          <a:p>
+            <a:pPr>
+              <a:spcAft>
+                <a:spcPts val="1000"/>
+              </a:spcAft>
+              <a:defRPr sz="1800">
+                <a:solidFill>
+                  <a:srgbClr val="1A1A1A"/>
+                </a:solidFill>
+              </a:defRPr>
+            </a:pPr>
+            <a:r>
+              <a:t>•  5.  Repartition only that region, under the recovery cost model</a:t>
+            </a:r>
+          </a:p>
+          <a:p>
+            <a:pPr>
+              <a:spcAft>
+                <a:spcPts val="1000"/>
+              </a:spcAft>
+              <a:defRPr sz="1800">
+                <a:solidFill>
+                  <a:srgbClr val="1A1A1A"/>
+                </a:solidFill>
+              </a:defRPr>
+            </a:pPr>
+            <a:r>
+              <a:t>•  6.  Update only the communication paths that actually changed</a:t>
+            </a:r>
+          </a:p>
+          <a:p>
+            <a:pPr>
+              <a:spcAft>
+                <a:spcPts val="1000"/>
+              </a:spcAft>
+              <a:defRPr sz="1800">
+                <a:solidFill>
+                  <a:srgbClr val="1A1A1A"/>
+                </a:solidFill>
+              </a:defRPr>
+            </a:pPr>
+            <a:r>
+              <a:t>•  7.  Resume the workflow from the last good point</a:t>
+            </a:r>
+          </a:p>
+        </p:txBody>
+      </p:sp>
+      <p:cxnSp>
+        <p:nvCxnSpPr>
+          <p:cNvPr id="7" name="Connector 6"/>
+          <p:cNvCxnSpPr/>
+          <p:nvPr/>
+        </p:nvCxnSpPr>
+        <p:spPr>
+          <a:xfrm>
+            <a:off x="640080" y="5623560"/>
+            <a:ext cx="10881360" cy="0"/>
+          </a:xfrm>
+          <a:prstGeom prst="line">
+            <a:avLst/>
+          </a:prstGeom>
+          <a:ln w="9525">
+            <a:solidFill>
+              <a:srgbClr val="595959"/>
+            </a:solidFill>
+          </a:ln>
+        </p:spPr>
+        <p:style>
+          <a:lnRef idx="2">
+            <a:schemeClr val="accent1"/>
+          </a:lnRef>
+          <a:fillRef idx="0">
+            <a:schemeClr val="accent1"/>
+          </a:fillRef>
+          <a:effectRef idx="1">
+            <a:schemeClr val="accent1"/>
+          </a:effectRef>
+          <a:fontRef idx="minor">
+            <a:schemeClr val="tx1"/>
+          </a:fontRef>
+        </p:style>
+      </p:cxnSp>
+      <p:sp>
+        <p:nvSpPr>
+          <p:cNvPr id="8" name="TextBox 7"/>
+          <p:cNvSpPr txBox="1"/>
+          <p:nvPr/>
+        </p:nvSpPr>
+        <p:spPr>
+          <a:xfrm>
+            <a:off x="640080" y="5715000"/>
+            <a:ext cx="10881360" cy="914400"/>
+          </a:xfrm>
+          <a:prstGeom prst="rect">
+            <a:avLst/>
+          </a:prstGeom>
+          <a:noFill/>
+        </p:spPr>
+        <p:txBody>
+          <a:bodyPr wrap="square">
+            <a:spAutoFit/>
+          </a:bodyPr>
+          <a:lstStyle/>
+          <a:p>
+            <a:pPr>
+              <a:defRPr sz="1700" b="1">
+                <a:solidFill>
+                  <a:srgbClr val="1A1A1A"/>
+                </a:solidFill>
+              </a:defRPr>
+            </a:pPr>
+            <a:r>
+              <a:t>Take-away:  only the affected region is re-planned — the rest of the schedule runs untouched</a:t>
             </a:r>
           </a:p>
         </p:txBody>
@@ -15650,6 +17706,41 @@
         </p:nvSpPr>
         <p:spPr>
           <a:xfrm>
+            <a:off x="8046720" y="329184"/>
+            <a:ext cx="3657600" cy="274320"/>
+          </a:xfrm>
+          <a:prstGeom prst="rect">
+            <a:avLst/>
+          </a:prstGeom>
+          <a:noFill/>
+        </p:spPr>
+        <p:txBody>
+          <a:bodyPr wrap="none">
+            <a:spAutoFit/>
+          </a:bodyPr>
+          <a:lstStyle/>
+          <a:p>
+            <a:pPr algn="r">
+              <a:defRPr sz="1100">
+                <a:solidFill>
+                  <a:srgbClr val="595959"/>
+                </a:solidFill>
+              </a:defRPr>
+            </a:pPr>
+            <a:r>
+              <a:t>PAPER 3 · PROPOSAL</a:t>
+            </a:r>
+          </a:p>
+        </p:txBody>
+      </p:sp>
+      <p:sp>
+        <p:nvSpPr>
+          <p:cNvPr id="3" name="TextBox 2"/>
+          <p:cNvSpPr txBox="1"/>
+          <p:nvPr/>
+        </p:nvSpPr>
+        <p:spPr>
+          <a:xfrm>
             <a:off x="457200" y="201168"/>
             <a:ext cx="11338560" cy="685800"/>
           </a:xfrm>
@@ -15672,14 +17763,14 @@
               </a:defRPr>
             </a:pPr>
             <a:r>
-              <a:t>RQ2: repairing the region</a:t>
+              <a:t>RQ1: where does the boundary lie?</a:t>
             </a:r>
           </a:p>
         </p:txBody>
       </p:sp>
       <p:cxnSp>
         <p:nvCxnSpPr>
-          <p:cNvPr id="3" name="Connector 2"/>
+          <p:cNvPr id="4" name="Connector 3"/>
           <p:cNvCxnSpPr/>
           <p:nvPr/>
         </p:nvCxnSpPr>
@@ -15714,7 +17805,7 @@
       </p:cxnSp>
       <p:sp>
         <p:nvSpPr>
-          <p:cNvPr id="4" name="TextBox 3"/>
+          <p:cNvPr id="5" name="TextBox 4"/>
           <p:cNvSpPr txBox="1"/>
           <p:nvPr/>
         </p:nvSpPr>
@@ -15749,7 +17840,7 @@
       </p:sp>
       <p:sp>
         <p:nvSpPr>
-          <p:cNvPr id="5" name="TextBox 4"/>
+          <p:cNvPr id="6" name="TextBox 5"/>
           <p:cNvSpPr txBox="1"/>
           <p:nvPr/>
         </p:nvSpPr>
@@ -15780,7 +17871,7 @@
               </a:defRPr>
             </a:pPr>
             <a:r>
-              <a:t>•  Repair is a smaller instance of the same optimization — the paper-2 schedulers become the region solvers</a:t>
+              <a:t>•  Start with the stranded tasks — mandatory</a:t>
             </a:r>
           </a:p>
           <a:p>
@@ -15795,7 +17886,37 @@
               </a:defRPr>
             </a:pPr>
             <a:r>
-              <a:t>•  Minimize added makespan + tasks moved + data re-shipped, subject to accuracy and the deadline</a:t>
+              <a:t>•  Then admit a neighbor only while it fails a stay-test:</a:t>
+            </a:r>
+          </a:p>
+          <a:p>
+            <a:pPr>
+              <a:spcAft>
+                <a:spcPts val="1000"/>
+              </a:spcAft>
+              <a:defRPr sz="1800">
+                <a:solidFill>
+                  <a:srgbClr val="595959"/>
+                </a:solidFill>
+              </a:defRPr>
+            </a:pPr>
+            <a:r>
+              <a:t>      – deadline test – staying pushes its finish time past the remaining slack</a:t>
+            </a:r>
+          </a:p>
+          <a:p>
+            <a:pPr>
+              <a:spcAft>
+                <a:spcPts val="1000"/>
+              </a:spcAft>
+              <a:defRPr sz="1800">
+                <a:solidFill>
+                  <a:srgbClr val="595959"/>
+                </a:solidFill>
+              </a:defRPr>
+            </a:pPr>
+            <a:r>
+              <a:t>      – locality test – staying strands its input on a path too slow to serve it in time</a:t>
             </a:r>
           </a:p>
           <a:p>
@@ -15810,7 +17931,7 @@
               </a:defRPr>
             </a:pPr>
             <a:r>
-              <a:t>•  The anchors enter as constants: arrival times of data from tasks that stayed put</a:t>
+              <a:t>•  Stop when no neighbor fails, or at a size cap</a:t>
             </a:r>
           </a:p>
           <a:p>
@@ -15825,7 +17946,7 @@
               </a:defRPr>
             </a:pPr>
             <a:r>
-              <a:t>•  A greedy repair gives millisecond answers; the exact solver is the reference on small regions</a:t>
+              <a:t>•  The tasks that stayed put become fixed anchors the repair must respect</a:t>
             </a:r>
           </a:p>
         </p:txBody>
@@ -15856,6 +17977,41 @@
         </p:nvSpPr>
         <p:spPr>
           <a:xfrm>
+            <a:off x="8046720" y="329184"/>
+            <a:ext cx="3657600" cy="274320"/>
+          </a:xfrm>
+          <a:prstGeom prst="rect">
+            <a:avLst/>
+          </a:prstGeom>
+          <a:noFill/>
+        </p:spPr>
+        <p:txBody>
+          <a:bodyPr wrap="none">
+            <a:spAutoFit/>
+          </a:bodyPr>
+          <a:lstStyle/>
+          <a:p>
+            <a:pPr algn="r">
+              <a:defRPr sz="1100">
+                <a:solidFill>
+                  <a:srgbClr val="595959"/>
+                </a:solidFill>
+              </a:defRPr>
+            </a:pPr>
+            <a:r>
+              <a:t>MOTIVATION</a:t>
+            </a:r>
+          </a:p>
+        </p:txBody>
+      </p:sp>
+      <p:sp>
+        <p:nvSpPr>
+          <p:cNvPr id="3" name="TextBox 2"/>
+          <p:cNvSpPr txBox="1"/>
+          <p:nvPr/>
+        </p:nvSpPr>
+        <p:spPr>
+          <a:xfrm>
             <a:off x="457200" y="201168"/>
             <a:ext cx="11338560" cy="685800"/>
           </a:xfrm>
@@ -15885,7 +18041,7 @@
       </p:sp>
       <p:cxnSp>
         <p:nvCxnSpPr>
-          <p:cNvPr id="3" name="Connector 2"/>
+          <p:cNvPr id="4" name="Connector 3"/>
           <p:cNvCxnSpPr/>
           <p:nvPr/>
         </p:nvCxnSpPr>
@@ -15920,7 +18076,7 @@
       </p:cxnSp>
       <p:sp>
         <p:nvSpPr>
-          <p:cNvPr id="4" name="TextBox 3"/>
+          <p:cNvPr id="5" name="TextBox 4"/>
           <p:cNvSpPr txBox="1"/>
           <p:nvPr/>
         </p:nvSpPr>
@@ -15955,7 +18111,7 @@
       </p:sp>
       <p:sp>
         <p:nvSpPr>
-          <p:cNvPr id="5" name="TextBox 4"/>
+          <p:cNvPr id="6" name="TextBox 5"/>
           <p:cNvSpPr txBox="1"/>
           <p:nvPr/>
         </p:nvSpPr>
@@ -16047,6 +18203,41 @@
         </p:nvSpPr>
         <p:spPr>
           <a:xfrm>
+            <a:off x="8046720" y="329184"/>
+            <a:ext cx="3657600" cy="274320"/>
+          </a:xfrm>
+          <a:prstGeom prst="rect">
+            <a:avLst/>
+          </a:prstGeom>
+          <a:noFill/>
+        </p:spPr>
+        <p:txBody>
+          <a:bodyPr wrap="none">
+            <a:spAutoFit/>
+          </a:bodyPr>
+          <a:lstStyle/>
+          <a:p>
+            <a:pPr algn="r">
+              <a:defRPr sz="1100">
+                <a:solidFill>
+                  <a:srgbClr val="595959"/>
+                </a:solidFill>
+              </a:defRPr>
+            </a:pPr>
+            <a:r>
+              <a:t>PAPER 3 · PROPOSAL</a:t>
+            </a:r>
+          </a:p>
+        </p:txBody>
+      </p:sp>
+      <p:sp>
+        <p:nvSpPr>
+          <p:cNvPr id="3" name="TextBox 2"/>
+          <p:cNvSpPr txBox="1"/>
+          <p:nvPr/>
+        </p:nvSpPr>
+        <p:spPr>
+          <a:xfrm>
             <a:off x="457200" y="201168"/>
             <a:ext cx="11338560" cy="685800"/>
           </a:xfrm>
@@ -16069,14 +18260,14 @@
               </a:defRPr>
             </a:pPr>
             <a:r>
-              <a:t>RQ3: updating the paths</a:t>
+              <a:t>RQ2: repairing the region</a:t>
             </a:r>
           </a:p>
         </p:txBody>
       </p:sp>
       <p:cxnSp>
         <p:nvCxnSpPr>
-          <p:cNvPr id="3" name="Connector 2"/>
+          <p:cNvPr id="4" name="Connector 3"/>
           <p:cNvCxnSpPr/>
           <p:nvPr/>
         </p:nvCxnSpPr>
@@ -16111,7 +18302,7 @@
       </p:cxnSp>
       <p:sp>
         <p:nvSpPr>
-          <p:cNvPr id="4" name="TextBox 3"/>
+          <p:cNvPr id="5" name="TextBox 4"/>
           <p:cNvSpPr txBox="1"/>
           <p:nvPr/>
         </p:nvSpPr>
@@ -16146,7 +18337,7 @@
       </p:sp>
       <p:sp>
         <p:nvSpPr>
-          <p:cNvPr id="5" name="TextBox 4"/>
+          <p:cNvPr id="6" name="TextBox 5"/>
           <p:cNvSpPr txBox="1"/>
           <p:nvPr/>
         </p:nvSpPr>
@@ -16177,7 +18368,7 @@
               </a:defRPr>
             </a:pPr>
             <a:r>
-              <a:t>•  Moved tasks need new paths to their parents and children</a:t>
+              <a:t>•  Repair is a smaller instance of the same optimization — the paper-2 schedulers become the region solvers</a:t>
             </a:r>
           </a:p>
           <a:p>
@@ -16192,7 +18383,7 @@
               </a:defRPr>
             </a:pPr>
             <a:r>
-              <a:t>•  Recomputing all shortest paths mid-workflow is too slow</a:t>
+              <a:t>•  Minimize added makespan + tasks moved + data re-shipped, subject to accuracy and the deadline</a:t>
             </a:r>
           </a:p>
           <a:p>
@@ -16207,22 +18398,7 @@
               </a:defRPr>
             </a:pPr>
             <a:r>
-              <a:t>•  So we reuse dynamic shortest-path updates (Riazi, Khanda, Bhowmick and colleagues):</a:t>
-            </a:r>
-          </a:p>
-          <a:p>
-            <a:pPr>
-              <a:spcAft>
-                <a:spcPts val="1000"/>
-              </a:spcAft>
-              <a:defRPr sz="1800">
-                <a:solidFill>
-                  <a:srgbClr val="595959"/>
-                </a:solidFill>
-              </a:defRPr>
-            </a:pPr>
-            <a:r>
-              <a:t>      – only paths through the deleted machine and the moved tasks change</a:t>
+              <a:t>•  The anchors enter as constants: arrival times of data from tasks that stayed put</a:t>
             </a:r>
           </a:p>
           <a:p>
@@ -16237,7 +18413,7 @@
               </a:defRPr>
             </a:pPr>
             <a:r>
-              <a:t>•  Using dynamic path updates to drive workflow recovery is, as far as we know, new</a:t>
+              <a:t>•  A greedy repair gives millisecond answers; the exact solver is the reference on small regions</a:t>
             </a:r>
           </a:p>
         </p:txBody>
@@ -16268,6 +18444,41 @@
         </p:nvSpPr>
         <p:spPr>
           <a:xfrm>
+            <a:off x="8046720" y="329184"/>
+            <a:ext cx="3657600" cy="274320"/>
+          </a:xfrm>
+          <a:prstGeom prst="rect">
+            <a:avLst/>
+          </a:prstGeom>
+          <a:noFill/>
+        </p:spPr>
+        <p:txBody>
+          <a:bodyPr wrap="none">
+            <a:spAutoFit/>
+          </a:bodyPr>
+          <a:lstStyle/>
+          <a:p>
+            <a:pPr algn="r">
+              <a:defRPr sz="1100">
+                <a:solidFill>
+                  <a:srgbClr val="595959"/>
+                </a:solidFill>
+              </a:defRPr>
+            </a:pPr>
+            <a:r>
+              <a:t>PAPER 3 · PROPOSAL</a:t>
+            </a:r>
+          </a:p>
+        </p:txBody>
+      </p:sp>
+      <p:sp>
+        <p:nvSpPr>
+          <p:cNvPr id="3" name="TextBox 2"/>
+          <p:cNvSpPr txBox="1"/>
+          <p:nvPr/>
+        </p:nvSpPr>
+        <p:spPr>
+          <a:xfrm>
             <a:off x="457200" y="201168"/>
             <a:ext cx="11338560" cy="685800"/>
           </a:xfrm>
@@ -16290,14 +18501,14 @@
               </a:defRPr>
             </a:pPr>
             <a:r>
-              <a:t>What is new here</a:t>
+              <a:t>RQ3: updating the paths</a:t>
             </a:r>
           </a:p>
         </p:txBody>
       </p:sp>
       <p:cxnSp>
         <p:nvCxnSpPr>
-          <p:cNvPr id="3" name="Connector 2"/>
+          <p:cNvPr id="4" name="Connector 3"/>
           <p:cNvCxnSpPr/>
           <p:nvPr/>
         </p:nvCxnSpPr>
@@ -16332,7 +18543,7 @@
       </p:cxnSp>
       <p:sp>
         <p:nvSpPr>
-          <p:cNvPr id="4" name="TextBox 3"/>
+          <p:cNvPr id="5" name="TextBox 4"/>
           <p:cNvSpPr txBox="1"/>
           <p:nvPr/>
         </p:nvSpPr>
@@ -16367,7 +18578,7 @@
       </p:sp>
       <p:sp>
         <p:nvSpPr>
-          <p:cNvPr id="5" name="TextBox 4"/>
+          <p:cNvPr id="6" name="TextBox 5"/>
           <p:cNvSpPr txBox="1"/>
           <p:nvPr/>
         </p:nvSpPr>
@@ -16398,7 +18609,7 @@
               </a:defRPr>
             </a:pPr>
             <a:r>
-              <a:t>•  Dynamic shortest-path updates exist — but have never driven workflow repartitioning</a:t>
+              <a:t>•  Moved tasks need new paths to their parents and children</a:t>
             </a:r>
           </a:p>
           <a:p>
@@ -16413,7 +18624,7 @@
               </a:defRPr>
             </a:pPr>
             <a:r>
-              <a:t>•  Fog rescheduling exists — but without the two-graph coupling</a:t>
+              <a:t>•  Recomputing all shortest paths mid-workflow is too slow</a:t>
             </a:r>
           </a:p>
           <a:p>
@@ -16428,15 +18639,23 @@
               </a:defRPr>
             </a:pPr>
             <a:r>
-              <a:t>•  Partial workflow reconsideration exists — but not at failure granularity</a:t>
+              <a:t>•  So we reuse dynamic shortest-path updates (Riazi, Khanda, Bhowmick and colleagues):</a:t>
             </a:r>
           </a:p>
           <a:p>
             <a:pPr>
               <a:spcAft>
-                <a:spcPts val="400"/>
+                <a:spcPts val="1000"/>
               </a:spcAft>
-            </a:pPr>
+              <a:defRPr sz="1800">
+                <a:solidFill>
+                  <a:srgbClr val="595959"/>
+                </a:solidFill>
+              </a:defRPr>
+            </a:pPr>
+            <a:r>
+              <a:t>      – only paths through the deleted machine and the moved tasks change</a:t>
+            </a:r>
           </a:p>
           <a:p>
             <a:pPr>
@@ -16450,7 +18669,7 @@
               </a:defRPr>
             </a:pPr>
             <a:r>
-              <a:t>•  What is new: a machine failure maps to the smallest affected region; only that region is repartitioned; only its paths update; the workflow resumes</a:t>
+              <a:t>•  Using dynamic path updates to drive workflow recovery is, as far as we know, new</a:t>
             </a:r>
           </a:p>
         </p:txBody>
@@ -16481,8 +18700,148 @@
         </p:nvSpPr>
         <p:spPr>
           <a:xfrm>
-            <a:off x="914400" y="2377440"/>
-            <a:ext cx="10332720" cy="1280160"/>
+            <a:off x="8046720" y="329184"/>
+            <a:ext cx="3657600" cy="274320"/>
+          </a:xfrm>
+          <a:prstGeom prst="rect">
+            <a:avLst/>
+          </a:prstGeom>
+          <a:noFill/>
+        </p:spPr>
+        <p:txBody>
+          <a:bodyPr wrap="none">
+            <a:spAutoFit/>
+          </a:bodyPr>
+          <a:lstStyle/>
+          <a:p>
+            <a:pPr algn="r">
+              <a:defRPr sz="1100">
+                <a:solidFill>
+                  <a:srgbClr val="595959"/>
+                </a:solidFill>
+              </a:defRPr>
+            </a:pPr>
+            <a:r>
+              <a:t>PAPER 3 · PROPOSAL</a:t>
+            </a:r>
+          </a:p>
+        </p:txBody>
+      </p:sp>
+      <p:sp>
+        <p:nvSpPr>
+          <p:cNvPr id="3" name="TextBox 2"/>
+          <p:cNvSpPr txBox="1"/>
+          <p:nvPr/>
+        </p:nvSpPr>
+        <p:spPr>
+          <a:xfrm>
+            <a:off x="457200" y="201168"/>
+            <a:ext cx="11338560" cy="685800"/>
+          </a:xfrm>
+          <a:prstGeom prst="rect">
+            <a:avLst/>
+          </a:prstGeom>
+          <a:noFill/>
+        </p:spPr>
+        <p:txBody>
+          <a:bodyPr wrap="none" anchor="ctr">
+            <a:spAutoFit/>
+          </a:bodyPr>
+          <a:lstStyle/>
+          <a:p>
+            <a:pPr>
+              <a:defRPr sz="3000" b="1">
+                <a:solidFill>
+                  <a:srgbClr val="1A1A1A"/>
+                </a:solidFill>
+              </a:defRPr>
+            </a:pPr>
+            <a:r>
+              <a:t>What is new here</a:t>
+            </a:r>
+          </a:p>
+        </p:txBody>
+      </p:sp>
+      <p:cxnSp>
+        <p:nvCxnSpPr>
+          <p:cNvPr id="4" name="Connector 3"/>
+          <p:cNvCxnSpPr/>
+          <p:nvPr/>
+        </p:nvCxnSpPr>
+        <p:spPr>
+          <a:xfrm>
+            <a:off x="502920" y="932688"/>
+            <a:ext cx="11201400" cy="0"/>
+          </a:xfrm>
+          <a:prstGeom prst="line">
+            <a:avLst/>
+          </a:prstGeom>
+          <a:ln w="12700">
+            <a:solidFill>
+              <a:srgbClr val="1A1A1A"/>
+            </a:solidFill>
+          </a:ln>
+        </p:spPr>
+        <p:style>
+          <a:lnRef idx="2">
+            <a:schemeClr val="accent1"/>
+          </a:lnRef>
+          <a:fillRef idx="0">
+            <a:schemeClr val="accent1"/>
+          </a:fillRef>
+          <a:effectRef idx="1">
+            <a:schemeClr val="accent1"/>
+          </a:effectRef>
+          <a:fontRef idx="minor">
+            <a:schemeClr val="tx1"/>
+          </a:fontRef>
+        </p:style>
+      </p:cxnSp>
+      <p:sp>
+        <p:nvSpPr>
+          <p:cNvPr id="5" name="TextBox 4"/>
+          <p:cNvSpPr txBox="1"/>
+          <p:nvPr/>
+        </p:nvSpPr>
+        <p:spPr>
+          <a:xfrm>
+            <a:off x="11430000" y="6492240"/>
+            <a:ext cx="640080" cy="274320"/>
+          </a:xfrm>
+          <a:prstGeom prst="rect">
+            <a:avLst/>
+          </a:prstGeom>
+          <a:noFill/>
+        </p:spPr>
+        <p:txBody>
+          <a:bodyPr wrap="none">
+            <a:spAutoFit/>
+          </a:bodyPr>
+          <a:lstStyle/>
+          <a:p>
+            <a:pPr algn="r">
+              <a:defRPr sz="1000">
+                <a:solidFill>
+                  <a:srgbClr val="595959"/>
+                </a:solidFill>
+              </a:defRPr>
+            </a:pPr>
+            <a:r>
+              <a:t>42</a:t>
+            </a:r>
+          </a:p>
+        </p:txBody>
+      </p:sp>
+      <p:sp>
+        <p:nvSpPr>
+          <p:cNvPr id="6" name="TextBox 5"/>
+          <p:cNvSpPr txBox="1"/>
+          <p:nvPr/>
+        </p:nvSpPr>
+        <p:spPr>
+          <a:xfrm>
+            <a:off x="640080" y="1371600"/>
+            <a:ext cx="10972800" cy="5029200"/>
           </a:xfrm>
           <a:prstGeom prst="rect">
             <a:avLst/>
@@ -16495,29 +18854,119 @@
           </a:bodyPr>
           <a:lstStyle/>
           <a:p>
-            <a:pPr algn="ctr">
-              <a:defRPr sz="3800" b="1">
+            <a:pPr>
+              <a:spcAft>
+                <a:spcPts val="1000"/>
+              </a:spcAft>
+              <a:defRPr sz="2000">
                 <a:solidFill>
                   <a:srgbClr val="1A1A1A"/>
                 </a:solidFill>
               </a:defRPr>
             </a:pPr>
             <a:r>
-              <a:t>Evaluation plan and timeline</a:t>
-            </a:r>
-          </a:p>
-        </p:txBody>
-      </p:sp>
-      <p:sp>
-        <p:nvSpPr>
-          <p:cNvPr id="3" name="TextBox 2"/>
+              <a:t>•  Dynamic shortest-path updates exist — but have never driven workflow repartitioning</a:t>
+            </a:r>
+          </a:p>
+          <a:p>
+            <a:pPr>
+              <a:spcAft>
+                <a:spcPts val="1000"/>
+              </a:spcAft>
+              <a:defRPr sz="2000">
+                <a:solidFill>
+                  <a:srgbClr val="1A1A1A"/>
+                </a:solidFill>
+              </a:defRPr>
+            </a:pPr>
+            <a:r>
+              <a:t>•  Fog rescheduling exists — but without the two-graph coupling</a:t>
+            </a:r>
+          </a:p>
+          <a:p>
+            <a:pPr>
+              <a:spcAft>
+                <a:spcPts val="1000"/>
+              </a:spcAft>
+              <a:defRPr sz="2000">
+                <a:solidFill>
+                  <a:srgbClr val="1A1A1A"/>
+                </a:solidFill>
+              </a:defRPr>
+            </a:pPr>
+            <a:r>
+              <a:t>•  Partial workflow reconsideration exists — but not at failure granularity</a:t>
+            </a:r>
+          </a:p>
+          <a:p>
+            <a:pPr>
+              <a:spcAft>
+                <a:spcPts val="400"/>
+              </a:spcAft>
+            </a:pPr>
+          </a:p>
+          <a:p>
+            <a:pPr>
+              <a:spcAft>
+                <a:spcPts val="1000"/>
+              </a:spcAft>
+              <a:defRPr sz="2000">
+                <a:solidFill>
+                  <a:srgbClr val="1A1A1A"/>
+                </a:solidFill>
+              </a:defRPr>
+            </a:pPr>
+            <a:r>
+              <a:t>•  What is new: a node failure maps to the smallest affected region; only that region is repartitioned; only its paths update; the workflow resumes</a:t>
+            </a:r>
+          </a:p>
+        </p:txBody>
+      </p:sp>
+      <p:cxnSp>
+        <p:nvCxnSpPr>
+          <p:cNvPr id="7" name="Connector 6"/>
+          <p:cNvCxnSpPr/>
+          <p:nvPr/>
+        </p:nvCxnSpPr>
+        <p:spPr>
+          <a:xfrm>
+            <a:off x="640080" y="5623560"/>
+            <a:ext cx="10881360" cy="0"/>
+          </a:xfrm>
+          <a:prstGeom prst="line">
+            <a:avLst/>
+          </a:prstGeom>
+          <a:ln w="9525">
+            <a:solidFill>
+              <a:srgbClr val="595959"/>
+            </a:solidFill>
+          </a:ln>
+        </p:spPr>
+        <p:style>
+          <a:lnRef idx="2">
+            <a:schemeClr val="accent1"/>
+          </a:lnRef>
+          <a:fillRef idx="0">
+            <a:schemeClr val="accent1"/>
+          </a:fillRef>
+          <a:effectRef idx="1">
+            <a:schemeClr val="accent1"/>
+          </a:effectRef>
+          <a:fontRef idx="minor">
+            <a:schemeClr val="tx1"/>
+          </a:fontRef>
+        </p:style>
+      </p:cxnSp>
+      <p:sp>
+        <p:nvSpPr>
+          <p:cNvPr id="8" name="TextBox 7"/>
           <p:cNvSpPr txBox="1"/>
           <p:nvPr/>
         </p:nvSpPr>
         <p:spPr>
           <a:xfrm>
-            <a:off x="914400" y="3657600"/>
-            <a:ext cx="10332720" cy="1097280"/>
+            <a:off x="640080" y="5715000"/>
+            <a:ext cx="10881360" cy="914400"/>
           </a:xfrm>
           <a:prstGeom prst="rect">
             <a:avLst/>
@@ -16530,50 +18979,15 @@
           </a:bodyPr>
           <a:lstStyle/>
           <a:p>
-            <a:pPr algn="ctr">
-              <a:defRPr sz="2000">
-                <a:solidFill>
-                  <a:srgbClr val="595959"/>
-                </a:solidFill>
-              </a:defRPr>
-            </a:pPr>
-            <a:r>
-              <a:t>Baselines, metrics, hypotheses, milestones</a:t>
-            </a:r>
-          </a:p>
-        </p:txBody>
-      </p:sp>
-      <p:sp>
-        <p:nvSpPr>
-          <p:cNvPr id="4" name="TextBox 3"/>
-          <p:cNvSpPr txBox="1"/>
-          <p:nvPr/>
-        </p:nvSpPr>
-        <p:spPr>
-          <a:xfrm>
-            <a:off x="11430000" y="6492240"/>
-            <a:ext cx="640080" cy="274320"/>
-          </a:xfrm>
-          <a:prstGeom prst="rect">
-            <a:avLst/>
-          </a:prstGeom>
-          <a:noFill/>
-        </p:spPr>
-        <p:txBody>
-          <a:bodyPr wrap="none">
-            <a:spAutoFit/>
-          </a:bodyPr>
-          <a:lstStyle/>
-          <a:p>
-            <a:pPr algn="r">
-              <a:defRPr sz="1000">
-                <a:solidFill>
-                  <a:srgbClr val="595959"/>
-                </a:solidFill>
-              </a:defRPr>
-            </a:pPr>
-            <a:r>
-              <a:t>42</a:t>
+            <a:pPr>
+              <a:defRPr sz="1700" b="1">
+                <a:solidFill>
+                  <a:srgbClr val="1A1A1A"/>
+                </a:solidFill>
+              </a:defRPr>
+            </a:pPr>
+            <a:r>
+              <a:t>Take-away:  the novelty is the coupling: a failure in one graph becomes a small, well-defined repair in the other</a:t>
             </a:r>
           </a:p>
         </p:txBody>
@@ -16604,6 +19018,164 @@
         </p:nvSpPr>
         <p:spPr>
           <a:xfrm>
+            <a:off x="914400" y="2377440"/>
+            <a:ext cx="10332720" cy="1280160"/>
+          </a:xfrm>
+          <a:prstGeom prst="rect">
+            <a:avLst/>
+          </a:prstGeom>
+          <a:noFill/>
+        </p:spPr>
+        <p:txBody>
+          <a:bodyPr wrap="square">
+            <a:spAutoFit/>
+          </a:bodyPr>
+          <a:lstStyle/>
+          <a:p>
+            <a:pPr algn="ctr">
+              <a:defRPr sz="3800" b="1">
+                <a:solidFill>
+                  <a:srgbClr val="1A1A1A"/>
+                </a:solidFill>
+              </a:defRPr>
+            </a:pPr>
+            <a:r>
+              <a:t>7.  Evaluation plan and timeline</a:t>
+            </a:r>
+          </a:p>
+        </p:txBody>
+      </p:sp>
+      <p:sp>
+        <p:nvSpPr>
+          <p:cNvPr id="3" name="TextBox 2"/>
+          <p:cNvSpPr txBox="1"/>
+          <p:nvPr/>
+        </p:nvSpPr>
+        <p:spPr>
+          <a:xfrm>
+            <a:off x="914400" y="3657600"/>
+            <a:ext cx="10332720" cy="1097280"/>
+          </a:xfrm>
+          <a:prstGeom prst="rect">
+            <a:avLst/>
+          </a:prstGeom>
+          <a:noFill/>
+        </p:spPr>
+        <p:txBody>
+          <a:bodyPr wrap="square">
+            <a:spAutoFit/>
+          </a:bodyPr>
+          <a:lstStyle/>
+          <a:p>
+            <a:pPr algn="ctr">
+              <a:defRPr sz="2000">
+                <a:solidFill>
+                  <a:srgbClr val="595959"/>
+                </a:solidFill>
+              </a:defRPr>
+            </a:pPr>
+            <a:r>
+              <a:t>Baselines, metrics, hypotheses, milestones</a:t>
+            </a:r>
+          </a:p>
+        </p:txBody>
+      </p:sp>
+      <p:sp>
+        <p:nvSpPr>
+          <p:cNvPr id="4" name="TextBox 3"/>
+          <p:cNvSpPr txBox="1"/>
+          <p:nvPr/>
+        </p:nvSpPr>
+        <p:spPr>
+          <a:xfrm>
+            <a:off x="11430000" y="6492240"/>
+            <a:ext cx="640080" cy="274320"/>
+          </a:xfrm>
+          <a:prstGeom prst="rect">
+            <a:avLst/>
+          </a:prstGeom>
+          <a:noFill/>
+        </p:spPr>
+        <p:txBody>
+          <a:bodyPr wrap="none">
+            <a:spAutoFit/>
+          </a:bodyPr>
+          <a:lstStyle/>
+          <a:p>
+            <a:pPr algn="r">
+              <a:defRPr sz="1000">
+                <a:solidFill>
+                  <a:srgbClr val="595959"/>
+                </a:solidFill>
+              </a:defRPr>
+            </a:pPr>
+            <a:r>
+              <a:t>43</a:t>
+            </a:r>
+          </a:p>
+        </p:txBody>
+      </p:sp>
+    </p:spTree>
+  </p:cSld>
+  <p:clrMapOvr>
+    <a:masterClrMapping/>
+  </p:clrMapOvr>
+</p:sld>
+</file>
+
+<file path=ppt/slides/slide44.xml><?xml version="1.0" encoding="utf-8"?>
+<p:sld xmlns:a="http://schemas.openxmlformats.org/drawingml/2006/main" xmlns:p="http://schemas.openxmlformats.org/presentationml/2006/main" xmlns:r="http://schemas.openxmlformats.org/officeDocument/2006/relationships">
+  <p:cSld>
+    <p:spTree>
+      <p:nvGrpSpPr>
+        <p:cNvPr id="1" name=""/>
+        <p:cNvGrpSpPr/>
+        <p:nvPr/>
+      </p:nvGrpSpPr>
+      <p:grpSpPr/>
+      <p:sp>
+        <p:nvSpPr>
+          <p:cNvPr id="2" name="TextBox 1"/>
+          <p:cNvSpPr txBox="1"/>
+          <p:nvPr/>
+        </p:nvSpPr>
+        <p:spPr>
+          <a:xfrm>
+            <a:off x="8046720" y="329184"/>
+            <a:ext cx="3657600" cy="274320"/>
+          </a:xfrm>
+          <a:prstGeom prst="rect">
+            <a:avLst/>
+          </a:prstGeom>
+          <a:noFill/>
+        </p:spPr>
+        <p:txBody>
+          <a:bodyPr wrap="none">
+            <a:spAutoFit/>
+          </a:bodyPr>
+          <a:lstStyle/>
+          <a:p>
+            <a:pPr algn="r">
+              <a:defRPr sz="1100">
+                <a:solidFill>
+                  <a:srgbClr val="595959"/>
+                </a:solidFill>
+              </a:defRPr>
+            </a:pPr>
+            <a:r>
+              <a:t>EVALUATION PLAN</a:t>
+            </a:r>
+          </a:p>
+        </p:txBody>
+      </p:sp>
+      <p:sp>
+        <p:nvSpPr>
+          <p:cNvPr id="3" name="TextBox 2"/>
+          <p:cNvSpPr txBox="1"/>
+          <p:nvPr/>
+        </p:nvSpPr>
+        <p:spPr>
+          <a:xfrm>
             <a:off x="457200" y="201168"/>
             <a:ext cx="11338560" cy="685800"/>
           </a:xfrm>
@@ -16626,14 +19198,14 @@
               </a:defRPr>
             </a:pPr>
             <a:r>
-              <a:t>Baselines and metrics</a:t>
+              <a:t>Evaluation setup: baselines and metrics</a:t>
             </a:r>
           </a:p>
         </p:txBody>
       </p:sp>
       <p:cxnSp>
         <p:nvCxnSpPr>
-          <p:cNvPr id="3" name="Connector 2"/>
+          <p:cNvPr id="4" name="Connector 3"/>
           <p:cNvCxnSpPr/>
           <p:nvPr/>
         </p:nvCxnSpPr>
@@ -16668,7 +19240,7 @@
       </p:cxnSp>
       <p:sp>
         <p:nvSpPr>
-          <p:cNvPr id="4" name="TextBox 3"/>
+          <p:cNvPr id="5" name="TextBox 4"/>
           <p:cNvSpPr txBox="1"/>
           <p:nvPr/>
         </p:nvSpPr>
@@ -16696,14 +19268,14 @@
               </a:defRPr>
             </a:pPr>
             <a:r>
-              <a:t>43</a:t>
+              <a:t>44</a:t>
             </a:r>
           </a:p>
         </p:txBody>
       </p:sp>
       <p:graphicFrame>
         <p:nvGraphicFramePr>
-          <p:cNvPr id="5" name="Table 4"/>
+          <p:cNvPr id="6" name="Table 5"/>
           <p:cNvGraphicFramePr>
             <a:graphicFrameLocks noGrp="1"/>
           </p:cNvGraphicFramePr>
@@ -16969,7 +19541,7 @@
       </p:graphicFrame>
       <p:cxnSp>
         <p:nvCxnSpPr>
-          <p:cNvPr id="6" name="Connector 5"/>
+          <p:cNvPr id="7" name="Connector 6"/>
           <p:cNvCxnSpPr/>
           <p:nvPr/>
         </p:nvCxnSpPr>
@@ -17004,7 +19576,7 @@
       </p:cxnSp>
       <p:sp>
         <p:nvSpPr>
-          <p:cNvPr id="7" name="TextBox 6"/>
+          <p:cNvPr id="8" name="TextBox 7"/>
           <p:cNvSpPr txBox="1"/>
           <p:nvPr/>
         </p:nvSpPr>
@@ -17033,287 +19605,6 @@
             </a:pPr>
             <a:r>
               <a:t>Take-away:  the platform from paper two already provides the baselines and the failure injection — the testbed exists</a:t>
-            </a:r>
-          </a:p>
-        </p:txBody>
-      </p:sp>
-    </p:spTree>
-  </p:cSld>
-  <p:clrMapOvr>
-    <a:masterClrMapping/>
-  </p:clrMapOvr>
-</p:sld>
-</file>
-
-<file path=ppt/slides/slide44.xml><?xml version="1.0" encoding="utf-8"?>
-<p:sld xmlns:a="http://schemas.openxmlformats.org/drawingml/2006/main" xmlns:p="http://schemas.openxmlformats.org/presentationml/2006/main" xmlns:r="http://schemas.openxmlformats.org/officeDocument/2006/relationships">
-  <p:cSld>
-    <p:spTree>
-      <p:nvGrpSpPr>
-        <p:cNvPr id="1" name=""/>
-        <p:cNvGrpSpPr/>
-        <p:nvPr/>
-      </p:nvGrpSpPr>
-      <p:grpSpPr/>
-      <p:sp>
-        <p:nvSpPr>
-          <p:cNvPr id="2" name="TextBox 1"/>
-          <p:cNvSpPr txBox="1"/>
-          <p:nvPr/>
-        </p:nvSpPr>
-        <p:spPr>
-          <a:xfrm>
-            <a:off x="457200" y="201168"/>
-            <a:ext cx="11338560" cy="685800"/>
-          </a:xfrm>
-          <a:prstGeom prst="rect">
-            <a:avLst/>
-          </a:prstGeom>
-          <a:noFill/>
-        </p:spPr>
-        <p:txBody>
-          <a:bodyPr wrap="none" anchor="ctr">
-            <a:spAutoFit/>
-          </a:bodyPr>
-          <a:lstStyle/>
-          <a:p>
-            <a:pPr>
-              <a:defRPr sz="3000" b="1">
-                <a:solidFill>
-                  <a:srgbClr val="1A1A1A"/>
-                </a:solidFill>
-              </a:defRPr>
-            </a:pPr>
-            <a:r>
-              <a:t>What I will vary, and what I expect</a:t>
-            </a:r>
-          </a:p>
-        </p:txBody>
-      </p:sp>
-      <p:cxnSp>
-        <p:nvCxnSpPr>
-          <p:cNvPr id="3" name="Connector 2"/>
-          <p:cNvCxnSpPr/>
-          <p:nvPr/>
-        </p:nvCxnSpPr>
-        <p:spPr>
-          <a:xfrm>
-            <a:off x="502920" y="932688"/>
-            <a:ext cx="11201400" cy="0"/>
-          </a:xfrm>
-          <a:prstGeom prst="line">
-            <a:avLst/>
-          </a:prstGeom>
-          <a:ln w="12700">
-            <a:solidFill>
-              <a:srgbClr val="1A1A1A"/>
-            </a:solidFill>
-          </a:ln>
-        </p:spPr>
-        <p:style>
-          <a:lnRef idx="2">
-            <a:schemeClr val="accent1"/>
-          </a:lnRef>
-          <a:fillRef idx="0">
-            <a:schemeClr val="accent1"/>
-          </a:fillRef>
-          <a:effectRef idx="1">
-            <a:schemeClr val="accent1"/>
-          </a:effectRef>
-          <a:fontRef idx="minor">
-            <a:schemeClr val="tx1"/>
-          </a:fontRef>
-        </p:style>
-      </p:cxnSp>
-      <p:sp>
-        <p:nvSpPr>
-          <p:cNvPr id="4" name="TextBox 3"/>
-          <p:cNvSpPr txBox="1"/>
-          <p:nvPr/>
-        </p:nvSpPr>
-        <p:spPr>
-          <a:xfrm>
-            <a:off x="11430000" y="6492240"/>
-            <a:ext cx="640080" cy="274320"/>
-          </a:xfrm>
-          <a:prstGeom prst="rect">
-            <a:avLst/>
-          </a:prstGeom>
-          <a:noFill/>
-        </p:spPr>
-        <p:txBody>
-          <a:bodyPr wrap="none">
-            <a:spAutoFit/>
-          </a:bodyPr>
-          <a:lstStyle/>
-          <a:p>
-            <a:pPr algn="r">
-              <a:defRPr sz="1000">
-                <a:solidFill>
-                  <a:srgbClr val="595959"/>
-                </a:solidFill>
-              </a:defRPr>
-            </a:pPr>
-            <a:r>
-              <a:t>44</a:t>
-            </a:r>
-          </a:p>
-        </p:txBody>
-      </p:sp>
-      <p:sp>
-        <p:nvSpPr>
-          <p:cNvPr id="5" name="TextBox 4"/>
-          <p:cNvSpPr txBox="1"/>
-          <p:nvPr/>
-        </p:nvSpPr>
-        <p:spPr>
-          <a:xfrm>
-            <a:off x="640080" y="1280160"/>
-            <a:ext cx="10972800" cy="5029200"/>
-          </a:xfrm>
-          <a:prstGeom prst="rect">
-            <a:avLst/>
-          </a:prstGeom>
-          <a:noFill/>
-        </p:spPr>
-        <p:txBody>
-          <a:bodyPr wrap="square">
-            <a:spAutoFit/>
-          </a:bodyPr>
-          <a:lstStyle/>
-          <a:p>
-            <a:pPr>
-              <a:spcAft>
-                <a:spcPts val="1000"/>
-              </a:spcAft>
-              <a:defRPr sz="1800">
-                <a:solidFill>
-                  <a:srgbClr val="1A1A1A"/>
-                </a:solidFill>
-              </a:defRPr>
-            </a:pPr>
-            <a:r>
-              <a:t>•  Failure injection:</a:t>
-            </a:r>
-          </a:p>
-          <a:p>
-            <a:pPr>
-              <a:spcAft>
-                <a:spcPts val="1000"/>
-              </a:spcAft>
-              <a:defRPr sz="1600">
-                <a:solidFill>
-                  <a:srgbClr val="595959"/>
-                </a:solidFill>
-              </a:defRPr>
-            </a:pPr>
-            <a:r>
-              <a:t>      – where – a machine on the critical path vs. a peripheral one</a:t>
-            </a:r>
-          </a:p>
-          <a:p>
-            <a:pPr>
-              <a:spcAft>
-                <a:spcPts val="1000"/>
-              </a:spcAft>
-              <a:defRPr sz="1600">
-                <a:solidFill>
-                  <a:srgbClr val="595959"/>
-                </a:solidFill>
-              </a:defRPr>
-            </a:pPr>
-            <a:r>
-              <a:t>      – how many – one machine vs. several at once</a:t>
-            </a:r>
-          </a:p>
-          <a:p>
-            <a:pPr>
-              <a:spcAft>
-                <a:spcPts val="1000"/>
-              </a:spcAft>
-              <a:defRPr sz="1600">
-                <a:solidFill>
-                  <a:srgbClr val="595959"/>
-                </a:solidFill>
-              </a:defRPr>
-            </a:pPr>
-            <a:r>
-              <a:t>      – when – how much deadline slack is left</a:t>
-            </a:r>
-          </a:p>
-          <a:p>
-            <a:pPr>
-              <a:spcAft>
-                <a:spcPts val="1000"/>
-              </a:spcAft>
-              <a:defRPr sz="1800">
-                <a:solidFill>
-                  <a:srgbClr val="1A1A1A"/>
-                </a:solidFill>
-              </a:defRPr>
-            </a:pPr>
-            <a:r>
-              <a:t>•  Scale: workflows of 10–1000 tasks, federations of 2–10 machines</a:t>
-            </a:r>
-          </a:p>
-          <a:p>
-            <a:pPr>
-              <a:spcAft>
-                <a:spcPts val="1000"/>
-              </a:spcAft>
-              <a:defRPr sz="1800">
-                <a:solidFill>
-                  <a:srgbClr val="1A1A1A"/>
-                </a:solidFill>
-              </a:defRPr>
-            </a:pPr>
-            <a:r>
-              <a:t>•  Hypotheses:</a:t>
-            </a:r>
-          </a:p>
-          <a:p>
-            <a:pPr>
-              <a:spcAft>
-                <a:spcPts val="1000"/>
-              </a:spcAft>
-              <a:defRPr sz="1600">
-                <a:solidFill>
-                  <a:srgbClr val="595959"/>
-                </a:solidFill>
-              </a:defRPr>
-            </a:pPr>
-            <a:r>
-              <a:t>      – H1 – recovery time grows with the region, not the whole workflow</a:t>
-            </a:r>
-          </a:p>
-          <a:p>
-            <a:pPr>
-              <a:spcAft>
-                <a:spcPts val="1000"/>
-              </a:spcAft>
-              <a:defRPr sz="1600">
-                <a:solidFill>
-                  <a:srgbClr val="595959"/>
-                </a:solidFill>
-              </a:defRPr>
-            </a:pPr>
-            <a:r>
-              <a:t>      – H2 – tasks moved and data re-shipped are far below the baselines at equal feasibility</a:t>
-            </a:r>
-          </a:p>
-          <a:p>
-            <a:pPr>
-              <a:spcAft>
-                <a:spcPts val="1000"/>
-              </a:spcAft>
-              <a:defRPr sz="1600">
-                <a:solidFill>
-                  <a:srgbClr val="595959"/>
-                </a:solidFill>
-              </a:defRPr>
-            </a:pPr>
-            <a:r>
-              <a:t>      – H3 – repair quality stays near the exact reference on small cases</a:t>
             </a:r>
           </a:p>
         </p:txBody>
@@ -17344,6 +19635,41 @@
         </p:nvSpPr>
         <p:spPr>
           <a:xfrm>
+            <a:off x="8046720" y="329184"/>
+            <a:ext cx="3657600" cy="274320"/>
+          </a:xfrm>
+          <a:prstGeom prst="rect">
+            <a:avLst/>
+          </a:prstGeom>
+          <a:noFill/>
+        </p:spPr>
+        <p:txBody>
+          <a:bodyPr wrap="none">
+            <a:spAutoFit/>
+          </a:bodyPr>
+          <a:lstStyle/>
+          <a:p>
+            <a:pPr algn="r">
+              <a:defRPr sz="1100">
+                <a:solidFill>
+                  <a:srgbClr val="595959"/>
+                </a:solidFill>
+              </a:defRPr>
+            </a:pPr>
+            <a:r>
+              <a:t>EVALUATION PLAN</a:t>
+            </a:r>
+          </a:p>
+        </p:txBody>
+      </p:sp>
+      <p:sp>
+        <p:nvSpPr>
+          <p:cNvPr id="3" name="TextBox 2"/>
+          <p:cNvSpPr txBox="1"/>
+          <p:nvPr/>
+        </p:nvSpPr>
+        <p:spPr>
+          <a:xfrm>
             <a:off x="457200" y="201168"/>
             <a:ext cx="11338560" cy="685800"/>
           </a:xfrm>
@@ -17366,14 +19692,14 @@
               </a:defRPr>
             </a:pPr>
             <a:r>
-              <a:t>Six-month plan (Aug 2026 – Jan 2027)</a:t>
+              <a:t>Factors and hypotheses</a:t>
             </a:r>
           </a:p>
         </p:txBody>
       </p:sp>
       <p:cxnSp>
         <p:nvCxnSpPr>
-          <p:cNvPr id="3" name="Connector 2"/>
+          <p:cNvPr id="4" name="Connector 3"/>
           <p:cNvCxnSpPr/>
           <p:nvPr/>
         </p:nvCxnSpPr>
@@ -17408,7 +19734,7 @@
       </p:cxnSp>
       <p:sp>
         <p:nvSpPr>
-          <p:cNvPr id="4" name="TextBox 3"/>
+          <p:cNvPr id="5" name="TextBox 4"/>
           <p:cNvSpPr txBox="1"/>
           <p:nvPr/>
         </p:nvSpPr>
@@ -17441,9 +19767,325 @@
           </a:p>
         </p:txBody>
       </p:sp>
+      <p:sp>
+        <p:nvSpPr>
+          <p:cNvPr id="6" name="TextBox 5"/>
+          <p:cNvSpPr txBox="1"/>
+          <p:nvPr/>
+        </p:nvSpPr>
+        <p:spPr>
+          <a:xfrm>
+            <a:off x="640080" y="1280160"/>
+            <a:ext cx="10972800" cy="5029200"/>
+          </a:xfrm>
+          <a:prstGeom prst="rect">
+            <a:avLst/>
+          </a:prstGeom>
+          <a:noFill/>
+        </p:spPr>
+        <p:txBody>
+          <a:bodyPr wrap="square">
+            <a:spAutoFit/>
+          </a:bodyPr>
+          <a:lstStyle/>
+          <a:p>
+            <a:pPr>
+              <a:spcAft>
+                <a:spcPts val="1000"/>
+              </a:spcAft>
+              <a:defRPr sz="1800">
+                <a:solidFill>
+                  <a:srgbClr val="1A1A1A"/>
+                </a:solidFill>
+              </a:defRPr>
+            </a:pPr>
+            <a:r>
+              <a:t>•  What I will vary:</a:t>
+            </a:r>
+          </a:p>
+          <a:p>
+            <a:pPr>
+              <a:spcAft>
+                <a:spcPts val="1000"/>
+              </a:spcAft>
+              <a:defRPr sz="1600">
+                <a:solidFill>
+                  <a:srgbClr val="595959"/>
+                </a:solidFill>
+              </a:defRPr>
+            </a:pPr>
+            <a:r>
+              <a:t>      – where the failure hits — a node on the critical path versus a peripheral one</a:t>
+            </a:r>
+          </a:p>
+          <a:p>
+            <a:pPr>
+              <a:spcAft>
+                <a:spcPts val="1000"/>
+              </a:spcAft>
+              <a:defRPr sz="1600">
+                <a:solidFill>
+                  <a:srgbClr val="595959"/>
+                </a:solidFill>
+              </a:defRPr>
+            </a:pPr>
+            <a:r>
+              <a:t>      – how many nodes fail — one versus several at once</a:t>
+            </a:r>
+          </a:p>
+          <a:p>
+            <a:pPr>
+              <a:spcAft>
+                <a:spcPts val="1000"/>
+              </a:spcAft>
+              <a:defRPr sz="1600">
+                <a:solidFill>
+                  <a:srgbClr val="595959"/>
+                </a:solidFill>
+              </a:defRPr>
+            </a:pPr>
+            <a:r>
+              <a:t>      – when it happens — how much deadline slack is left</a:t>
+            </a:r>
+          </a:p>
+          <a:p>
+            <a:pPr>
+              <a:spcAft>
+                <a:spcPts val="1000"/>
+              </a:spcAft>
+              <a:defRPr sz="1800">
+                <a:solidFill>
+                  <a:srgbClr val="1A1A1A"/>
+                </a:solidFill>
+              </a:defRPr>
+            </a:pPr>
+            <a:r>
+              <a:t>•  Scale: workflows of 10–1,000 tasks on federations of 2–10 nodes, as in paper 2</a:t>
+            </a:r>
+          </a:p>
+          <a:p>
+            <a:pPr>
+              <a:spcAft>
+                <a:spcPts val="1000"/>
+              </a:spcAft>
+              <a:defRPr sz="1800">
+                <a:solidFill>
+                  <a:srgbClr val="1A1A1A"/>
+                </a:solidFill>
+              </a:defRPr>
+            </a:pPr>
+            <a:r>
+              <a:t>•  Three falsifiable hypotheses:</a:t>
+            </a:r>
+          </a:p>
+          <a:p>
+            <a:pPr>
+              <a:spcAft>
+                <a:spcPts val="1000"/>
+              </a:spcAft>
+              <a:defRPr sz="1600">
+                <a:solidFill>
+                  <a:srgbClr val="595959"/>
+                </a:solidFill>
+              </a:defRPr>
+            </a:pPr>
+            <a:r>
+              <a:t>      – H1 – recovery time grows with the affected region, not with the whole workflow</a:t>
+            </a:r>
+          </a:p>
+          <a:p>
+            <a:pPr>
+              <a:spcAft>
+                <a:spcPts val="1000"/>
+              </a:spcAft>
+              <a:defRPr sz="1600">
+                <a:solidFill>
+                  <a:srgbClr val="595959"/>
+                </a:solidFill>
+              </a:defRPr>
+            </a:pPr>
+            <a:r>
+              <a:t>      – H2 – tasks moved and data re-shipped stay far below the baselines at equal feasibility</a:t>
+            </a:r>
+          </a:p>
+          <a:p>
+            <a:pPr>
+              <a:spcAft>
+                <a:spcPts val="1000"/>
+              </a:spcAft>
+              <a:defRPr sz="1600">
+                <a:solidFill>
+                  <a:srgbClr val="595959"/>
+                </a:solidFill>
+              </a:defRPr>
+            </a:pPr>
+            <a:r>
+              <a:t>      – H3 – the repair stays near the exact solver's quality on small cases</a:t>
+            </a:r>
+          </a:p>
+        </p:txBody>
+      </p:sp>
+    </p:spTree>
+  </p:cSld>
+  <p:clrMapOvr>
+    <a:masterClrMapping/>
+  </p:clrMapOvr>
+</p:sld>
+</file>
+
+<file path=ppt/slides/slide46.xml><?xml version="1.0" encoding="utf-8"?>
+<p:sld xmlns:a="http://schemas.openxmlformats.org/drawingml/2006/main" xmlns:p="http://schemas.openxmlformats.org/presentationml/2006/main" xmlns:r="http://schemas.openxmlformats.org/officeDocument/2006/relationships">
+  <p:cSld>
+    <p:spTree>
+      <p:nvGrpSpPr>
+        <p:cNvPr id="1" name=""/>
+        <p:cNvGrpSpPr/>
+        <p:nvPr/>
+      </p:nvGrpSpPr>
+      <p:grpSpPr/>
+      <p:sp>
+        <p:nvSpPr>
+          <p:cNvPr id="2" name="TextBox 1"/>
+          <p:cNvSpPr txBox="1"/>
+          <p:nvPr/>
+        </p:nvSpPr>
+        <p:spPr>
+          <a:xfrm>
+            <a:off x="8046720" y="329184"/>
+            <a:ext cx="3657600" cy="274320"/>
+          </a:xfrm>
+          <a:prstGeom prst="rect">
+            <a:avLst/>
+          </a:prstGeom>
+          <a:noFill/>
+        </p:spPr>
+        <p:txBody>
+          <a:bodyPr wrap="none">
+            <a:spAutoFit/>
+          </a:bodyPr>
+          <a:lstStyle/>
+          <a:p>
+            <a:pPr algn="r">
+              <a:defRPr sz="1100">
+                <a:solidFill>
+                  <a:srgbClr val="595959"/>
+                </a:solidFill>
+              </a:defRPr>
+            </a:pPr>
+            <a:r>
+              <a:t>EVALUATION PLAN</a:t>
+            </a:r>
+          </a:p>
+        </p:txBody>
+      </p:sp>
+      <p:sp>
+        <p:nvSpPr>
+          <p:cNvPr id="3" name="TextBox 2"/>
+          <p:cNvSpPr txBox="1"/>
+          <p:nvPr/>
+        </p:nvSpPr>
+        <p:spPr>
+          <a:xfrm>
+            <a:off x="457200" y="201168"/>
+            <a:ext cx="11338560" cy="685800"/>
+          </a:xfrm>
+          <a:prstGeom prst="rect">
+            <a:avLst/>
+          </a:prstGeom>
+          <a:noFill/>
+        </p:spPr>
+        <p:txBody>
+          <a:bodyPr wrap="none" anchor="ctr">
+            <a:spAutoFit/>
+          </a:bodyPr>
+          <a:lstStyle/>
+          <a:p>
+            <a:pPr>
+              <a:defRPr sz="3000" b="1">
+                <a:solidFill>
+                  <a:srgbClr val="1A1A1A"/>
+                </a:solidFill>
+              </a:defRPr>
+            </a:pPr>
+            <a:r>
+              <a:t>Six-month plan (Aug 2026 – Jan 2027)</a:t>
+            </a:r>
+          </a:p>
+        </p:txBody>
+      </p:sp>
+      <p:cxnSp>
+        <p:nvCxnSpPr>
+          <p:cNvPr id="4" name="Connector 3"/>
+          <p:cNvCxnSpPr/>
+          <p:nvPr/>
+        </p:nvCxnSpPr>
+        <p:spPr>
+          <a:xfrm>
+            <a:off x="502920" y="932688"/>
+            <a:ext cx="11201400" cy="0"/>
+          </a:xfrm>
+          <a:prstGeom prst="line">
+            <a:avLst/>
+          </a:prstGeom>
+          <a:ln w="12700">
+            <a:solidFill>
+              <a:srgbClr val="1A1A1A"/>
+            </a:solidFill>
+          </a:ln>
+        </p:spPr>
+        <p:style>
+          <a:lnRef idx="2">
+            <a:schemeClr val="accent1"/>
+          </a:lnRef>
+          <a:fillRef idx="0">
+            <a:schemeClr val="accent1"/>
+          </a:fillRef>
+          <a:effectRef idx="1">
+            <a:schemeClr val="accent1"/>
+          </a:effectRef>
+          <a:fontRef idx="minor">
+            <a:schemeClr val="tx1"/>
+          </a:fontRef>
+        </p:style>
+      </p:cxnSp>
+      <p:sp>
+        <p:nvSpPr>
+          <p:cNvPr id="5" name="TextBox 4"/>
+          <p:cNvSpPr txBox="1"/>
+          <p:nvPr/>
+        </p:nvSpPr>
+        <p:spPr>
+          <a:xfrm>
+            <a:off x="11430000" y="6492240"/>
+            <a:ext cx="640080" cy="274320"/>
+          </a:xfrm>
+          <a:prstGeom prst="rect">
+            <a:avLst/>
+          </a:prstGeom>
+          <a:noFill/>
+        </p:spPr>
+        <p:txBody>
+          <a:bodyPr wrap="none">
+            <a:spAutoFit/>
+          </a:bodyPr>
+          <a:lstStyle/>
+          <a:p>
+            <a:pPr algn="r">
+              <a:defRPr sz="1000">
+                <a:solidFill>
+                  <a:srgbClr val="595959"/>
+                </a:solidFill>
+              </a:defRPr>
+            </a:pPr>
+            <a:r>
+              <a:t>46</a:t>
+            </a:r>
+          </a:p>
+        </p:txBody>
+      </p:sp>
       <p:graphicFrame>
         <p:nvGraphicFramePr>
-          <p:cNvPr id="5" name="Table 4"/>
+          <p:cNvPr id="6" name="Table 5"/>
           <p:cNvGraphicFramePr>
             <a:graphicFrameLocks noGrp="1"/>
           </p:cNvGraphicFramePr>
@@ -17973,7 +20615,7 @@
 </p:sld>
 </file>
 
-<file path=ppt/slides/slide46.xml><?xml version="1.0" encoding="utf-8"?>
+<file path=ppt/slides/slide47.xml><?xml version="1.0" encoding="utf-8"?>
 <p:sld xmlns:a="http://schemas.openxmlformats.org/drawingml/2006/main" xmlns:p="http://schemas.openxmlformats.org/presentationml/2006/main" xmlns:r="http://schemas.openxmlformats.org/officeDocument/2006/relationships">
   <p:cSld>
     <p:spTree>
@@ -17991,6 +20633,41 @@
         </p:nvSpPr>
         <p:spPr>
           <a:xfrm>
+            <a:off x="8046720" y="329184"/>
+            <a:ext cx="3657600" cy="274320"/>
+          </a:xfrm>
+          <a:prstGeom prst="rect">
+            <a:avLst/>
+          </a:prstGeom>
+          <a:noFill/>
+        </p:spPr>
+        <p:txBody>
+          <a:bodyPr wrap="none">
+            <a:spAutoFit/>
+          </a:bodyPr>
+          <a:lstStyle/>
+          <a:p>
+            <a:pPr algn="r">
+              <a:defRPr sz="1100">
+                <a:solidFill>
+                  <a:srgbClr val="595959"/>
+                </a:solidFill>
+              </a:defRPr>
+            </a:pPr>
+            <a:r>
+              <a:t>EVALUATION PLAN</a:t>
+            </a:r>
+          </a:p>
+        </p:txBody>
+      </p:sp>
+      <p:sp>
+        <p:nvSpPr>
+          <p:cNvPr id="3" name="TextBox 2"/>
+          <p:cNvSpPr txBox="1"/>
+          <p:nvPr/>
+        </p:nvSpPr>
+        <p:spPr>
+          <a:xfrm>
             <a:off x="457200" y="201168"/>
             <a:ext cx="11338560" cy="685800"/>
           </a:xfrm>
@@ -18020,7 +20697,7 @@
       </p:sp>
       <p:cxnSp>
         <p:nvCxnSpPr>
-          <p:cNvPr id="3" name="Connector 2"/>
+          <p:cNvPr id="4" name="Connector 3"/>
           <p:cNvCxnSpPr/>
           <p:nvPr/>
         </p:nvCxnSpPr>
@@ -18055,7 +20732,7 @@
       </p:cxnSp>
       <p:sp>
         <p:nvSpPr>
-          <p:cNvPr id="4" name="TextBox 3"/>
+          <p:cNvPr id="5" name="TextBox 4"/>
           <p:cNvSpPr txBox="1"/>
           <p:nvPr/>
         </p:nvSpPr>
@@ -18083,14 +20760,14 @@
               </a:defRPr>
             </a:pPr>
             <a:r>
-              <a:t>46</a:t>
-            </a:r>
-          </a:p>
-        </p:txBody>
-      </p:sp>
-      <p:sp>
-        <p:nvSpPr>
-          <p:cNvPr id="5" name="TextBox 4"/>
+              <a:t>47</a:t>
+            </a:r>
+          </a:p>
+        </p:txBody>
+      </p:sp>
+      <p:sp>
+        <p:nvSpPr>
+          <p:cNvPr id="6" name="TextBox 5"/>
           <p:cNvSpPr txBox="1"/>
           <p:nvPr/>
         </p:nvSpPr>
@@ -18121,7 +20798,7 @@
               </a:defRPr>
             </a:pPr>
             <a:r>
-              <a:t>•  The boundary rule might degenerate into 'repartition everything'</a:t>
+              <a:t>•  The boundary rule might grow until it covers most of the workflow</a:t>
             </a:r>
           </a:p>
           <a:p>
@@ -18136,7 +20813,7 @@
               </a:defRPr>
             </a:pPr>
             <a:r>
-              <a:t>      – the size cap is enforced, and the sensitivity study measures it</a:t>
+              <a:t>      – then it is no better than repartitioning everything — the size cap prevents this, and the sensitivity study shows when it happens</a:t>
             </a:r>
           </a:p>
           <a:p>
@@ -18181,7 +20858,7 @@
               </a:defRPr>
             </a:pPr>
             <a:r>
-              <a:t>•  Region repair might trail the exact solver's quality</a:t>
+              <a:t>•  The region repair might fall short of the exact solver's quality</a:t>
             </a:r>
           </a:p>
           <a:p>
@@ -18196,250 +20873,7 @@
               </a:defRPr>
             </a:pPr>
             <a:r>
-              <a:t>      – hybrid: greedy repair at scale, exact repair on small regions</a:t>
-            </a:r>
-          </a:p>
-        </p:txBody>
-      </p:sp>
-    </p:spTree>
-  </p:cSld>
-  <p:clrMapOvr>
-    <a:masterClrMapping/>
-  </p:clrMapOvr>
-</p:sld>
-</file>
-
-<file path=ppt/slides/slide47.xml><?xml version="1.0" encoding="utf-8"?>
-<p:sld xmlns:a="http://schemas.openxmlformats.org/drawingml/2006/main" xmlns:p="http://schemas.openxmlformats.org/presentationml/2006/main" xmlns:r="http://schemas.openxmlformats.org/officeDocument/2006/relationships">
-  <p:cSld>
-    <p:spTree>
-      <p:nvGrpSpPr>
-        <p:cNvPr id="1" name=""/>
-        <p:cNvGrpSpPr/>
-        <p:nvPr/>
-      </p:nvGrpSpPr>
-      <p:grpSpPr/>
-      <p:sp>
-        <p:nvSpPr>
-          <p:cNvPr id="2" name="TextBox 1"/>
-          <p:cNvSpPr txBox="1"/>
-          <p:nvPr/>
-        </p:nvSpPr>
-        <p:spPr>
-          <a:xfrm>
-            <a:off x="457200" y="201168"/>
-            <a:ext cx="11338560" cy="685800"/>
-          </a:xfrm>
-          <a:prstGeom prst="rect">
-            <a:avLst/>
-          </a:prstGeom>
-          <a:noFill/>
-        </p:spPr>
-        <p:txBody>
-          <a:bodyPr wrap="none" anchor="ctr">
-            <a:spAutoFit/>
-          </a:bodyPr>
-          <a:lstStyle/>
-          <a:p>
-            <a:pPr>
-              <a:defRPr sz="3000" b="1">
-                <a:solidFill>
-                  <a:srgbClr val="1A1A1A"/>
-                </a:solidFill>
-              </a:defRPr>
-            </a:pPr>
-            <a:r>
-              <a:t>Conclusion</a:t>
-            </a:r>
-          </a:p>
-        </p:txBody>
-      </p:sp>
-      <p:cxnSp>
-        <p:nvCxnSpPr>
-          <p:cNvPr id="3" name="Connector 2"/>
-          <p:cNvCxnSpPr/>
-          <p:nvPr/>
-        </p:nvCxnSpPr>
-        <p:spPr>
-          <a:xfrm>
-            <a:off x="502920" y="932688"/>
-            <a:ext cx="11201400" cy="0"/>
-          </a:xfrm>
-          <a:prstGeom prst="line">
-            <a:avLst/>
-          </a:prstGeom>
-          <a:ln w="12700">
-            <a:solidFill>
-              <a:srgbClr val="1A1A1A"/>
-            </a:solidFill>
-          </a:ln>
-        </p:spPr>
-        <p:style>
-          <a:lnRef idx="2">
-            <a:schemeClr val="accent1"/>
-          </a:lnRef>
-          <a:fillRef idx="0">
-            <a:schemeClr val="accent1"/>
-          </a:fillRef>
-          <a:effectRef idx="1">
-            <a:schemeClr val="accent1"/>
-          </a:effectRef>
-          <a:fontRef idx="minor">
-            <a:schemeClr val="tx1"/>
-          </a:fontRef>
-        </p:style>
-      </p:cxnSp>
-      <p:sp>
-        <p:nvSpPr>
-          <p:cNvPr id="4" name="TextBox 3"/>
-          <p:cNvSpPr txBox="1"/>
-          <p:nvPr/>
-        </p:nvSpPr>
-        <p:spPr>
-          <a:xfrm>
-            <a:off x="11430000" y="6492240"/>
-            <a:ext cx="640080" cy="274320"/>
-          </a:xfrm>
-          <a:prstGeom prst="rect">
-            <a:avLst/>
-          </a:prstGeom>
-          <a:noFill/>
-        </p:spPr>
-        <p:txBody>
-          <a:bodyPr wrap="none">
-            <a:spAutoFit/>
-          </a:bodyPr>
-          <a:lstStyle/>
-          <a:p>
-            <a:pPr algn="r">
-              <a:defRPr sz="1000">
-                <a:solidFill>
-                  <a:srgbClr val="595959"/>
-                </a:solidFill>
-              </a:defRPr>
-            </a:pPr>
-            <a:r>
-              <a:t>47</a:t>
-            </a:r>
-          </a:p>
-        </p:txBody>
-      </p:sp>
-      <p:sp>
-        <p:nvSpPr>
-          <p:cNvPr id="5" name="TextBox 4"/>
-          <p:cNvSpPr txBox="1"/>
-          <p:nvPr/>
-        </p:nvSpPr>
-        <p:spPr>
-          <a:xfrm>
-            <a:off x="640080" y="1280160"/>
-            <a:ext cx="10972800" cy="5029200"/>
-          </a:xfrm>
-          <a:prstGeom prst="rect">
-            <a:avLst/>
-          </a:prstGeom>
-          <a:noFill/>
-        </p:spPr>
-        <p:txBody>
-          <a:bodyPr wrap="square">
-            <a:spAutoFit/>
-          </a:bodyPr>
-          <a:lstStyle/>
-          <a:p>
-            <a:pPr>
-              <a:spcAft>
-                <a:spcPts val="1000"/>
-              </a:spcAft>
-              <a:defRPr sz="1900">
-                <a:solidFill>
-                  <a:srgbClr val="1A1A1A"/>
-                </a:solidFill>
-              </a:defRPr>
-            </a:pPr>
-            <a:r>
-              <a:t>•  Already done: a proved, data-aware formulation, four schedulers on one cost model, and a reproducible platform (Papers 1 and 2)</a:t>
-            </a:r>
-          </a:p>
-          <a:p>
-            <a:pPr>
-              <a:spcAft>
-                <a:spcPts val="1000"/>
-              </a:spcAft>
-              <a:defRPr sz="1900">
-                <a:solidFill>
-                  <a:srgbClr val="1A1A1A"/>
-                </a:solidFill>
-              </a:defRPr>
-            </a:pPr>
-            <a:r>
-              <a:t>•  Proposed: a boundary rule for the smallest affected region (RQ1)</a:t>
-            </a:r>
-          </a:p>
-          <a:p>
-            <a:pPr>
-              <a:spcAft>
-                <a:spcPts val="1000"/>
-              </a:spcAft>
-              <a:defRPr sz="1900">
-                <a:solidFill>
-                  <a:srgbClr val="1A1A1A"/>
-                </a:solidFill>
-              </a:defRPr>
-            </a:pPr>
-            <a:r>
-              <a:t>•  Proposed: minimal-region repartitioning under a recovery cost model (RQ2)</a:t>
-            </a:r>
-          </a:p>
-          <a:p>
-            <a:pPr>
-              <a:spcAft>
-                <a:spcPts val="1000"/>
-              </a:spcAft>
-              <a:defRPr sz="1900">
-                <a:solidFill>
-                  <a:srgbClr val="1A1A1A"/>
-                </a:solidFill>
-              </a:defRPr>
-            </a:pPr>
-            <a:r>
-              <a:t>•  Proposed: incremental path updates for workflow recovery (RQ3)</a:t>
-            </a:r>
-          </a:p>
-          <a:p>
-            <a:pPr>
-              <a:spcAft>
-                <a:spcPts val="1000"/>
-              </a:spcAft>
-              <a:defRPr sz="1900">
-                <a:solidFill>
-                  <a:srgbClr val="1A1A1A"/>
-                </a:solidFill>
-              </a:defRPr>
-            </a:pPr>
-            <a:r>
-              <a:t>•  Expected outcome: recovery that is faster and less disturbing than a complete repartition, at near-reference quality</a:t>
-            </a:r>
-          </a:p>
-          <a:p>
-            <a:pPr>
-              <a:spcAft>
-                <a:spcPts val="400"/>
-              </a:spcAft>
-            </a:pPr>
-          </a:p>
-          <a:p>
-            <a:pPr>
-              <a:spcAft>
-                <a:spcPts val="1000"/>
-              </a:spcAft>
-              <a:defRPr sz="1900">
-                <a:solidFill>
-                  <a:srgbClr val="1A1A1A"/>
-                </a:solidFill>
-              </a:defRPr>
-            </a:pPr>
-            <a:r>
-              <a:t>•  Paper 1 placed the workflow; Paper 2 priced its data and approximation; Paper 3 keeps it alive when the infrastructure fails.</a:t>
+              <a:t>      – hybrid plan: greedy repair at scale, exact repair on small regions</a:t>
             </a:r>
           </a:p>
         </p:txBody>
@@ -18470,6 +20904,284 @@
         </p:nvSpPr>
         <p:spPr>
           <a:xfrm>
+            <a:off x="8046720" y="329184"/>
+            <a:ext cx="3657600" cy="274320"/>
+          </a:xfrm>
+          <a:prstGeom prst="rect">
+            <a:avLst/>
+          </a:prstGeom>
+          <a:noFill/>
+        </p:spPr>
+        <p:txBody>
+          <a:bodyPr wrap="none">
+            <a:spAutoFit/>
+          </a:bodyPr>
+          <a:lstStyle/>
+          <a:p>
+            <a:pPr algn="r">
+              <a:defRPr sz="1100">
+                <a:solidFill>
+                  <a:srgbClr val="595959"/>
+                </a:solidFill>
+              </a:defRPr>
+            </a:pPr>
+            <a:r>
+              <a:t>CONCLUSION</a:t>
+            </a:r>
+          </a:p>
+        </p:txBody>
+      </p:sp>
+      <p:sp>
+        <p:nvSpPr>
+          <p:cNvPr id="3" name="TextBox 2"/>
+          <p:cNvSpPr txBox="1"/>
+          <p:nvPr/>
+        </p:nvSpPr>
+        <p:spPr>
+          <a:xfrm>
+            <a:off x="457200" y="201168"/>
+            <a:ext cx="11338560" cy="685800"/>
+          </a:xfrm>
+          <a:prstGeom prst="rect">
+            <a:avLst/>
+          </a:prstGeom>
+          <a:noFill/>
+        </p:spPr>
+        <p:txBody>
+          <a:bodyPr wrap="none" anchor="ctr">
+            <a:spAutoFit/>
+          </a:bodyPr>
+          <a:lstStyle/>
+          <a:p>
+            <a:pPr>
+              <a:defRPr sz="3000" b="1">
+                <a:solidFill>
+                  <a:srgbClr val="1A1A1A"/>
+                </a:solidFill>
+              </a:defRPr>
+            </a:pPr>
+            <a:r>
+              <a:t>Conclusion</a:t>
+            </a:r>
+          </a:p>
+        </p:txBody>
+      </p:sp>
+      <p:cxnSp>
+        <p:nvCxnSpPr>
+          <p:cNvPr id="4" name="Connector 3"/>
+          <p:cNvCxnSpPr/>
+          <p:nvPr/>
+        </p:nvCxnSpPr>
+        <p:spPr>
+          <a:xfrm>
+            <a:off x="502920" y="932688"/>
+            <a:ext cx="11201400" cy="0"/>
+          </a:xfrm>
+          <a:prstGeom prst="line">
+            <a:avLst/>
+          </a:prstGeom>
+          <a:ln w="12700">
+            <a:solidFill>
+              <a:srgbClr val="1A1A1A"/>
+            </a:solidFill>
+          </a:ln>
+        </p:spPr>
+        <p:style>
+          <a:lnRef idx="2">
+            <a:schemeClr val="accent1"/>
+          </a:lnRef>
+          <a:fillRef idx="0">
+            <a:schemeClr val="accent1"/>
+          </a:fillRef>
+          <a:effectRef idx="1">
+            <a:schemeClr val="accent1"/>
+          </a:effectRef>
+          <a:fontRef idx="minor">
+            <a:schemeClr val="tx1"/>
+          </a:fontRef>
+        </p:style>
+      </p:cxnSp>
+      <p:sp>
+        <p:nvSpPr>
+          <p:cNvPr id="5" name="TextBox 4"/>
+          <p:cNvSpPr txBox="1"/>
+          <p:nvPr/>
+        </p:nvSpPr>
+        <p:spPr>
+          <a:xfrm>
+            <a:off x="11430000" y="6492240"/>
+            <a:ext cx="640080" cy="274320"/>
+          </a:xfrm>
+          <a:prstGeom prst="rect">
+            <a:avLst/>
+          </a:prstGeom>
+          <a:noFill/>
+        </p:spPr>
+        <p:txBody>
+          <a:bodyPr wrap="none">
+            <a:spAutoFit/>
+          </a:bodyPr>
+          <a:lstStyle/>
+          <a:p>
+            <a:pPr algn="r">
+              <a:defRPr sz="1000">
+                <a:solidFill>
+                  <a:srgbClr val="595959"/>
+                </a:solidFill>
+              </a:defRPr>
+            </a:pPr>
+            <a:r>
+              <a:t>48</a:t>
+            </a:r>
+          </a:p>
+        </p:txBody>
+      </p:sp>
+      <p:sp>
+        <p:nvSpPr>
+          <p:cNvPr id="6" name="TextBox 5"/>
+          <p:cNvSpPr txBox="1"/>
+          <p:nvPr/>
+        </p:nvSpPr>
+        <p:spPr>
+          <a:xfrm>
+            <a:off x="640080" y="1280160"/>
+            <a:ext cx="10972800" cy="5029200"/>
+          </a:xfrm>
+          <a:prstGeom prst="rect">
+            <a:avLst/>
+          </a:prstGeom>
+          <a:noFill/>
+        </p:spPr>
+        <p:txBody>
+          <a:bodyPr wrap="square">
+            <a:spAutoFit/>
+          </a:bodyPr>
+          <a:lstStyle/>
+          <a:p>
+            <a:pPr>
+              <a:spcAft>
+                <a:spcPts val="1000"/>
+              </a:spcAft>
+              <a:defRPr sz="1800">
+                <a:solidFill>
+                  <a:srgbClr val="1A1A1A"/>
+                </a:solidFill>
+              </a:defRPr>
+            </a:pPr>
+            <a:r>
+              <a:t>•  Done — Papers 1 and 2: a proved, data-aware formulation, four schedulers on one cost model, and a reproducible platform</a:t>
+            </a:r>
+          </a:p>
+          <a:p>
+            <a:pPr>
+              <a:spcAft>
+                <a:spcPts val="1000"/>
+              </a:spcAft>
+              <a:defRPr sz="1800">
+                <a:solidFill>
+                  <a:srgbClr val="1A1A1A"/>
+                </a:solidFill>
+              </a:defRPr>
+            </a:pPr>
+            <a:r>
+              <a:t>•  Proposed — RQ1: a boundary rule that finds the smallest part of the workflow a failure actually breaks</a:t>
+            </a:r>
+          </a:p>
+          <a:p>
+            <a:pPr>
+              <a:spcAft>
+                <a:spcPts val="1000"/>
+              </a:spcAft>
+              <a:defRPr sz="1800">
+                <a:solidFill>
+                  <a:srgbClr val="1A1A1A"/>
+                </a:solidFill>
+              </a:defRPr>
+            </a:pPr>
+            <a:r>
+              <a:t>•  Proposed — RQ2: repartitioning that repairs only that region, under a recovery cost model</a:t>
+            </a:r>
+          </a:p>
+          <a:p>
+            <a:pPr>
+              <a:spcAft>
+                <a:spcPts val="1000"/>
+              </a:spcAft>
+              <a:defRPr sz="1800">
+                <a:solidFill>
+                  <a:srgbClr val="1A1A1A"/>
+                </a:solidFill>
+              </a:defRPr>
+            </a:pPr>
+            <a:r>
+              <a:t>•  Proposed — RQ3: incremental updates to the communication paths, instead of recomputing them</a:t>
+            </a:r>
+          </a:p>
+          <a:p>
+            <a:pPr>
+              <a:spcAft>
+                <a:spcPts val="1000"/>
+              </a:spcAft>
+              <a:defRPr sz="1800">
+                <a:solidFill>
+                  <a:srgbClr val="1A1A1A"/>
+                </a:solidFill>
+              </a:defRPr>
+            </a:pPr>
+            <a:r>
+              <a:t>•  Expected outcome: recovery that is faster and less disturbing than repartitioning everything, at near-reference quality</a:t>
+            </a:r>
+          </a:p>
+          <a:p>
+            <a:pPr>
+              <a:spcAft>
+                <a:spcPts val="400"/>
+              </a:spcAft>
+            </a:pPr>
+          </a:p>
+          <a:p>
+            <a:pPr>
+              <a:spcAft>
+                <a:spcPts val="1000"/>
+              </a:spcAft>
+              <a:defRPr sz="1800">
+                <a:solidFill>
+                  <a:srgbClr val="1A1A1A"/>
+                </a:solidFill>
+              </a:defRPr>
+            </a:pPr>
+            <a:r>
+              <a:t>•  Paper 1 placed the workflow; Paper 2 priced its data and its approximation; Paper 3 keeps it alive when the infrastructure fails.</a:t>
+            </a:r>
+          </a:p>
+        </p:txBody>
+      </p:sp>
+    </p:spTree>
+  </p:cSld>
+  <p:clrMapOvr>
+    <a:masterClrMapping/>
+  </p:clrMapOvr>
+</p:sld>
+</file>
+
+<file path=ppt/slides/slide49.xml><?xml version="1.0" encoding="utf-8"?>
+<p:sld xmlns:a="http://schemas.openxmlformats.org/drawingml/2006/main" xmlns:p="http://schemas.openxmlformats.org/presentationml/2006/main" xmlns:r="http://schemas.openxmlformats.org/officeDocument/2006/relationships">
+  <p:cSld>
+    <p:spTree>
+      <p:nvGrpSpPr>
+        <p:cNvPr id="1" name=""/>
+        <p:cNvGrpSpPr/>
+        <p:nvPr/>
+      </p:nvGrpSpPr>
+      <p:grpSpPr/>
+      <p:sp>
+        <p:nvSpPr>
+          <p:cNvPr id="2" name="TextBox 1"/>
+          <p:cNvSpPr txBox="1"/>
+          <p:nvPr/>
+        </p:nvSpPr>
+        <p:spPr>
+          <a:xfrm>
             <a:off x="914400" y="2377440"/>
             <a:ext cx="10332720" cy="1097280"/>
           </a:xfrm>
@@ -18570,6 +21282,41 @@
         </p:nvSpPr>
         <p:spPr>
           <a:xfrm>
+            <a:off x="8046720" y="329184"/>
+            <a:ext cx="3657600" cy="274320"/>
+          </a:xfrm>
+          <a:prstGeom prst="rect">
+            <a:avLst/>
+          </a:prstGeom>
+          <a:noFill/>
+        </p:spPr>
+        <p:txBody>
+          <a:bodyPr wrap="none">
+            <a:spAutoFit/>
+          </a:bodyPr>
+          <a:lstStyle/>
+          <a:p>
+            <a:pPr algn="r">
+              <a:defRPr sz="1100">
+                <a:solidFill>
+                  <a:srgbClr val="595959"/>
+                </a:solidFill>
+              </a:defRPr>
+            </a:pPr>
+            <a:r>
+              <a:t>MOTIVATION</a:t>
+            </a:r>
+          </a:p>
+        </p:txBody>
+      </p:sp>
+      <p:sp>
+        <p:nvSpPr>
+          <p:cNvPr id="3" name="TextBox 2"/>
+          <p:cNvSpPr txBox="1"/>
+          <p:nvPr/>
+        </p:nvSpPr>
+        <p:spPr>
+          <a:xfrm>
             <a:off x="457200" y="201168"/>
             <a:ext cx="11338560" cy="685800"/>
           </a:xfrm>
@@ -18599,7 +21346,7 @@
       </p:sp>
       <p:cxnSp>
         <p:nvCxnSpPr>
-          <p:cNvPr id="3" name="Connector 2"/>
+          <p:cNvPr id="4" name="Connector 3"/>
           <p:cNvCxnSpPr/>
           <p:nvPr/>
         </p:nvCxnSpPr>
@@ -18634,7 +21381,7 @@
       </p:cxnSp>
       <p:sp>
         <p:nvSpPr>
-          <p:cNvPr id="4" name="TextBox 3"/>
+          <p:cNvPr id="5" name="TextBox 4"/>
           <p:cNvSpPr txBox="1"/>
           <p:nvPr/>
         </p:nvSpPr>
@@ -18669,7 +21416,7 @@
       </p:sp>
       <p:sp>
         <p:nvSpPr>
-          <p:cNvPr id="5" name="TextBox 4"/>
+          <p:cNvPr id="6" name="TextBox 5"/>
           <p:cNvSpPr txBox="1"/>
           <p:nvPr/>
         </p:nvSpPr>
@@ -18752,7 +21499,7 @@
       </p:sp>
       <p:pic>
         <p:nvPicPr>
-          <p:cNvPr id="6" name="Picture 5" descr="federated-fog-architecture.png"/>
+          <p:cNvPr id="7" name="Picture 6" descr="federated-fog-architecture.png"/>
           <p:cNvPicPr>
             <a:picLocks noChangeAspect="1"/>
           </p:cNvPicPr>
@@ -18776,7 +21523,7 @@
       </p:pic>
       <p:sp>
         <p:nvSpPr>
-          <p:cNvPr id="7" name="TextBox 6"/>
+          <p:cNvPr id="8" name="TextBox 7"/>
           <p:cNvSpPr txBox="1"/>
           <p:nvPr/>
         </p:nvSpPr>
@@ -18835,6 +21582,41 @@
         </p:nvSpPr>
         <p:spPr>
           <a:xfrm>
+            <a:off x="8046720" y="329184"/>
+            <a:ext cx="3657600" cy="274320"/>
+          </a:xfrm>
+          <a:prstGeom prst="rect">
+            <a:avLst/>
+          </a:prstGeom>
+          <a:noFill/>
+        </p:spPr>
+        <p:txBody>
+          <a:bodyPr wrap="none">
+            <a:spAutoFit/>
+          </a:bodyPr>
+          <a:lstStyle/>
+          <a:p>
+            <a:pPr algn="r">
+              <a:defRPr sz="1100">
+                <a:solidFill>
+                  <a:srgbClr val="595959"/>
+                </a:solidFill>
+              </a:defRPr>
+            </a:pPr>
+            <a:r>
+              <a:t>MOTIVATION</a:t>
+            </a:r>
+          </a:p>
+        </p:txBody>
+      </p:sp>
+      <p:sp>
+        <p:nvSpPr>
+          <p:cNvPr id="3" name="TextBox 2"/>
+          <p:cNvSpPr txBox="1"/>
+          <p:nvPr/>
+        </p:nvSpPr>
+        <p:spPr>
+          <a:xfrm>
             <a:off x="457200" y="201168"/>
             <a:ext cx="11338560" cy="685800"/>
           </a:xfrm>
@@ -18864,7 +21646,7 @@
       </p:sp>
       <p:cxnSp>
         <p:nvCxnSpPr>
-          <p:cNvPr id="3" name="Connector 2"/>
+          <p:cNvPr id="4" name="Connector 3"/>
           <p:cNvCxnSpPr/>
           <p:nvPr/>
         </p:nvCxnSpPr>
@@ -18899,7 +21681,7 @@
       </p:cxnSp>
       <p:sp>
         <p:nvSpPr>
-          <p:cNvPr id="4" name="TextBox 3"/>
+          <p:cNvPr id="5" name="TextBox 4"/>
           <p:cNvSpPr txBox="1"/>
           <p:nvPr/>
         </p:nvSpPr>
@@ -18934,7 +21716,7 @@
       </p:sp>
       <p:sp>
         <p:nvSpPr>
-          <p:cNvPr id="5" name="TextBox 4"/>
+          <p:cNvPr id="6" name="TextBox 5"/>
           <p:cNvSpPr txBox="1"/>
           <p:nvPr/>
         </p:nvSpPr>
@@ -19056,6 +21838,41 @@
         </p:nvSpPr>
         <p:spPr>
           <a:xfrm>
+            <a:off x="8046720" y="329184"/>
+            <a:ext cx="3657600" cy="274320"/>
+          </a:xfrm>
+          <a:prstGeom prst="rect">
+            <a:avLst/>
+          </a:prstGeom>
+          <a:noFill/>
+        </p:spPr>
+        <p:txBody>
+          <a:bodyPr wrap="none">
+            <a:spAutoFit/>
+          </a:bodyPr>
+          <a:lstStyle/>
+          <a:p>
+            <a:pPr algn="r">
+              <a:defRPr sz="1100">
+                <a:solidFill>
+                  <a:srgbClr val="595959"/>
+                </a:solidFill>
+              </a:defRPr>
+            </a:pPr>
+            <a:r>
+              <a:t>MOTIVATION</a:t>
+            </a:r>
+          </a:p>
+        </p:txBody>
+      </p:sp>
+      <p:sp>
+        <p:nvSpPr>
+          <p:cNvPr id="3" name="TextBox 2"/>
+          <p:cNvSpPr txBox="1"/>
+          <p:nvPr/>
+        </p:nvSpPr>
+        <p:spPr>
+          <a:xfrm>
             <a:off x="457200" y="201168"/>
             <a:ext cx="11338560" cy="685800"/>
           </a:xfrm>
@@ -19085,7 +21902,7 @@
       </p:sp>
       <p:cxnSp>
         <p:nvCxnSpPr>
-          <p:cNvPr id="3" name="Connector 2"/>
+          <p:cNvPr id="4" name="Connector 3"/>
           <p:cNvCxnSpPr/>
           <p:nvPr/>
         </p:nvCxnSpPr>
@@ -19120,7 +21937,7 @@
       </p:cxnSp>
       <p:sp>
         <p:nvSpPr>
-          <p:cNvPr id="4" name="TextBox 3"/>
+          <p:cNvPr id="5" name="TextBox 4"/>
           <p:cNvSpPr txBox="1"/>
           <p:nvPr/>
         </p:nvSpPr>
@@ -19155,7 +21972,7 @@
       </p:sp>
       <p:sp>
         <p:nvSpPr>
-          <p:cNvPr id="5" name="TextBox 4"/>
+          <p:cNvPr id="6" name="TextBox 5"/>
           <p:cNvSpPr txBox="1"/>
           <p:nvPr/>
         </p:nvSpPr>
@@ -19284,6 +22101,41 @@
         </p:nvSpPr>
         <p:spPr>
           <a:xfrm>
+            <a:off x="8046720" y="329184"/>
+            <a:ext cx="3657600" cy="274320"/>
+          </a:xfrm>
+          <a:prstGeom prst="rect">
+            <a:avLst/>
+          </a:prstGeom>
+          <a:noFill/>
+        </p:spPr>
+        <p:txBody>
+          <a:bodyPr wrap="none">
+            <a:spAutoFit/>
+          </a:bodyPr>
+          <a:lstStyle/>
+          <a:p>
+            <a:pPr algn="r">
+              <a:defRPr sz="1100">
+                <a:solidFill>
+                  <a:srgbClr val="595959"/>
+                </a:solidFill>
+              </a:defRPr>
+            </a:pPr>
+            <a:r>
+              <a:t>MOTIVATION</a:t>
+            </a:r>
+          </a:p>
+        </p:txBody>
+      </p:sp>
+      <p:sp>
+        <p:nvSpPr>
+          <p:cNvPr id="3" name="TextBox 2"/>
+          <p:cNvSpPr txBox="1"/>
+          <p:nvPr/>
+        </p:nvSpPr>
+        <p:spPr>
+          <a:xfrm>
             <a:off x="457200" y="201168"/>
             <a:ext cx="11338560" cy="685800"/>
           </a:xfrm>
@@ -19313,7 +22165,7 @@
       </p:sp>
       <p:cxnSp>
         <p:nvCxnSpPr>
-          <p:cNvPr id="3" name="Connector 2"/>
+          <p:cNvPr id="4" name="Connector 3"/>
           <p:cNvCxnSpPr/>
           <p:nvPr/>
         </p:nvCxnSpPr>
@@ -19348,7 +22200,7 @@
       </p:cxnSp>
       <p:sp>
         <p:nvSpPr>
-          <p:cNvPr id="4" name="TextBox 3"/>
+          <p:cNvPr id="5" name="TextBox 4"/>
           <p:cNvSpPr txBox="1"/>
           <p:nvPr/>
         </p:nvSpPr>
@@ -19383,7 +22235,7 @@
       </p:sp>
       <p:sp>
         <p:nvSpPr>
-          <p:cNvPr id="5" name="TextBox 4"/>
+          <p:cNvPr id="6" name="TextBox 5"/>
           <p:cNvSpPr txBox="1"/>
           <p:nvPr/>
         </p:nvSpPr>
@@ -19542,7 +22394,7 @@
               </a:defRPr>
             </a:pPr>
             <a:r>
-              <a:t>What is already known</a:t>
+              <a:t>2.  Related work</a:t>
             </a:r>
           </a:p>
         </p:txBody>

--- a/slides/data-aware-scheduling.pptx
+++ b/slides/data-aware-scheduling.pptx
@@ -9247,7 +9247,7 @@
         <p:spPr>
           <a:xfrm>
             <a:off x="6675120" y="1280160"/>
-            <a:ext cx="5120640" cy="3833707"/>
+            <a:ext cx="5120640" cy="2456902"/>
           </a:xfrm>
           <a:prstGeom prst="rect">
             <a:avLst/>
@@ -9284,7 +9284,7 @@
               </a:defRPr>
             </a:pPr>
             <a:r>
-              <a:t>A task graph (left) mapped onto the machine graph (right)</a:t>
+              <a:t>A wildfire workflow mapped onto the fog resource network</a:t>
             </a:r>
           </a:p>
         </p:txBody>

--- a/slides/data-aware-scheduling.pptx
+++ b/slides/data-aware-scheduling.pptx
@@ -9247,7 +9247,7 @@
         <p:spPr>
           <a:xfrm>
             <a:off x="6675120" y="1280160"/>
-            <a:ext cx="5120640" cy="2456902"/>
+            <a:ext cx="5120640" cy="2535385"/>
           </a:xfrm>
           <a:prstGeom prst="rect">
             <a:avLst/>

--- a/slides/data-aware-scheduling.pptx
+++ b/slides/data-aware-scheduling.pptx
@@ -9247,7 +9247,7 @@
         <p:spPr>
           <a:xfrm>
             <a:off x="6675120" y="1280160"/>
-            <a:ext cx="5120640" cy="2535385"/>
+            <a:ext cx="5120640" cy="2546296"/>
           </a:xfrm>
           <a:prstGeom prst="rect">
             <a:avLst/>
@@ -22731,7 +22731,7 @@
         <p:spPr>
           <a:xfrm>
             <a:off x="6858000" y="1188720"/>
-            <a:ext cx="4937760" cy="3396343"/>
+            <a:ext cx="4937760" cy="6263640"/>
           </a:xfrm>
           <a:prstGeom prst="rect">
             <a:avLst/>

--- a/slides/data-aware-scheduling.pptx
+++ b/slides/data-aware-scheduling.pptx
@@ -9247,7 +9247,7 @@
         <p:spPr>
           <a:xfrm>
             <a:off x="6675120" y="1280160"/>
-            <a:ext cx="5120640" cy="2546296"/>
+            <a:ext cx="5120640" cy="2540333"/>
           </a:xfrm>
           <a:prstGeom prst="rect">
             <a:avLst/>
@@ -22731,7 +22731,7 @@
         <p:spPr>
           <a:xfrm>
             <a:off x="6858000" y="1188720"/>
-            <a:ext cx="4937760" cy="6263640"/>
+            <a:ext cx="4937760" cy="5845052"/>
           </a:xfrm>
           <a:prstGeom prst="rect">
             <a:avLst/>
